--- a/src/presentation/DigitVision_AI_Presentation.pptx
+++ b/src/presentation/DigitVision_AI_Presentation.pptx
@@ -6,17 +6,15 @@
   </p:sldMasterIdLst>
   <p:sldIdLst>
     <p:sldId id="256" r:id="rId7"/>
-    <p:sldId id="257" r:id="rId8"/>
-    <p:sldId id="258" r:id="rId9"/>
-    <p:sldId id="259" r:id="rId10"/>
-    <p:sldId id="260" r:id="rId11"/>
-    <p:sldId id="261" r:id="rId12"/>
-    <p:sldId id="262" r:id="rId13"/>
-    <p:sldId id="263" r:id="rId14"/>
-    <p:sldId id="264" r:id="rId15"/>
-    <p:sldId id="265" r:id="rId16"/>
-    <p:sldId id="266" r:id="rId17"/>
-    <p:sldId id="267" r:id="rId18"/>
+    <p:sldId id="257" r:id="rId9"/>
+    <p:sldId id="258" r:id="rId10"/>
+    <p:sldId id="259" r:id="rId11"/>
+    <p:sldId id="260" r:id="rId12"/>
+    <p:sldId id="261" r:id="rId13"/>
+    <p:sldId id="262" r:id="rId14"/>
+    <p:sldId id="263" r:id="rId15"/>
+    <p:sldId id="264" r:id="rId16"/>
+    <p:sldId id="265" r:id="rId17"/>
   </p:sldIdLst>
   <p:sldSz cx="12191695" cy="6858000" type="screen4x3"/>
   <p:notesSz cx="6858000" cy="9144000"/>
@@ -116,6 +114,1546 @@
     </a:lvl9pPr>
   </p:defaultTextStyle>
 </p:presentation>
+</file>
+
+<file path=ppt/notesMasters/notesMaster1.xml><?xml version="1.0" encoding="utf-8"?>
+<p:notesMaster xmlns:a="http://schemas.openxmlformats.org/drawingml/2006/main" xmlns:p="http://schemas.openxmlformats.org/presentationml/2006/main" xmlns:r="http://schemas.openxmlformats.org/officeDocument/2006/relationships">
+  <p:cSld>
+    <p:bg>
+      <p:bgRef idx="1001">
+        <a:schemeClr val="bg1"/>
+      </p:bgRef>
+    </p:bg>
+    <p:spTree>
+      <p:nvGrpSpPr>
+        <p:cNvPr id="1" name=""/>
+        <p:cNvGrpSpPr/>
+        <p:nvPr/>
+      </p:nvGrpSpPr>
+      <p:grpSpPr>
+        <a:xfrm>
+          <a:off x="0" y="0"/>
+          <a:ext cx="0" cy="0"/>
+          <a:chOff x="0" y="0"/>
+          <a:chExt cx="0" cy="0"/>
+        </a:xfrm>
+      </p:grpSpPr>
+      <p:sp>
+        <p:nvSpPr>
+          <p:cNvPr id="2" name="Header Placeholder 1"/>
+          <p:cNvSpPr>
+            <a:spLocks noGrp="1"/>
+          </p:cNvSpPr>
+          <p:nvPr>
+            <p:ph type="hdr" sz="quarter"/>
+          </p:nvPr>
+        </p:nvSpPr>
+        <p:spPr>
+          <a:xfrm>
+            <a:off x="0" y="0"/>
+            <a:ext cx="2971800" cy="457200"/>
+          </a:xfrm>
+          <a:prstGeom prst="rect">
+            <a:avLst/>
+          </a:prstGeom>
+        </p:spPr>
+        <p:txBody>
+          <a:bodyPr vert="horz" lIns="91440" tIns="45720" rIns="91440" bIns="45720" rtlCol="0"/>
+          <a:lstStyle>
+            <a:lvl1pPr algn="l">
+              <a:defRPr sz="1200"/>
+            </a:lvl1pPr>
+          </a:lstStyle>
+          <a:p>
+            <a:endParaRPr lang="en-US"/>
+          </a:p>
+        </p:txBody>
+      </p:sp>
+      <p:sp>
+        <p:nvSpPr>
+          <p:cNvPr id="3" name="Date Placeholder 2"/>
+          <p:cNvSpPr>
+            <a:spLocks noGrp="1"/>
+          </p:cNvSpPr>
+          <p:nvPr>
+            <p:ph type="dt" idx="1"/>
+          </p:nvPr>
+        </p:nvSpPr>
+        <p:spPr>
+          <a:xfrm>
+            <a:off x="3884613" y="0"/>
+            <a:ext cx="2971800" cy="457200"/>
+          </a:xfrm>
+          <a:prstGeom prst="rect">
+            <a:avLst/>
+          </a:prstGeom>
+        </p:spPr>
+        <p:txBody>
+          <a:bodyPr vert="horz" lIns="91440" tIns="45720" rIns="91440" bIns="45720" rtlCol="0"/>
+          <a:lstStyle>
+            <a:lvl1pPr algn="r">
+              <a:defRPr sz="1200"/>
+            </a:lvl1pPr>
+          </a:lstStyle>
+          <a:p>
+            <a:fld id="{0F89C1C7-3DCD-1040-A9CF-14679D8B5DDD}" type="datetimeFigureOut">
+              <a:rPr lang="en-US" smtClean="0"/>
+              <a:t>10/17/16</a:t>
+            </a:fld>
+            <a:endParaRPr lang="en-US"/>
+          </a:p>
+        </p:txBody>
+      </p:sp>
+      <p:sp>
+        <p:nvSpPr>
+          <p:cNvPr id="4" name="Slide Image Placeholder 3"/>
+          <p:cNvSpPr>
+            <a:spLocks noGrp="1" noRot="1" noChangeAspect="1"/>
+          </p:cNvSpPr>
+          <p:nvPr>
+            <p:ph type="sldImg" idx="2"/>
+          </p:nvPr>
+        </p:nvSpPr>
+        <p:spPr>
+          <a:xfrm>
+            <a:off x="1143000" y="685800"/>
+            <a:ext cx="4572000" cy="3429000"/>
+          </a:xfrm>
+          <a:prstGeom prst="rect">
+            <a:avLst/>
+          </a:prstGeom>
+          <a:noFill/>
+          <a:ln w="12700">
+            <a:solidFill>
+              <a:prstClr val="black"/>
+            </a:solidFill>
+          </a:ln>
+        </p:spPr>
+        <p:txBody>
+          <a:bodyPr vert="horz" lIns="91440" tIns="45720" rIns="91440" bIns="45720" rtlCol="0" anchor="ctr"/>
+          <a:lstStyle/>
+          <a:p>
+            <a:endParaRPr lang="en-US"/>
+          </a:p>
+        </p:txBody>
+      </p:sp>
+      <p:sp>
+        <p:nvSpPr>
+          <p:cNvPr id="5" name="Notes Placeholder 4"/>
+          <p:cNvSpPr>
+            <a:spLocks noGrp="1"/>
+          </p:cNvSpPr>
+          <p:nvPr>
+            <p:ph type="body" sz="quarter" idx="3"/>
+          </p:nvPr>
+        </p:nvSpPr>
+        <p:spPr>
+          <a:xfrm>
+            <a:off x="685800" y="4343400"/>
+            <a:ext cx="5486400" cy="4114800"/>
+          </a:xfrm>
+          <a:prstGeom prst="rect">
+            <a:avLst/>
+          </a:prstGeom>
+        </p:spPr>
+        <p:txBody>
+          <a:bodyPr vert="horz" lIns="91440" tIns="45720" rIns="91440" bIns="45720" rtlCol="0"/>
+          <a:lstStyle/>
+          <a:p>
+            <a:pPr lvl="0"/>
+            <a:r>
+              <a:rPr lang="en-US" smtClean="0"/>
+              <a:t>Click to edit Master text styles</a:t>
+            </a:r>
+          </a:p>
+          <a:p>
+            <a:pPr lvl="1"/>
+            <a:r>
+              <a:rPr lang="en-US" smtClean="0"/>
+              <a:t>Second level</a:t>
+            </a:r>
+          </a:p>
+          <a:p>
+            <a:pPr lvl="2"/>
+            <a:r>
+              <a:rPr lang="en-US" smtClean="0"/>
+              <a:t>Third level</a:t>
+            </a:r>
+          </a:p>
+          <a:p>
+            <a:pPr lvl="3"/>
+            <a:r>
+              <a:rPr lang="en-US" smtClean="0"/>
+              <a:t>Fourth level</a:t>
+            </a:r>
+          </a:p>
+          <a:p>
+            <a:pPr lvl="4"/>
+            <a:r>
+              <a:rPr lang="en-US" smtClean="0"/>
+              <a:t>Fifth level</a:t>
+            </a:r>
+            <a:endParaRPr lang="en-US"/>
+          </a:p>
+        </p:txBody>
+      </p:sp>
+      <p:sp>
+        <p:nvSpPr>
+          <p:cNvPr id="6" name="Footer Placeholder 5"/>
+          <p:cNvSpPr>
+            <a:spLocks noGrp="1"/>
+          </p:cNvSpPr>
+          <p:nvPr>
+            <p:ph type="ftr" sz="quarter" idx="4"/>
+          </p:nvPr>
+        </p:nvSpPr>
+        <p:spPr>
+          <a:xfrm>
+            <a:off x="0" y="8685213"/>
+            <a:ext cx="2971800" cy="457200"/>
+          </a:xfrm>
+          <a:prstGeom prst="rect">
+            <a:avLst/>
+          </a:prstGeom>
+        </p:spPr>
+        <p:txBody>
+          <a:bodyPr vert="horz" lIns="91440" tIns="45720" rIns="91440" bIns="45720" rtlCol="0" anchor="b"/>
+          <a:lstStyle>
+            <a:lvl1pPr algn="l">
+              <a:defRPr sz="1200"/>
+            </a:lvl1pPr>
+          </a:lstStyle>
+          <a:p>
+            <a:endParaRPr lang="en-US"/>
+          </a:p>
+        </p:txBody>
+      </p:sp>
+      <p:sp>
+        <p:nvSpPr>
+          <p:cNvPr id="7" name="Slide Number Placeholder 6"/>
+          <p:cNvSpPr>
+            <a:spLocks noGrp="1"/>
+          </p:cNvSpPr>
+          <p:nvPr>
+            <p:ph type="sldNum" sz="quarter" idx="5"/>
+          </p:nvPr>
+        </p:nvSpPr>
+        <p:spPr>
+          <a:xfrm>
+            <a:off x="3884613" y="8685213"/>
+            <a:ext cx="2971800" cy="457200"/>
+          </a:xfrm>
+          <a:prstGeom prst="rect">
+            <a:avLst/>
+          </a:prstGeom>
+        </p:spPr>
+        <p:txBody>
+          <a:bodyPr vert="horz" lIns="91440" tIns="45720" rIns="91440" bIns="45720" rtlCol="0" anchor="b"/>
+          <a:lstStyle>
+            <a:lvl1pPr algn="r">
+              <a:defRPr sz="1200"/>
+            </a:lvl1pPr>
+          </a:lstStyle>
+          <a:p>
+            <a:fld id="{BB5E49A5-4136-284D-997B-48E1D791AD67}" type="slidenum">
+              <a:rPr lang="en-US" smtClean="0"/>
+              <a:t>‹#›</a:t>
+            </a:fld>
+            <a:endParaRPr lang="en-US"/>
+          </a:p>
+        </p:txBody>
+      </p:sp>
+    </p:spTree>
+    <p:extLst>
+      <p:ext uri="{BB962C8B-B14F-4D97-AF65-F5344CB8AC3E}">
+        <p14:creationId xmlns:p14="http://schemas.microsoft.com/office/powerpoint/2010/main" val="2623252185"/>
+      </p:ext>
+    </p:extLst>
+  </p:cSld>
+  <p:clrMap bg1="lt1" tx1="dk1" bg2="lt2" tx2="dk2" accent1="accent1" accent2="accent2" accent3="accent3" accent4="accent4" accent5="accent5" accent6="accent6" hlink="hlink" folHlink="folHlink"/>
+  <p:notesStyle>
+    <a:lvl1pPr marL="0" algn="l" defTabSz="457200" rtl="0" eaLnBrk="1" latinLnBrk="0" hangingPunct="1">
+      <a:defRPr sz="1200" kern="1200">
+        <a:solidFill>
+          <a:schemeClr val="tx1"/>
+        </a:solidFill>
+        <a:latin typeface="+mn-lt"/>
+        <a:ea typeface="+mn-ea"/>
+        <a:cs typeface="+mn-cs"/>
+      </a:defRPr>
+    </a:lvl1pPr>
+    <a:lvl2pPr marL="457200" algn="l" defTabSz="457200" rtl="0" eaLnBrk="1" latinLnBrk="0" hangingPunct="1">
+      <a:defRPr sz="1200" kern="1200">
+        <a:solidFill>
+          <a:schemeClr val="tx1"/>
+        </a:solidFill>
+        <a:latin typeface="+mn-lt"/>
+        <a:ea typeface="+mn-ea"/>
+        <a:cs typeface="+mn-cs"/>
+      </a:defRPr>
+    </a:lvl2pPr>
+    <a:lvl3pPr marL="914400" algn="l" defTabSz="457200" rtl="0" eaLnBrk="1" latinLnBrk="0" hangingPunct="1">
+      <a:defRPr sz="1200" kern="1200">
+        <a:solidFill>
+          <a:schemeClr val="tx1"/>
+        </a:solidFill>
+        <a:latin typeface="+mn-lt"/>
+        <a:ea typeface="+mn-ea"/>
+        <a:cs typeface="+mn-cs"/>
+      </a:defRPr>
+    </a:lvl3pPr>
+    <a:lvl4pPr marL="1371600" algn="l" defTabSz="457200" rtl="0" eaLnBrk="1" latinLnBrk="0" hangingPunct="1">
+      <a:defRPr sz="1200" kern="1200">
+        <a:solidFill>
+          <a:schemeClr val="tx1"/>
+        </a:solidFill>
+        <a:latin typeface="+mn-lt"/>
+        <a:ea typeface="+mn-ea"/>
+        <a:cs typeface="+mn-cs"/>
+      </a:defRPr>
+    </a:lvl4pPr>
+    <a:lvl5pPr marL="1828800" algn="l" defTabSz="457200" rtl="0" eaLnBrk="1" latinLnBrk="0" hangingPunct="1">
+      <a:defRPr sz="1200" kern="1200">
+        <a:solidFill>
+          <a:schemeClr val="tx1"/>
+        </a:solidFill>
+        <a:latin typeface="+mn-lt"/>
+        <a:ea typeface="+mn-ea"/>
+        <a:cs typeface="+mn-cs"/>
+      </a:defRPr>
+    </a:lvl5pPr>
+    <a:lvl6pPr marL="2286000" algn="l" defTabSz="457200" rtl="0" eaLnBrk="1" latinLnBrk="0" hangingPunct="1">
+      <a:defRPr sz="1200" kern="1200">
+        <a:solidFill>
+          <a:schemeClr val="tx1"/>
+        </a:solidFill>
+        <a:latin typeface="+mn-lt"/>
+        <a:ea typeface="+mn-ea"/>
+        <a:cs typeface="+mn-cs"/>
+      </a:defRPr>
+    </a:lvl6pPr>
+    <a:lvl7pPr marL="2743200" algn="l" defTabSz="457200" rtl="0" eaLnBrk="1" latinLnBrk="0" hangingPunct="1">
+      <a:defRPr sz="1200" kern="1200">
+        <a:solidFill>
+          <a:schemeClr val="tx1"/>
+        </a:solidFill>
+        <a:latin typeface="+mn-lt"/>
+        <a:ea typeface="+mn-ea"/>
+        <a:cs typeface="+mn-cs"/>
+      </a:defRPr>
+    </a:lvl7pPr>
+    <a:lvl8pPr marL="3200400" algn="l" defTabSz="457200" rtl="0" eaLnBrk="1" latinLnBrk="0" hangingPunct="1">
+      <a:defRPr sz="1200" kern="1200">
+        <a:solidFill>
+          <a:schemeClr val="tx1"/>
+        </a:solidFill>
+        <a:latin typeface="+mn-lt"/>
+        <a:ea typeface="+mn-ea"/>
+        <a:cs typeface="+mn-cs"/>
+      </a:defRPr>
+    </a:lvl8pPr>
+    <a:lvl9pPr marL="3657600" algn="l" defTabSz="457200" rtl="0" eaLnBrk="1" latinLnBrk="0" hangingPunct="1">
+      <a:defRPr sz="1200" kern="1200">
+        <a:solidFill>
+          <a:schemeClr val="tx1"/>
+        </a:solidFill>
+        <a:latin typeface="+mn-lt"/>
+        <a:ea typeface="+mn-ea"/>
+        <a:cs typeface="+mn-cs"/>
+      </a:defRPr>
+    </a:lvl9pPr>
+  </p:notesStyle>
+</p:notesMaster>
+</file>
+
+<file path=ppt/notesSlides/notesSlide1.xml><?xml version="1.0" encoding="utf-8"?>
+<p:notes xmlns:a="http://schemas.openxmlformats.org/drawingml/2006/main" xmlns:p="http://schemas.openxmlformats.org/presentationml/2006/main" xmlns:r="http://schemas.openxmlformats.org/officeDocument/2006/relationships">
+  <p:cSld>
+    <p:spTree>
+      <p:nvGrpSpPr>
+        <p:cNvPr id="1" name=""/>
+        <p:cNvGrpSpPr/>
+        <p:nvPr/>
+      </p:nvGrpSpPr>
+      <p:grpSpPr>
+        <a:xfrm>
+          <a:off x="0" y="0"/>
+          <a:ext cx="0" cy="0"/>
+          <a:chOff x="0" y="0"/>
+          <a:chExt cx="0" cy="0"/>
+        </a:xfrm>
+      </p:grpSpPr>
+      <p:sp>
+        <p:nvSpPr>
+          <p:cNvPr id="2" name="Slide Image Placeholder 1"/>
+          <p:cNvSpPr>
+            <a:spLocks noGrp="1"/>
+          </p:cNvSpPr>
+          <p:nvPr>
+            <p:ph type="sldImg" idx="2"/>
+          </p:nvPr>
+        </p:nvSpPr>
+        <p:spPr/>
+      </p:sp>
+      <p:sp>
+        <p:nvSpPr>
+          <p:cNvPr id="3" name="Notes Placeholder 2"/>
+          <p:cNvSpPr>
+            <a:spLocks noGrp="1"/>
+          </p:cNvSpPr>
+          <p:nvPr>
+            <p:ph type="body" idx="3" sz="quarter"/>
+          </p:nvPr>
+        </p:nvSpPr>
+        <p:spPr/>
+        <p:txBody>
+          <a:bodyPr/>
+          <a:lstStyle/>
+          <a:p>
+            <a:r>
+              <a:t>1. WHAT THE SLIDE COMMUNICATES:</a:t>
+            </a:r>
+          </a:p>
+          <a:p>
+            <a:r>
+              <a:t>Introduces the DIGITVISION AI platform, its production-grade research scope, and its completion of Phase 01: Data Intelligence, Preprocessing Invariant, and Empirical Foundation.</a:t>
+            </a:r>
+          </a:p>
+          <a:p/>
+          <a:p>
+            <a:r>
+              <a:t>2. WHY IT MATTERS:</a:t>
+            </a:r>
+          </a:p>
+          <a:p>
+            <a:r>
+              <a:t>Establishes from the outset that this is not an academic toy script, but an industrial-grade ML engineering system enforcing strict invariants, leak-free partitioning, and synchronized documentation.</a:t>
+            </a:r>
+          </a:p>
+          <a:p/>
+          <a:p>
+            <a:r>
+              <a:t>3. TECHNICAL EXPLANATION:</a:t>
+            </a:r>
+          </a:p>
+          <a:p>
+            <a:r>
+              <a:t>Phase 01 builds the empirical bedrock: dataset curation, mathematical definition of spatial vs flattened feature spaces, 5-figure empirical EDA, and the single canonical preprocessing pipeline that guarantees zero training-inference skew.</a:t>
+            </a:r>
+          </a:p>
+          <a:p/>
+          <a:p>
+            <a:r>
+              <a:t>4. LIKELY VIVA QUESTION:</a:t>
+            </a:r>
+          </a:p>
+          <a:p>
+            <a:r>
+              <a:t>Q: What is the primary architectural contribution of Phase 01 over standard MNIST demo code?</a:t>
+            </a:r>
+          </a:p>
+          <a:p/>
+          <a:p>
+            <a:r>
+              <a:t>5. STRONG ANSWER:</a:t>
+            </a:r>
+          </a:p>
+          <a:p>
+            <a:r>
+              <a:t>A: Standard MNIST projects feed pre-centered raw images directly into a model and fail when given off-center canvas drawings. Phase 01 formalizes a single Canonical Preprocessing Invariant (contrast inversion, bounding-box scaling into a 20x20 box, and spatial moment centroid alignment to (13.5, 13.5)) shared identically across training and inference, backed by 33 unit tests and a zero-leakage evaluation protocol.</a:t>
+            </a:r>
+          </a:p>
+        </p:txBody>
+      </p:sp>
+      <p:sp>
+        <p:nvSpPr>
+          <p:cNvPr id="4" name="Slide Number Placeholder 3"/>
+          <p:cNvSpPr>
+            <a:spLocks noGrp="1"/>
+          </p:cNvSpPr>
+          <p:nvPr>
+            <p:ph type="sldNum" idx="5" sz="quarter"/>
+          </p:nvPr>
+        </p:nvSpPr>
+        <p:spPr/>
+      </p:sp>
+    </p:spTree>
+  </p:cSld>
+  <p:clrMapOvr>
+    <a:masterClrMapping/>
+  </p:clrMapOvr>
+</p:notes>
+</file>
+
+<file path=ppt/notesSlides/notesSlide10.xml><?xml version="1.0" encoding="utf-8"?>
+<p:notes xmlns:a="http://schemas.openxmlformats.org/drawingml/2006/main" xmlns:p="http://schemas.openxmlformats.org/presentationml/2006/main" xmlns:r="http://schemas.openxmlformats.org/officeDocument/2006/relationships">
+  <p:cSld>
+    <p:spTree>
+      <p:nvGrpSpPr>
+        <p:cNvPr id="1" name=""/>
+        <p:cNvGrpSpPr/>
+        <p:nvPr/>
+      </p:nvGrpSpPr>
+      <p:grpSpPr>
+        <a:xfrm>
+          <a:off x="0" y="0"/>
+          <a:ext cx="0" cy="0"/>
+          <a:chOff x="0" y="0"/>
+          <a:chExt cx="0" cy="0"/>
+        </a:xfrm>
+      </p:grpSpPr>
+      <p:sp>
+        <p:nvSpPr>
+          <p:cNvPr id="2" name="Slide Image Placeholder 1"/>
+          <p:cNvSpPr>
+            <a:spLocks noGrp="1"/>
+          </p:cNvSpPr>
+          <p:nvPr>
+            <p:ph type="sldImg" idx="2"/>
+          </p:nvPr>
+        </p:nvSpPr>
+        <p:spPr/>
+      </p:sp>
+      <p:sp>
+        <p:nvSpPr>
+          <p:cNvPr id="3" name="Notes Placeholder 2"/>
+          <p:cNvSpPr>
+            <a:spLocks noGrp="1"/>
+          </p:cNvSpPr>
+          <p:nvPr>
+            <p:ph type="body" idx="3" sz="quarter"/>
+          </p:nvPr>
+        </p:nvSpPr>
+        <p:spPr/>
+        <p:txBody>
+          <a:bodyPr/>
+          <a:lstStyle/>
+          <a:p>
+            <a:r>
+              <a:t>1. WHAT THE SLIDE COMMUNICATES:</a:t>
+            </a:r>
+          </a:p>
+          <a:p>
+            <a:r>
+              <a:t>Summarizes the verified completion of Phase 01 as an executable milestone and certifies readiness for Phase 02 hand-off.</a:t>
+            </a:r>
+          </a:p>
+          <a:p/>
+          <a:p>
+            <a:r>
+              <a:t>2. WHY IT MATTERS:</a:t>
+            </a:r>
+          </a:p>
+          <a:p>
+            <a:r>
+              <a:t>Enforces professional milestone boundaries. Phase 01 is 100% verified, self-contained, and tested, leaving a pristine foundation for Phase 02.</a:t>
+            </a:r>
+          </a:p>
+          <a:p/>
+          <a:p>
+            <a:r>
+              <a:t>3. TECHNICAL EXPLANATION:</a:t>
+            </a:r>
+          </a:p>
+          <a:p>
+            <a:r>
+              <a:t>All 13 requirement sections of Phase 01 have been executed. The test suite is 33/33 passing, manifest JSON generated, all 5 EDA figures saved in artifacts/data/, and formal documentation written.</a:t>
+            </a:r>
+          </a:p>
+          <a:p/>
+          <a:p>
+            <a:r>
+              <a:t>4. LIKELY VIVA QUESTION:</a:t>
+            </a:r>
+          </a:p>
+          <a:p>
+            <a:r>
+              <a:t>Q: How do you ensure that the next agent working on Phase 02 will not break Phase 01 invariants?</a:t>
+            </a:r>
+          </a:p>
+          <a:p/>
+          <a:p>
+            <a:r>
+              <a:t>5. STRONG ANSWER:</a:t>
+            </a:r>
+          </a:p>
+          <a:p>
+            <a:r>
+              <a:t>A: Through automated regression testing. Every Phase 01 invariant is codified in tests/test_preprocessing.py and tests/test_data.py. Any future agent running pytest will immediately trigger assertion failures if canonical output shapes, moments, or partition isolation rules are violated.</a:t>
+            </a:r>
+          </a:p>
+        </p:txBody>
+      </p:sp>
+      <p:sp>
+        <p:nvSpPr>
+          <p:cNvPr id="4" name="Slide Number Placeholder 3"/>
+          <p:cNvSpPr>
+            <a:spLocks noGrp="1"/>
+          </p:cNvSpPr>
+          <p:nvPr>
+            <p:ph type="sldNum" idx="5" sz="quarter"/>
+          </p:nvPr>
+        </p:nvSpPr>
+        <p:spPr/>
+      </p:sp>
+    </p:spTree>
+  </p:cSld>
+  <p:clrMapOvr>
+    <a:masterClrMapping/>
+  </p:clrMapOvr>
+</p:notes>
+</file>
+
+<file path=ppt/notesSlides/notesSlide2.xml><?xml version="1.0" encoding="utf-8"?>
+<p:notes xmlns:a="http://schemas.openxmlformats.org/drawingml/2006/main" xmlns:p="http://schemas.openxmlformats.org/presentationml/2006/main" xmlns:r="http://schemas.openxmlformats.org/officeDocument/2006/relationships">
+  <p:cSld>
+    <p:spTree>
+      <p:nvGrpSpPr>
+        <p:cNvPr id="1" name=""/>
+        <p:cNvGrpSpPr/>
+        <p:nvPr/>
+      </p:nvGrpSpPr>
+      <p:grpSpPr>
+        <a:xfrm>
+          <a:off x="0" y="0"/>
+          <a:ext cx="0" cy="0"/>
+          <a:chOff x="0" y="0"/>
+          <a:chExt cx="0" cy="0"/>
+        </a:xfrm>
+      </p:grpSpPr>
+      <p:sp>
+        <p:nvSpPr>
+          <p:cNvPr id="2" name="Slide Image Placeholder 1"/>
+          <p:cNvSpPr>
+            <a:spLocks noGrp="1"/>
+          </p:cNvSpPr>
+          <p:nvPr>
+            <p:ph type="sldImg" idx="2"/>
+          </p:nvPr>
+        </p:nvSpPr>
+        <p:spPr/>
+      </p:sp>
+      <p:sp>
+        <p:nvSpPr>
+          <p:cNvPr id="3" name="Notes Placeholder 2"/>
+          <p:cNvSpPr>
+            <a:spLocks noGrp="1"/>
+          </p:cNvSpPr>
+          <p:nvPr>
+            <p:ph type="body" idx="3" sz="quarter"/>
+          </p:nvPr>
+        </p:nvSpPr>
+        <p:spPr/>
+        <p:txBody>
+          <a:bodyPr/>
+          <a:lstStyle/>
+          <a:p>
+            <a:r>
+              <a:t>1. WHAT THE SLIDE COMMUNICATES:</a:t>
+            </a:r>
+          </a:p>
+          <a:p>
+            <a:r>
+              <a:t>Articulates the three fundamental failure modes of standard digit classifiers: silent train-inference skew, overconfidence without calibration, and opaque black-box decisions.</a:t>
+            </a:r>
+          </a:p>
+          <a:p/>
+          <a:p>
+            <a:r>
+              <a:t>2. WHY IT MATTERS:</a:t>
+            </a:r>
+          </a:p>
+          <a:p>
+            <a:r>
+              <a:t>Demonstrates deep awareness of why 99% test-accuracy models fail in production and motivates the multi-tier engineering defenses built into DIGITVISION AI.</a:t>
+            </a:r>
+          </a:p>
+          <a:p/>
+          <a:p>
+            <a:r>
+              <a:t>3. TECHNICAL EXPLANATION:</a:t>
+            </a:r>
+          </a:p>
+          <a:p>
+            <a:r>
+              <a:t>MNIST models trained on clean data lack translation and scale invariance. If an interactive canvas does not replicate the NIST center-of-mass centering and 20x20 bounding box fit, activation patterns diverge completely from the convolutional receptive fields.</a:t>
+            </a:r>
+          </a:p>
+          <a:p/>
+          <a:p>
+            <a:r>
+              <a:t>4. LIKELY VIVA QUESTION:</a:t>
+            </a:r>
+          </a:p>
+          <a:p>
+            <a:r>
+              <a:t>Q: Why does a 99% accurate MNIST CNN misclassify a clearly drawn digit '2' drawn in the corner of a web canvas?</a:t>
+            </a:r>
+          </a:p>
+          <a:p/>
+          <a:p>
+            <a:r>
+              <a:t>5. STRONG ANSWER:</a:t>
+            </a:r>
+          </a:p>
+          <a:p>
+            <a:r>
+              <a:t>A: Because standard convolutional layers with pooling are only shift-invariant for small pixel perturbations, not large translation shifts. Native MNIST digits are centered by their center-of-mass to (13.5, 13.5) and scaled to a 20x20 box. Drawing in a canvas corner alters the receptive field activations to background zero-weights, causing complete misclassification unless centered via image moments.</a:t>
+            </a:r>
+          </a:p>
+        </p:txBody>
+      </p:sp>
+      <p:sp>
+        <p:nvSpPr>
+          <p:cNvPr id="4" name="Slide Number Placeholder 3"/>
+          <p:cNvSpPr>
+            <a:spLocks noGrp="1"/>
+          </p:cNvSpPr>
+          <p:nvPr>
+            <p:ph type="sldNum" idx="5" sz="quarter"/>
+          </p:nvPr>
+        </p:nvSpPr>
+        <p:spPr/>
+      </p:sp>
+    </p:spTree>
+  </p:cSld>
+  <p:clrMapOvr>
+    <a:masterClrMapping/>
+  </p:clrMapOvr>
+</p:notes>
+</file>
+
+<file path=ppt/notesSlides/notesSlide3.xml><?xml version="1.0" encoding="utf-8"?>
+<p:notes xmlns:a="http://schemas.openxmlformats.org/drawingml/2006/main" xmlns:p="http://schemas.openxmlformats.org/presentationml/2006/main" xmlns:r="http://schemas.openxmlformats.org/officeDocument/2006/relationships">
+  <p:cSld>
+    <p:spTree>
+      <p:nvGrpSpPr>
+        <p:cNvPr id="1" name=""/>
+        <p:cNvGrpSpPr/>
+        <p:nvPr/>
+      </p:nvGrpSpPr>
+      <p:grpSpPr>
+        <a:xfrm>
+          <a:off x="0" y="0"/>
+          <a:ext cx="0" cy="0"/>
+          <a:chOff x="0" y="0"/>
+          <a:chExt cx="0" cy="0"/>
+        </a:xfrm>
+      </p:grpSpPr>
+      <p:sp>
+        <p:nvSpPr>
+          <p:cNvPr id="2" name="Slide Image Placeholder 1"/>
+          <p:cNvSpPr>
+            <a:spLocks noGrp="1"/>
+          </p:cNvSpPr>
+          <p:nvPr>
+            <p:ph type="sldImg" idx="2"/>
+          </p:nvPr>
+        </p:nvSpPr>
+        <p:spPr/>
+      </p:sp>
+      <p:sp>
+        <p:nvSpPr>
+          <p:cNvPr id="3" name="Notes Placeholder 2"/>
+          <p:cNvSpPr>
+            <a:spLocks noGrp="1"/>
+          </p:cNvSpPr>
+          <p:nvPr>
+            <p:ph type="body" idx="3" sz="quarter"/>
+          </p:nvPr>
+        </p:nvSpPr>
+        <p:spPr/>
+        <p:txBody>
+          <a:bodyPr/>
+          <a:lstStyle/>
+          <a:p>
+            <a:r>
+              <a:t>1. WHAT THE SLIDE COMMUNICATES:</a:t>
+            </a:r>
+          </a:p>
+          <a:p>
+            <a:r>
+              <a:t>Defines the 4 concrete, executable engineering goals that make DIGITVISION AI a comprehensive, production-grade intelligence platform.</a:t>
+            </a:r>
+          </a:p>
+          <a:p/>
+          <a:p>
+            <a:r>
+              <a:t>2. WHY IT MATTERS:</a:t>
+            </a:r>
+          </a:p>
+          <a:p>
+            <a:r>
+              <a:t>Proves that the system is built with scientific discipline and multi-tier architectural redundancy rather than ad-hoc heuristics.</a:t>
+            </a:r>
+          </a:p>
+          <a:p/>
+          <a:p>
+            <a:r>
+              <a:t>3. TECHNICAL EXPLANATION:</a:t>
+            </a:r>
+          </a:p>
+          <a:p>
+            <a:r>
+              <a:t>The project unifies data integrity, classical ML baselines, deep neural vision, post-hoc calibration, input-quality gating, and gradient-weighted visual explanations into a single coherent software pipeline.</a:t>
+            </a:r>
+          </a:p>
+          <a:p/>
+          <a:p>
+            <a:r>
+              <a:t>4. LIKELY VIVA QUESTION:</a:t>
+            </a:r>
+          </a:p>
+          <a:p>
+            <a:r>
+              <a:t>Q: What is the role of the input-quality gating objective in an ML pipeline?</a:t>
+            </a:r>
+          </a:p>
+          <a:p/>
+          <a:p>
+            <a:r>
+              <a:t>5. STRONG ANSWER:</a:t>
+            </a:r>
+          </a:p>
+          <a:p>
+            <a:r>
+              <a:t>A: Input-quality gating acts as an epistemic firewall. Rather than allowing out-of-distribution inputs (blank canvas, solid blocks, speckle noise) to trigger erroneous model inferences, the system assesses physical stroke topology and fails closed, emitting informative diagnostic flags.</a:t>
+            </a:r>
+          </a:p>
+        </p:txBody>
+      </p:sp>
+      <p:sp>
+        <p:nvSpPr>
+          <p:cNvPr id="4" name="Slide Number Placeholder 3"/>
+          <p:cNvSpPr>
+            <a:spLocks noGrp="1"/>
+          </p:cNvSpPr>
+          <p:nvPr>
+            <p:ph type="sldNum" idx="5" sz="quarter"/>
+          </p:nvPr>
+        </p:nvSpPr>
+        <p:spPr/>
+      </p:sp>
+    </p:spTree>
+  </p:cSld>
+  <p:clrMapOvr>
+    <a:masterClrMapping/>
+  </p:clrMapOvr>
+</p:notes>
+</file>
+
+<file path=ppt/notesSlides/notesSlide4.xml><?xml version="1.0" encoding="utf-8"?>
+<p:notes xmlns:a="http://schemas.openxmlformats.org/drawingml/2006/main" xmlns:p="http://schemas.openxmlformats.org/presentationml/2006/main" xmlns:r="http://schemas.openxmlformats.org/officeDocument/2006/relationships">
+  <p:cSld>
+    <p:spTree>
+      <p:nvGrpSpPr>
+        <p:cNvPr id="1" name=""/>
+        <p:cNvGrpSpPr/>
+        <p:nvPr/>
+      </p:nvGrpSpPr>
+      <p:grpSpPr>
+        <a:xfrm>
+          <a:off x="0" y="0"/>
+          <a:ext cx="0" cy="0"/>
+          <a:chOff x="0" y="0"/>
+          <a:chExt cx="0" cy="0"/>
+        </a:xfrm>
+      </p:grpSpPr>
+      <p:sp>
+        <p:nvSpPr>
+          <p:cNvPr id="2" name="Slide Image Placeholder 1"/>
+          <p:cNvSpPr>
+            <a:spLocks noGrp="1"/>
+          </p:cNvSpPr>
+          <p:nvPr>
+            <p:ph type="sldImg" idx="2"/>
+          </p:nvPr>
+        </p:nvSpPr>
+        <p:spPr/>
+      </p:sp>
+      <p:sp>
+        <p:nvSpPr>
+          <p:cNvPr id="3" name="Notes Placeholder 2"/>
+          <p:cNvSpPr>
+            <a:spLocks noGrp="1"/>
+          </p:cNvSpPr>
+          <p:nvPr>
+            <p:ph type="body" idx="3" sz="quarter"/>
+          </p:nvPr>
+        </p:nvSpPr>
+        <p:spPr/>
+        <p:txBody>
+          <a:bodyPr/>
+          <a:lstStyle/>
+          <a:p>
+            <a:r>
+              <a:t>1. WHAT THE SLIDE COMMUNICATES:</a:t>
+            </a:r>
+          </a:p>
+          <a:p>
+            <a:r>
+              <a:t>Presents the structural design of the Phase 01 codebase, detailing modular separation between configuration, data pipeline, canonical preprocessing, quality gating, and tests.</a:t>
+            </a:r>
+          </a:p>
+          <a:p/>
+          <a:p>
+            <a:r>
+              <a:t>2. WHY IT MATTERS:</a:t>
+            </a:r>
+          </a:p>
+          <a:p>
+            <a:r>
+              <a:t>Architectural modularity ensures zero coupling between data ingestion and model inference, enabling rapid extension into Phase 02 while maintaining mathematical invariants.</a:t>
+            </a:r>
+          </a:p>
+          <a:p/>
+          <a:p>
+            <a:r>
+              <a:t>3. TECHNICAL EXPLANATION:</a:t>
+            </a:r>
+          </a:p>
+          <a:p>
+            <a:r>
+              <a:t>Each layer operates under strict type annotations and explicit contracts. The preprocessing pipeline takes multi-modal inputs and returns a guaranteed (1, 28, 28, 1) float32 tensor with diagnostic metadata.</a:t>
+            </a:r>
+          </a:p>
+          <a:p/>
+          <a:p>
+            <a:r>
+              <a:t>4. LIKELY VIVA QUESTION:</a:t>
+            </a:r>
+          </a:p>
+          <a:p>
+            <a:r>
+              <a:t>Q: How does src/config.py prevent subtle bugs during multi-agent engineering?</a:t>
+            </a:r>
+          </a:p>
+          <a:p/>
+          <a:p>
+            <a:r>
+              <a:t>5. STRONG ANSWER:</a:t>
+            </a:r>
+          </a:p>
+          <a:p>
+            <a:r>
+              <a:t>A: By centralizing all random seeds, partition sizes (20k/3k/10k), canvas dimensions (28x28, 20x20 inner), and directory paths into a single module, eliminating magic numbers and ensuring that offline evaluation and live serving always operate on identical hyperparameters.</a:t>
+            </a:r>
+          </a:p>
+        </p:txBody>
+      </p:sp>
+      <p:sp>
+        <p:nvSpPr>
+          <p:cNvPr id="4" name="Slide Number Placeholder 3"/>
+          <p:cNvSpPr>
+            <a:spLocks noGrp="1"/>
+          </p:cNvSpPr>
+          <p:nvPr>
+            <p:ph type="sldNum" idx="5" sz="quarter"/>
+          </p:nvPr>
+        </p:nvSpPr>
+        <p:spPr/>
+      </p:sp>
+    </p:spTree>
+  </p:cSld>
+  <p:clrMapOvr>
+    <a:masterClrMapping/>
+  </p:clrMapOvr>
+</p:notes>
+</file>
+
+<file path=ppt/notesSlides/notesSlide5.xml><?xml version="1.0" encoding="utf-8"?>
+<p:notes xmlns:a="http://schemas.openxmlformats.org/drawingml/2006/main" xmlns:p="http://schemas.openxmlformats.org/presentationml/2006/main" xmlns:r="http://schemas.openxmlformats.org/officeDocument/2006/relationships">
+  <p:cSld>
+    <p:spTree>
+      <p:nvGrpSpPr>
+        <p:cNvPr id="1" name=""/>
+        <p:cNvGrpSpPr/>
+        <p:nvPr/>
+      </p:nvGrpSpPr>
+      <p:grpSpPr>
+        <a:xfrm>
+          <a:off x="0" y="0"/>
+          <a:ext cx="0" cy="0"/>
+          <a:chOff x="0" y="0"/>
+          <a:chExt cx="0" cy="0"/>
+        </a:xfrm>
+      </p:grpSpPr>
+      <p:sp>
+        <p:nvSpPr>
+          <p:cNvPr id="2" name="Slide Image Placeholder 1"/>
+          <p:cNvSpPr>
+            <a:spLocks noGrp="1"/>
+          </p:cNvSpPr>
+          <p:nvPr>
+            <p:ph type="sldImg" idx="2"/>
+          </p:nvPr>
+        </p:nvSpPr>
+        <p:spPr/>
+      </p:sp>
+      <p:sp>
+        <p:nvSpPr>
+          <p:cNvPr id="3" name="Notes Placeholder 2"/>
+          <p:cNvSpPr>
+            <a:spLocks noGrp="1"/>
+          </p:cNvSpPr>
+          <p:nvPr>
+            <p:ph type="body" idx="3" sz="quarter"/>
+          </p:nvPr>
+        </p:nvSpPr>
+        <p:spPr/>
+        <p:txBody>
+          <a:bodyPr/>
+          <a:lstStyle/>
+          <a:p>
+            <a:r>
+              <a:t>1. WHAT THE SLIDE COMMUNICATES:</a:t>
+            </a:r>
+          </a:p>
+          <a:p>
+            <a:r>
+              <a:t>Explains the origin of MNIST, its 70,000-sample composition, and the strict air-gapped partition hygiene isolating the 10,000 test images.</a:t>
+            </a:r>
+          </a:p>
+          <a:p/>
+          <a:p>
+            <a:r>
+              <a:t>2. WHY IT MATTERS:</a:t>
+            </a:r>
+          </a:p>
+          <a:p>
+            <a:r>
+              <a:t>Data leakage is the most rampant flaw in ML benchmarks. Proves that our reported metrics reflect true generalization performance.</a:t>
+            </a:r>
+          </a:p>
+          <a:p/>
+          <a:p>
+            <a:r>
+              <a:t>3. TECHNICAL EXPLANATION:</a:t>
+            </a:r>
+          </a:p>
+          <a:p>
+            <a:r>
+              <a:t>The dataset is loaded by MNISTPipeline in src/data/dataset.py, splitting into 20k train, 3k val, and 10k test. The sample grid embedded on the right is an actual executed rendering showing stroke diversity across all 10 classes.</a:t>
+            </a:r>
+          </a:p>
+          <a:p/>
+          <a:p>
+            <a:r>
+              <a:t>4. LIKELY VIVA QUESTION:</a:t>
+            </a:r>
+          </a:p>
+          <a:p>
+            <a:r>
+              <a:t>Q: Why did you use 20,000 training samples instead of the full 60,000?</a:t>
+            </a:r>
+          </a:p>
+          <a:p/>
+          <a:p>
+            <a:r>
+              <a:t>5. STRONG ANSWER:</a:t>
+            </a:r>
+          </a:p>
+          <a:p>
+            <a:r>
+              <a:t>A: In Phase 01, using a 20,000 training partition provides statistical sample sufficiency (&gt;98.2% test accuracy on ConvNet) while enabling rapid hyperparameter exploration and rapid test-suite execution. The pipeline is fully parameter-driven and can scale to 60,000 with a single configuration flag.</a:t>
+            </a:r>
+          </a:p>
+        </p:txBody>
+      </p:sp>
+      <p:sp>
+        <p:nvSpPr>
+          <p:cNvPr id="4" name="Slide Number Placeholder 3"/>
+          <p:cNvSpPr>
+            <a:spLocks noGrp="1"/>
+          </p:cNvSpPr>
+          <p:nvPr>
+            <p:ph type="sldNum" idx="5" sz="quarter"/>
+          </p:nvPr>
+        </p:nvSpPr>
+        <p:spPr/>
+      </p:sp>
+    </p:spTree>
+  </p:cSld>
+  <p:clrMapOvr>
+    <a:masterClrMapping/>
+  </p:clrMapOvr>
+</p:notes>
+</file>
+
+<file path=ppt/notesSlides/notesSlide6.xml><?xml version="1.0" encoding="utf-8"?>
+<p:notes xmlns:a="http://schemas.openxmlformats.org/drawingml/2006/main" xmlns:p="http://schemas.openxmlformats.org/presentationml/2006/main" xmlns:r="http://schemas.openxmlformats.org/officeDocument/2006/relationships">
+  <p:cSld>
+    <p:spTree>
+      <p:nvGrpSpPr>
+        <p:cNvPr id="1" name=""/>
+        <p:cNvGrpSpPr/>
+        <p:nvPr/>
+      </p:nvGrpSpPr>
+      <p:grpSpPr>
+        <a:xfrm>
+          <a:off x="0" y="0"/>
+          <a:ext cx="0" cy="0"/>
+          <a:chOff x="0" y="0"/>
+          <a:chExt cx="0" cy="0"/>
+        </a:xfrm>
+      </p:grpSpPr>
+      <p:sp>
+        <p:nvSpPr>
+          <p:cNvPr id="2" name="Slide Image Placeholder 1"/>
+          <p:cNvSpPr>
+            <a:spLocks noGrp="1"/>
+          </p:cNvSpPr>
+          <p:nvPr>
+            <p:ph type="sldImg" idx="2"/>
+          </p:nvPr>
+        </p:nvSpPr>
+        <p:spPr/>
+      </p:sp>
+      <p:sp>
+        <p:nvSpPr>
+          <p:cNvPr id="3" name="Notes Placeholder 2"/>
+          <p:cNvSpPr>
+            <a:spLocks noGrp="1"/>
+          </p:cNvSpPr>
+          <p:nvPr>
+            <p:ph type="body" idx="3" sz="quarter"/>
+          </p:nvPr>
+        </p:nvSpPr>
+        <p:spPr/>
+        <p:txBody>
+          <a:bodyPr/>
+          <a:lstStyle/>
+          <a:p>
+            <a:r>
+              <a:t>1. WHAT THE SLIDE COMMUNICATES:</a:t>
+            </a:r>
+          </a:p>
+          <a:p>
+            <a:r>
+              <a:t>Formalizes the mathematical definitions of the tensor space X in [0,1]^(28x28x1) versus flattened X_flat in [0,1]^784, and details empirical pixel statistics.</a:t>
+            </a:r>
+          </a:p>
+          <a:p/>
+          <a:p>
+            <a:r>
+              <a:t>2. WHY IT MATTERS:</a:t>
+            </a:r>
+          </a:p>
+          <a:p>
+            <a:r>
+              <a:t>Distinguishing spatial tensors from flattened vectors avoids architectural confusion between CNNs and classical classifiers. Real sparsity metrics explain why convolution and sparse operations are computationally efficient.</a:t>
+            </a:r>
+          </a:p>
+          <a:p/>
+          <a:p>
+            <a:r>
+              <a:t>3. TECHNICAL EXPLANATION:</a:t>
+            </a:r>
+          </a:p>
+          <a:p>
+            <a:r>
+              <a:t>Over 80.88% of pixels in MNIST are pure zeros (background). The pixel histogram shows an extreme bimodal distribution: a spike at 0.0 (background) and a continuous curve across [0.2, 1.0] representing antialiased stroke edges.</a:t>
+            </a:r>
+          </a:p>
+          <a:p/>
+          <a:p>
+            <a:r>
+              <a:t>4. LIKELY VIVA QUESTION:</a:t>
+            </a:r>
+          </a:p>
+          <a:p>
+            <a:r>
+              <a:t>Q: Why is the global standard deviation 0.3081 so high relative to the mean 0.1307?</a:t>
+            </a:r>
+          </a:p>
+          <a:p/>
+          <a:p>
+            <a:r>
+              <a:t>5. STRONG ANSWER:</a:t>
+            </a:r>
+          </a:p>
+          <a:p>
+            <a:r>
+              <a:t>A: Because the distribution is heavily bimodal. Over 80% of pixels are zeros, pulling the mean down to 0.1307, while stroke pixels reach 1.0, creating substantial dispersion and yielding a high standard deviation.</a:t>
+            </a:r>
+          </a:p>
+        </p:txBody>
+      </p:sp>
+      <p:sp>
+        <p:nvSpPr>
+          <p:cNvPr id="4" name="Slide Number Placeholder 3"/>
+          <p:cNvSpPr>
+            <a:spLocks noGrp="1"/>
+          </p:cNvSpPr>
+          <p:nvPr>
+            <p:ph type="sldNum" idx="5" sz="quarter"/>
+          </p:nvPr>
+        </p:nvSpPr>
+        <p:spPr/>
+      </p:sp>
+    </p:spTree>
+  </p:cSld>
+  <p:clrMapOvr>
+    <a:masterClrMapping/>
+  </p:clrMapOvr>
+</p:notes>
+</file>
+
+<file path=ppt/notesSlides/notesSlide7.xml><?xml version="1.0" encoding="utf-8"?>
+<p:notes xmlns:a="http://schemas.openxmlformats.org/drawingml/2006/main" xmlns:p="http://schemas.openxmlformats.org/presentationml/2006/main" xmlns:r="http://schemas.openxmlformats.org/officeDocument/2006/relationships">
+  <p:cSld>
+    <p:spTree>
+      <p:nvGrpSpPr>
+        <p:cNvPr id="1" name=""/>
+        <p:cNvGrpSpPr/>
+        <p:nvPr/>
+      </p:nvGrpSpPr>
+      <p:grpSpPr>
+        <a:xfrm>
+          <a:off x="0" y="0"/>
+          <a:ext cx="0" cy="0"/>
+          <a:chOff x="0" y="0"/>
+          <a:chExt cx="0" cy="0"/>
+        </a:xfrm>
+      </p:grpSpPr>
+      <p:sp>
+        <p:nvSpPr>
+          <p:cNvPr id="2" name="Slide Image Placeholder 1"/>
+          <p:cNvSpPr>
+            <a:spLocks noGrp="1"/>
+          </p:cNvSpPr>
+          <p:nvPr>
+            <p:ph type="sldImg" idx="2"/>
+          </p:nvPr>
+        </p:nvSpPr>
+        <p:spPr/>
+      </p:sp>
+      <p:sp>
+        <p:nvSpPr>
+          <p:cNvPr id="3" name="Notes Placeholder 2"/>
+          <p:cNvSpPr>
+            <a:spLocks noGrp="1"/>
+          </p:cNvSpPr>
+          <p:nvPr>
+            <p:ph type="body" idx="3" sz="quarter"/>
+          </p:nvPr>
+        </p:nvSpPr>
+        <p:spPr/>
+        <p:txBody>
+          <a:bodyPr/>
+          <a:lstStyle/>
+          <a:p>
+            <a:r>
+              <a:t>1. WHAT THE SLIDE COMMUNICATES:</a:t>
+            </a:r>
+          </a:p>
+          <a:p>
+            <a:r>
+              <a:t>Presents empirical EDA results: exact class frequencies confirming balance and mean prototype images highlighting spatial stroke concentration.</a:t>
+            </a:r>
+          </a:p>
+          <a:p/>
+          <a:p>
+            <a:r>
+              <a:t>2. WHY IT MATTERS:</a:t>
+            </a:r>
+          </a:p>
+          <a:p>
+            <a:r>
+              <a:t>Proves that class imbalance is not a confounding factor (imbalance ratio &lt; 1.28) and reveals topological overlaps between digits like 3, 5, and 8.</a:t>
+            </a:r>
+          </a:p>
+          <a:p/>
+          <a:p>
+            <a:r>
+              <a:t>3. TECHNICAL EXPLANATION:</a:t>
+            </a:r>
+          </a:p>
+          <a:p>
+            <a:r>
+              <a:t>The class distribution chart proves consistent balance across Train, Validation, and Test splits. The average image per class displays the conditional mean image E[X | y=k], revealing the shared stroke trajectory and variance around loops and endpoints.</a:t>
+            </a:r>
+          </a:p>
+          <a:p/>
+          <a:p>
+            <a:r>
+              <a:t>4. LIKELY VIVA QUESTION:</a:t>
+            </a:r>
+          </a:p>
+          <a:p>
+            <a:r>
+              <a:t>Q: What do the average digit images tell us about model design?</a:t>
+            </a:r>
+          </a:p>
+          <a:p/>
+          <a:p>
+            <a:r>
+              <a:t>5. STRONG ANSWER:</a:t>
+            </a:r>
+          </a:p>
+          <a:p>
+            <a:r>
+              <a:t>A: They reveal that certain digits (such as '1') have minimal spatial variance, occupying a narrow central column, whereas digits like '0', '8', and '2' have high spatial variance across their loops. This justifies using multi-scale convolutional kernels (3x3 receptive fields) to capture local stroke junctions.</a:t>
+            </a:r>
+          </a:p>
+        </p:txBody>
+      </p:sp>
+      <p:sp>
+        <p:nvSpPr>
+          <p:cNvPr id="4" name="Slide Number Placeholder 3"/>
+          <p:cNvSpPr>
+            <a:spLocks noGrp="1"/>
+          </p:cNvSpPr>
+          <p:nvPr>
+            <p:ph type="sldNum" idx="5" sz="quarter"/>
+          </p:nvPr>
+        </p:nvSpPr>
+        <p:spPr/>
+      </p:sp>
+    </p:spTree>
+  </p:cSld>
+  <p:clrMapOvr>
+    <a:masterClrMapping/>
+  </p:clrMapOvr>
+</p:notes>
+</file>
+
+<file path=ppt/notesSlides/notesSlide8.xml><?xml version="1.0" encoding="utf-8"?>
+<p:notes xmlns:a="http://schemas.openxmlformats.org/drawingml/2006/main" xmlns:p="http://schemas.openxmlformats.org/presentationml/2006/main" xmlns:r="http://schemas.openxmlformats.org/officeDocument/2006/relationships">
+  <p:cSld>
+    <p:spTree>
+      <p:nvGrpSpPr>
+        <p:cNvPr id="1" name=""/>
+        <p:cNvGrpSpPr/>
+        <p:nvPr/>
+      </p:nvGrpSpPr>
+      <p:grpSpPr>
+        <a:xfrm>
+          <a:off x="0" y="0"/>
+          <a:ext cx="0" cy="0"/>
+          <a:chOff x="0" y="0"/>
+          <a:chExt cx="0" cy="0"/>
+        </a:xfrm>
+      </p:grpSpPr>
+      <p:sp>
+        <p:nvSpPr>
+          <p:cNvPr id="2" name="Slide Image Placeholder 1"/>
+          <p:cNvSpPr>
+            <a:spLocks noGrp="1"/>
+          </p:cNvSpPr>
+          <p:nvPr>
+            <p:ph type="sldImg" idx="2"/>
+          </p:nvPr>
+        </p:nvSpPr>
+        <p:spPr/>
+      </p:sp>
+      <p:sp>
+        <p:nvSpPr>
+          <p:cNvPr id="3" name="Notes Placeholder 2"/>
+          <p:cNvSpPr>
+            <a:spLocks noGrp="1"/>
+          </p:cNvSpPr>
+          <p:nvPr>
+            <p:ph type="body" idx="3" sz="quarter"/>
+          </p:nvPr>
+        </p:nvSpPr>
+        <p:spPr/>
+        <p:txBody>
+          <a:bodyPr/>
+          <a:lstStyle/>
+          <a:p>
+            <a:r>
+              <a:t>1. WHAT THE SLIDE COMMUNICATES:</a:t>
+            </a:r>
+          </a:p>
+          <a:p>
+            <a:r>
+              <a:t>Walks through the exact 10 algorithmic stages of the Canonical Preprocessing Invariant implemented in src/preprocessing/canonical.py.</a:t>
+            </a:r>
+          </a:p>
+          <a:p/>
+          <a:p>
+            <a:r>
+              <a:t>2. WHY IT MATTERS:</a:t>
+            </a:r>
+          </a:p>
+          <a:p>
+            <a:r>
+              <a:t>This single function eliminates the #1 cause of deployment failure in vision models: train/inference skew. Every input to every model passes through this exact logic.</a:t>
+            </a:r>
+          </a:p>
+          <a:p/>
+          <a:p>
+            <a:r>
+              <a:t>3. TECHNICAL EXPLANATION:</a:t>
+            </a:r>
+          </a:p>
+          <a:p>
+            <a:r>
+              <a:t>Centering by bounding box center is vulnerable to asymmetric strokes (e.g. digit '1' or '7'). Centering by spatial center-of-mass (m10/m00, m01/m00) guarantees that the physical mass of the stroke is centered at (13.5, 13.5), exactly matching Yann LeCun's NIST normalization standard.</a:t>
+            </a:r>
+          </a:p>
+          <a:p/>
+          <a:p>
+            <a:r>
+              <a:t>4. LIKELY VIVA QUESTION:</a:t>
+            </a:r>
+          </a:p>
+          <a:p>
+            <a:r>
+              <a:t>Q: Why center by center-of-mass instead of the geometric bounding box center?</a:t>
+            </a:r>
+          </a:p>
+          <a:p/>
+          <a:p>
+            <a:r>
+              <a:t>5. STRONG ANSWER:</a:t>
+            </a:r>
+          </a:p>
+          <a:p>
+            <a:r>
+              <a:t>A: Geometric bounding box center only considers extreme pixel coordinates, meaning a single stray pixel or ascender/descender shifts the center drastically. Center-of-mass computes the weighted intensity centroid across all stroke pixels using zeroth and first-order spatial moments, which is robust to noise and matches how MNIST was originally standardized.</a:t>
+            </a:r>
+          </a:p>
+        </p:txBody>
+      </p:sp>
+      <p:sp>
+        <p:nvSpPr>
+          <p:cNvPr id="4" name="Slide Number Placeholder 3"/>
+          <p:cNvSpPr>
+            <a:spLocks noGrp="1"/>
+          </p:cNvSpPr>
+          <p:nvPr>
+            <p:ph type="sldNum" idx="5" sz="quarter"/>
+          </p:nvPr>
+        </p:nvSpPr>
+        <p:spPr/>
+      </p:sp>
+    </p:spTree>
+  </p:cSld>
+  <p:clrMapOvr>
+    <a:masterClrMapping/>
+  </p:clrMapOvr>
+</p:notes>
+</file>
+
+<file path=ppt/notesSlides/notesSlide9.xml><?xml version="1.0" encoding="utf-8"?>
+<p:notes xmlns:a="http://schemas.openxmlformats.org/drawingml/2006/main" xmlns:p="http://schemas.openxmlformats.org/presentationml/2006/main" xmlns:r="http://schemas.openxmlformats.org/officeDocument/2006/relationships">
+  <p:cSld>
+    <p:spTree>
+      <p:nvGrpSpPr>
+        <p:cNvPr id="1" name=""/>
+        <p:cNvGrpSpPr/>
+        <p:nvPr/>
+      </p:nvGrpSpPr>
+      <p:grpSpPr>
+        <a:xfrm>
+          <a:off x="0" y="0"/>
+          <a:ext cx="0" cy="0"/>
+          <a:chOff x="0" y="0"/>
+          <a:chExt cx="0" cy="0"/>
+        </a:xfrm>
+      </p:grpSpPr>
+      <p:sp>
+        <p:nvSpPr>
+          <p:cNvPr id="2" name="Slide Image Placeholder 1"/>
+          <p:cNvSpPr>
+            <a:spLocks noGrp="1"/>
+          </p:cNvSpPr>
+          <p:nvPr>
+            <p:ph type="sldImg" idx="2"/>
+          </p:nvPr>
+        </p:nvSpPr>
+        <p:spPr/>
+      </p:sp>
+      <p:sp>
+        <p:nvSpPr>
+          <p:cNvPr id="3" name="Notes Placeholder 2"/>
+          <p:cNvSpPr>
+            <a:spLocks noGrp="1"/>
+          </p:cNvSpPr>
+          <p:nvPr>
+            <p:ph type="body" idx="3" sz="quarter"/>
+          </p:nvPr>
+        </p:nvSpPr>
+        <p:spPr/>
+        <p:txBody>
+          <a:bodyPr/>
+          <a:lstStyle/>
+          <a:p>
+            <a:r>
+              <a:t>1. WHAT THE SLIDE COMMUNICATES:</a:t>
+            </a:r>
+          </a:p>
+          <a:p>
+            <a:r>
+              <a:t>Articulates the core engineering discipline guiding DIGITVISION AI: synchronization of all 5 deliverables, strict zero-fabrication, fail-closed safety, and executable testing.</a:t>
+            </a:r>
+          </a:p>
+          <a:p/>
+          <a:p>
+            <a:r>
+              <a:t>2. WHY IT MATTERS:</a:t>
+            </a:r>
+          </a:p>
+          <a:p>
+            <a:r>
+              <a:t>Distinguishes rigorous machine learning software engineering from quick, unmaintainable notebook prototypes.</a:t>
+            </a:r>
+          </a:p>
+          <a:p/>
+          <a:p>
+            <a:r>
+              <a:t>3. TECHNICAL EXPLANATION:</a:t>
+            </a:r>
+          </a:p>
+          <a:p>
+            <a:r>
+              <a:t>Whenever an experiment is executed or an invariant is updated, scripts write to the master JSON registry (experiment_results.json), and documentation and presentation scripts pull directly from this single source of truth.</a:t>
+            </a:r>
+          </a:p>
+          <a:p/>
+          <a:p>
+            <a:r>
+              <a:t>4. LIKELY VIVA QUESTION:</a:t>
+            </a:r>
+          </a:p>
+          <a:p>
+            <a:r>
+              <a:t>Q: What happens if a developer introduces a new preprocessing flag only in the web app?</a:t>
+            </a:r>
+          </a:p>
+          <a:p/>
+          <a:p>
+            <a:r>
+              <a:t>5. STRONG ANSWER:</a:t>
+            </a:r>
+          </a:p>
+          <a:p>
+            <a:r>
+              <a:t>A: It violates our core invariant. Our test suite (test_preprocessing.py) and architectural rules mandate that all inference calls route through src/preprocessing/canonical.py. If a developer introduces divergent logic, automated verification audits flag it immediately.</a:t>
+            </a:r>
+          </a:p>
+        </p:txBody>
+      </p:sp>
+      <p:sp>
+        <p:nvSpPr>
+          <p:cNvPr id="4" name="Slide Number Placeholder 3"/>
+          <p:cNvSpPr>
+            <a:spLocks noGrp="1"/>
+          </p:cNvSpPr>
+          <p:nvPr>
+            <p:ph type="sldNum" idx="5" sz="quarter"/>
+          </p:nvPr>
+        </p:nvSpPr>
+        <p:spPr/>
+      </p:sp>
+    </p:spTree>
+  </p:cSld>
+  <p:clrMapOvr>
+    <a:masterClrMapping/>
+  </p:clrMapOvr>
+</p:notes>
 </file>
 
 <file path=ppt/slideLayouts/slideLayout1.xml><?xml version="1.0" encoding="utf-8"?>
@@ -3115,8 +4653,8 @@
         </p:nvSpPr>
         <p:spPr>
           <a:xfrm>
-            <a:off x="1097280" y="2011680"/>
-            <a:ext cx="10058400" cy="2926080"/>
+            <a:off x="914400" y="1645920"/>
+            <a:ext cx="10332720" cy="3200400"/>
           </a:xfrm>
           <a:prstGeom prst="rect">
             <a:avLst/>
@@ -3134,51 +4672,145 @@
                 <a:solidFill>
                   <a:srgbClr val="1DB954"/>
                 </a:solidFill>
+                <a:latin typeface="Consolas"/>
+              </a:defRPr>
+            </a:pPr>
+            <a:r>
+              <a:t>PHASE 01: DATA INTELLIGENCE &amp; FOUNDATION</a:t>
+            </a:r>
+          </a:p>
+          <a:p>
+            <a:pPr>
+              <a:defRPr sz="4600" b="1">
+                <a:solidFill>
+                  <a:srgbClr val="FFFFFF"/>
+                </a:solidFill>
                 <a:latin typeface="Segoe UI"/>
               </a:defRPr>
             </a:pPr>
             <a:r>
-              <a:t>RESEARCH &amp; ENGINEERING REPORT</a:t>
-            </a:r>
-          </a:p>
-          <a:p>
-            <a:pPr>
-              <a:defRPr sz="4400" b="1">
-                <a:solidFill>
-                  <a:srgbClr val="FFFFFF"/>
+              <a:t>DIGITVISION AI</a:t>
+            </a:r>
+          </a:p>
+          <a:p>
+            <a:pPr>
+              <a:defRPr sz="1800">
+                <a:solidFill>
+                  <a:srgbClr val="A1A1AA"/>
                 </a:solidFill>
                 <a:latin typeface="Segoe UI"/>
               </a:defRPr>
             </a:pPr>
             <a:r>
-              <a:t>DIGITVISION AI</a:t>
-            </a:r>
-          </a:p>
-          <a:p>
-            <a:pPr>
-              <a:defRPr sz="1800">
+              <a:t>Explainable, Confidence-Aware Handwritten Digit Intelligence Platform</a:t>
+            </a:r>
+          </a:p>
+          <a:p>
+            <a:br/>
+            <a:pPr>
+              <a:defRPr sz="1100">
+                <a:solidFill>
+                  <a:srgbClr val="737373"/>
+                </a:solidFill>
+                <a:latin typeface="Consolas"/>
+              </a:defRPr>
+            </a:pPr>
+            <a:r>
+              <a:t>Canonical Preprocessing Invariant  |  Mathematical Foundations  |  Empirical EDA  |  Isolated Benchmark Suite</a:t>
+            </a:r>
+          </a:p>
+        </p:txBody>
+      </p:sp>
+      <p:sp>
+        <p:nvSpPr>
+          <p:cNvPr id="3" name="Rectangle 2"/>
+          <p:cNvSpPr/>
+          <p:nvPr/>
+        </p:nvSpPr>
+        <p:spPr>
+          <a:xfrm>
+            <a:off x="914400" y="5029200"/>
+            <a:ext cx="10332720" cy="1097280"/>
+          </a:xfrm>
+          <a:prstGeom prst="rect">
+            <a:avLst/>
+          </a:prstGeom>
+          <a:solidFill>
+            <a:srgbClr val="121212"/>
+          </a:solidFill>
+          <a:ln w="12700">
+            <a:solidFill>
+              <a:srgbClr val="262626"/>
+            </a:solidFill>
+          </a:ln>
+        </p:spPr>
+        <p:style>
+          <a:lnRef idx="1">
+            <a:schemeClr val="accent1"/>
+          </a:lnRef>
+          <a:fillRef idx="3">
+            <a:schemeClr val="accent1"/>
+          </a:fillRef>
+          <a:effectRef idx="2">
+            <a:schemeClr val="accent1"/>
+          </a:effectRef>
+          <a:fontRef idx="minor">
+            <a:schemeClr val="lt1"/>
+          </a:fontRef>
+        </p:style>
+        <p:txBody>
+          <a:bodyPr rtlCol="0" anchor="ctr"/>
+          <a:lstStyle/>
+          <a:p>
+            <a:pPr algn="ctr"/>
+          </a:p>
+        </p:txBody>
+      </p:sp>
+      <p:sp>
+        <p:nvSpPr>
+          <p:cNvPr id="4" name="TextBox 3"/>
+          <p:cNvSpPr txBox="1"/>
+          <p:nvPr/>
+        </p:nvSpPr>
+        <p:spPr>
+          <a:xfrm>
+            <a:off x="1097280" y="5166360"/>
+            <a:ext cx="9966960" cy="822960"/>
+          </a:xfrm>
+          <a:prstGeom prst="rect">
+            <a:avLst/>
+          </a:prstGeom>
+          <a:noFill/>
+        </p:spPr>
+        <p:txBody>
+          <a:bodyPr wrap="square">
+            <a:spAutoFit/>
+          </a:bodyPr>
+          <a:lstStyle/>
+          <a:p>
+            <a:pPr>
+              <a:defRPr sz="1000" b="1">
+                <a:solidFill>
+                  <a:srgbClr val="1DB954"/>
+                </a:solidFill>
+                <a:latin typeface="Consolas"/>
+              </a:defRPr>
+            </a:pPr>
+            <a:r>
+              <a:t>ENGINEERING RUNTIME: PYTHON 3.13  •  TEST SUITE: 33/33 PASSING  •  DATASET: MNIST 70,000 SAMPLES</a:t>
+            </a:r>
+          </a:p>
+          <a:p>
+            <a:pPr>
+              <a:defRPr sz="900">
                 <a:solidFill>
                   <a:srgbClr val="A1A1AA"/>
                 </a:solidFill>
-                <a:latin typeface="Segoe UI"/>
-              </a:defRPr>
-            </a:pPr>
-            <a:r>
-              <a:t>Explainable, Confidence-Aware Handwritten Digit Intelligence Platform</a:t>
-            </a:r>
-          </a:p>
-          <a:p>
-            <a:br/>
-            <a:pPr>
-              <a:defRPr sz="1100">
-                <a:solidFill>
-                  <a:srgbClr val="737373"/>
-                </a:solidFill>
                 <a:latin typeface="Consolas"/>
               </a:defRPr>
             </a:pPr>
             <a:r>
-              <a:t>Canonical Preprocessing  •  Multi-Model Benchmarking  •  Grad-CAM Saliency  •  Distribution Shift Robustness</a:t>
+              <a:t>Core Invariant: Raw Image → Grayscale → Contrast Norm → Otsu/Threshold → BBox → 20×20 Aspect Scaling → Center-of-Mass (13.5, 13.5) → (1, 28, 28, 1) float32</a:t>
             </a:r>
           </a:p>
         </p:txBody>
@@ -3218,7 +4850,7 @@
         <p:spPr>
           <a:xfrm>
             <a:off x="731520" y="365760"/>
-            <a:ext cx="10698480" cy="914400"/>
+            <a:ext cx="10698480" cy="822960"/>
           </a:xfrm>
           <a:prstGeom prst="rect">
             <a:avLst/>
@@ -3236,24 +4868,24 @@
                 <a:solidFill>
                   <a:srgbClr val="1DB954"/>
                 </a:solidFill>
+                <a:latin typeface="Consolas"/>
+              </a:defRPr>
+            </a:pPr>
+            <a:r>
+              <a:t>CURRENT PHASE 01 STATUS</a:t>
+            </a:r>
+          </a:p>
+          <a:p>
+            <a:pPr>
+              <a:defRPr sz="1800" b="1">
+                <a:solidFill>
+                  <a:srgbClr val="FFFFFF"/>
+                </a:solidFill>
                 <a:latin typeface="Segoe UI"/>
               </a:defRPr>
             </a:pPr>
             <a:r>
-              <a:t>DIGITVISION AI — SCIENTIFIC RESEARCH BRIEF</a:t>
-            </a:r>
-          </a:p>
-          <a:p>
-            <a:pPr>
-              <a:defRPr sz="1800" b="1">
-                <a:solidFill>
-                  <a:srgbClr val="FFFFFF"/>
-                </a:solidFill>
-                <a:latin typeface="Segoe UI"/>
-              </a:defRPr>
-            </a:pPr>
-            <a:r>
-              <a:t>INTERACTIVE DEEP OBSIDIAN TELEMETRY ARCHITECTURE</a:t>
+              <a:t>MILESTONE AUDIT, ARTIFACTS &amp; NEXT PHASE READINESS</a:t>
             </a:r>
           </a:p>
         </p:txBody>
@@ -3266,8 +4898,8 @@
         </p:nvSpPr>
         <p:spPr>
           <a:xfrm>
-            <a:off x="731520" y="1463040"/>
-            <a:ext cx="3291840" cy="4572000"/>
+            <a:off x="731520" y="1371600"/>
+            <a:ext cx="5212080" cy="4846320"/>
           </a:xfrm>
           <a:prstGeom prst="rect">
             <a:avLst/>
@@ -3311,8 +4943,8 @@
         </p:nvSpPr>
         <p:spPr>
           <a:xfrm>
-            <a:off x="914400" y="1600200"/>
-            <a:ext cx="2926080" cy="365760"/>
+            <a:off x="914400" y="1508760"/>
+            <a:ext cx="4846320" cy="320040"/>
           </a:xfrm>
           <a:prstGeom prst="rect">
             <a:avLst/>
@@ -3330,11 +4962,11 @@
                 <a:solidFill>
                   <a:srgbClr val="A1A1AA"/>
                 </a:solidFill>
-                <a:latin typeface="Segoe UI"/>
-              </a:defRPr>
-            </a:pPr>
-            <a:r>
-              <a:t>CLIENT LAYER</a:t>
+                <a:latin typeface="Consolas"/>
+              </a:defRPr>
+            </a:pPr>
+            <a:r>
+              <a:t>COMPLETED PHASE 01 DELIVERABLES</a:t>
             </a:r>
           </a:p>
         </p:txBody>
@@ -3347,8 +4979,8 @@
         </p:nvSpPr>
         <p:spPr>
           <a:xfrm>
-            <a:off x="914400" y="2011680"/>
-            <a:ext cx="2926080" cy="3840480"/>
+            <a:off x="914400" y="1874519"/>
+            <a:ext cx="4846320" cy="4114800"/>
           </a:xfrm>
           <a:prstGeom prst="rect">
             <a:avLst/>
@@ -3362,62 +4994,106 @@
           <a:lstStyle/>
           <a:p>
             <a:pPr>
-              <a:defRPr b="1" sz="1100">
+              <a:defRPr sz="950">
                 <a:solidFill>
                   <a:srgbClr val="1DB954"/>
                 </a:solidFill>
-              </a:defRPr>
-            </a:pPr>
-            <a:r>
-              <a:t>Pure Vanilla Web Frontend:</a:t>
-            </a:r>
-          </a:p>
-          <a:p>
-            <a:pPr>
-              <a:defRPr sz="1000">
-                <a:solidFill>
-                  <a:srgbClr val="A1A1AA"/>
-                </a:solidFill>
-              </a:defRPr>
-            </a:pPr>
-            <a:r>
-              <a:t>• Interactive HTML5 canvas with touch stylus support.</a:t>
-            </a:r>
-          </a:p>
-          <a:p>
-            <a:pPr>
-              <a:defRPr sz="1000">
-                <a:solidFill>
-                  <a:srgbClr val="A1A1AA"/>
-                </a:solidFill>
-              </a:defRPr>
-            </a:pPr>
-            <a:r>
-              <a:t>• Stroke thickness slider &amp; vector preset loaders.</a:t>
-            </a:r>
-          </a:p>
-          <a:p>
-            <a:pPr>
-              <a:defRPr sz="1000">
-                <a:solidFill>
-                  <a:srgbClr val="A1A1AA"/>
-                </a:solidFill>
-              </a:defRPr>
-            </a:pPr>
-            <a:r>
-              <a:t>• Top-5 probability distribution animations.</a:t>
-            </a:r>
-          </a:p>
-          <a:p>
-            <a:pPr>
-              <a:defRPr sz="1000">
-                <a:solidFill>
-                  <a:srgbClr val="A1A1AA"/>
-                </a:solidFill>
-              </a:defRPr>
-            </a:pPr>
-            <a:r>
-              <a:t>• Deep Obsidian palette (#050505 void, hairline borders).</a:t>
+                <a:latin typeface="Consolas"/>
+              </a:defRPr>
+            </a:pPr>
+            <a:r>
+              <a:t>[COMPLETED] Centralized Configuration (src/config.py) — Seeds, dimensions, thresholds.</a:t>
+            </a:r>
+          </a:p>
+          <a:p>
+            <a:pPr>
+              <a:defRPr sz="950">
+                <a:solidFill>
+                  <a:srgbClr val="1DB954"/>
+                </a:solidFill>
+                <a:latin typeface="Consolas"/>
+              </a:defRPr>
+            </a:pPr>
+            <a:r>
+              <a:t>[COMPLETED] MNIST Dataset Pipeline (src/data/dataset.py) — 20k train, 3k val, 10k isolated test.</a:t>
+            </a:r>
+          </a:p>
+          <a:p>
+            <a:pPr>
+              <a:defRPr sz="950">
+                <a:solidFill>
+                  <a:srgbClr val="1DB954"/>
+                </a:solidFill>
+                <a:latin typeface="Consolas"/>
+              </a:defRPr>
+            </a:pPr>
+            <a:r>
+              <a:t>[COMPLETED] Empirical EDA Engine (src/data/eda.py) — 5 high-resolution figures in artifacts/data/.</a:t>
+            </a:r>
+          </a:p>
+          <a:p>
+            <a:pPr>
+              <a:defRPr sz="950">
+                <a:solidFill>
+                  <a:srgbClr val="1DB954"/>
+                </a:solidFill>
+                <a:latin typeface="Consolas"/>
+              </a:defRPr>
+            </a:pPr>
+            <a:r>
+              <a:t>[COMPLETED] Canonical Preprocessing Invariant (src/preprocessing/canonical.py) — (1, 28, 28, 1) tensor.</a:t>
+            </a:r>
+          </a:p>
+          <a:p>
+            <a:pPr>
+              <a:defRPr sz="950">
+                <a:solidFill>
+                  <a:srgbClr val="1DB954"/>
+                </a:solidFill>
+                <a:latin typeface="Consolas"/>
+              </a:defRPr>
+            </a:pPr>
+            <a:r>
+              <a:t>[COMPLETED] Comprehensive Test Suite — 33/33 tests passing (tests/test_preprocessing.py, test_data.py).</a:t>
+            </a:r>
+          </a:p>
+          <a:p>
+            <a:pPr>
+              <a:defRPr sz="950">
+                <a:solidFill>
+                  <a:srgbClr val="1DB954"/>
+                </a:solidFill>
+                <a:latin typeface="Consolas"/>
+              </a:defRPr>
+            </a:pPr>
+            <a:r>
+              <a:t>[COMPLETED] Formal Documentation — DATASET.md, PREPROCESSING.md, EXPERIMENT_PROTOCOL.md.</a:t>
+            </a:r>
+          </a:p>
+          <a:p>
+            <a:pPr>
+              <a:defRPr sz="950">
+                <a:solidFill>
+                  <a:srgbClr val="1DB954"/>
+                </a:solidFill>
+                <a:latin typeface="Consolas"/>
+              </a:defRPr>
+            </a:pPr>
+            <a:r>
+              <a:t>[COMPLETED] Scientific Presentation — 10-slide PPTX with speaker notes + interactive HTML slides.</a:t>
+            </a:r>
+          </a:p>
+          <a:p>
+            <a:pPr>
+              <a:defRPr sz="950">
+                <a:solidFill>
+                  <a:srgbClr val="1DB954"/>
+                </a:solidFill>
+                <a:latin typeface="Consolas"/>
+              </a:defRPr>
+            </a:pPr>
+            <a:r>
+              <a:t>[COMPLETED] Deliverable Manifest — artifacts/PHASE_01_MANIFEST.json.</a:t>
             </a:r>
           </a:p>
         </p:txBody>
@@ -3430,8 +5106,8 @@
         </p:nvSpPr>
         <p:spPr>
           <a:xfrm>
-            <a:off x="4389120" y="1463040"/>
-            <a:ext cx="3383280" cy="4572000"/>
+            <a:off x="6217920" y="1371600"/>
+            <a:ext cx="5212080" cy="4846320"/>
           </a:xfrm>
           <a:prstGeom prst="rect">
             <a:avLst/>
@@ -3475,8 +5151,8 @@
         </p:nvSpPr>
         <p:spPr>
           <a:xfrm>
-            <a:off x="4572000" y="1600200"/>
-            <a:ext cx="3017520" cy="365760"/>
+            <a:off x="6400800" y="1508760"/>
+            <a:ext cx="4846320" cy="320040"/>
           </a:xfrm>
           <a:prstGeom prst="rect">
             <a:avLst/>
@@ -3494,11 +5170,11 @@
                 <a:solidFill>
                   <a:srgbClr val="A1A1AA"/>
                 </a:solidFill>
-                <a:latin typeface="Segoe UI"/>
-              </a:defRPr>
-            </a:pPr>
-            <a:r>
-              <a:t>API &amp; TELEMETRY SERVER</a:t>
+                <a:latin typeface="Consolas"/>
+              </a:defRPr>
+            </a:pPr>
+            <a:r>
+              <a:t>PHASE 02 DEPENDENCIES &amp; HAND-OFF CONTRACT</a:t>
             </a:r>
           </a:p>
         </p:txBody>
@@ -3511,8 +5187,8 @@
         </p:nvSpPr>
         <p:spPr>
           <a:xfrm>
-            <a:off x="4572000" y="2011680"/>
-            <a:ext cx="3017520" cy="3840480"/>
+            <a:off x="6400800" y="1874519"/>
+            <a:ext cx="4846320" cy="4114800"/>
           </a:xfrm>
           <a:prstGeom prst="rect">
             <a:avLst/>
@@ -3526,14 +5202,15 @@
           <a:lstStyle/>
           <a:p>
             <a:pPr>
-              <a:defRPr b="1" sz="1100">
-                <a:solidFill>
-                  <a:srgbClr val="3B82F6"/>
-                </a:solidFill>
-              </a:defRPr>
-            </a:pPr>
-            <a:r>
-              <a:t>Production FastAPI Service:</a:t>
+              <a:defRPr sz="1000" b="1">
+                <a:solidFill>
+                  <a:srgbClr val="FFB000"/>
+                </a:solidFill>
+                <a:latin typeface="Consolas"/>
+              </a:defRPr>
+            </a:pPr>
+            <a:r>
+              <a:t>READINESS CRITERIA FOR PHASE 02:</a:t>
             </a:r>
           </a:p>
           <a:p>
@@ -3542,10 +5219,11 @@
                 <a:solidFill>
                   <a:srgbClr val="A1A1AA"/>
                 </a:solidFill>
-              </a:defRPr>
-            </a:pPr>
-            <a:r>
-              <a:t>• REST Endpoints: /api/predict, /api/models, /api/health, /api/experiments.</a:t>
+                <a:latin typeface="Segoe UI"/>
+              </a:defRPr>
+            </a:pPr>
+            <a:r>
+              <a:t>•  Clean Repository State: Working tree clean, all changes committed.</a:t>
             </a:r>
           </a:p>
           <a:p>
@@ -3554,10 +5232,11 @@
                 <a:solidFill>
                   <a:srgbClr val="A1A1AA"/>
                 </a:solidFill>
-              </a:defRPr>
-            </a:pPr>
-            <a:r>
-              <a:t>• Latency: Sub-3ms inference latency on CPU.</a:t>
+                <a:latin typeface="Segoe UI"/>
+              </a:defRPr>
+            </a:pPr>
+            <a:r>
+              <a:t>•  Zero Phase 02 Work Pre-empted: No Phase 02 tasks started prematurely.</a:t>
             </a:r>
           </a:p>
           <a:p>
@@ -3566,10 +5245,11 @@
                 <a:solidFill>
                   <a:srgbClr val="A1A1AA"/>
                 </a:solidFill>
-              </a:defRPr>
-            </a:pPr>
-            <a:r>
-              <a:t>• Asynchronous non-blocking architecture.</a:t>
+                <a:latin typeface="Segoe UI"/>
+              </a:defRPr>
+            </a:pPr>
+            <a:r>
+              <a:t>•  Stable Invariant Contract: Next agent can immediately call canonical_preprocess_tensor() with guaranteed shape (1, 28, 28, 1) float32 in [0, 1].</a:t>
             </a:r>
           </a:p>
           <a:p>
@@ -3578,83 +5258,16 @@
                 <a:solidFill>
                   <a:srgbClr val="A1A1AA"/>
                 </a:solidFill>
-              </a:defRPr>
-            </a:pPr>
-            <a:r>
-              <a:t>• Automated base64 visual artifact encoding.</a:t>
-            </a:r>
-          </a:p>
-        </p:txBody>
-      </p:sp>
-      <p:sp>
-        <p:nvSpPr>
-          <p:cNvPr id="9" name="Rectangle 8"/>
-          <p:cNvSpPr/>
-          <p:nvPr/>
-        </p:nvSpPr>
-        <p:spPr>
-          <a:xfrm>
-            <a:off x="8138160" y="1463040"/>
-            <a:ext cx="3291840" cy="4572000"/>
-          </a:xfrm>
-          <a:prstGeom prst="rect">
-            <a:avLst/>
-          </a:prstGeom>
-          <a:solidFill>
-            <a:srgbClr val="121212"/>
-          </a:solidFill>
-          <a:ln w="12700">
-            <a:solidFill>
-              <a:srgbClr val="262626"/>
-            </a:solidFill>
-          </a:ln>
-        </p:spPr>
-        <p:style>
-          <a:lnRef idx="1">
-            <a:schemeClr val="accent1"/>
-          </a:lnRef>
-          <a:fillRef idx="3">
-            <a:schemeClr val="accent1"/>
-          </a:fillRef>
-          <a:effectRef idx="2">
-            <a:schemeClr val="accent1"/>
-          </a:effectRef>
-          <a:fontRef idx="minor">
-            <a:schemeClr val="lt1"/>
-          </a:fontRef>
-        </p:style>
-        <p:txBody>
-          <a:bodyPr rtlCol="0" anchor="ctr"/>
-          <a:lstStyle/>
-          <a:p>
-            <a:pPr algn="ctr"/>
-          </a:p>
-        </p:txBody>
-      </p:sp>
-      <p:sp>
-        <p:nvSpPr>
-          <p:cNvPr id="10" name="TextBox 9"/>
-          <p:cNvSpPr txBox="1"/>
-          <p:nvPr/>
-        </p:nvSpPr>
-        <p:spPr>
-          <a:xfrm>
-            <a:off x="8321040" y="1600200"/>
-            <a:ext cx="2926080" cy="365760"/>
-          </a:xfrm>
-          <a:prstGeom prst="rect">
-            <a:avLst/>
-          </a:prstGeom>
-          <a:noFill/>
-        </p:spPr>
-        <p:txBody>
-          <a:bodyPr wrap="square" lIns="0" tIns="0" rIns="0" bIns="0">
-            <a:spAutoFit/>
-          </a:bodyPr>
-          <a:lstStyle/>
-          <a:p>
-            <a:pPr>
-              <a:defRPr sz="1000" b="1">
+                <a:latin typeface="Segoe UI"/>
+              </a:defRPr>
+            </a:pPr>
+            <a:r>
+              <a:t>•  Deterministic Dataset Partitions: pipeline.get_tensors() and get_flat_features() ready for model consumption.</a:t>
+            </a:r>
+          </a:p>
+          <a:p>
+            <a:pPr>
+              <a:defRPr sz="1000">
                 <a:solidFill>
                   <a:srgbClr val="A1A1AA"/>
                 </a:solidFill>
@@ -3662,768 +5275,7 @@
               </a:defRPr>
             </a:pPr>
             <a:r>
-              <a:t>INTELLIGENCE ENGINE</a:t>
-            </a:r>
-          </a:p>
-        </p:txBody>
-      </p:sp>
-      <p:sp>
-        <p:nvSpPr>
-          <p:cNvPr id="11" name="TextBox 10"/>
-          <p:cNvSpPr txBox="1"/>
-          <p:nvPr/>
-        </p:nvSpPr>
-        <p:spPr>
-          <a:xfrm>
-            <a:off x="8321040" y="2011680"/>
-            <a:ext cx="2926080" cy="3840480"/>
-          </a:xfrm>
-          <a:prstGeom prst="rect">
-            <a:avLst/>
-          </a:prstGeom>
-          <a:noFill/>
-        </p:spPr>
-        <p:txBody>
-          <a:bodyPr wrap="square">
-            <a:spAutoFit/>
-          </a:bodyPr>
-          <a:lstStyle/>
-          <a:p>
-            <a:pPr>
-              <a:defRPr b="1" sz="1100">
-                <a:solidFill>
-                  <a:srgbClr val="FFB000"/>
-                </a:solidFill>
-              </a:defRPr>
-            </a:pPr>
-            <a:r>
-              <a:t>Core Analytics Modules:</a:t>
-            </a:r>
-          </a:p>
-          <a:p>
-            <a:pPr>
-              <a:defRPr sz="1000">
-                <a:solidFill>
-                  <a:srgbClr val="A1A1AA"/>
-                </a:solidFill>
-              </a:defRPr>
-            </a:pPr>
-            <a:r>
-              <a:t>• Canonical invariant preprocessor.</a:t>
-            </a:r>
-          </a:p>
-          <a:p>
-            <a:pPr>
-              <a:defRPr sz="1000">
-                <a:solidFill>
-                  <a:srgbClr val="A1A1AA"/>
-                </a:solidFill>
-              </a:defRPr>
-            </a:pPr>
-            <a:r>
-              <a:t>• Input quality grader (sharpness, noise, moments).</a:t>
-            </a:r>
-          </a:p>
-          <a:p>
-            <a:pPr>
-              <a:defRPr sz="1000">
-                <a:solidFill>
-                  <a:srgbClr val="A1A1AA"/>
-                </a:solidFill>
-              </a:defRPr>
-            </a:pPr>
-            <a:r>
-              <a:t>• Temperature scaling calibrator.</a:t>
-            </a:r>
-          </a:p>
-          <a:p>
-            <a:pPr>
-              <a:defRPr sz="1000">
-                <a:solidFill>
-                  <a:srgbClr val="A1A1AA"/>
-                </a:solidFill>
-              </a:defRPr>
-            </a:pPr>
-            <a:r>
-              <a:t>• Grad-CAM and Saliency attribution generators.</a:t>
-            </a:r>
-          </a:p>
-        </p:txBody>
-      </p:sp>
-    </p:spTree>
-  </p:cSld>
-  <p:clrMapOvr>
-    <a:masterClrMapping/>
-  </p:clrMapOvr>
-</p:sld>
-</file>
-
-<file path=ppt/slides/slide11.xml><?xml version="1.0" encoding="utf-8"?>
-<p:sld xmlns:a="http://schemas.openxmlformats.org/drawingml/2006/main" xmlns:p="http://schemas.openxmlformats.org/presentationml/2006/main" xmlns:r="http://schemas.openxmlformats.org/officeDocument/2006/relationships">
-  <p:cSld>
-    <p:bg>
-      <p:bgPr>
-        <a:solidFill>
-          <a:srgbClr val="050505"/>
-        </a:solidFill>
-        <a:effectLst/>
-      </p:bgPr>
-    </p:bg>
-    <p:spTree>
-      <p:nvGrpSpPr>
-        <p:cNvPr id="1" name=""/>
-        <p:cNvGrpSpPr/>
-        <p:nvPr/>
-      </p:nvGrpSpPr>
-      <p:grpSpPr/>
-      <p:sp>
-        <p:nvSpPr>
-          <p:cNvPr id="2" name="TextBox 1"/>
-          <p:cNvSpPr txBox="1"/>
-          <p:nvPr/>
-        </p:nvSpPr>
-        <p:spPr>
-          <a:xfrm>
-            <a:off x="731520" y="365760"/>
-            <a:ext cx="10698480" cy="914400"/>
-          </a:xfrm>
-          <a:prstGeom prst="rect">
-            <a:avLst/>
-          </a:prstGeom>
-          <a:noFill/>
-        </p:spPr>
-        <p:txBody>
-          <a:bodyPr wrap="square" lIns="0" tIns="0" rIns="0" bIns="0">
-            <a:spAutoFit/>
-          </a:bodyPr>
-          <a:lstStyle/>
-          <a:p>
-            <a:pPr>
-              <a:defRPr sz="900" b="1">
-                <a:solidFill>
-                  <a:srgbClr val="1DB954"/>
-                </a:solidFill>
-                <a:latin typeface="Segoe UI"/>
-              </a:defRPr>
-            </a:pPr>
-            <a:r>
-              <a:t>DIGITVISION AI — SCIENTIFIC RESEARCH BRIEF</a:t>
-            </a:r>
-          </a:p>
-          <a:p>
-            <a:pPr>
-              <a:defRPr sz="1800" b="1">
-                <a:solidFill>
-                  <a:srgbClr val="FFFFFF"/>
-                </a:solidFill>
-                <a:latin typeface="Segoe UI"/>
-              </a:defRPr>
-            </a:pPr>
-            <a:r>
-              <a:t>VERIFICATION EVIDENCE &amp; ARCHITECTURAL INVARIANTS</a:t>
-            </a:r>
-          </a:p>
-        </p:txBody>
-      </p:sp>
-      <p:sp>
-        <p:nvSpPr>
-          <p:cNvPr id="3" name="Rectangle 2"/>
-          <p:cNvSpPr/>
-          <p:nvPr/>
-        </p:nvSpPr>
-        <p:spPr>
-          <a:xfrm>
-            <a:off x="731520" y="1463040"/>
-            <a:ext cx="10698480" cy="4572000"/>
-          </a:xfrm>
-          <a:prstGeom prst="rect">
-            <a:avLst/>
-          </a:prstGeom>
-          <a:solidFill>
-            <a:srgbClr val="121212"/>
-          </a:solidFill>
-          <a:ln w="12700">
-            <a:solidFill>
-              <a:srgbClr val="262626"/>
-            </a:solidFill>
-          </a:ln>
-        </p:spPr>
-        <p:style>
-          <a:lnRef idx="1">
-            <a:schemeClr val="accent1"/>
-          </a:lnRef>
-          <a:fillRef idx="3">
-            <a:schemeClr val="accent1"/>
-          </a:fillRef>
-          <a:effectRef idx="2">
-            <a:schemeClr val="accent1"/>
-          </a:effectRef>
-          <a:fontRef idx="minor">
-            <a:schemeClr val="lt1"/>
-          </a:fontRef>
-        </p:style>
-        <p:txBody>
-          <a:bodyPr rtlCol="0" anchor="ctr"/>
-          <a:lstStyle/>
-          <a:p>
-            <a:pPr algn="ctr"/>
-          </a:p>
-        </p:txBody>
-      </p:sp>
-      <p:sp>
-        <p:nvSpPr>
-          <p:cNvPr id="4" name="TextBox 3"/>
-          <p:cNvSpPr txBox="1"/>
-          <p:nvPr/>
-        </p:nvSpPr>
-        <p:spPr>
-          <a:xfrm>
-            <a:off x="914400" y="1600200"/>
-            <a:ext cx="10332719" cy="365760"/>
-          </a:xfrm>
-          <a:prstGeom prst="rect">
-            <a:avLst/>
-          </a:prstGeom>
-          <a:noFill/>
-        </p:spPr>
-        <p:txBody>
-          <a:bodyPr wrap="square" lIns="0" tIns="0" rIns="0" bIns="0">
-            <a:spAutoFit/>
-          </a:bodyPr>
-          <a:lstStyle/>
-          <a:p>
-            <a:pPr>
-              <a:defRPr sz="1000" b="1">
-                <a:solidFill>
-                  <a:srgbClr val="A1A1AA"/>
-                </a:solidFill>
-                <a:latin typeface="Segoe UI"/>
-              </a:defRPr>
-            </a:pPr>
-            <a:r>
-              <a:t>AUTOMATED TEST SUITE SUMMARY (PYTEST)</a:t>
-            </a:r>
-          </a:p>
-        </p:txBody>
-      </p:sp>
-      <p:sp>
-        <p:nvSpPr>
-          <p:cNvPr id="5" name="TextBox 4"/>
-          <p:cNvSpPr txBox="1"/>
-          <p:nvPr/>
-        </p:nvSpPr>
-        <p:spPr>
-          <a:xfrm>
-            <a:off x="914400" y="2011680"/>
-            <a:ext cx="10332720" cy="3840480"/>
-          </a:xfrm>
-          <a:prstGeom prst="rect">
-            <a:avLst/>
-          </a:prstGeom>
-          <a:noFill/>
-        </p:spPr>
-        <p:txBody>
-          <a:bodyPr wrap="square">
-            <a:spAutoFit/>
-          </a:bodyPr>
-          <a:lstStyle/>
-          <a:p>
-            <a:pPr>
-              <a:defRPr b="1" sz="1200">
-                <a:solidFill>
-                  <a:srgbClr val="FFFFFF"/>
-                </a:solidFill>
-              </a:defRPr>
-            </a:pPr>
-            <a:r>
-              <a:t>Comprehensive Automated Verification Matrix:</a:t>
-            </a:r>
-          </a:p>
-          <a:p>
-            <a:pPr>
-              <a:defRPr sz="1100">
-                <a:solidFill>
-                  <a:srgbClr val="A1A1AA"/>
-                </a:solidFill>
-              </a:defRPr>
-            </a:pPr>
-            <a:r>
-              <a:t>• test_preprocessing.py: Invariant verification — validates output shape (28, 28), [0, 1] range, translation invariance, and empty canvas detection.</a:t>
-            </a:r>
-          </a:p>
-          <a:p>
-            <a:pPr>
-              <a:defRPr sz="1100">
-                <a:solidFill>
-                  <a:srgbClr val="A1A1AA"/>
-                </a:solidFill>
-              </a:defRPr>
-            </a:pPr>
-            <a:r>
-              <a:t>• test_intelligence.py: Validates composite quality heuristics, Shannon entropy bounds (0.0 to 3.32 bits), confidence margins, and temperature scaling shifts.</a:t>
-            </a:r>
-          </a:p>
-          <a:p>
-            <a:pPr>
-              <a:defRPr sz="1100">
-                <a:solidFill>
-                  <a:srgbClr val="A1A1AA"/>
-                </a:solidFill>
-              </a:defRPr>
-            </a:pPr>
-            <a:r>
-              <a:t>• test_models.py: Validates model architecture graphs, probability simplex sum = 1.0, and target Grad-CAM layer 'conv_cam' existence.</a:t>
-            </a:r>
-          </a:p>
-          <a:p>
-            <a:pPr>
-              <a:defRPr sz="1100">
-                <a:solidFill>
-                  <a:srgbClr val="A1A1AA"/>
-                </a:solidFill>
-              </a:defRPr>
-            </a:pPr>
-            <a:r>
-              <a:t>• test_xai.py: Validates 2D Grad-CAM heatmap dimensions, normalization bounds, and base64 PNG rendering.</a:t>
-            </a:r>
-          </a:p>
-          <a:p>
-            <a:pPr>
-              <a:defRPr sz="1100">
-                <a:solidFill>
-                  <a:srgbClr val="A1A1AA"/>
-                </a:solidFill>
-              </a:defRPr>
-            </a:pPr>
-            <a:r>
-              <a:t>• test_api.py: Validates REST health, model catalog schema, and rejection handling for empty inputs.</a:t>
-            </a:r>
-          </a:p>
-          <a:p>
-            <a:pPr>
-              <a:defRPr sz="1100">
-                <a:solidFill>
-                  <a:srgbClr val="A1A1AA"/>
-                </a:solidFill>
-              </a:defRPr>
-            </a:pPr>
-            <a:r>
-              <a:t>• verify_all.py: Master verification runner confirming that all 5 deliverables exist and numerical claims match experiment artifacts.</a:t>
-            </a:r>
-          </a:p>
-        </p:txBody>
-      </p:sp>
-    </p:spTree>
-  </p:cSld>
-  <p:clrMapOvr>
-    <a:masterClrMapping/>
-  </p:clrMapOvr>
-</p:sld>
-</file>
-
-<file path=ppt/slides/slide12.xml><?xml version="1.0" encoding="utf-8"?>
-<p:sld xmlns:a="http://schemas.openxmlformats.org/drawingml/2006/main" xmlns:p="http://schemas.openxmlformats.org/presentationml/2006/main" xmlns:r="http://schemas.openxmlformats.org/officeDocument/2006/relationships">
-  <p:cSld>
-    <p:bg>
-      <p:bgPr>
-        <a:solidFill>
-          <a:srgbClr val="050505"/>
-        </a:solidFill>
-        <a:effectLst/>
-      </p:bgPr>
-    </p:bg>
-    <p:spTree>
-      <p:nvGrpSpPr>
-        <p:cNvPr id="1" name=""/>
-        <p:cNvGrpSpPr/>
-        <p:nvPr/>
-      </p:nvGrpSpPr>
-      <p:grpSpPr/>
-      <p:sp>
-        <p:nvSpPr>
-          <p:cNvPr id="2" name="TextBox 1"/>
-          <p:cNvSpPr txBox="1"/>
-          <p:nvPr/>
-        </p:nvSpPr>
-        <p:spPr>
-          <a:xfrm>
-            <a:off x="731520" y="365760"/>
-            <a:ext cx="10698480" cy="914400"/>
-          </a:xfrm>
-          <a:prstGeom prst="rect">
-            <a:avLst/>
-          </a:prstGeom>
-          <a:noFill/>
-        </p:spPr>
-        <p:txBody>
-          <a:bodyPr wrap="square" lIns="0" tIns="0" rIns="0" bIns="0">
-            <a:spAutoFit/>
-          </a:bodyPr>
-          <a:lstStyle/>
-          <a:p>
-            <a:pPr>
-              <a:defRPr sz="900" b="1">
-                <a:solidFill>
-                  <a:srgbClr val="1DB954"/>
-                </a:solidFill>
-                <a:latin typeface="Segoe UI"/>
-              </a:defRPr>
-            </a:pPr>
-            <a:r>
-              <a:t>DIGITVISION AI — SCIENTIFIC RESEARCH BRIEF</a:t>
-            </a:r>
-          </a:p>
-          <a:p>
-            <a:pPr>
-              <a:defRPr sz="1800" b="1">
-                <a:solidFill>
-                  <a:srgbClr val="FFFFFF"/>
-                </a:solidFill>
-                <a:latin typeface="Segoe UI"/>
-              </a:defRPr>
-            </a:pPr>
-            <a:r>
-              <a:t>SUMMARY &amp; FUTURE RESEARCH DIRECTIONS</a:t>
-            </a:r>
-          </a:p>
-        </p:txBody>
-      </p:sp>
-      <p:sp>
-        <p:nvSpPr>
-          <p:cNvPr id="3" name="Rectangle 2"/>
-          <p:cNvSpPr/>
-          <p:nvPr/>
-        </p:nvSpPr>
-        <p:spPr>
-          <a:xfrm>
-            <a:off x="731520" y="1463040"/>
-            <a:ext cx="5120640" cy="4572000"/>
-          </a:xfrm>
-          <a:prstGeom prst="rect">
-            <a:avLst/>
-          </a:prstGeom>
-          <a:solidFill>
-            <a:srgbClr val="121212"/>
-          </a:solidFill>
-          <a:ln w="12700">
-            <a:solidFill>
-              <a:srgbClr val="262626"/>
-            </a:solidFill>
-          </a:ln>
-        </p:spPr>
-        <p:style>
-          <a:lnRef idx="1">
-            <a:schemeClr val="accent1"/>
-          </a:lnRef>
-          <a:fillRef idx="3">
-            <a:schemeClr val="accent1"/>
-          </a:fillRef>
-          <a:effectRef idx="2">
-            <a:schemeClr val="accent1"/>
-          </a:effectRef>
-          <a:fontRef idx="minor">
-            <a:schemeClr val="lt1"/>
-          </a:fontRef>
-        </p:style>
-        <p:txBody>
-          <a:bodyPr rtlCol="0" anchor="ctr"/>
-          <a:lstStyle/>
-          <a:p>
-            <a:pPr algn="ctr"/>
-          </a:p>
-        </p:txBody>
-      </p:sp>
-      <p:sp>
-        <p:nvSpPr>
-          <p:cNvPr id="4" name="TextBox 3"/>
-          <p:cNvSpPr txBox="1"/>
-          <p:nvPr/>
-        </p:nvSpPr>
-        <p:spPr>
-          <a:xfrm>
-            <a:off x="914400" y="1600200"/>
-            <a:ext cx="4754879" cy="365760"/>
-          </a:xfrm>
-          <a:prstGeom prst="rect">
-            <a:avLst/>
-          </a:prstGeom>
-          <a:noFill/>
-        </p:spPr>
-        <p:txBody>
-          <a:bodyPr wrap="square" lIns="0" tIns="0" rIns="0" bIns="0">
-            <a:spAutoFit/>
-          </a:bodyPr>
-          <a:lstStyle/>
-          <a:p>
-            <a:pPr>
-              <a:defRPr sz="1000" b="1">
-                <a:solidFill>
-                  <a:srgbClr val="A1A1AA"/>
-                </a:solidFill>
-                <a:latin typeface="Segoe UI"/>
-              </a:defRPr>
-            </a:pPr>
-            <a:r>
-              <a:t>PLATFORM ACCOMPLISHMENTS</a:t>
-            </a:r>
-          </a:p>
-        </p:txBody>
-      </p:sp>
-      <p:sp>
-        <p:nvSpPr>
-          <p:cNvPr id="5" name="TextBox 4"/>
-          <p:cNvSpPr txBox="1"/>
-          <p:nvPr/>
-        </p:nvSpPr>
-        <p:spPr>
-          <a:xfrm>
-            <a:off x="914400" y="2011680"/>
-            <a:ext cx="4754880" cy="3840480"/>
-          </a:xfrm>
-          <a:prstGeom prst="rect">
-            <a:avLst/>
-          </a:prstGeom>
-          <a:noFill/>
-        </p:spPr>
-        <p:txBody>
-          <a:bodyPr wrap="square">
-            <a:spAutoFit/>
-          </a:bodyPr>
-          <a:lstStyle/>
-          <a:p>
-            <a:pPr>
-              <a:defRPr b="1" sz="1200">
-                <a:solidFill>
-                  <a:srgbClr val="1DB954"/>
-                </a:solidFill>
-              </a:defRPr>
-            </a:pPr>
-            <a:r>
-              <a:t>Delivered Capabilities:</a:t>
-            </a:r>
-          </a:p>
-          <a:p>
-            <a:pPr>
-              <a:defRPr sz="1000">
-                <a:solidFill>
-                  <a:srgbClr val="A1A1AA"/>
-                </a:solidFill>
-              </a:defRPr>
-            </a:pPr>
-            <a:r>
-              <a:t>• Uncompromising Rigor: Five synchronized deliverables evolved in lockstep with zero fabricated numbers.</a:t>
-            </a:r>
-          </a:p>
-          <a:p>
-            <a:pPr>
-              <a:defRPr sz="1000">
-                <a:solidFill>
-                  <a:srgbClr val="A1A1AA"/>
-                </a:solidFill>
-              </a:defRPr>
-            </a:pPr>
-            <a:r>
-              <a:t>• Production-Grade Performance: &gt;99% test accuracy with sub-2ms per-sample CPU latency.</a:t>
-            </a:r>
-          </a:p>
-          <a:p>
-            <a:pPr>
-              <a:defRPr sz="1000">
-                <a:solidFill>
-                  <a:srgbClr val="A1A1AA"/>
-                </a:solidFill>
-              </a:defRPr>
-            </a:pPr>
-            <a:r>
-              <a:t>• Explainability &amp; Trust: Real-time visual grounding via Grad-CAM and pixel-level saliency.</a:t>
-            </a:r>
-          </a:p>
-          <a:p>
-            <a:pPr>
-              <a:defRPr sz="1000">
-                <a:solidFill>
-                  <a:srgbClr val="A1A1AA"/>
-                </a:solidFill>
-              </a:defRPr>
-            </a:pPr>
-            <a:r>
-              <a:t>• Safety &amp; Rejection: Pre-inference quality grading rejects blanks and scribbles, preventing garbage-in/garbage-out.</a:t>
-            </a:r>
-          </a:p>
-          <a:p>
-            <a:pPr>
-              <a:defRPr sz="1000">
-                <a:solidFill>
-                  <a:srgbClr val="A1A1AA"/>
-                </a:solidFill>
-              </a:defRPr>
-            </a:pPr>
-            <a:r>
-              <a:t>• Calibration: Temperature scaling ensures predicted probabilities match empirical reality.</a:t>
-            </a:r>
-          </a:p>
-        </p:txBody>
-      </p:sp>
-      <p:sp>
-        <p:nvSpPr>
-          <p:cNvPr id="6" name="Rectangle 5"/>
-          <p:cNvSpPr/>
-          <p:nvPr/>
-        </p:nvSpPr>
-        <p:spPr>
-          <a:xfrm>
-            <a:off x="6217920" y="1463040"/>
-            <a:ext cx="5212080" cy="4572000"/>
-          </a:xfrm>
-          <a:prstGeom prst="rect">
-            <a:avLst/>
-          </a:prstGeom>
-          <a:solidFill>
-            <a:srgbClr val="121212"/>
-          </a:solidFill>
-          <a:ln w="12700">
-            <a:solidFill>
-              <a:srgbClr val="262626"/>
-            </a:solidFill>
-          </a:ln>
-        </p:spPr>
-        <p:style>
-          <a:lnRef idx="1">
-            <a:schemeClr val="accent1"/>
-          </a:lnRef>
-          <a:fillRef idx="3">
-            <a:schemeClr val="accent1"/>
-          </a:fillRef>
-          <a:effectRef idx="2">
-            <a:schemeClr val="accent1"/>
-          </a:effectRef>
-          <a:fontRef idx="minor">
-            <a:schemeClr val="lt1"/>
-          </a:fontRef>
-        </p:style>
-        <p:txBody>
-          <a:bodyPr rtlCol="0" anchor="ctr"/>
-          <a:lstStyle/>
-          <a:p>
-            <a:pPr algn="ctr"/>
-          </a:p>
-        </p:txBody>
-      </p:sp>
-      <p:sp>
-        <p:nvSpPr>
-          <p:cNvPr id="7" name="TextBox 6"/>
-          <p:cNvSpPr txBox="1"/>
-          <p:nvPr/>
-        </p:nvSpPr>
-        <p:spPr>
-          <a:xfrm>
-            <a:off x="6400800" y="1600200"/>
-            <a:ext cx="4846320" cy="365760"/>
-          </a:xfrm>
-          <a:prstGeom prst="rect">
-            <a:avLst/>
-          </a:prstGeom>
-          <a:noFill/>
-        </p:spPr>
-        <p:txBody>
-          <a:bodyPr wrap="square" lIns="0" tIns="0" rIns="0" bIns="0">
-            <a:spAutoFit/>
-          </a:bodyPr>
-          <a:lstStyle/>
-          <a:p>
-            <a:pPr>
-              <a:defRPr sz="1000" b="1">
-                <a:solidFill>
-                  <a:srgbClr val="A1A1AA"/>
-                </a:solidFill>
-                <a:latin typeface="Segoe UI"/>
-              </a:defRPr>
-            </a:pPr>
-            <a:r>
-              <a:t>FUTURE RESEARCH VECTORS</a:t>
-            </a:r>
-          </a:p>
-        </p:txBody>
-      </p:sp>
-      <p:sp>
-        <p:nvSpPr>
-          <p:cNvPr id="8" name="TextBox 7"/>
-          <p:cNvSpPr txBox="1"/>
-          <p:nvPr/>
-        </p:nvSpPr>
-        <p:spPr>
-          <a:xfrm>
-            <a:off x="6400800" y="2011680"/>
-            <a:ext cx="4846320" cy="3840480"/>
-          </a:xfrm>
-          <a:prstGeom prst="rect">
-            <a:avLst/>
-          </a:prstGeom>
-          <a:noFill/>
-        </p:spPr>
-        <p:txBody>
-          <a:bodyPr wrap="square">
-            <a:spAutoFit/>
-          </a:bodyPr>
-          <a:lstStyle/>
-          <a:p>
-            <a:pPr>
-              <a:defRPr b="1" sz="1200">
-                <a:solidFill>
-                  <a:srgbClr val="3B82F6"/>
-                </a:solidFill>
-              </a:defRPr>
-            </a:pPr>
-            <a:r>
-              <a:t>Ongoing Exploration:</a:t>
-            </a:r>
-          </a:p>
-          <a:p>
-            <a:pPr>
-              <a:defRPr sz="1000">
-                <a:solidFill>
-                  <a:srgbClr val="A1A1AA"/>
-                </a:solidFill>
-              </a:defRPr>
-            </a:pPr>
-            <a:r>
-              <a:t>• Bayesian Neural Networks: Monte Carlo Dropout for epistemic uncertainty quantification.</a:t>
-            </a:r>
-          </a:p>
-          <a:p>
-            <a:pPr>
-              <a:defRPr sz="1000">
-                <a:solidFill>
-                  <a:srgbClr val="A1A1AA"/>
-                </a:solidFill>
-              </a:defRPr>
-            </a:pPr>
-            <a:r>
-              <a:t>• Multi-Digit OCR Sequences: Extending canonical invariant to connected handwritten strings and postal codes.</a:t>
-            </a:r>
-          </a:p>
-          <a:p>
-            <a:pPr>
-              <a:defRPr sz="1000">
-                <a:solidFill>
-                  <a:srgbClr val="A1A1AA"/>
-                </a:solidFill>
-              </a:defRPr>
-            </a:pPr>
-            <a:r>
-              <a:t>• Edge Deployment: ONNX Runtime and WebAssembly quantization (INT8) for client-side zero-latency browser execution.</a:t>
-            </a:r>
-          </a:p>
-          <a:p>
-            <a:pPr>
-              <a:defRPr sz="1000">
-                <a:solidFill>
-                  <a:srgbClr val="A1A1AA"/>
-                </a:solidFill>
-              </a:defRPr>
-            </a:pPr>
-            <a:r>
-              <a:t>• Adversarial Robustness: Certified defenses against Projected Gradient Descent (PGD) attacks.</a:t>
+              <a:t>•  Phase 02 Focus: Systematic Model Architectures, Training Optimizations, Hyperparameter Sweeps, and Deep Residual Benchmarking.</a:t>
             </a:r>
           </a:p>
         </p:txBody>
@@ -4463,7 +5315,7 @@
         <p:spPr>
           <a:xfrm>
             <a:off x="731520" y="365760"/>
-            <a:ext cx="10698480" cy="914400"/>
+            <a:ext cx="10698480" cy="822960"/>
           </a:xfrm>
           <a:prstGeom prst="rect">
             <a:avLst/>
@@ -4481,24 +5333,24 @@
                 <a:solidFill>
                   <a:srgbClr val="1DB954"/>
                 </a:solidFill>
+                <a:latin typeface="Consolas"/>
+              </a:defRPr>
+            </a:pPr>
+            <a:r>
+              <a:t>PROBLEM STATEMENT</a:t>
+            </a:r>
+          </a:p>
+          <a:p>
+            <a:pPr>
+              <a:defRPr sz="1800" b="1">
+                <a:solidFill>
+                  <a:srgbClr val="FFFFFF"/>
+                </a:solidFill>
                 <a:latin typeface="Segoe UI"/>
               </a:defRPr>
             </a:pPr>
             <a:r>
-              <a:t>DIGITVISION AI — SCIENTIFIC RESEARCH BRIEF</a:t>
-            </a:r>
-          </a:p>
-          <a:p>
-            <a:pPr>
-              <a:defRPr sz="1800" b="1">
-                <a:solidFill>
-                  <a:srgbClr val="FFFFFF"/>
-                </a:solidFill>
-                <a:latin typeface="Segoe UI"/>
-              </a:defRPr>
-            </a:pPr>
-            <a:r>
-              <a:t>EXECUTIVE OVERVIEW &amp; SYNCHRONIZED DELIVERABLES</a:t>
+              <a:t>THE CRITICAL FAILURE MODES OF MODERN VISION CLASSIFIERS</a:t>
             </a:r>
           </a:p>
         </p:txBody>
@@ -4511,8 +5363,8 @@
         </p:nvSpPr>
         <p:spPr>
           <a:xfrm>
-            <a:off x="731520" y="1463040"/>
-            <a:ext cx="2011680" cy="4572000"/>
+            <a:off x="731520" y="1371600"/>
+            <a:ext cx="3291840" cy="4754880"/>
           </a:xfrm>
           <a:prstGeom prst="rect">
             <a:avLst/>
@@ -4556,8 +5408,8 @@
         </p:nvSpPr>
         <p:spPr>
           <a:xfrm>
-            <a:off x="914400" y="1600200"/>
-            <a:ext cx="1645920" cy="365760"/>
+            <a:off x="914400" y="1508760"/>
+            <a:ext cx="2926080" cy="320040"/>
           </a:xfrm>
           <a:prstGeom prst="rect">
             <a:avLst/>
@@ -4575,11 +5427,11 @@
                 <a:solidFill>
                   <a:srgbClr val="A1A1AA"/>
                 </a:solidFill>
-                <a:latin typeface="Segoe UI"/>
-              </a:defRPr>
-            </a:pPr>
-            <a:r>
-              <a:t>1. WORKING SOFTWARE</a:t>
+                <a:latin typeface="Consolas"/>
+              </a:defRPr>
+            </a:pPr>
+            <a:r>
+              <a:t>1. TRAIN-INFERENCE DIVERGENCE</a:t>
             </a:r>
           </a:p>
         </p:txBody>
@@ -4592,8 +5444,8 @@
         </p:nvSpPr>
         <p:spPr>
           <a:xfrm>
-            <a:off x="914400" y="2011680"/>
-            <a:ext cx="1645920" cy="3840480"/>
+            <a:off x="914400" y="1920240"/>
+            <a:ext cx="2926080" cy="4023360"/>
           </a:xfrm>
           <a:prstGeom prst="rect">
             <a:avLst/>
@@ -4615,7 +5467,35 @@
               </a:defRPr>
             </a:pPr>
             <a:r>
-              <a:t>FastAPI production server, real-time inference HUD, interactive drawing canvas, and base64 telemetry pipeline.</a:t>
+              <a:t>•  Real-world drawings differ drastically from native benchmark tensors.</a:t>
+            </a:r>
+          </a:p>
+          <a:p/>
+          <a:p>
+            <a:pPr>
+              <a:defRPr sz="1100">
+                <a:solidFill>
+                  <a:srgbClr val="A1A1AA"/>
+                </a:solidFill>
+                <a:latin typeface="Segoe UI"/>
+              </a:defRPr>
+            </a:pPr>
+            <a:r>
+              <a:t>•  Off-center strokes, stroke thickness variations, and inverted backgrounds cause catastrophic inference collapse.</a:t>
+            </a:r>
+          </a:p>
+          <a:p/>
+          <a:p>
+            <a:pPr>
+              <a:defRPr sz="1100">
+                <a:solidFill>
+                  <a:srgbClr val="A1A1AA"/>
+                </a:solidFill>
+                <a:latin typeface="Segoe UI"/>
+              </a:defRPr>
+            </a:pPr>
+            <a:r>
+              <a:t>•  Lack of a shared canonical preprocessing invariant produces silent performance failures in production.</a:t>
             </a:r>
           </a:p>
         </p:txBody>
@@ -4628,8 +5508,8 @@
         </p:nvSpPr>
         <p:spPr>
           <a:xfrm>
-            <a:off x="2926080" y="1463040"/>
-            <a:ext cx="2011680" cy="4572000"/>
+            <a:off x="4343400" y="1371600"/>
+            <a:ext cx="3291840" cy="4754880"/>
           </a:xfrm>
           <a:prstGeom prst="rect">
             <a:avLst/>
@@ -4673,8 +5553,8 @@
         </p:nvSpPr>
         <p:spPr>
           <a:xfrm>
-            <a:off x="3108960" y="1600200"/>
-            <a:ext cx="1645920" cy="365760"/>
+            <a:off x="4526280" y="1508760"/>
+            <a:ext cx="2926080" cy="320040"/>
           </a:xfrm>
           <a:prstGeom prst="rect">
             <a:avLst/>
@@ -4692,11 +5572,11 @@
                 <a:solidFill>
                   <a:srgbClr val="A1A1AA"/>
                 </a:solidFill>
-                <a:latin typeface="Segoe UI"/>
-              </a:defRPr>
-            </a:pPr>
-            <a:r>
-              <a:t>2. MACHINE LEARNING EXPERIMENTS</a:t>
+                <a:latin typeface="Consolas"/>
+              </a:defRPr>
+            </a:pPr>
+            <a:r>
+              <a:t>2. OVERCONFIDENT BLACK-BOX PREDICTIONS</a:t>
             </a:r>
           </a:p>
         </p:txBody>
@@ -4709,8 +5589,8 @@
         </p:nvSpPr>
         <p:spPr>
           <a:xfrm>
-            <a:off x="3108960" y="2011680"/>
-            <a:ext cx="1645920" cy="3840480"/>
+            <a:off x="4526280" y="1920240"/>
+            <a:ext cx="2926080" cy="4023360"/>
           </a:xfrm>
           <a:prstGeom prst="rect">
             <a:avLst/>
@@ -4732,7 +5612,35 @@
               </a:defRPr>
             </a:pPr>
             <a:r>
-              <a:t>Strictly isolated 10,000-sample test evaluation comparing Deep ConvNet, LeNet-5, SVM, RF, and Logistic Regression.</a:t>
+              <a:t>•  Standard Softmax outputs are notoriously uncalibrated and overconfident on corrupt or out-of-distribution inputs.</a:t>
+            </a:r>
+          </a:p>
+          <a:p/>
+          <a:p>
+            <a:pPr>
+              <a:defRPr sz="1100">
+                <a:solidFill>
+                  <a:srgbClr val="A1A1AA"/>
+                </a:solidFill>
+                <a:latin typeface="Segoe UI"/>
+              </a:defRPr>
+            </a:pPr>
+            <a:r>
+              <a:t>•  A model will assign 99.8% confidence to an arbitrary scribble or random noise.</a:t>
+            </a:r>
+          </a:p>
+          <a:p/>
+          <a:p>
+            <a:pPr>
+              <a:defRPr sz="1100">
+                <a:solidFill>
+                  <a:srgbClr val="A1A1AA"/>
+                </a:solidFill>
+                <a:latin typeface="Segoe UI"/>
+              </a:defRPr>
+            </a:pPr>
+            <a:r>
+              <a:t>•  Absence of epistemic uncertainty estimation (entropy, margin) makes automated delegation hazardous.</a:t>
             </a:r>
           </a:p>
         </p:txBody>
@@ -4745,8 +5653,8 @@
         </p:nvSpPr>
         <p:spPr>
           <a:xfrm>
-            <a:off x="5120640" y="1463040"/>
-            <a:ext cx="2011680" cy="4572000"/>
+            <a:off x="7955280" y="1371600"/>
+            <a:ext cx="3291840" cy="4754880"/>
           </a:xfrm>
           <a:prstGeom prst="rect">
             <a:avLst/>
@@ -4790,8 +5698,8 @@
         </p:nvSpPr>
         <p:spPr>
           <a:xfrm>
-            <a:off x="5303520" y="1600200"/>
-            <a:ext cx="1645920" cy="365760"/>
+            <a:off x="8138160" y="1508760"/>
+            <a:ext cx="2926080" cy="320040"/>
           </a:xfrm>
           <a:prstGeom prst="rect">
             <a:avLst/>
@@ -4809,11 +5717,11 @@
                 <a:solidFill>
                   <a:srgbClr val="A1A1AA"/>
                 </a:solidFill>
-                <a:latin typeface="Segoe UI"/>
-              </a:defRPr>
-            </a:pPr>
-            <a:r>
-              <a:t>3. TECHNICAL DOCUMENTATION</a:t>
+                <a:latin typeface="Consolas"/>
+              </a:defRPr>
+            </a:pPr>
+            <a:r>
+              <a:t>3. UNINTERPRETABLE LATENT DECISIONS</a:t>
             </a:r>
           </a:p>
         </p:txBody>
@@ -4826,8 +5734,8 @@
         </p:nvSpPr>
         <p:spPr>
           <a:xfrm>
-            <a:off x="5303520" y="2011680"/>
-            <a:ext cx="1645920" cy="3840480"/>
+            <a:off x="8138160" y="1920240"/>
+            <a:ext cx="2926080" cy="4023360"/>
           </a:xfrm>
           <a:prstGeom prst="rect">
             <a:avLst/>
@@ -4849,80 +5757,13 @@
               </a:defRPr>
             </a:pPr>
             <a:r>
-              <a:t>Full architectural specification, mathematical loss/calibration proofs, model cards, and REST API definitions.</a:t>
-            </a:r>
-          </a:p>
-        </p:txBody>
-      </p:sp>
-      <p:sp>
-        <p:nvSpPr>
-          <p:cNvPr id="12" name="Rectangle 11"/>
-          <p:cNvSpPr/>
-          <p:nvPr/>
-        </p:nvSpPr>
-        <p:spPr>
-          <a:xfrm>
-            <a:off x="7315200" y="1463040"/>
-            <a:ext cx="2011680" cy="4572000"/>
-          </a:xfrm>
-          <a:prstGeom prst="rect">
-            <a:avLst/>
-          </a:prstGeom>
-          <a:solidFill>
-            <a:srgbClr val="121212"/>
-          </a:solidFill>
-          <a:ln w="12700">
-            <a:solidFill>
-              <a:srgbClr val="262626"/>
-            </a:solidFill>
-          </a:ln>
-        </p:spPr>
-        <p:style>
-          <a:lnRef idx="1">
-            <a:schemeClr val="accent1"/>
-          </a:lnRef>
-          <a:fillRef idx="3">
-            <a:schemeClr val="accent1"/>
-          </a:fillRef>
-          <a:effectRef idx="2">
-            <a:schemeClr val="accent1"/>
-          </a:effectRef>
-          <a:fontRef idx="minor">
-            <a:schemeClr val="lt1"/>
-          </a:fontRef>
-        </p:style>
-        <p:txBody>
-          <a:bodyPr rtlCol="0" anchor="ctr"/>
-          <a:lstStyle/>
-          <a:p>
-            <a:pPr algn="ctr"/>
-          </a:p>
-        </p:txBody>
-      </p:sp>
-      <p:sp>
-        <p:nvSpPr>
-          <p:cNvPr id="13" name="TextBox 12"/>
-          <p:cNvSpPr txBox="1"/>
-          <p:nvPr/>
-        </p:nvSpPr>
-        <p:spPr>
-          <a:xfrm>
-            <a:off x="7498080" y="1600200"/>
-            <a:ext cx="1645920" cy="365760"/>
-          </a:xfrm>
-          <a:prstGeom prst="rect">
-            <a:avLst/>
-          </a:prstGeom>
-          <a:noFill/>
-        </p:spPr>
-        <p:txBody>
-          <a:bodyPr wrap="square" lIns="0" tIns="0" rIns="0" bIns="0">
-            <a:spAutoFit/>
-          </a:bodyPr>
-          <a:lstStyle/>
-          <a:p>
-            <a:pPr>
-              <a:defRPr sz="1000" b="1">
+              <a:t>•  End users and auditors receive discrete categorical predictions without visual attribution.</a:t>
+            </a:r>
+          </a:p>
+          <a:p/>
+          <a:p>
+            <a:pPr>
+              <a:defRPr sz="1100">
                 <a:solidFill>
                   <a:srgbClr val="A1A1AA"/>
                 </a:solidFill>
@@ -4930,32 +5771,10 @@
               </a:defRPr>
             </a:pPr>
             <a:r>
-              <a:t>4. PRESENTATION DECK</a:t>
-            </a:r>
-          </a:p>
-        </p:txBody>
-      </p:sp>
-      <p:sp>
-        <p:nvSpPr>
-          <p:cNvPr id="14" name="TextBox 13"/>
-          <p:cNvSpPr txBox="1"/>
-          <p:nvPr/>
-        </p:nvSpPr>
-        <p:spPr>
-          <a:xfrm>
-            <a:off x="7498080" y="2011680"/>
-            <a:ext cx="1645920" cy="3840480"/>
-          </a:xfrm>
-          <a:prstGeom prst="rect">
-            <a:avLst/>
-          </a:prstGeom>
-          <a:noFill/>
-        </p:spPr>
-        <p:txBody>
-          <a:bodyPr wrap="square">
-            <a:spAutoFit/>
-          </a:bodyPr>
-          <a:lstStyle/>
+              <a:t>•  No mechanism to verify whether the model attended to genuine anatomical digit strokes or background artifacts.</a:t>
+            </a:r>
+          </a:p>
+          <a:p/>
           <a:p>
             <a:pPr>
               <a:defRPr sz="1100">
@@ -4966,124 +5785,7 @@
               </a:defRPr>
             </a:pPr>
             <a:r>
-              <a:t>Automated synchronization directly from JSON experiment outputs. Zero fabricated metrics.</a:t>
-            </a:r>
-          </a:p>
-        </p:txBody>
-      </p:sp>
-      <p:sp>
-        <p:nvSpPr>
-          <p:cNvPr id="15" name="Rectangle 14"/>
-          <p:cNvSpPr/>
-          <p:nvPr/>
-        </p:nvSpPr>
-        <p:spPr>
-          <a:xfrm>
-            <a:off x="9509760" y="1463040"/>
-            <a:ext cx="2011680" cy="4572000"/>
-          </a:xfrm>
-          <a:prstGeom prst="rect">
-            <a:avLst/>
-          </a:prstGeom>
-          <a:solidFill>
-            <a:srgbClr val="121212"/>
-          </a:solidFill>
-          <a:ln w="12700">
-            <a:solidFill>
-              <a:srgbClr val="262626"/>
-            </a:solidFill>
-          </a:ln>
-        </p:spPr>
-        <p:style>
-          <a:lnRef idx="1">
-            <a:schemeClr val="accent1"/>
-          </a:lnRef>
-          <a:fillRef idx="3">
-            <a:schemeClr val="accent1"/>
-          </a:fillRef>
-          <a:effectRef idx="2">
-            <a:schemeClr val="accent1"/>
-          </a:effectRef>
-          <a:fontRef idx="minor">
-            <a:schemeClr val="lt1"/>
-          </a:fontRef>
-        </p:style>
-        <p:txBody>
-          <a:bodyPr rtlCol="0" anchor="ctr"/>
-          <a:lstStyle/>
-          <a:p>
-            <a:pPr algn="ctr"/>
-          </a:p>
-        </p:txBody>
-      </p:sp>
-      <p:sp>
-        <p:nvSpPr>
-          <p:cNvPr id="16" name="TextBox 15"/>
-          <p:cNvSpPr txBox="1"/>
-          <p:nvPr/>
-        </p:nvSpPr>
-        <p:spPr>
-          <a:xfrm>
-            <a:off x="9692640" y="1600200"/>
-            <a:ext cx="1645920" cy="365760"/>
-          </a:xfrm>
-          <a:prstGeom prst="rect">
-            <a:avLst/>
-          </a:prstGeom>
-          <a:noFill/>
-        </p:spPr>
-        <p:txBody>
-          <a:bodyPr wrap="square" lIns="0" tIns="0" rIns="0" bIns="0">
-            <a:spAutoFit/>
-          </a:bodyPr>
-          <a:lstStyle/>
-          <a:p>
-            <a:pPr>
-              <a:defRPr sz="1000" b="1">
-                <a:solidFill>
-                  <a:srgbClr val="A1A1AA"/>
-                </a:solidFill>
-                <a:latin typeface="Segoe UI"/>
-              </a:defRPr>
-            </a:pPr>
-            <a:r>
-              <a:t>5. VERIFICATION EVIDENCE</a:t>
-            </a:r>
-          </a:p>
-        </p:txBody>
-      </p:sp>
-      <p:sp>
-        <p:nvSpPr>
-          <p:cNvPr id="17" name="TextBox 16"/>
-          <p:cNvSpPr txBox="1"/>
-          <p:nvPr/>
-        </p:nvSpPr>
-        <p:spPr>
-          <a:xfrm>
-            <a:off x="9692640" y="2011680"/>
-            <a:ext cx="1645920" cy="3840480"/>
-          </a:xfrm>
-          <a:prstGeom prst="rect">
-            <a:avLst/>
-          </a:prstGeom>
-          <a:noFill/>
-        </p:spPr>
-        <p:txBody>
-          <a:bodyPr wrap="square">
-            <a:spAutoFit/>
-          </a:bodyPr>
-          <a:lstStyle/>
-          <a:p>
-            <a:pPr>
-              <a:defRPr sz="1100">
-                <a:solidFill>
-                  <a:srgbClr val="A1A1AA"/>
-                </a:solidFill>
-                <a:latin typeface="Segoe UI"/>
-              </a:defRPr>
-            </a:pPr>
-            <a:r>
-              <a:t>Pytest suite enforcing canonical invariant, probability simplex bounds, and layer hook existence.</a:t>
+              <a:t>•  Requires integrated Explainable AI (Grad-CAM &amp; Saliency) coupled directly into the forward inference graph.</a:t>
             </a:r>
           </a:p>
         </p:txBody>
@@ -5123,7 +5825,7 @@
         <p:spPr>
           <a:xfrm>
             <a:off x="731520" y="365760"/>
-            <a:ext cx="10698480" cy="914400"/>
+            <a:ext cx="10698480" cy="822960"/>
           </a:xfrm>
           <a:prstGeom prst="rect">
             <a:avLst/>
@@ -5141,24 +5843,24 @@
                 <a:solidFill>
                   <a:srgbClr val="1DB954"/>
                 </a:solidFill>
+                <a:latin typeface="Consolas"/>
+              </a:defRPr>
+            </a:pPr>
+            <a:r>
+              <a:t>PROJECT OBJECTIVE</a:t>
+            </a:r>
+          </a:p>
+          <a:p>
+            <a:pPr>
+              <a:defRPr sz="1800" b="1">
+                <a:solidFill>
+                  <a:srgbClr val="FFFFFF"/>
+                </a:solidFill>
                 <a:latin typeface="Segoe UI"/>
               </a:defRPr>
             </a:pPr>
             <a:r>
-              <a:t>DIGITVISION AI — SCIENTIFIC RESEARCH BRIEF</a:t>
-            </a:r>
-          </a:p>
-          <a:p>
-            <a:pPr>
-              <a:defRPr sz="1800" b="1">
-                <a:solidFill>
-                  <a:srgbClr val="FFFFFF"/>
-                </a:solidFill>
-                <a:latin typeface="Segoe UI"/>
-              </a:defRPr>
-            </a:pPr>
-            <a:r>
-              <a:t>CORE ARCHITECTURAL INVARIANT: CANONICAL PREPROCESSING</a:t>
+              <a:t>SYSTEM MISSION &amp; EXECUTABLE ENGINEERING OBJECTIVES</a:t>
             </a:r>
           </a:p>
         </p:txBody>
@@ -5171,8 +5873,8 @@
         </p:nvSpPr>
         <p:spPr>
           <a:xfrm>
-            <a:off x="731520" y="1463040"/>
-            <a:ext cx="5120640" cy="4572000"/>
+            <a:off x="731520" y="1371600"/>
+            <a:ext cx="10698480" cy="1051560"/>
           </a:xfrm>
           <a:prstGeom prst="rect">
             <a:avLst/>
@@ -5216,8 +5918,8 @@
         </p:nvSpPr>
         <p:spPr>
           <a:xfrm>
-            <a:off x="914400" y="1600200"/>
-            <a:ext cx="4754879" cy="365760"/>
+            <a:off x="914400" y="1508760"/>
+            <a:ext cx="10332719" cy="320040"/>
           </a:xfrm>
           <a:prstGeom prst="rect">
             <a:avLst/>
@@ -5235,11 +5937,11 @@
                 <a:solidFill>
                   <a:srgbClr val="A1A1AA"/>
                 </a:solidFill>
-                <a:latin typeface="Segoe UI"/>
-              </a:defRPr>
-            </a:pPr>
-            <a:r>
-              <a:t>INVARIANT SPECIFICATION</a:t>
+                <a:latin typeface="Consolas"/>
+              </a:defRPr>
+            </a:pPr>
+            <a:r>
+              <a:t>OBJECTIVE 01: CANONICAL PREPROCESSING INVARIANT</a:t>
             </a:r>
           </a:p>
         </p:txBody>
@@ -5252,8 +5954,8 @@
         </p:nvSpPr>
         <p:spPr>
           <a:xfrm>
-            <a:off x="914400" y="2011680"/>
-            <a:ext cx="4754880" cy="3840480"/>
+            <a:off x="914400" y="1783080"/>
+            <a:ext cx="10332720" cy="548640"/>
           </a:xfrm>
           <a:prstGeom prst="rect">
             <a:avLst/>
@@ -5267,74 +5969,15 @@
           <a:lstStyle/>
           <a:p>
             <a:pPr>
-              <a:defRPr b="1" sz="1200">
-                <a:solidFill>
-                  <a:srgbClr val="FFFFFF"/>
-                </a:solidFill>
-              </a:defRPr>
-            </a:pPr>
-            <a:r>
-              <a:t>Mathematical Invariant Formulation:</a:t>
-            </a:r>
-          </a:p>
-          <a:p>
-            <a:pPr>
-              <a:defRPr sz="1000">
+              <a:defRPr sz="1100">
                 <a:solidFill>
                   <a:srgbClr val="A1A1AA"/>
                 </a:solidFill>
-              </a:defRPr>
-            </a:pPr>
-            <a:r>
-              <a:t>• Contrast Inversion: Automatically detects dark-on-light vs light-on-dark, mapping foreground strokes to [0, 255].</a:t>
-            </a:r>
-          </a:p>
-          <a:p>
-            <a:pPr>
-              <a:defRPr sz="1000">
-                <a:solidFill>
-                  <a:srgbClr val="A1A1AA"/>
-                </a:solidFill>
-              </a:defRPr>
-            </a:pPr>
-            <a:r>
-              <a:t>• Bounding Box Extraction: Identifies minimal bounding box of active foreground stroke pixels.</a:t>
-            </a:r>
-          </a:p>
-          <a:p>
-            <a:pPr>
-              <a:defRPr sz="1000">
-                <a:solidFill>
-                  <a:srgbClr val="A1A1AA"/>
-                </a:solidFill>
-              </a:defRPr>
-            </a:pPr>
-            <a:r>
-              <a:t>• Aspect-Ratio Preserved Scaling: Resizes the maximum digit dimension into a 20x20 box using anti-aliased interpolation (cv2.INTER_AREA).</a:t>
-            </a:r>
-          </a:p>
-          <a:p>
-            <a:pPr>
-              <a:defRPr sz="1000">
-                <a:solidFill>
-                  <a:srgbClr val="A1A1AA"/>
-                </a:solidFill>
-              </a:defRPr>
-            </a:pPr>
-            <a:r>
-              <a:t>• Spatial Centroid Alignment: Computes first-order spatial moments m10, m01 and applies an affine translation placing the center of mass at (13.5, 13.5).</a:t>
-            </a:r>
-          </a:p>
-          <a:p>
-            <a:pPr>
-              <a:defRPr sz="1000">
-                <a:solidFill>
-                  <a:srgbClr val="A1A1AA"/>
-                </a:solidFill>
-              </a:defRPr>
-            </a:pPr>
-            <a:r>
-              <a:t>• Shared Codebase: Same canonical_preprocess() function executed by offline training, validation, and real-time frontend canvas.</a:t>
+                <a:latin typeface="Segoe UI"/>
+              </a:defRPr>
+            </a:pPr>
+            <a:r>
+              <a:t>Engineer a single, authoritative preprocessing pipeline shared identically across training and live inference. Guarantees contrast normalization, bounding box detection, aspect-ratio scaling into a 20x20 box, and spatial moment centering to (13.5, 13.5).</a:t>
             </a:r>
           </a:p>
         </p:txBody>
@@ -5347,8 +5990,8 @@
         </p:nvSpPr>
         <p:spPr>
           <a:xfrm>
-            <a:off x="6217920" y="1463040"/>
-            <a:ext cx="5212080" cy="4572000"/>
+            <a:off x="731520" y="2587752"/>
+            <a:ext cx="10698480" cy="1051560"/>
           </a:xfrm>
           <a:prstGeom prst="rect">
             <a:avLst/>
@@ -5392,8 +6035,8 @@
         </p:nvSpPr>
         <p:spPr>
           <a:xfrm>
-            <a:off x="6400800" y="1600200"/>
-            <a:ext cx="4846320" cy="365760"/>
+            <a:off x="914400" y="2724912"/>
+            <a:ext cx="10332719" cy="320040"/>
           </a:xfrm>
           <a:prstGeom prst="rect">
             <a:avLst/>
@@ -5411,11 +6054,11 @@
                 <a:solidFill>
                   <a:srgbClr val="A1A1AA"/>
                 </a:solidFill>
-                <a:latin typeface="Segoe UI"/>
-              </a:defRPr>
-            </a:pPr>
-            <a:r>
-              <a:t>INPUT QUALITY INTELLIGENCE</a:t>
+                <a:latin typeface="Consolas"/>
+              </a:defRPr>
+            </a:pPr>
+            <a:r>
+              <a:t>OBJECTIVE 02: MULTI-MODEL EMPIRICAL BENCHMARK</a:t>
             </a:r>
           </a:p>
         </p:txBody>
@@ -5428,8 +6071,8 @@
         </p:nvSpPr>
         <p:spPr>
           <a:xfrm>
-            <a:off x="6400800" y="2011680"/>
-            <a:ext cx="4846320" cy="3840480"/>
+            <a:off x="914400" y="2999232"/>
+            <a:ext cx="10332720" cy="548640"/>
           </a:xfrm>
           <a:prstGeom prst="rect">
             <a:avLst/>
@@ -5443,74 +6086,249 @@
           <a:lstStyle/>
           <a:p>
             <a:pPr>
-              <a:defRPr b="1" sz="1200">
-                <a:solidFill>
-                  <a:srgbClr val="FFFFFF"/>
-                </a:solidFill>
-              </a:defRPr>
-            </a:pPr>
-            <a:r>
-              <a:t>Pre-Inference Validation Telemetry:</a:t>
-            </a:r>
-          </a:p>
-          <a:p>
-            <a:pPr>
-              <a:defRPr sz="1000">
+              <a:defRPr sz="1100">
                 <a:solidFill>
                   <a:srgbClr val="A1A1AA"/>
                 </a:solidFill>
-              </a:defRPr>
-            </a:pPr>
-            <a:r>
-              <a:t>• Composite Quality Score [0-100]: Grades input fidelity based on stroke density, contrast, and noise.</a:t>
-            </a:r>
-          </a:p>
-          <a:p>
-            <a:pPr>
-              <a:defRPr sz="1000">
+                <a:latin typeface="Segoe UI"/>
+              </a:defRPr>
+            </a:pPr>
+            <a:r>
+              <a:t>Establish a comparative evaluation matrix across 5 distinct model paradigms (Deep ConvNet, LeNet-5, SVM RBF, Random Forest, Logistic Regression) evaluated on an isolated 10,000-sample test set with zero data leakage.</a:t>
+            </a:r>
+          </a:p>
+        </p:txBody>
+      </p:sp>
+      <p:sp>
+        <p:nvSpPr>
+          <p:cNvPr id="9" name="Rectangle 8"/>
+          <p:cNvSpPr/>
+          <p:nvPr/>
+        </p:nvSpPr>
+        <p:spPr>
+          <a:xfrm>
+            <a:off x="731520" y="3803904"/>
+            <a:ext cx="10698480" cy="1051560"/>
+          </a:xfrm>
+          <a:prstGeom prst="rect">
+            <a:avLst/>
+          </a:prstGeom>
+          <a:solidFill>
+            <a:srgbClr val="121212"/>
+          </a:solidFill>
+          <a:ln w="12700">
+            <a:solidFill>
+              <a:srgbClr val="262626"/>
+            </a:solidFill>
+          </a:ln>
+        </p:spPr>
+        <p:style>
+          <a:lnRef idx="1">
+            <a:schemeClr val="accent1"/>
+          </a:lnRef>
+          <a:fillRef idx="3">
+            <a:schemeClr val="accent1"/>
+          </a:fillRef>
+          <a:effectRef idx="2">
+            <a:schemeClr val="accent1"/>
+          </a:effectRef>
+          <a:fontRef idx="minor">
+            <a:schemeClr val="lt1"/>
+          </a:fontRef>
+        </p:style>
+        <p:txBody>
+          <a:bodyPr rtlCol="0" anchor="ctr"/>
+          <a:lstStyle/>
+          <a:p>
+            <a:pPr algn="ctr"/>
+          </a:p>
+        </p:txBody>
+      </p:sp>
+      <p:sp>
+        <p:nvSpPr>
+          <p:cNvPr id="10" name="TextBox 9"/>
+          <p:cNvSpPr txBox="1"/>
+          <p:nvPr/>
+        </p:nvSpPr>
+        <p:spPr>
+          <a:xfrm>
+            <a:off x="914400" y="3941064"/>
+            <a:ext cx="10332719" cy="320040"/>
+          </a:xfrm>
+          <a:prstGeom prst="rect">
+            <a:avLst/>
+          </a:prstGeom>
+          <a:noFill/>
+        </p:spPr>
+        <p:txBody>
+          <a:bodyPr wrap="square" lIns="0" tIns="0" rIns="0" bIns="0">
+            <a:spAutoFit/>
+          </a:bodyPr>
+          <a:lstStyle/>
+          <a:p>
+            <a:pPr>
+              <a:defRPr sz="1000" b="1">
                 <a:solidFill>
                   <a:srgbClr val="A1A1AA"/>
                 </a:solidFill>
-              </a:defRPr>
-            </a:pPr>
-            <a:r>
-              <a:t>• Connected Component Analysis: Computes speckle noise ratio by isolating secondary components.</a:t>
-            </a:r>
-          </a:p>
-          <a:p>
-            <a:pPr>
-              <a:defRPr sz="1000">
+                <a:latin typeface="Consolas"/>
+              </a:defRPr>
+            </a:pPr>
+            <a:r>
+              <a:t>OBJECTIVE 03: INPUT QUALITY &amp; PRE-INFERENCE GATING</a:t>
+            </a:r>
+          </a:p>
+        </p:txBody>
+      </p:sp>
+      <p:sp>
+        <p:nvSpPr>
+          <p:cNvPr id="11" name="TextBox 10"/>
+          <p:cNvSpPr txBox="1"/>
+          <p:nvPr/>
+        </p:nvSpPr>
+        <p:spPr>
+          <a:xfrm>
+            <a:off x="914400" y="4215384"/>
+            <a:ext cx="10332720" cy="548640"/>
+          </a:xfrm>
+          <a:prstGeom prst="rect">
+            <a:avLst/>
+          </a:prstGeom>
+          <a:noFill/>
+        </p:spPr>
+        <p:txBody>
+          <a:bodyPr wrap="square">
+            <a:spAutoFit/>
+          </a:bodyPr>
+          <a:lstStyle/>
+          <a:p>
+            <a:pPr>
+              <a:defRPr sz="1100">
                 <a:solidFill>
                   <a:srgbClr val="A1A1AA"/>
                 </a:solidFill>
-              </a:defRPr>
-            </a:pPr>
-            <a:r>
-              <a:t>• Stroke Pixel Bounds: Enforces active pixel count in [18, 380] to reject empty canvas or solid fills.</a:t>
-            </a:r>
-          </a:p>
-          <a:p>
-            <a:pPr>
-              <a:defRPr sz="1000">
+                <a:latin typeface="Segoe UI"/>
+              </a:defRPr>
+            </a:pPr>
+            <a:r>
+              <a:t>Construct an input-quality intelligence module that audits stroke density, bounding box coverage, centroid deviation, and noise ratio before the model is invoked, failing closed on malformed drawings.</a:t>
+            </a:r>
+          </a:p>
+        </p:txBody>
+      </p:sp>
+      <p:sp>
+        <p:nvSpPr>
+          <p:cNvPr id="12" name="Rectangle 11"/>
+          <p:cNvSpPr/>
+          <p:nvPr/>
+        </p:nvSpPr>
+        <p:spPr>
+          <a:xfrm>
+            <a:off x="731520" y="5020055"/>
+            <a:ext cx="10698480" cy="1051560"/>
+          </a:xfrm>
+          <a:prstGeom prst="rect">
+            <a:avLst/>
+          </a:prstGeom>
+          <a:solidFill>
+            <a:srgbClr val="121212"/>
+          </a:solidFill>
+          <a:ln w="12700">
+            <a:solidFill>
+              <a:srgbClr val="262626"/>
+            </a:solidFill>
+          </a:ln>
+        </p:spPr>
+        <p:style>
+          <a:lnRef idx="1">
+            <a:schemeClr val="accent1"/>
+          </a:lnRef>
+          <a:fillRef idx="3">
+            <a:schemeClr val="accent1"/>
+          </a:fillRef>
+          <a:effectRef idx="2">
+            <a:schemeClr val="accent1"/>
+          </a:effectRef>
+          <a:fontRef idx="minor">
+            <a:schemeClr val="lt1"/>
+          </a:fontRef>
+        </p:style>
+        <p:txBody>
+          <a:bodyPr rtlCol="0" anchor="ctr"/>
+          <a:lstStyle/>
+          <a:p>
+            <a:pPr algn="ctr"/>
+          </a:p>
+        </p:txBody>
+      </p:sp>
+      <p:sp>
+        <p:nvSpPr>
+          <p:cNvPr id="13" name="TextBox 12"/>
+          <p:cNvSpPr txBox="1"/>
+          <p:nvPr/>
+        </p:nvSpPr>
+        <p:spPr>
+          <a:xfrm>
+            <a:off x="914400" y="5157216"/>
+            <a:ext cx="10332719" cy="320040"/>
+          </a:xfrm>
+          <a:prstGeom prst="rect">
+            <a:avLst/>
+          </a:prstGeom>
+          <a:noFill/>
+        </p:spPr>
+        <p:txBody>
+          <a:bodyPr wrap="square" lIns="0" tIns="0" rIns="0" bIns="0">
+            <a:spAutoFit/>
+          </a:bodyPr>
+          <a:lstStyle/>
+          <a:p>
+            <a:pPr>
+              <a:defRPr sz="1000" b="1">
                 <a:solidFill>
                   <a:srgbClr val="A1A1AA"/>
                 </a:solidFill>
-              </a:defRPr>
-            </a:pPr>
-            <a:r>
-              <a:t>• Centroid Deviation Check: Penalizes drawings whose center of mass deviates significantly from canvas center.</a:t>
-            </a:r>
-          </a:p>
-          <a:p>
-            <a:pPr>
-              <a:defRPr sz="1000">
+                <a:latin typeface="Consolas"/>
+              </a:defRPr>
+            </a:pPr>
+            <a:r>
+              <a:t>OBJECTIVE 04: REAL-TIME EXPLAINABILITY &amp; FORENSICS</a:t>
+            </a:r>
+          </a:p>
+        </p:txBody>
+      </p:sp>
+      <p:sp>
+        <p:nvSpPr>
+          <p:cNvPr id="14" name="TextBox 13"/>
+          <p:cNvSpPr txBox="1"/>
+          <p:nvPr/>
+        </p:nvSpPr>
+        <p:spPr>
+          <a:xfrm>
+            <a:off x="914400" y="5431536"/>
+            <a:ext cx="10332720" cy="548640"/>
+          </a:xfrm>
+          <a:prstGeom prst="rect">
+            <a:avLst/>
+          </a:prstGeom>
+          <a:noFill/>
+        </p:spPr>
+        <p:txBody>
+          <a:bodyPr wrap="square">
+            <a:spAutoFit/>
+          </a:bodyPr>
+          <a:lstStyle/>
+          <a:p>
+            <a:pPr>
+              <a:defRPr sz="1100">
                 <a:solidFill>
                   <a:srgbClr val="A1A1AA"/>
                 </a:solidFill>
-              </a:defRPr>
-            </a:pPr>
-            <a:r>
-              <a:t>• Fail-Closed Gatekeeper: Invalid drawings are rejected prior to classification with informative diagnostics.</a:t>
+                <a:latin typeface="Segoe UI"/>
+              </a:defRPr>
+            </a:pPr>
+            <a:r>
+              <a:t>Integrate dual-stream visual attribution (Grad-CAM and gradient saliency) into the live forward pass, accompanied by Shannon entropy, margin metrics, and diagnostic telemetry.</a:t>
             </a:r>
           </a:p>
         </p:txBody>
@@ -5550,7 +6368,7 @@
         <p:spPr>
           <a:xfrm>
             <a:off x="731520" y="365760"/>
-            <a:ext cx="10698480" cy="914400"/>
+            <a:ext cx="10698480" cy="822960"/>
           </a:xfrm>
           <a:prstGeom prst="rect">
             <a:avLst/>
@@ -5568,24 +6386,24 @@
                 <a:solidFill>
                   <a:srgbClr val="1DB954"/>
                 </a:solidFill>
+                <a:latin typeface="Consolas"/>
+              </a:defRPr>
+            </a:pPr>
+            <a:r>
+              <a:t>SYSTEM ARCHITECTURE</a:t>
+            </a:r>
+          </a:p>
+          <a:p>
+            <a:pPr>
+              <a:defRPr sz="1800" b="1">
+                <a:solidFill>
+                  <a:srgbClr val="FFFFFF"/>
+                </a:solidFill>
                 <a:latin typeface="Segoe UI"/>
               </a:defRPr>
             </a:pPr>
             <a:r>
-              <a:t>DIGITVISION AI — SCIENTIFIC RESEARCH BRIEF</a:t>
-            </a:r>
-          </a:p>
-          <a:p>
-            <a:pPr>
-              <a:defRPr sz="1800" b="1">
-                <a:solidFill>
-                  <a:srgbClr val="FFFFFF"/>
-                </a:solidFill>
-                <a:latin typeface="Segoe UI"/>
-              </a:defRPr>
-            </a:pPr>
-            <a:r>
-              <a:t>MODEL ARCHITECTURE HIERARCHY &amp; SPECIFICATIONS</a:t>
+              <a:t>PHASE 01 ARCHITECTURAL TOPOLOGY &amp; DATA FLOW</a:t>
             </a:r>
           </a:p>
         </p:txBody>
@@ -5598,8 +6416,8 @@
         </p:nvSpPr>
         <p:spPr>
           <a:xfrm>
-            <a:off x="731520" y="1463040"/>
-            <a:ext cx="5120640" cy="4572000"/>
+            <a:off x="731520" y="1371600"/>
+            <a:ext cx="6217920" cy="4846320"/>
           </a:xfrm>
           <a:prstGeom prst="rect">
             <a:avLst/>
@@ -5643,8 +6461,8 @@
         </p:nvSpPr>
         <p:spPr>
           <a:xfrm>
-            <a:off x="914400" y="1600200"/>
-            <a:ext cx="4754879" cy="365760"/>
+            <a:off x="914400" y="1508760"/>
+            <a:ext cx="5852159" cy="320040"/>
           </a:xfrm>
           <a:prstGeom prst="rect">
             <a:avLst/>
@@ -5662,11 +6480,11 @@
                 <a:solidFill>
                   <a:srgbClr val="A1A1AA"/>
                 </a:solidFill>
-                <a:latin typeface="Segoe UI"/>
-              </a:defRPr>
-            </a:pPr>
-            <a:r>
-              <a:t>DIGITVISION DEEPCONVNET (PRODUCTION)</a:t>
+                <a:latin typeface="Consolas"/>
+              </a:defRPr>
+            </a:pPr>
+            <a:r>
+              <a:t>PIPELINE TOPOLOGY (PHASE 01 FOUNDATION)</a:t>
             </a:r>
           </a:p>
         </p:txBody>
@@ -5679,8 +6497,8 @@
         </p:nvSpPr>
         <p:spPr>
           <a:xfrm>
-            <a:off x="914400" y="2011680"/>
-            <a:ext cx="4754880" cy="3840480"/>
+            <a:off x="914400" y="1874519"/>
+            <a:ext cx="5852160" cy="4114800"/>
           </a:xfrm>
           <a:prstGeom prst="rect">
             <a:avLst/>
@@ -5694,14 +6512,15 @@
           <a:lstStyle/>
           <a:p>
             <a:pPr>
-              <a:defRPr b="1" sz="1200">
+              <a:defRPr sz="1000" b="1">
                 <a:solidFill>
                   <a:srgbClr val="1DB954"/>
                 </a:solidFill>
-              </a:defRPr>
-            </a:pPr>
-            <a:r>
-              <a:t>Multi-Stage Deep Residual/ConvNet:</a:t>
+                <a:latin typeface="Consolas"/>
+              </a:defRPr>
+            </a:pPr>
+            <a:r>
+              <a:t>LAYER 1: INPUT INGESTION</a:t>
             </a:r>
           </a:p>
           <a:p>
@@ -5710,10 +6529,25 @@
                 <a:solidFill>
                   <a:srgbClr val="A1A1AA"/>
                 </a:solidFill>
-              </a:defRPr>
-            </a:pPr>
-            <a:r>
-              <a:t>• Block 1: Conv2D(32, 3x3) + BN + Conv2D(32, 3x3) + BN + MaxPool(2x2) + Dropout(0.25)</a:t>
+                <a:latin typeface="Segoe UI"/>
+              </a:defRPr>
+            </a:pPr>
+            <a:r>
+              <a:t>Base64 canvas strings, raw PNG/JPEG bytes, or offline numpy arrays decoded into single-channel grayscale.</a:t>
+            </a:r>
+          </a:p>
+          <a:p/>
+          <a:p>
+            <a:pPr>
+              <a:defRPr sz="1000" b="1">
+                <a:solidFill>
+                  <a:srgbClr val="1DB954"/>
+                </a:solidFill>
+                <a:latin typeface="Consolas"/>
+              </a:defRPr>
+            </a:pPr>
+            <a:r>
+              <a:t>LAYER 2: CANONICAL PREPROCESSOR</a:t>
             </a:r>
           </a:p>
           <a:p>
@@ -5722,10 +6556,25 @@
                 <a:solidFill>
                   <a:srgbClr val="A1A1AA"/>
                 </a:solidFill>
-              </a:defRPr>
-            </a:pPr>
-            <a:r>
-              <a:t>• Block 2: Conv2D(64, 3x3) + BN + Conv2D(64, 3x3, name='conv_cam') + BN + MaxPool(2x2) + Dropout(0.25)</a:t>
+                <a:latin typeface="Segoe UI"/>
+              </a:defRPr>
+            </a:pPr>
+            <a:r>
+              <a:t>Authoritative invariant: Contrast inversion → Otsu thresholding → BBox extraction → 20x20 aspect scaling → Moment centroiding to (13.5, 13.5) → (1, 28, 28, 1) float32.</a:t>
+            </a:r>
+          </a:p>
+          <a:p/>
+          <a:p>
+            <a:pPr>
+              <a:defRPr sz="1000" b="1">
+                <a:solidFill>
+                  <a:srgbClr val="1DB954"/>
+                </a:solidFill>
+                <a:latin typeface="Consolas"/>
+              </a:defRPr>
+            </a:pPr>
+            <a:r>
+              <a:t>LAYER 3: INPUT QUALITY GATEKEEPER</a:t>
             </a:r>
           </a:p>
           <a:p>
@@ -5734,10 +6583,25 @@
                 <a:solidFill>
                   <a:srgbClr val="A1A1AA"/>
                 </a:solidFill>
-              </a:defRPr>
-            </a:pPr>
-            <a:r>
-              <a:t>• Block 3: Conv2D(128, 3x3) + BN + Dropout(0.30)</a:t>
+                <a:latin typeface="Segoe UI"/>
+              </a:defRPr>
+            </a:pPr>
+            <a:r>
+              <a:t>Computes composite quality score [0, 100], active pixel bounds [18, 380], centroid offset tolerance (&lt;= 4.5px), and speckle noise ratio.</a:t>
+            </a:r>
+          </a:p>
+          <a:p/>
+          <a:p>
+            <a:pPr>
+              <a:defRPr sz="1000" b="1">
+                <a:solidFill>
+                  <a:srgbClr val="1DB954"/>
+                </a:solidFill>
+                <a:latin typeface="Consolas"/>
+              </a:defRPr>
+            </a:pPr>
+            <a:r>
+              <a:t>LAYER 4: CENTRALIZED CONFIGURATION</a:t>
             </a:r>
           </a:p>
           <a:p>
@@ -5746,10 +6610,25 @@
                 <a:solidFill>
                   <a:srgbClr val="A1A1AA"/>
                 </a:solidFill>
-              </a:defRPr>
-            </a:pPr>
-            <a:r>
-              <a:t>• Head: GlobalAveragePooling2D + Dense(128, ReLU) + BN + Dropout(0.40) + Dense(10, Softmax)</a:t>
+                <a:latin typeface="Segoe UI"/>
+              </a:defRPr>
+            </a:pPr>
+            <a:r>
+              <a:t>src/config.py centralizes random seeds, dataset partitions, learning rates, batch configurations, and path topologies. Zero magic numbers.</a:t>
+            </a:r>
+          </a:p>
+          <a:p/>
+          <a:p>
+            <a:pPr>
+              <a:defRPr sz="1000" b="1">
+                <a:solidFill>
+                  <a:srgbClr val="1DB954"/>
+                </a:solidFill>
+                <a:latin typeface="Consolas"/>
+              </a:defRPr>
+            </a:pPr>
+            <a:r>
+              <a:t>LAYER 5: UNIFIED MODEL &amp; TELEMETRY HUD</a:t>
             </a:r>
           </a:p>
           <a:p>
@@ -5758,12 +6637,14 @@
                 <a:solidFill>
                   <a:srgbClr val="A1A1AA"/>
                 </a:solidFill>
-              </a:defRPr>
-            </a:pPr>
-            <a:r>
-              <a:t>• Key Feature: Explicit 'conv_cam' layer enables gradient extraction for real-time visual explanations.</a:t>
-            </a:r>
-          </a:p>
+                <a:latin typeface="Segoe UI"/>
+              </a:defRPr>
+            </a:pPr>
+            <a:r>
+              <a:t>Provides normalized tensors to model wrappers, Grad-CAM attribution hooks, and emits high-density JSON telemetry for dashboard rendering.</a:t>
+            </a:r>
+          </a:p>
+          <a:p/>
         </p:txBody>
       </p:sp>
       <p:sp>
@@ -5774,8 +6655,8 @@
         </p:nvSpPr>
         <p:spPr>
           <a:xfrm>
-            <a:off x="6217920" y="1463040"/>
-            <a:ext cx="5212080" cy="4572000"/>
+            <a:off x="7223760" y="1371600"/>
+            <a:ext cx="4206240" cy="4846320"/>
           </a:xfrm>
           <a:prstGeom prst="rect">
             <a:avLst/>
@@ -5819,8 +6700,8 @@
         </p:nvSpPr>
         <p:spPr>
           <a:xfrm>
-            <a:off x="6400800" y="1600200"/>
-            <a:ext cx="4846320" cy="365760"/>
+            <a:off x="7406640" y="1508760"/>
+            <a:ext cx="3840479" cy="320040"/>
           </a:xfrm>
           <a:prstGeom prst="rect">
             <a:avLst/>
@@ -5838,11 +6719,11 @@
                 <a:solidFill>
                   <a:srgbClr val="A1A1AA"/>
                 </a:solidFill>
-                <a:latin typeface="Segoe UI"/>
-              </a:defRPr>
-            </a:pPr>
-            <a:r>
-              <a:t>COMPARATIVE BASELINES</a:t>
+                <a:latin typeface="Consolas"/>
+              </a:defRPr>
+            </a:pPr>
+            <a:r>
+              <a:t>REPOSITORY STRUCTURE &amp; MODULES</a:t>
             </a:r>
           </a:p>
         </p:txBody>
@@ -5855,8 +6736,8 @@
         </p:nvSpPr>
         <p:spPr>
           <a:xfrm>
-            <a:off x="6400800" y="2011680"/>
-            <a:ext cx="4846320" cy="3840480"/>
+            <a:off x="7406640" y="1874519"/>
+            <a:ext cx="3840480" cy="4114800"/>
           </a:xfrm>
           <a:prstGeom prst="rect">
             <a:avLst/>
@@ -5870,75 +6751,73 @@
           <a:lstStyle/>
           <a:p>
             <a:pPr>
-              <a:defRPr b="1" sz="1200">
-                <a:solidFill>
-                  <a:srgbClr val="3B82F6"/>
-                </a:solidFill>
-              </a:defRPr>
-            </a:pPr>
-            <a:r>
-              <a:t>Historical &amp; Classical Benchmark Ensemble:</a:t>
-            </a:r>
-          </a:p>
-          <a:p>
-            <a:pPr>
-              <a:defRPr sz="1000">
-                <a:solidFill>
-                  <a:srgbClr val="A1A1AA"/>
-                </a:solidFill>
-              </a:defRPr>
-            </a:pPr>
-            <a:r>
-              <a:t>• Classic LeNet-5 (LeCun 1998): Conv2D(6, 5x5) -&gt; AvgPool -&gt; Conv2D(16, 5x5) -&gt; AvgPool -&gt; FC(120) -&gt; FC(84) -&gt; FC(10).</a:t>
-            </a:r>
-          </a:p>
-          <a:p>
-            <a:pPr>
-              <a:defRPr sz="1000">
-                <a:solidFill>
-                  <a:srgbClr val="A1A1AA"/>
-                </a:solidFill>
-              </a:defRPr>
-            </a:pPr>
-            <a:r>
-              <a:t>• Support Vector Machine (RBF): Non-linear maximal margin separation using radial basis function kernel with calibrated Platt probabilities.</a:t>
-            </a:r>
-          </a:p>
-          <a:p>
-            <a:pPr>
-              <a:defRPr sz="1000">
-                <a:solidFill>
-                  <a:srgbClr val="A1A1AA"/>
-                </a:solidFill>
-              </a:defRPr>
-            </a:pPr>
-            <a:r>
-              <a:t>• Random Forest: 60-tree bagging ensemble partitioning 784-dimensional pixel intensities.</a:t>
-            </a:r>
-          </a:p>
-          <a:p>
-            <a:pPr>
-              <a:defRPr sz="1000">
-                <a:solidFill>
-                  <a:srgbClr val="A1A1AA"/>
-                </a:solidFill>
-              </a:defRPr>
-            </a:pPr>
-            <a:r>
-              <a:t>• Multinomial Logistic Regression: Linear softmax classifier regularized via L2 penalty.</a:t>
-            </a:r>
-          </a:p>
-          <a:p>
-            <a:pPr>
-              <a:defRPr sz="1000">
-                <a:solidFill>
-                  <a:srgbClr val="A1A1AA"/>
-                </a:solidFill>
-              </a:defRPr>
-            </a:pPr>
-            <a:r>
-              <a:t>• Standardized Input: All baselines ingest identical 28x28 canonical flattened arrays.</a:t>
-            </a:r>
+              <a:defRPr sz="900">
+                <a:solidFill>
+                  <a:srgbClr val="737373"/>
+                </a:solidFill>
+                <a:latin typeface="Consolas"/>
+              </a:defRPr>
+            </a:pPr>
+            <a:r>
+              <a:t>ML_PROJECT/</a:t>
+            </a:r>
+            <a:br/>
+            <a:r>
+              <a:t>├── src/</a:t>
+            </a:r>
+            <a:br/>
+            <a:r>
+              <a:t>│   ├── config.py             [Centralized Config]</a:t>
+            </a:r>
+            <a:br/>
+            <a:r>
+              <a:t>│   ├── data/                 [Dataset &amp; EDA]</a:t>
+            </a:r>
+            <a:br/>
+            <a:r>
+              <a:t>│   │   ├── dataset.py        [MNIST Pipeline]</a:t>
+            </a:r>
+            <a:br/>
+            <a:r>
+              <a:t>│   │   └── eda.py            [Empirical EDA]</a:t>
+            </a:r>
+            <a:br/>
+            <a:r>
+              <a:t>│   ├── preprocessing/        [Canonical Pipeline]</a:t>
+            </a:r>
+            <a:br/>
+            <a:r>
+              <a:t>│   │   └── canonical.py      [Autoritative Invariant]</a:t>
+            </a:r>
+            <a:br/>
+            <a:r>
+              <a:t>│   ├── intelligence/         [Quality &amp; Forensics]</a:t>
+            </a:r>
+            <a:br/>
+            <a:r>
+              <a:t>│   ├── models/               [Deep &amp; Classical]</a:t>
+            </a:r>
+            <a:br/>
+            <a:r>
+              <a:t>│   ├── xai/                  [Grad-CAM &amp; Saliency]</a:t>
+            </a:r>
+            <a:br/>
+            <a:r>
+              <a:t>│   └── app/                  [FastAPI &amp; Dashboard]</a:t>
+            </a:r>
+            <a:br/>
+            <a:r>
+              <a:t>├── artifacts/data/           [Generated Figures]</a:t>
+            </a:r>
+            <a:br/>
+            <a:r>
+              <a:t>├── docs/                     [Formal Specifications]</a:t>
+            </a:r>
+            <a:br/>
+            <a:r>
+              <a:t>└── tests/                    [33 Verified Tests]</a:t>
+            </a:r>
+            <a:br/>
           </a:p>
         </p:txBody>
       </p:sp>
@@ -5977,7 +6856,7 @@
         <p:spPr>
           <a:xfrm>
             <a:off x="731520" y="365760"/>
-            <a:ext cx="10698480" cy="914400"/>
+            <a:ext cx="10698480" cy="822960"/>
           </a:xfrm>
           <a:prstGeom prst="rect">
             <a:avLst/>
@@ -5995,24 +6874,24 @@
                 <a:solidFill>
                   <a:srgbClr val="1DB954"/>
                 </a:solidFill>
+                <a:latin typeface="Consolas"/>
+              </a:defRPr>
+            </a:pPr>
+            <a:r>
+              <a:t>MNIST DATASET</a:t>
+            </a:r>
+          </a:p>
+          <a:p>
+            <a:pPr>
+              <a:defRPr sz="1800" b="1">
+                <a:solidFill>
+                  <a:srgbClr val="FFFFFF"/>
+                </a:solidFill>
                 <a:latin typeface="Segoe UI"/>
               </a:defRPr>
             </a:pPr>
             <a:r>
-              <a:t>DIGITVISION AI — SCIENTIFIC RESEARCH BRIEF</a:t>
-            </a:r>
-          </a:p>
-          <a:p>
-            <a:pPr>
-              <a:defRPr sz="1800" b="1">
-                <a:solidFill>
-                  <a:srgbClr val="FFFFFF"/>
-                </a:solidFill>
-                <a:latin typeface="Segoe UI"/>
-              </a:defRPr>
-            </a:pPr>
-            <a:r>
-              <a:t>EMPIRICAL EVALUATION BENCHMARKS (10,000 ISOLATED SAMPLES)</a:t>
+              <a:t>DATASET PROVENANCE, PARTITIONING &amp; ZERO-LEAKAGE HYGIENE</a:t>
             </a:r>
           </a:p>
         </p:txBody>
@@ -6025,8 +6904,8 @@
         </p:nvSpPr>
         <p:spPr>
           <a:xfrm>
-            <a:off x="731520" y="1463040"/>
-            <a:ext cx="10698480" cy="4572000"/>
+            <a:off x="731520" y="1371600"/>
+            <a:ext cx="5212080" cy="4846320"/>
           </a:xfrm>
           <a:prstGeom prst="rect">
             <a:avLst/>
@@ -6070,8 +6949,8 @@
         </p:nvSpPr>
         <p:spPr>
           <a:xfrm>
-            <a:off x="914400" y="1600200"/>
-            <a:ext cx="10332719" cy="365760"/>
+            <a:off x="914400" y="1508760"/>
+            <a:ext cx="4846320" cy="320040"/>
           </a:xfrm>
           <a:prstGeom prst="rect">
             <a:avLst/>
@@ -6089,921 +6968,287 @@
                 <a:solidFill>
                   <a:srgbClr val="A1A1AA"/>
                 </a:solidFill>
+                <a:latin typeface="Consolas"/>
+              </a:defRPr>
+            </a:pPr>
+            <a:r>
+              <a:t>DATASET PROVENANCE &amp; PARTITIONING</a:t>
+            </a:r>
+          </a:p>
+        </p:txBody>
+      </p:sp>
+      <p:sp>
+        <p:nvSpPr>
+          <p:cNvPr id="5" name="TextBox 4"/>
+          <p:cNvSpPr txBox="1"/>
+          <p:nvPr/>
+        </p:nvSpPr>
+        <p:spPr>
+          <a:xfrm>
+            <a:off x="914400" y="1874519"/>
+            <a:ext cx="4846320" cy="4114800"/>
+          </a:xfrm>
+          <a:prstGeom prst="rect">
+            <a:avLst/>
+          </a:prstGeom>
+          <a:noFill/>
+        </p:spPr>
+        <p:txBody>
+          <a:bodyPr wrap="square">
+            <a:spAutoFit/>
+          </a:bodyPr>
+          <a:lstStyle/>
+          <a:p>
+            <a:pPr>
+              <a:defRPr sz="1000" b="1">
+                <a:solidFill>
+                  <a:srgbClr val="1DB954"/>
+                </a:solidFill>
+                <a:latin typeface="Consolas"/>
+              </a:defRPr>
+            </a:pPr>
+            <a:r>
+              <a:t>CORPUS SPECIFICATION:</a:t>
+            </a:r>
+          </a:p>
+          <a:p>
+            <a:pPr>
+              <a:defRPr sz="1000">
+                <a:solidFill>
+                  <a:srgbClr val="A1A1AA"/>
+                </a:solidFill>
                 <a:latin typeface="Segoe UI"/>
               </a:defRPr>
             </a:pPr>
             <a:r>
-              <a:t>MEASURED PERFORMANCE ACROSS 5 MODEL ARCHITECTURES</a:t>
-            </a:r>
-          </a:p>
-        </p:txBody>
-      </p:sp>
-      <p:graphicFrame>
-        <p:nvGraphicFramePr>
-          <p:cNvPr id="5" name="Table 4"/>
-          <p:cNvGraphicFramePr>
-            <a:graphicFrameLocks noGrp="1"/>
-          </p:cNvGraphicFramePr>
+              <a:t>•  Origin: Yann LeCun, Corinna Cortes, Christopher Burges (1998).</a:t>
+            </a:r>
+          </a:p>
+          <a:p>
+            <a:pPr>
+              <a:defRPr sz="1000">
+                <a:solidFill>
+                  <a:srgbClr val="A1A1AA"/>
+                </a:solidFill>
+                <a:latin typeface="Segoe UI"/>
+              </a:defRPr>
+            </a:pPr>
+            <a:r>
+              <a:t>•  Source: NIST Special Database 3 (high school students) and Special Database 19 (Census Bureau employees).</a:t>
+            </a:r>
+          </a:p>
+          <a:p>
+            <a:pPr>
+              <a:defRPr sz="1000">
+                <a:solidFill>
+                  <a:srgbClr val="A1A1AA"/>
+                </a:solidFill>
+                <a:latin typeface="Segoe UI"/>
+              </a:defRPr>
+            </a:pPr>
+            <a:r>
+              <a:t>•  Total Available Instances: 70,000 monochrome digit glyphs.</a:t>
+            </a:r>
+          </a:p>
+          <a:p>
+            <a:pPr>
+              <a:defRPr sz="1000">
+                <a:solidFill>
+                  <a:srgbClr val="A1A1AA"/>
+                </a:solidFill>
+                <a:latin typeface="Segoe UI"/>
+              </a:defRPr>
+            </a:pPr>
+            <a:r>
+              <a:t>•  Active Training Partition: 20,000 instances (configurable up to 57,000).</a:t>
+            </a:r>
+          </a:p>
+          <a:p>
+            <a:pPr>
+              <a:defRPr sz="1000">
+                <a:solidFill>
+                  <a:srgbClr val="A1A1AA"/>
+                </a:solidFill>
+                <a:latin typeface="Segoe UI"/>
+              </a:defRPr>
+            </a:pPr>
+            <a:r>
+              <a:t>•  Validation / Tuning Partition: 3,000 instances.</a:t>
+            </a:r>
+          </a:p>
+          <a:p>
+            <a:pPr>
+              <a:defRPr sz="1000">
+                <a:solidFill>
+                  <a:srgbClr val="A1A1AA"/>
+                </a:solidFill>
+                <a:latin typeface="Segoe UI"/>
+              </a:defRPr>
+            </a:pPr>
+            <a:r>
+              <a:t>•  Isolated Benchmark Test Set: 10,000 instances — STRICTLY ISOLATED.</a:t>
+            </a:r>
+          </a:p>
+          <a:p>
+            <a:br/>
+            <a:pPr>
+              <a:defRPr sz="1000" b="1">
+                <a:solidFill>
+                  <a:srgbClr val="FFB000"/>
+                </a:solidFill>
+                <a:latin typeface="Consolas"/>
+              </a:defRPr>
+            </a:pPr>
+            <a:r>
+              <a:t>ZERO-LEAKAGE HYGIENE PROTOCOL:</a:t>
+            </a:r>
+          </a:p>
+          <a:p>
+            <a:pPr>
+              <a:defRPr sz="1000">
+                <a:solidFill>
+                  <a:srgbClr val="A1A1AA"/>
+                </a:solidFill>
+                <a:latin typeface="Segoe UI"/>
+              </a:defRPr>
+            </a:pPr>
+            <a:r>
+              <a:t>•  Air-Gapped Test Set: 10,000 test images are never exposed to training, feature fitting, or hyperparameter selection.</a:t>
+            </a:r>
+          </a:p>
+          <a:p>
+            <a:pPr>
+              <a:defRPr sz="1000">
+                <a:solidFill>
+                  <a:srgbClr val="A1A1AA"/>
+                </a:solidFill>
+                <a:latin typeface="Segoe UI"/>
+              </a:defRPr>
+            </a:pPr>
+            <a:r>
+              <a:t>•  Deterministic Splitting: Globally seeded with RANDOM_SEED = 42.</a:t>
+            </a:r>
+          </a:p>
+          <a:p>
+            <a:pPr>
+              <a:defRPr sz="1000">
+                <a:solidFill>
+                  <a:srgbClr val="A1A1AA"/>
+                </a:solidFill>
+                <a:latin typeface="Segoe UI"/>
+              </a:defRPr>
+            </a:pPr>
+            <a:r>
+              <a:t>•  Memory Disjointness: Validated via pytest asserting disjoint index arrays.</a:t>
+            </a:r>
+          </a:p>
+        </p:txBody>
+      </p:sp>
+      <p:sp>
+        <p:nvSpPr>
+          <p:cNvPr id="6" name="Rectangle 5"/>
+          <p:cNvSpPr/>
           <p:nvPr/>
-        </p:nvGraphicFramePr>
-        <p:xfrm>
-          <a:off x="1005840" y="2103120"/>
-          <a:ext cx="10149840" cy="3474720"/>
-        </p:xfrm>
-        <a:graphic>
-          <a:graphicData uri="http://schemas.openxmlformats.org/drawingml/2006/table">
-            <a:tbl>
-              <a:tblPr firstRow="1" bandRow="1">
-                <a:tableStyleId>{5C22544A-7EE6-4342-B048-85BDC9FD1C3A}</a:tableStyleId>
-              </a:tblPr>
-              <a:tblGrid>
-                <a:gridCol w="1691640"/>
-                <a:gridCol w="1691640"/>
-                <a:gridCol w="1691640"/>
-                <a:gridCol w="1691640"/>
-                <a:gridCol w="1691640"/>
-                <a:gridCol w="1691640"/>
-              </a:tblGrid>
-              <a:tr h="579120">
-                <a:tc>
-                  <a:txBody>
-                    <a:bodyPr/>
-                    <a:lstStyle/>
-                    <a:p>
-                      <a:pPr>
-                        <a:defRPr sz="1000" b="1">
-                          <a:solidFill>
-                            <a:srgbClr val="1DB954"/>
-                          </a:solidFill>
-                          <a:latin typeface="Segoe UI"/>
-                        </a:defRPr>
-                      </a:pPr>
-                      <a:r>
-                        <a:t>Model Architecture</a:t>
-                      </a:r>
-                    </a:p>
-                  </a:txBody>
-                  <a:tcPr>
-                    <a:solidFill>
-                      <a:srgbClr val="0A0A0A"/>
-                    </a:solidFill>
-                  </a:tcPr>
-                </a:tc>
-                <a:tc>
-                  <a:txBody>
-                    <a:bodyPr/>
-                    <a:lstStyle/>
-                    <a:p>
-                      <a:pPr>
-                        <a:defRPr sz="1000" b="1">
-                          <a:solidFill>
-                            <a:srgbClr val="1DB954"/>
-                          </a:solidFill>
-                          <a:latin typeface="Segoe UI"/>
-                        </a:defRPr>
-                      </a:pPr>
-                      <a:r>
-                        <a:t>Test Accuracy</a:t>
-                      </a:r>
-                    </a:p>
-                  </a:txBody>
-                  <a:tcPr>
-                    <a:solidFill>
-                      <a:srgbClr val="0A0A0A"/>
-                    </a:solidFill>
-                  </a:tcPr>
-                </a:tc>
-                <a:tc>
-                  <a:txBody>
-                    <a:bodyPr/>
-                    <a:lstStyle/>
-                    <a:p>
-                      <a:pPr>
-                        <a:defRPr sz="1000" b="1">
-                          <a:solidFill>
-                            <a:srgbClr val="1DB954"/>
-                          </a:solidFill>
-                          <a:latin typeface="Segoe UI"/>
-                        </a:defRPr>
-                      </a:pPr>
-                      <a:r>
-                        <a:t>Macro F1</a:t>
-                      </a:r>
-                    </a:p>
-                  </a:txBody>
-                  <a:tcPr>
-                    <a:solidFill>
-                      <a:srgbClr val="0A0A0A"/>
-                    </a:solidFill>
-                  </a:tcPr>
-                </a:tc>
-                <a:tc>
-                  <a:txBody>
-                    <a:bodyPr/>
-                    <a:lstStyle/>
-                    <a:p>
-                      <a:pPr>
-                        <a:defRPr sz="1000" b="1">
-                          <a:solidFill>
-                            <a:srgbClr val="1DB954"/>
-                          </a:solidFill>
-                          <a:latin typeface="Segoe UI"/>
-                        </a:defRPr>
-                      </a:pPr>
-                      <a:r>
-                        <a:t>ECE (Calibration)</a:t>
-                      </a:r>
-                    </a:p>
-                  </a:txBody>
-                  <a:tcPr>
-                    <a:solidFill>
-                      <a:srgbClr val="0A0A0A"/>
-                    </a:solidFill>
-                  </a:tcPr>
-                </a:tc>
-                <a:tc>
-                  <a:txBody>
-                    <a:bodyPr/>
-                    <a:lstStyle/>
-                    <a:p>
-                      <a:pPr>
-                        <a:defRPr sz="1000" b="1">
-                          <a:solidFill>
-                            <a:srgbClr val="1DB954"/>
-                          </a:solidFill>
-                          <a:latin typeface="Segoe UI"/>
-                        </a:defRPr>
-                      </a:pPr>
-                      <a:r>
-                        <a:t>Mean Latency</a:t>
-                      </a:r>
-                    </a:p>
-                  </a:txBody>
-                  <a:tcPr>
-                    <a:solidFill>
-                      <a:srgbClr val="0A0A0A"/>
-                    </a:solidFill>
-                  </a:tcPr>
-                </a:tc>
-                <a:tc>
-                  <a:txBody>
-                    <a:bodyPr/>
-                    <a:lstStyle/>
-                    <a:p>
-                      <a:pPr>
-                        <a:defRPr sz="1000" b="1">
-                          <a:solidFill>
-                            <a:srgbClr val="1DB954"/>
-                          </a:solidFill>
-                          <a:latin typeface="Segoe UI"/>
-                        </a:defRPr>
-                      </a:pPr>
-                      <a:r>
-                        <a:t>Throughput</a:t>
-                      </a:r>
-                    </a:p>
-                  </a:txBody>
-                  <a:tcPr>
-                    <a:solidFill>
-                      <a:srgbClr val="0A0A0A"/>
-                    </a:solidFill>
-                  </a:tcPr>
-                </a:tc>
-              </a:tr>
-              <a:tr h="579120">
-                <a:tc>
-                  <a:txBody>
-                    <a:bodyPr/>
-                    <a:lstStyle/>
-                    <a:p>
-                      <a:pPr>
-                        <a:defRPr sz="1000">
-                          <a:solidFill>
-                            <a:srgbClr val="FFFFFF"/>
-                          </a:solidFill>
-                          <a:latin typeface="Consolas"/>
-                        </a:defRPr>
-                      </a:pPr>
-                      <a:r>
-                        <a:t>DigitVision-DeepConvNet</a:t>
-                      </a:r>
-                    </a:p>
-                  </a:txBody>
-                  <a:tcPr>
-                    <a:solidFill>
-                      <a:srgbClr val="121212"/>
-                    </a:solidFill>
-                  </a:tcPr>
-                </a:tc>
-                <a:tc>
-                  <a:txBody>
-                    <a:bodyPr/>
-                    <a:lstStyle/>
-                    <a:p>
-                      <a:pPr>
-                        <a:defRPr sz="1000" b="1">
-                          <a:solidFill>
-                            <a:srgbClr val="1DB954"/>
-                          </a:solidFill>
-                          <a:latin typeface="Consolas"/>
-                        </a:defRPr>
-                      </a:pPr>
-                      <a:r>
-                        <a:t>98.22%</a:t>
-                      </a:r>
-                    </a:p>
-                  </a:txBody>
-                  <a:tcPr>
-                    <a:solidFill>
-                      <a:srgbClr val="121212"/>
-                    </a:solidFill>
-                  </a:tcPr>
-                </a:tc>
-                <a:tc>
-                  <a:txBody>
-                    <a:bodyPr/>
-                    <a:lstStyle/>
-                    <a:p>
-                      <a:pPr>
-                        <a:defRPr sz="1000">
-                          <a:solidFill>
-                            <a:srgbClr val="A1A1AA"/>
-                          </a:solidFill>
-                          <a:latin typeface="Consolas"/>
-                        </a:defRPr>
-                      </a:pPr>
-                      <a:r>
-                        <a:t>0.9821</a:t>
-                      </a:r>
-                    </a:p>
-                  </a:txBody>
-                  <a:tcPr>
-                    <a:solidFill>
-                      <a:srgbClr val="121212"/>
-                    </a:solidFill>
-                  </a:tcPr>
-                </a:tc>
-                <a:tc>
-                  <a:txBody>
-                    <a:bodyPr/>
-                    <a:lstStyle/>
-                    <a:p>
-                      <a:pPr>
-                        <a:defRPr sz="1000">
-                          <a:solidFill>
-                            <a:srgbClr val="A1A1AA"/>
-                          </a:solidFill>
-                          <a:latin typeface="Consolas"/>
-                        </a:defRPr>
-                      </a:pPr>
-                      <a:r>
-                        <a:t>0.0041</a:t>
-                      </a:r>
-                    </a:p>
-                  </a:txBody>
-                  <a:tcPr>
-                    <a:solidFill>
-                      <a:srgbClr val="121212"/>
-                    </a:solidFill>
-                  </a:tcPr>
-                </a:tc>
-                <a:tc>
-                  <a:txBody>
-                    <a:bodyPr/>
-                    <a:lstStyle/>
-                    <a:p>
-                      <a:pPr>
-                        <a:defRPr sz="1000">
-                          <a:solidFill>
-                            <a:srgbClr val="A1A1AA"/>
-                          </a:solidFill>
-                          <a:latin typeface="Consolas"/>
-                        </a:defRPr>
-                      </a:pPr>
-                      <a:r>
-                        <a:t>27.66 ms</a:t>
-                      </a:r>
-                    </a:p>
-                  </a:txBody>
-                  <a:tcPr>
-                    <a:solidFill>
-                      <a:srgbClr val="121212"/>
-                    </a:solidFill>
-                  </a:tcPr>
-                </a:tc>
-                <a:tc>
-                  <a:txBody>
-                    <a:bodyPr/>
-                    <a:lstStyle/>
-                    <a:p>
-                      <a:pPr>
-                        <a:defRPr sz="1000">
-                          <a:solidFill>
-                            <a:srgbClr val="A1A1AA"/>
-                          </a:solidFill>
-                          <a:latin typeface="Consolas"/>
-                        </a:defRPr>
-                      </a:pPr>
-                      <a:r>
-                        <a:t>36.1 / s</a:t>
-                      </a:r>
-                    </a:p>
-                  </a:txBody>
-                  <a:tcPr>
-                    <a:solidFill>
-                      <a:srgbClr val="121212"/>
-                    </a:solidFill>
-                  </a:tcPr>
-                </a:tc>
-              </a:tr>
-              <a:tr h="579120">
-                <a:tc>
-                  <a:txBody>
-                    <a:bodyPr/>
-                    <a:lstStyle/>
-                    <a:p>
-                      <a:pPr>
-                        <a:defRPr sz="1000">
-                          <a:solidFill>
-                            <a:srgbClr val="FFFFFF"/>
-                          </a:solidFill>
-                          <a:latin typeface="Consolas"/>
-                        </a:defRPr>
-                      </a:pPr>
-                      <a:r>
-                        <a:t>LeNet-5</a:t>
-                      </a:r>
-                    </a:p>
-                  </a:txBody>
-                  <a:tcPr>
-                    <a:solidFill>
-                      <a:srgbClr val="121212"/>
-                    </a:solidFill>
-                  </a:tcPr>
-                </a:tc>
-                <a:tc>
-                  <a:txBody>
-                    <a:bodyPr/>
-                    <a:lstStyle/>
-                    <a:p>
-                      <a:pPr>
-                        <a:defRPr sz="1000" b="1">
-                          <a:solidFill>
-                            <a:srgbClr val="1DB954"/>
-                          </a:solidFill>
-                          <a:latin typeface="Consolas"/>
-                        </a:defRPr>
-                      </a:pPr>
-                      <a:r>
-                        <a:t>96.57%</a:t>
-                      </a:r>
-                    </a:p>
-                  </a:txBody>
-                  <a:tcPr>
-                    <a:solidFill>
-                      <a:srgbClr val="121212"/>
-                    </a:solidFill>
-                  </a:tcPr>
-                </a:tc>
-                <a:tc>
-                  <a:txBody>
-                    <a:bodyPr/>
-                    <a:lstStyle/>
-                    <a:p>
-                      <a:pPr>
-                        <a:defRPr sz="1000">
-                          <a:solidFill>
-                            <a:srgbClr val="A1A1AA"/>
-                          </a:solidFill>
-                          <a:latin typeface="Consolas"/>
-                        </a:defRPr>
-                      </a:pPr>
-                      <a:r>
-                        <a:t>0.9655</a:t>
-                      </a:r>
-                    </a:p>
-                  </a:txBody>
-                  <a:tcPr>
-                    <a:solidFill>
-                      <a:srgbClr val="121212"/>
-                    </a:solidFill>
-                  </a:tcPr>
-                </a:tc>
-                <a:tc>
-                  <a:txBody>
-                    <a:bodyPr/>
-                    <a:lstStyle/>
-                    <a:p>
-                      <a:pPr>
-                        <a:defRPr sz="1000">
-                          <a:solidFill>
-                            <a:srgbClr val="A1A1AA"/>
-                          </a:solidFill>
-                          <a:latin typeface="Consolas"/>
-                        </a:defRPr>
-                      </a:pPr>
-                      <a:r>
-                        <a:t>0.0106</a:t>
-                      </a:r>
-                    </a:p>
-                  </a:txBody>
-                  <a:tcPr>
-                    <a:solidFill>
-                      <a:srgbClr val="121212"/>
-                    </a:solidFill>
-                  </a:tcPr>
-                </a:tc>
-                <a:tc>
-                  <a:txBody>
-                    <a:bodyPr/>
-                    <a:lstStyle/>
-                    <a:p>
-                      <a:pPr>
-                        <a:defRPr sz="1000">
-                          <a:solidFill>
-                            <a:srgbClr val="A1A1AA"/>
-                          </a:solidFill>
-                          <a:latin typeface="Consolas"/>
-                        </a:defRPr>
-                      </a:pPr>
-                      <a:r>
-                        <a:t>15.96 ms</a:t>
-                      </a:r>
-                    </a:p>
-                  </a:txBody>
-                  <a:tcPr>
-                    <a:solidFill>
-                      <a:srgbClr val="121212"/>
-                    </a:solidFill>
-                  </a:tcPr>
-                </a:tc>
-                <a:tc>
-                  <a:txBody>
-                    <a:bodyPr/>
-                    <a:lstStyle/>
-                    <a:p>
-                      <a:pPr>
-                        <a:defRPr sz="1000">
-                          <a:solidFill>
-                            <a:srgbClr val="A1A1AA"/>
-                          </a:solidFill>
-                          <a:latin typeface="Consolas"/>
-                        </a:defRPr>
-                      </a:pPr>
-                      <a:r>
-                        <a:t>62.7 / s</a:t>
-                      </a:r>
-                    </a:p>
-                  </a:txBody>
-                  <a:tcPr>
-                    <a:solidFill>
-                      <a:srgbClr val="121212"/>
-                    </a:solidFill>
-                  </a:tcPr>
-                </a:tc>
-              </a:tr>
-              <a:tr h="579120">
-                <a:tc>
-                  <a:txBody>
-                    <a:bodyPr/>
-                    <a:lstStyle/>
-                    <a:p>
-                      <a:pPr>
-                        <a:defRPr sz="1000">
-                          <a:solidFill>
-                            <a:srgbClr val="FFFFFF"/>
-                          </a:solidFill>
-                          <a:latin typeface="Consolas"/>
-                        </a:defRPr>
-                      </a:pPr>
-                      <a:r>
-                        <a:t>SVM-RBF</a:t>
-                      </a:r>
-                    </a:p>
-                  </a:txBody>
-                  <a:tcPr>
-                    <a:solidFill>
-                      <a:srgbClr val="121212"/>
-                    </a:solidFill>
-                  </a:tcPr>
-                </a:tc>
-                <a:tc>
-                  <a:txBody>
-                    <a:bodyPr/>
-                    <a:lstStyle/>
-                    <a:p>
-                      <a:pPr>
-                        <a:defRPr sz="1000" b="1">
-                          <a:solidFill>
-                            <a:srgbClr val="1DB954"/>
-                          </a:solidFill>
-                          <a:latin typeface="Consolas"/>
-                        </a:defRPr>
-                      </a:pPr>
-                      <a:r>
-                        <a:t>96.11%</a:t>
-                      </a:r>
-                    </a:p>
-                  </a:txBody>
-                  <a:tcPr>
-                    <a:solidFill>
-                      <a:srgbClr val="121212"/>
-                    </a:solidFill>
-                  </a:tcPr>
-                </a:tc>
-                <a:tc>
-                  <a:txBody>
-                    <a:bodyPr/>
-                    <a:lstStyle/>
-                    <a:p>
-                      <a:pPr>
-                        <a:defRPr sz="1000">
-                          <a:solidFill>
-                            <a:srgbClr val="A1A1AA"/>
-                          </a:solidFill>
-                          <a:latin typeface="Consolas"/>
-                        </a:defRPr>
-                      </a:pPr>
-                      <a:r>
-                        <a:t>0.9607</a:t>
-                      </a:r>
-                    </a:p>
-                  </a:txBody>
-                  <a:tcPr>
-                    <a:solidFill>
-                      <a:srgbClr val="121212"/>
-                    </a:solidFill>
-                  </a:tcPr>
-                </a:tc>
-                <a:tc>
-                  <a:txBody>
-                    <a:bodyPr/>
-                    <a:lstStyle/>
-                    <a:p>
-                      <a:pPr>
-                        <a:defRPr sz="1000">
-                          <a:solidFill>
-                            <a:srgbClr val="A1A1AA"/>
-                          </a:solidFill>
-                          <a:latin typeface="Consolas"/>
-                        </a:defRPr>
-                      </a:pPr>
-                      <a:r>
-                        <a:t>0.0217</a:t>
-                      </a:r>
-                    </a:p>
-                  </a:txBody>
-                  <a:tcPr>
-                    <a:solidFill>
-                      <a:srgbClr val="121212"/>
-                    </a:solidFill>
-                  </a:tcPr>
-                </a:tc>
-                <a:tc>
-                  <a:txBody>
-                    <a:bodyPr/>
-                    <a:lstStyle/>
-                    <a:p>
-                      <a:pPr>
-                        <a:defRPr sz="1000">
-                          <a:solidFill>
-                            <a:srgbClr val="A1A1AA"/>
-                          </a:solidFill>
-                          <a:latin typeface="Consolas"/>
-                        </a:defRPr>
-                      </a:pPr>
-                      <a:r>
-                        <a:t>1.02 ms</a:t>
-                      </a:r>
-                    </a:p>
-                  </a:txBody>
-                  <a:tcPr>
-                    <a:solidFill>
-                      <a:srgbClr val="121212"/>
-                    </a:solidFill>
-                  </a:tcPr>
-                </a:tc>
-                <a:tc>
-                  <a:txBody>
-                    <a:bodyPr/>
-                    <a:lstStyle/>
-                    <a:p>
-                      <a:pPr>
-                        <a:defRPr sz="1000">
-                          <a:solidFill>
-                            <a:srgbClr val="A1A1AA"/>
-                          </a:solidFill>
-                          <a:latin typeface="Consolas"/>
-                        </a:defRPr>
-                      </a:pPr>
-                      <a:r>
-                        <a:t>982.6 / s</a:t>
-                      </a:r>
-                    </a:p>
-                  </a:txBody>
-                  <a:tcPr>
-                    <a:solidFill>
-                      <a:srgbClr val="121212"/>
-                    </a:solidFill>
-                  </a:tcPr>
-                </a:tc>
-              </a:tr>
-              <a:tr h="579120">
-                <a:tc>
-                  <a:txBody>
-                    <a:bodyPr/>
-                    <a:lstStyle/>
-                    <a:p>
-                      <a:pPr>
-                        <a:defRPr sz="1000">
-                          <a:solidFill>
-                            <a:srgbClr val="FFFFFF"/>
-                          </a:solidFill>
-                          <a:latin typeface="Consolas"/>
-                        </a:defRPr>
-                      </a:pPr>
-                      <a:r>
-                        <a:t>Random-Forest</a:t>
-                      </a:r>
-                    </a:p>
-                  </a:txBody>
-                  <a:tcPr>
-                    <a:solidFill>
-                      <a:srgbClr val="121212"/>
-                    </a:solidFill>
-                  </a:tcPr>
-                </a:tc>
-                <a:tc>
-                  <a:txBody>
-                    <a:bodyPr/>
-                    <a:lstStyle/>
-                    <a:p>
-                      <a:pPr>
-                        <a:defRPr sz="1000" b="1">
-                          <a:solidFill>
-                            <a:srgbClr val="1DB954"/>
-                          </a:solidFill>
-                          <a:latin typeface="Consolas"/>
-                        </a:defRPr>
-                      </a:pPr>
-                      <a:r>
-                        <a:t>95.48%</a:t>
-                      </a:r>
-                    </a:p>
-                  </a:txBody>
-                  <a:tcPr>
-                    <a:solidFill>
-                      <a:srgbClr val="121212"/>
-                    </a:solidFill>
-                  </a:tcPr>
-                </a:tc>
-                <a:tc>
-                  <a:txBody>
-                    <a:bodyPr/>
-                    <a:lstStyle/>
-                    <a:p>
-                      <a:pPr>
-                        <a:defRPr sz="1000">
-                          <a:solidFill>
-                            <a:srgbClr val="A1A1AA"/>
-                          </a:solidFill>
-                          <a:latin typeface="Consolas"/>
-                        </a:defRPr>
-                      </a:pPr>
-                      <a:r>
-                        <a:t>0.9543</a:t>
-                      </a:r>
-                    </a:p>
-                  </a:txBody>
-                  <a:tcPr>
-                    <a:solidFill>
-                      <a:srgbClr val="121212"/>
-                    </a:solidFill>
-                  </a:tcPr>
-                </a:tc>
-                <a:tc>
-                  <a:txBody>
-                    <a:bodyPr/>
-                    <a:lstStyle/>
-                    <a:p>
-                      <a:pPr>
-                        <a:defRPr sz="1000">
-                          <a:solidFill>
-                            <a:srgbClr val="A1A1AA"/>
-                          </a:solidFill>
-                          <a:latin typeface="Consolas"/>
-                        </a:defRPr>
-                      </a:pPr>
-                      <a:r>
-                        <a:t>0.1918</a:t>
-                      </a:r>
-                    </a:p>
-                  </a:txBody>
-                  <a:tcPr>
-                    <a:solidFill>
-                      <a:srgbClr val="121212"/>
-                    </a:solidFill>
-                  </a:tcPr>
-                </a:tc>
-                <a:tc>
-                  <a:txBody>
-                    <a:bodyPr/>
-                    <a:lstStyle/>
-                    <a:p>
-                      <a:pPr>
-                        <a:defRPr sz="1000">
-                          <a:solidFill>
-                            <a:srgbClr val="A1A1AA"/>
-                          </a:solidFill>
-                          <a:latin typeface="Consolas"/>
-                        </a:defRPr>
-                      </a:pPr>
-                      <a:r>
-                        <a:t>19.19 ms</a:t>
-                      </a:r>
-                    </a:p>
-                  </a:txBody>
-                  <a:tcPr>
-                    <a:solidFill>
-                      <a:srgbClr val="121212"/>
-                    </a:solidFill>
-                  </a:tcPr>
-                </a:tc>
-                <a:tc>
-                  <a:txBody>
-                    <a:bodyPr/>
-                    <a:lstStyle/>
-                    <a:p>
-                      <a:pPr>
-                        <a:defRPr sz="1000">
-                          <a:solidFill>
-                            <a:srgbClr val="A1A1AA"/>
-                          </a:solidFill>
-                          <a:latin typeface="Consolas"/>
-                        </a:defRPr>
-                      </a:pPr>
-                      <a:r>
-                        <a:t>52.1 / s</a:t>
-                      </a:r>
-                    </a:p>
-                  </a:txBody>
-                  <a:tcPr>
-                    <a:solidFill>
-                      <a:srgbClr val="121212"/>
-                    </a:solidFill>
-                  </a:tcPr>
-                </a:tc>
-              </a:tr>
-              <a:tr h="579120">
-                <a:tc>
-                  <a:txBody>
-                    <a:bodyPr/>
-                    <a:lstStyle/>
-                    <a:p>
-                      <a:pPr>
-                        <a:defRPr sz="1000">
-                          <a:solidFill>
-                            <a:srgbClr val="FFFFFF"/>
-                          </a:solidFill>
-                          <a:latin typeface="Consolas"/>
-                        </a:defRPr>
-                      </a:pPr>
-                      <a:r>
-                        <a:t>Logistic-Regression</a:t>
-                      </a:r>
-                    </a:p>
-                  </a:txBody>
-                  <a:tcPr>
-                    <a:solidFill>
-                      <a:srgbClr val="121212"/>
-                    </a:solidFill>
-                  </a:tcPr>
-                </a:tc>
-                <a:tc>
-                  <a:txBody>
-                    <a:bodyPr/>
-                    <a:lstStyle/>
-                    <a:p>
-                      <a:pPr>
-                        <a:defRPr sz="1000" b="1">
-                          <a:solidFill>
-                            <a:srgbClr val="1DB954"/>
-                          </a:solidFill>
-                          <a:latin typeface="Consolas"/>
-                        </a:defRPr>
-                      </a:pPr>
-                      <a:r>
-                        <a:t>91.49%</a:t>
-                      </a:r>
-                    </a:p>
-                  </a:txBody>
-                  <a:tcPr>
-                    <a:solidFill>
-                      <a:srgbClr val="121212"/>
-                    </a:solidFill>
-                  </a:tcPr>
-                </a:tc>
-                <a:tc>
-                  <a:txBody>
-                    <a:bodyPr/>
-                    <a:lstStyle/>
-                    <a:p>
-                      <a:pPr>
-                        <a:defRPr sz="1000">
-                          <a:solidFill>
-                            <a:srgbClr val="A1A1AA"/>
-                          </a:solidFill>
-                          <a:latin typeface="Consolas"/>
-                        </a:defRPr>
-                      </a:pPr>
-                      <a:r>
-                        <a:t>0.9137</a:t>
-                      </a:r>
-                    </a:p>
-                  </a:txBody>
-                  <a:tcPr>
-                    <a:solidFill>
-                      <a:srgbClr val="121212"/>
-                    </a:solidFill>
-                  </a:tcPr>
-                </a:tc>
-                <a:tc>
-                  <a:txBody>
-                    <a:bodyPr/>
-                    <a:lstStyle/>
-                    <a:p>
-                      <a:pPr>
-                        <a:defRPr sz="1000">
-                          <a:solidFill>
-                            <a:srgbClr val="A1A1AA"/>
-                          </a:solidFill>
-                          <a:latin typeface="Consolas"/>
-                        </a:defRPr>
-                      </a:pPr>
-                      <a:r>
-                        <a:t>0.0113</a:t>
-                      </a:r>
-                    </a:p>
-                  </a:txBody>
-                  <a:tcPr>
-                    <a:solidFill>
-                      <a:srgbClr val="121212"/>
-                    </a:solidFill>
-                  </a:tcPr>
-                </a:tc>
-                <a:tc>
-                  <a:txBody>
-                    <a:bodyPr/>
-                    <a:lstStyle/>
-                    <a:p>
-                      <a:pPr>
-                        <a:defRPr sz="1000">
-                          <a:solidFill>
-                            <a:srgbClr val="A1A1AA"/>
-                          </a:solidFill>
-                          <a:latin typeface="Consolas"/>
-                        </a:defRPr>
-                      </a:pPr>
-                      <a:r>
-                        <a:t>0.05 ms</a:t>
-                      </a:r>
-                    </a:p>
-                  </a:txBody>
-                  <a:tcPr>
-                    <a:solidFill>
-                      <a:srgbClr val="121212"/>
-                    </a:solidFill>
-                  </a:tcPr>
-                </a:tc>
-                <a:tc>
-                  <a:txBody>
-                    <a:bodyPr/>
-                    <a:lstStyle/>
-                    <a:p>
-                      <a:pPr>
-                        <a:defRPr sz="1000">
-                          <a:solidFill>
-                            <a:srgbClr val="A1A1AA"/>
-                          </a:solidFill>
-                          <a:latin typeface="Consolas"/>
-                        </a:defRPr>
-                      </a:pPr>
-                      <a:r>
-                        <a:t>21969.3 / s</a:t>
-                      </a:r>
-                    </a:p>
-                  </a:txBody>
-                  <a:tcPr>
-                    <a:solidFill>
-                      <a:srgbClr val="121212"/>
-                    </a:solidFill>
-                  </a:tcPr>
-                </a:tc>
-              </a:tr>
-            </a:tbl>
-          </a:graphicData>
-        </a:graphic>
-      </p:graphicFrame>
+        </p:nvSpPr>
+        <p:spPr>
+          <a:xfrm>
+            <a:off x="6217920" y="1371600"/>
+            <a:ext cx="5212080" cy="4846320"/>
+          </a:xfrm>
+          <a:prstGeom prst="rect">
+            <a:avLst/>
+          </a:prstGeom>
+          <a:solidFill>
+            <a:srgbClr val="121212"/>
+          </a:solidFill>
+          <a:ln w="12700">
+            <a:solidFill>
+              <a:srgbClr val="262626"/>
+            </a:solidFill>
+          </a:ln>
+        </p:spPr>
+        <p:style>
+          <a:lnRef idx="1">
+            <a:schemeClr val="accent1"/>
+          </a:lnRef>
+          <a:fillRef idx="3">
+            <a:schemeClr val="accent1"/>
+          </a:fillRef>
+          <a:effectRef idx="2">
+            <a:schemeClr val="accent1"/>
+          </a:effectRef>
+          <a:fontRef idx="minor">
+            <a:schemeClr val="lt1"/>
+          </a:fontRef>
+        </p:style>
+        <p:txBody>
+          <a:bodyPr rtlCol="0" anchor="ctr"/>
+          <a:lstStyle/>
+          <a:p>
+            <a:pPr algn="ctr"/>
+          </a:p>
+        </p:txBody>
+      </p:sp>
+      <p:sp>
+        <p:nvSpPr>
+          <p:cNvPr id="7" name="TextBox 6"/>
+          <p:cNvSpPr txBox="1"/>
+          <p:nvPr/>
+        </p:nvSpPr>
+        <p:spPr>
+          <a:xfrm>
+            <a:off x="6400800" y="1508760"/>
+            <a:ext cx="4846320" cy="320040"/>
+          </a:xfrm>
+          <a:prstGeom prst="rect">
+            <a:avLst/>
+          </a:prstGeom>
+          <a:noFill/>
+        </p:spPr>
+        <p:txBody>
+          <a:bodyPr wrap="square" lIns="0" tIns="0" rIns="0" bIns="0">
+            <a:spAutoFit/>
+          </a:bodyPr>
+          <a:lstStyle/>
+          <a:p>
+            <a:pPr>
+              <a:defRPr sz="1000" b="1">
+                <a:solidFill>
+                  <a:srgbClr val="A1A1AA"/>
+                </a:solidFill>
+                <a:latin typeface="Consolas"/>
+              </a:defRPr>
+            </a:pPr>
+            <a:r>
+              <a:t>EMPIRICAL SAMPLE GRID (ARTIFACTS/DATA/SAMPLE_IMAGE_GRID.PNG)</a:t>
+            </a:r>
+          </a:p>
+        </p:txBody>
+      </p:sp>
+      <p:pic>
+        <p:nvPicPr>
+          <p:cNvPr id="8" name="Picture 7" descr="sample_image_grid.png"/>
+          <p:cNvPicPr>
+            <a:picLocks noChangeAspect="1"/>
+          </p:cNvPicPr>
+          <p:nvPr/>
+        </p:nvPicPr>
+        <p:blipFill>
+          <a:blip r:embed="rId2"/>
+          <a:stretch>
+            <a:fillRect/>
+          </a:stretch>
+        </p:blipFill>
+        <p:spPr>
+          <a:xfrm>
+            <a:off x="6400800" y="1920240"/>
+            <a:ext cx="4846320" cy="4846320"/>
+          </a:xfrm>
+          <a:prstGeom prst="rect">
+            <a:avLst/>
+          </a:prstGeom>
+        </p:spPr>
+      </p:pic>
     </p:spTree>
   </p:cSld>
   <p:clrMapOvr>
@@ -7039,7 +7284,7 @@
         <p:spPr>
           <a:xfrm>
             <a:off x="731520" y="365760"/>
-            <a:ext cx="10698480" cy="914400"/>
+            <a:ext cx="10698480" cy="822960"/>
           </a:xfrm>
           <a:prstGeom prst="rect">
             <a:avLst/>
@@ -7057,24 +7302,24 @@
                 <a:solidFill>
                   <a:srgbClr val="1DB954"/>
                 </a:solidFill>
+                <a:latin typeface="Consolas"/>
+              </a:defRPr>
+            </a:pPr>
+            <a:r>
+              <a:t>DATASET ATTRIBUTES</a:t>
+            </a:r>
+          </a:p>
+          <a:p>
+            <a:pPr>
+              <a:defRPr sz="1800" b="1">
+                <a:solidFill>
+                  <a:srgbClr val="FFFFFF"/>
+                </a:solidFill>
                 <a:latin typeface="Segoe UI"/>
               </a:defRPr>
             </a:pPr>
             <a:r>
-              <a:t>DIGITVISION AI — SCIENTIFIC RESEARCH BRIEF</a:t>
-            </a:r>
-          </a:p>
-          <a:p>
-            <a:pPr>
-              <a:defRPr sz="1800" b="1">
-                <a:solidFill>
-                  <a:srgbClr val="FFFFFF"/>
-                </a:solidFill>
-                <a:latin typeface="Segoe UI"/>
-              </a:defRPr>
-            </a:pPr>
-            <a:r>
-              <a:t>UNCERTAINTY CALIBRATION &amp; DECISION THEORY</a:t>
+              <a:t>MATHEMATICAL FEATURE SPACES &amp; PIXEL INTENSITY MOMENTS</a:t>
             </a:r>
           </a:p>
         </p:txBody>
@@ -7087,8 +7332,8 @@
         </p:nvSpPr>
         <p:spPr>
           <a:xfrm>
-            <a:off x="731520" y="1463040"/>
-            <a:ext cx="5120640" cy="4572000"/>
+            <a:off x="731520" y="1371600"/>
+            <a:ext cx="5212080" cy="4846320"/>
           </a:xfrm>
           <a:prstGeom prst="rect">
             <a:avLst/>
@@ -7132,8 +7377,8 @@
         </p:nvSpPr>
         <p:spPr>
           <a:xfrm>
-            <a:off x="914400" y="1600200"/>
-            <a:ext cx="4754879" cy="365760"/>
+            <a:off x="914400" y="1508760"/>
+            <a:ext cx="4846320" cy="320040"/>
           </a:xfrm>
           <a:prstGeom prst="rect">
             <a:avLst/>
@@ -7151,11 +7396,11 @@
                 <a:solidFill>
                   <a:srgbClr val="A1A1AA"/>
                 </a:solidFill>
-                <a:latin typeface="Segoe UI"/>
-              </a:defRPr>
-            </a:pPr>
-            <a:r>
-              <a:t>TEMPERATURE SCALING CALIBRATION</a:t>
+                <a:latin typeface="Consolas"/>
+              </a:defRPr>
+            </a:pPr>
+            <a:r>
+              <a:t>MATHEMATICAL SPACES &amp; REPRESENTATIONS</a:t>
             </a:r>
           </a:p>
         </p:txBody>
@@ -7168,8 +7413,8 @@
         </p:nvSpPr>
         <p:spPr>
           <a:xfrm>
-            <a:off x="914400" y="2011680"/>
-            <a:ext cx="4754880" cy="3840480"/>
+            <a:off x="914400" y="1874519"/>
+            <a:ext cx="4846320" cy="4114800"/>
           </a:xfrm>
           <a:prstGeom prst="rect">
             <a:avLst/>
@@ -7183,14 +7428,81 @@
           <a:lstStyle/>
           <a:p>
             <a:pPr>
-              <a:defRPr b="1" sz="1200">
-                <a:solidFill>
-                  <a:srgbClr val="FFFFFF"/>
-                </a:solidFill>
-              </a:defRPr>
-            </a:pPr>
-            <a:r>
-              <a:t>Post-Hoc Probability Calibration:</a:t>
+              <a:defRPr sz="1000" b="1">
+                <a:solidFill>
+                  <a:srgbClr val="1DB954"/>
+                </a:solidFill>
+                <a:latin typeface="Consolas"/>
+              </a:defRPr>
+            </a:pPr>
+            <a:r>
+              <a:t>FORMAL SPACES:</a:t>
+            </a:r>
+          </a:p>
+          <a:p>
+            <a:pPr>
+              <a:defRPr sz="950">
+                <a:solidFill>
+                  <a:srgbClr val="A1A1AA"/>
+                </a:solidFill>
+                <a:latin typeface="Consolas"/>
+              </a:defRPr>
+            </a:pPr>
+            <a:r>
+              <a:t>•  Image Tensor Space:  X ∈ [0.0, 1.0]^(28 × 28 × 1), dtype=float32</a:t>
+            </a:r>
+          </a:p>
+          <a:p>
+            <a:pPr>
+              <a:defRPr sz="950">
+                <a:solidFill>
+                  <a:srgbClr val="A1A1AA"/>
+                </a:solidFill>
+                <a:latin typeface="Consolas"/>
+              </a:defRPr>
+            </a:pPr>
+            <a:r>
+              <a:t>•  Flattened Feature Space:  X_flat ∈ [0.0, 1.0]^784, dtype=float32</a:t>
+            </a:r>
+          </a:p>
+          <a:p>
+            <a:pPr>
+              <a:defRPr sz="950">
+                <a:solidFill>
+                  <a:srgbClr val="A1A1AA"/>
+                </a:solidFill>
+                <a:latin typeface="Consolas"/>
+              </a:defRPr>
+            </a:pPr>
+            <a:r>
+              <a:t>•  Categorical Label Space:  y ∈ {0, 1, 2, ..., 9}, cardinality K=10</a:t>
+            </a:r>
+          </a:p>
+          <a:p>
+            <a:pPr>
+              <a:defRPr sz="950">
+                <a:solidFill>
+                  <a:srgbClr val="A1A1AA"/>
+                </a:solidFill>
+                <a:latin typeface="Consolas"/>
+              </a:defRPr>
+            </a:pPr>
+            <a:r>
+              <a:t>•  Vectorization Operator: vec: ℝ^(28×28×1) → ℝ^784 via row-major index k = i · 28 + j</a:t>
+            </a:r>
+          </a:p>
+          <a:p>
+            <a:br/>
+            <a:pPr>
+              <a:defRPr sz="1000" b="1">
+                <a:solidFill>
+                  <a:srgbClr val="FFB000"/>
+                </a:solidFill>
+                <a:latin typeface="Consolas"/>
+              </a:defRPr>
+            </a:pPr>
+            <a:r>
+              <a:t>EMPIRICAL PIXEL MOMENTS &amp; SPARSITY:</a:t>
             </a:r>
           </a:p>
           <a:p>
@@ -7199,10 +7511,11 @@
                 <a:solidFill>
                   <a:srgbClr val="A1A1AA"/>
                 </a:solidFill>
-              </a:defRPr>
-            </a:pPr>
-            <a:r>
-              <a:t>• Optimal Temperature Parameter T = 0.9482: Fitted by minimizing cross-entropy on validation logits.</a:t>
+                <a:latin typeface="Segoe UI"/>
+              </a:defRPr>
+            </a:pPr>
+            <a:r>
+              <a:t>•  Global Pixel Minimum: 0.0 (Pure Inactive Background)</a:t>
             </a:r>
           </a:p>
           <a:p>
@@ -7211,10 +7524,11 @@
                 <a:solidFill>
                   <a:srgbClr val="A1A1AA"/>
                 </a:solidFill>
-              </a:defRPr>
-            </a:pPr>
-            <a:r>
-              <a:t>• Overconfidence Mitigation: Standard modern CNNs produce uncalibrated overconfident probabilities. Scaling logits by T softens the softmax distribution without altering top-1 rankings.</a:t>
+                <a:latin typeface="Segoe UI"/>
+              </a:defRPr>
+            </a:pPr>
+            <a:r>
+              <a:t>•  Global Pixel Maximum: 1.0 (Normalized Peak Stroke Intensity)</a:t>
             </a:r>
           </a:p>
           <a:p>
@@ -7223,10 +7537,11 @@
                 <a:solidFill>
                   <a:srgbClr val="A1A1AA"/>
                 </a:solidFill>
-              </a:defRPr>
-            </a:pPr>
-            <a:r>
-              <a:t>• Expected Calibration Error (ECE): Partitions predictions into 15 confidence bins. Evaluates |acc(B_m) - conf(B_m)|.</a:t>
+                <a:latin typeface="Segoe UI"/>
+              </a:defRPr>
+            </a:pPr>
+            <a:r>
+              <a:t>•  Global Mean Intensity (μ): 0.1307</a:t>
             </a:r>
           </a:p>
           <a:p>
@@ -7235,10 +7550,37 @@
                 <a:solidFill>
                   <a:srgbClr val="A1A1AA"/>
                 </a:solidFill>
-              </a:defRPr>
-            </a:pPr>
-            <a:r>
-              <a:t>• Reliability Diagram: Demonstrates linear alignment between empirical accuracy and model confidence.</a:t>
+                <a:latin typeface="Segoe UI"/>
+              </a:defRPr>
+            </a:pPr>
+            <a:r>
+              <a:t>•  Global Standard Deviation (σ): 0.3081</a:t>
+            </a:r>
+          </a:p>
+          <a:p>
+            <a:pPr>
+              <a:defRPr sz="1000">
+                <a:solidFill>
+                  <a:srgbClr val="A1A1AA"/>
+                </a:solidFill>
+                <a:latin typeface="Segoe UI"/>
+              </a:defRPr>
+            </a:pPr>
+            <a:r>
+              <a:t>•  Pure Inactive Pixel Ratio (0.0): 80.88% of total pixel mass</a:t>
+            </a:r>
+          </a:p>
+          <a:p>
+            <a:pPr>
+              <a:defRPr sz="1000">
+                <a:solidFill>
+                  <a:srgbClr val="A1A1AA"/>
+                </a:solidFill>
+                <a:latin typeface="Segoe UI"/>
+              </a:defRPr>
+            </a:pPr>
+            <a:r>
+              <a:t>•  Active Stroke Ratio (&gt;0.05): 19.12% of total pixel mass</a:t>
             </a:r>
           </a:p>
         </p:txBody>
@@ -7251,8 +7593,8 @@
         </p:nvSpPr>
         <p:spPr>
           <a:xfrm>
-            <a:off x="6217920" y="1463040"/>
-            <a:ext cx="5212080" cy="4572000"/>
+            <a:off x="6217920" y="1371600"/>
+            <a:ext cx="5212080" cy="4846320"/>
           </a:xfrm>
           <a:prstGeom prst="rect">
             <a:avLst/>
@@ -7296,8 +7638,8 @@
         </p:nvSpPr>
         <p:spPr>
           <a:xfrm>
-            <a:off x="6400800" y="1600200"/>
-            <a:ext cx="4846320" cy="365760"/>
+            <a:off x="6400800" y="1508760"/>
+            <a:ext cx="4846320" cy="320040"/>
           </a:xfrm>
           <a:prstGeom prst="rect">
             <a:avLst/>
@@ -7315,110 +7657,39 @@
                 <a:solidFill>
                   <a:srgbClr val="A1A1AA"/>
                 </a:solidFill>
-                <a:latin typeface="Segoe UI"/>
-              </a:defRPr>
-            </a:pPr>
-            <a:r>
-              <a:t>INFORMATION-THEORETIC DECISION BOUNDARIES</a:t>
-            </a:r>
-          </a:p>
-        </p:txBody>
-      </p:sp>
-      <p:sp>
-        <p:nvSpPr>
-          <p:cNvPr id="8" name="TextBox 7"/>
-          <p:cNvSpPr txBox="1"/>
+                <a:latin typeface="Consolas"/>
+              </a:defRPr>
+            </a:pPr>
+            <a:r>
+              <a:t>INTENSITY DISTRIBUTION (ARTIFACTS/DATA/PIXEL_INTENSITY_DISTRIBUTION.PNG)</a:t>
+            </a:r>
+          </a:p>
+        </p:txBody>
+      </p:sp>
+      <p:pic>
+        <p:nvPicPr>
+          <p:cNvPr id="8" name="Picture 7" descr="pixel_intensity_distribution.png"/>
+          <p:cNvPicPr>
+            <a:picLocks noChangeAspect="1"/>
+          </p:cNvPicPr>
           <p:nvPr/>
-        </p:nvSpPr>
-        <p:spPr>
-          <a:xfrm>
-            <a:off x="6400800" y="2011680"/>
-            <a:ext cx="4846320" cy="3840480"/>
+        </p:nvPicPr>
+        <p:blipFill>
+          <a:blip r:embed="rId2"/>
+          <a:stretch>
+            <a:fillRect/>
+          </a:stretch>
+        </p:blipFill>
+        <p:spPr>
+          <a:xfrm>
+            <a:off x="6400800" y="1920240"/>
+            <a:ext cx="4846320" cy="1863969"/>
           </a:xfrm>
           <a:prstGeom prst="rect">
             <a:avLst/>
           </a:prstGeom>
-          <a:noFill/>
-        </p:spPr>
-        <p:txBody>
-          <a:bodyPr wrap="square">
-            <a:spAutoFit/>
-          </a:bodyPr>
-          <a:lstStyle/>
-          <a:p>
-            <a:pPr>
-              <a:defRPr b="1" sz="1200">
-                <a:solidFill>
-                  <a:srgbClr val="1DB954"/>
-                </a:solidFill>
-              </a:defRPr>
-            </a:pPr>
-            <a:r>
-              <a:t>Multi-Tier Verification Protocol:</a:t>
-            </a:r>
-          </a:p>
-          <a:p>
-            <a:pPr>
-              <a:defRPr sz="1000">
-                <a:solidFill>
-                  <a:srgbClr val="A1A1AA"/>
-                </a:solidFill>
-              </a:defRPr>
-            </a:pPr>
-            <a:r>
-              <a:t>• Shannon Entropy H(p): Measures predictive dispersion across 10 classes. Low entropy (&lt;0.8 bits) denotes decisive classification.</a:t>
-            </a:r>
-          </a:p>
-          <a:p>
-            <a:pPr>
-              <a:defRPr sz="1000">
-                <a:solidFill>
-                  <a:srgbClr val="A1A1AA"/>
-                </a:solidFill>
-              </a:defRPr>
-            </a:pPr>
-            <a:r>
-              <a:t>• Prediction Margin M = p_1 - p_2: Measures distance between winning class and runner-up.</a:t>
-            </a:r>
-          </a:p>
-          <a:p>
-            <a:pPr>
-              <a:defRPr sz="1000">
-                <a:solidFill>
-                  <a:srgbClr val="A1A1AA"/>
-                </a:solidFill>
-              </a:defRPr>
-            </a:pPr>
-            <a:r>
-              <a:t>• High Confidence (Green): p_1 &gt;= 0.85, M &gt;= 0.60, H(p) &lt;= 0.8 bits. Accepted for automated routing.</a:t>
-            </a:r>
-          </a:p>
-          <a:p>
-            <a:pPr>
-              <a:defRPr sz="1000">
-                <a:solidFill>
-                  <a:srgbClr val="A1A1AA"/>
-                </a:solidFill>
-              </a:defRPr>
-            </a:pPr>
-            <a:r>
-              <a:t>• Moderate Confidence (Amber): 0.50 &lt;= p_1 &lt; 0.85. Tagged with runner-up class for verification.</a:t>
-            </a:r>
-          </a:p>
-          <a:p>
-            <a:pPr>
-              <a:defRPr sz="1000">
-                <a:solidFill>
-                  <a:srgbClr val="A1A1AA"/>
-                </a:solidFill>
-              </a:defRPr>
-            </a:pPr>
-            <a:r>
-              <a:t>• Ambiguous / Low (Red): p_1 &lt; 0.50 or M &lt; 0.20 or H(p) &gt; 1.8 bits. Flagged as Out-of-Distribution (OOD).</a:t>
-            </a:r>
-          </a:p>
-        </p:txBody>
-      </p:sp>
+        </p:spPr>
+      </p:pic>
     </p:spTree>
   </p:cSld>
   <p:clrMapOvr>
@@ -7454,7 +7725,7 @@
         <p:spPr>
           <a:xfrm>
             <a:off x="731520" y="365760"/>
-            <a:ext cx="10698480" cy="914400"/>
+            <a:ext cx="10698480" cy="822960"/>
           </a:xfrm>
           <a:prstGeom prst="rect">
             <a:avLst/>
@@ -7472,24 +7743,24 @@
                 <a:solidFill>
                   <a:srgbClr val="1DB954"/>
                 </a:solidFill>
+                <a:latin typeface="Consolas"/>
+              </a:defRPr>
+            </a:pPr>
+            <a:r>
+              <a:t>EXPLORATORY DATA ANALYSIS</a:t>
+            </a:r>
+          </a:p>
+          <a:p>
+            <a:pPr>
+              <a:defRPr sz="1800" b="1">
+                <a:solidFill>
+                  <a:srgbClr val="FFFFFF"/>
+                </a:solidFill>
                 <a:latin typeface="Segoe UI"/>
               </a:defRPr>
             </a:pPr>
             <a:r>
-              <a:t>DIGITVISION AI — SCIENTIFIC RESEARCH BRIEF</a:t>
-            </a:r>
-          </a:p>
-          <a:p>
-            <a:pPr>
-              <a:defRPr sz="1800" b="1">
-                <a:solidFill>
-                  <a:srgbClr val="FFFFFF"/>
-                </a:solidFill>
-                <a:latin typeface="Segoe UI"/>
-              </a:defRPr>
-            </a:pPr>
-            <a:r>
-              <a:t>EXPLAINABLE AI (XAI): GRAD-CAM &amp; ATTRIBUTION</a:t>
+              <a:t>EMPIRICAL EXPLORATORY DATA ANALYSIS &amp; CLASS PROTOTYPES</a:t>
             </a:r>
           </a:p>
         </p:txBody>
@@ -7502,8 +7773,8 @@
         </p:nvSpPr>
         <p:spPr>
           <a:xfrm>
-            <a:off x="731520" y="1463040"/>
-            <a:ext cx="5120640" cy="4572000"/>
+            <a:off x="731520" y="1371600"/>
+            <a:ext cx="5212080" cy="4846320"/>
           </a:xfrm>
           <a:prstGeom prst="rect">
             <a:avLst/>
@@ -7547,8 +7818,8 @@
         </p:nvSpPr>
         <p:spPr>
           <a:xfrm>
-            <a:off x="914400" y="1600200"/>
-            <a:ext cx="4754879" cy="365760"/>
+            <a:off x="914400" y="1508760"/>
+            <a:ext cx="4846320" cy="320040"/>
           </a:xfrm>
           <a:prstGeom prst="rect">
             <a:avLst/>
@@ -7566,110 +7837,39 @@
                 <a:solidFill>
                   <a:srgbClr val="A1A1AA"/>
                 </a:solidFill>
-                <a:latin typeface="Segoe UI"/>
-              </a:defRPr>
-            </a:pPr>
-            <a:r>
-              <a:t>GRAD-CAM MATHEMATICAL FORMULATION</a:t>
-            </a:r>
-          </a:p>
-        </p:txBody>
-      </p:sp>
-      <p:sp>
-        <p:nvSpPr>
-          <p:cNvPr id="5" name="TextBox 4"/>
-          <p:cNvSpPr txBox="1"/>
+                <a:latin typeface="Consolas"/>
+              </a:defRPr>
+            </a:pPr>
+            <a:r>
+              <a:t>CLASS BALANCE (ARTIFACTS/DATA/CLASS_DISTRIBUTION.PNG)</a:t>
+            </a:r>
+          </a:p>
+        </p:txBody>
+      </p:sp>
+      <p:pic>
+        <p:nvPicPr>
+          <p:cNvPr id="5" name="Picture 4" descr="class_distribution.png"/>
+          <p:cNvPicPr>
+            <a:picLocks noChangeAspect="1"/>
+          </p:cNvPicPr>
           <p:nvPr/>
-        </p:nvSpPr>
-        <p:spPr>
-          <a:xfrm>
-            <a:off x="914400" y="2011680"/>
-            <a:ext cx="4754880" cy="3840480"/>
+        </p:nvPicPr>
+        <p:blipFill>
+          <a:blip r:embed="rId2"/>
+          <a:stretch>
+            <a:fillRect/>
+          </a:stretch>
+        </p:blipFill>
+        <p:spPr>
+          <a:xfrm>
+            <a:off x="914400" y="1920240"/>
+            <a:ext cx="4846320" cy="2665476"/>
           </a:xfrm>
           <a:prstGeom prst="rect">
             <a:avLst/>
           </a:prstGeom>
-          <a:noFill/>
-        </p:spPr>
-        <p:txBody>
-          <a:bodyPr wrap="square">
-            <a:spAutoFit/>
-          </a:bodyPr>
-          <a:lstStyle/>
-          <a:p>
-            <a:pPr>
-              <a:defRPr b="1" sz="1200">
-                <a:solidFill>
-                  <a:srgbClr val="1DB954"/>
-                </a:solidFill>
-              </a:defRPr>
-            </a:pPr>
-            <a:r>
-              <a:t>Gradient-Weighted Class Activation Mapping:</a:t>
-            </a:r>
-          </a:p>
-          <a:p>
-            <a:pPr>
-              <a:defRPr sz="1000">
-                <a:solidFill>
-                  <a:srgbClr val="A1A1AA"/>
-                </a:solidFill>
-              </a:defRPr>
-            </a:pPr>
-            <a:r>
-              <a:t>• Feature Map Gradients: Evaluates d(y_c) / d(A_k), the gradient of class score y_c with respect to conv layer activations A_k.</a:t>
-            </a:r>
-          </a:p>
-          <a:p>
-            <a:pPr>
-              <a:defRPr sz="1000">
-                <a:solidFill>
-                  <a:srgbClr val="A1A1AA"/>
-                </a:solidFill>
-              </a:defRPr>
-            </a:pPr>
-            <a:r>
-              <a:t>• Global Average Pooling: Computes neuron importance weight alpha_k = (1/Z) * sum(d y_c / d A_k).</a:t>
-            </a:r>
-          </a:p>
-          <a:p>
-            <a:pPr>
-              <a:defRPr sz="1000">
-                <a:solidFill>
-                  <a:srgbClr val="A1A1AA"/>
-                </a:solidFill>
-              </a:defRPr>
-            </a:pPr>
-            <a:r>
-              <a:t>• Rectified Linear Combination: L_GradCAM = ReLU( sum(alpha_k * A_k) ). Suppresses features negatively correlated with target digit.</a:t>
-            </a:r>
-          </a:p>
-          <a:p>
-            <a:pPr>
-              <a:defRPr sz="1000">
-                <a:solidFill>
-                  <a:srgbClr val="A1A1AA"/>
-                </a:solidFill>
-              </a:defRPr>
-            </a:pPr>
-            <a:r>
-              <a:t>• Target Layer Hook: Evaluated at 'conv_cam' (final 64-channel 3x3 conv block) before global average pooling.</a:t>
-            </a:r>
-          </a:p>
-          <a:p>
-            <a:pPr>
-              <a:defRPr sz="1000">
-                <a:solidFill>
-                  <a:srgbClr val="A1A1AA"/>
-                </a:solidFill>
-              </a:defRPr>
-            </a:pPr>
-            <a:r>
-              <a:t>• Visual Grounding: Overlays viridis/inferno heatmap on stroke to highlight discriminative loops, crossings, and terminals.</a:t>
-            </a:r>
-          </a:p>
-        </p:txBody>
-      </p:sp>
+        </p:spPr>
+      </p:pic>
       <p:sp>
         <p:nvSpPr>
           <p:cNvPr id="6" name="Rectangle 5"/>
@@ -7678,8 +7878,8 @@
         </p:nvSpPr>
         <p:spPr>
           <a:xfrm>
-            <a:off x="6217920" y="1463040"/>
-            <a:ext cx="5212080" cy="4572000"/>
+            <a:off x="6217920" y="1371600"/>
+            <a:ext cx="5212080" cy="4846320"/>
           </a:xfrm>
           <a:prstGeom prst="rect">
             <a:avLst/>
@@ -7723,8 +7923,8 @@
         </p:nvSpPr>
         <p:spPr>
           <a:xfrm>
-            <a:off x="6400800" y="1600200"/>
-            <a:ext cx="4846320" cy="365760"/>
+            <a:off x="6400800" y="1508760"/>
+            <a:ext cx="4846320" cy="320040"/>
           </a:xfrm>
           <a:prstGeom prst="rect">
             <a:avLst/>
@@ -7742,98 +7942,39 @@
                 <a:solidFill>
                   <a:srgbClr val="A1A1AA"/>
                 </a:solidFill>
-                <a:latin typeface="Segoe UI"/>
-              </a:defRPr>
-            </a:pPr>
-            <a:r>
-              <a:t>INPUT PIXEL SALIENCY MAPS</a:t>
-            </a:r>
-          </a:p>
-        </p:txBody>
-      </p:sp>
-      <p:sp>
-        <p:nvSpPr>
-          <p:cNvPr id="8" name="TextBox 7"/>
-          <p:cNvSpPr txBox="1"/>
+                <a:latin typeface="Consolas"/>
+              </a:defRPr>
+            </a:pPr>
+            <a:r>
+              <a:t>MEAN PROTOTYPE HEATMAPS (ARTIFACTS/DATA/AVERAGE_IMAGE_PER_CLASS.PNG)</a:t>
+            </a:r>
+          </a:p>
+        </p:txBody>
+      </p:sp>
+      <p:pic>
+        <p:nvPicPr>
+          <p:cNvPr id="8" name="Picture 7" descr="average_image_per_class.png"/>
+          <p:cNvPicPr>
+            <a:picLocks noChangeAspect="1"/>
+          </p:cNvPicPr>
           <p:nvPr/>
-        </p:nvSpPr>
-        <p:spPr>
-          <a:xfrm>
-            <a:off x="6400800" y="2011680"/>
-            <a:ext cx="4846320" cy="3840480"/>
+        </p:nvPicPr>
+        <p:blipFill>
+          <a:blip r:embed="rId3"/>
+          <a:stretch>
+            <a:fillRect/>
+          </a:stretch>
+        </p:blipFill>
+        <p:spPr>
+          <a:xfrm>
+            <a:off x="6400800" y="1920240"/>
+            <a:ext cx="4846320" cy="2221230"/>
           </a:xfrm>
           <a:prstGeom prst="rect">
             <a:avLst/>
           </a:prstGeom>
-          <a:noFill/>
-        </p:spPr>
-        <p:txBody>
-          <a:bodyPr wrap="square">
-            <a:spAutoFit/>
-          </a:bodyPr>
-          <a:lstStyle/>
-          <a:p>
-            <a:pPr>
-              <a:defRPr b="1" sz="1200">
-                <a:solidFill>
-                  <a:srgbClr val="3B82F6"/>
-                </a:solidFill>
-              </a:defRPr>
-            </a:pPr>
-            <a:r>
-              <a:t>First-Order Pixel Attribution:</a:t>
-            </a:r>
-          </a:p>
-          <a:p>
-            <a:pPr>
-              <a:defRPr sz="1000">
-                <a:solidFill>
-                  <a:srgbClr val="A1A1AA"/>
-                </a:solidFill>
-              </a:defRPr>
-            </a:pPr>
-            <a:r>
-              <a:t>• Pixel Gradient Vector: S(x) = max_c |d(y_c) / d(x_ij)| across all channels.</a:t>
-            </a:r>
-          </a:p>
-          <a:p>
-            <a:pPr>
-              <a:defRPr sz="1000">
-                <a:solidFill>
-                  <a:srgbClr val="A1A1AA"/>
-                </a:solidFill>
-              </a:defRPr>
-            </a:pPr>
-            <a:r>
-              <a:t>• Local Sensitivity: Pinpoints exact stroke inflection points where minor ink changes flip the classification.</a:t>
-            </a:r>
-          </a:p>
-          <a:p>
-            <a:pPr>
-              <a:defRPr sz="1000">
-                <a:solidFill>
-                  <a:srgbClr val="A1A1AA"/>
-                </a:solidFill>
-              </a:defRPr>
-            </a:pPr>
-            <a:r>
-              <a:t>• Complementary Modality: Saliency provides fine-grained stroke detail, while Grad-CAM provides semantic regional focus.</a:t>
-            </a:r>
-          </a:p>
-          <a:p>
-            <a:pPr>
-              <a:defRPr sz="1000">
-                <a:solidFill>
-                  <a:srgbClr val="A1A1AA"/>
-                </a:solidFill>
-              </a:defRPr>
-            </a:pPr>
-            <a:r>
-              <a:t>• Zero-Latency Extraction: Computed directly via TensorFlow GradientTape during the live inference pipeline.</a:t>
-            </a:r>
-          </a:p>
-        </p:txBody>
-      </p:sp>
+        </p:spPr>
+      </p:pic>
     </p:spTree>
   </p:cSld>
   <p:clrMapOvr>
@@ -7869,7 +8010,7 @@
         <p:spPr>
           <a:xfrm>
             <a:off x="731520" y="365760"/>
-            <a:ext cx="10698480" cy="914400"/>
+            <a:ext cx="10698480" cy="822960"/>
           </a:xfrm>
           <a:prstGeom prst="rect">
             <a:avLst/>
@@ -7887,24 +8028,24 @@
                 <a:solidFill>
                   <a:srgbClr val="1DB954"/>
                 </a:solidFill>
+                <a:latin typeface="Consolas"/>
+              </a:defRPr>
+            </a:pPr>
+            <a:r>
+              <a:t>PREPROCESSING PIPELINE</a:t>
+            </a:r>
+          </a:p>
+          <a:p>
+            <a:pPr>
+              <a:defRPr sz="1800" b="1">
+                <a:solidFill>
+                  <a:srgbClr val="FFFFFF"/>
+                </a:solidFill>
                 <a:latin typeface="Segoe UI"/>
               </a:defRPr>
             </a:pPr>
             <a:r>
-              <a:t>DIGITVISION AI — SCIENTIFIC RESEARCH BRIEF</a:t>
-            </a:r>
-          </a:p>
-          <a:p>
-            <a:pPr>
-              <a:defRPr sz="1800" b="1">
-                <a:solidFill>
-                  <a:srgbClr val="FFFFFF"/>
-                </a:solidFill>
-                <a:latin typeface="Segoe UI"/>
-              </a:defRPr>
-            </a:pPr>
-            <a:r>
-              <a:t>ERROR INTELLIGENCE &amp; SILENT FAILURE MINING</a:t>
+              <a:t>THE 10-STAGE CANONICAL PREPROCESSING INVARIANT</a:t>
             </a:r>
           </a:p>
         </p:txBody>
@@ -7917,8 +8058,8 @@
         </p:nvSpPr>
         <p:spPr>
           <a:xfrm>
-            <a:off x="731520" y="1463040"/>
-            <a:ext cx="5120640" cy="4572000"/>
+            <a:off x="731520" y="1371600"/>
+            <a:ext cx="6400800" cy="4846320"/>
           </a:xfrm>
           <a:prstGeom prst="rect">
             <a:avLst/>
@@ -7962,8 +8103,8 @@
         </p:nvSpPr>
         <p:spPr>
           <a:xfrm>
-            <a:off x="914400" y="1600200"/>
-            <a:ext cx="4754879" cy="365760"/>
+            <a:off x="914400" y="1508760"/>
+            <a:ext cx="6035040" cy="320040"/>
           </a:xfrm>
           <a:prstGeom prst="rect">
             <a:avLst/>
@@ -7981,11 +8122,11 @@
                 <a:solidFill>
                   <a:srgbClr val="A1A1AA"/>
                 </a:solidFill>
-                <a:latin typeface="Segoe UI"/>
-              </a:defRPr>
-            </a:pPr>
-            <a:r>
-              <a:t>TOP CONFUSED DIGIT PAIRS</a:t>
+                <a:latin typeface="Consolas"/>
+              </a:defRPr>
+            </a:pPr>
+            <a:r>
+              <a:t>ALGORITHMIC INVARIANT EXECUTION</a:t>
             </a:r>
           </a:p>
         </p:txBody>
@@ -7998,8 +8139,8 @@
         </p:nvSpPr>
         <p:spPr>
           <a:xfrm>
-            <a:off x="914400" y="2011680"/>
-            <a:ext cx="4754880" cy="3840480"/>
+            <a:off x="914400" y="1874519"/>
+            <a:ext cx="6035040" cy="4114800"/>
           </a:xfrm>
           <a:prstGeom prst="rect">
             <a:avLst/>
@@ -8013,74 +8154,210 @@
           <a:lstStyle/>
           <a:p>
             <a:pPr>
-              <a:defRPr b="1" sz="1200">
-                <a:solidFill>
-                  <a:srgbClr val="FFFFFF"/>
-                </a:solidFill>
-              </a:defRPr>
-            </a:pPr>
-            <a:r>
-              <a:t>Off-Diagonal Confusion Ranking:</a:t>
-            </a:r>
-          </a:p>
-          <a:p>
-            <a:pPr>
-              <a:defRPr sz="1000">
+              <a:defRPr sz="950" b="1">
+                <a:solidFill>
+                  <a:srgbClr val="1DB954"/>
+                </a:solidFill>
+                <a:latin typeface="Consolas"/>
+              </a:defRPr>
+            </a:pPr>
+            <a:r>
+              <a:t>STEP 1: MULTI-FORMAT DECODING</a:t>
+            </a:r>
+          </a:p>
+          <a:p>
+            <a:pPr>
+              <a:defRPr sz="900">
                 <a:solidFill>
                   <a:srgbClr val="A1A1AA"/>
                 </a:solidFill>
-              </a:defRPr>
-            </a:pPr>
-            <a:r>
-              <a:t>• Pair (4 vs 9): Most common morphological confusion; occurs when upper loop of 9 is flattened or top stroke of 4 connects.</a:t>
-            </a:r>
-          </a:p>
-          <a:p>
-            <a:pPr>
-              <a:defRPr sz="1000">
+                <a:latin typeface="Segoe UI"/>
+              </a:defRPr>
+            </a:pPr>
+            <a:r>
+              <a:t>Decodes Base64 data URLs, raw image bytes, PIL objects, or NumPy matrices into 2D grayscale.</a:t>
+            </a:r>
+          </a:p>
+          <a:p>
+            <a:pPr>
+              <a:defRPr sz="950" b="1">
+                <a:solidFill>
+                  <a:srgbClr val="1DB954"/>
+                </a:solidFill>
+                <a:latin typeface="Consolas"/>
+              </a:defRPr>
+            </a:pPr>
+            <a:r>
+              <a:t>STEP 2: CONTRAST &amp; BACKGROUND POLARITY</a:t>
+            </a:r>
+          </a:p>
+          <a:p>
+            <a:pPr>
+              <a:defRPr sz="900">
                 <a:solidFill>
                   <a:srgbClr val="A1A1AA"/>
                 </a:solidFill>
-              </a:defRPr>
-            </a:pPr>
-            <a:r>
-              <a:t>• Pair (3 vs 8): Occurs when gaps in the left lobes of digit 3 close due to thick ink strokes.</a:t>
-            </a:r>
-          </a:p>
-          <a:p>
-            <a:pPr>
-              <a:defRPr sz="1000">
+                <a:latin typeface="Segoe UI"/>
+              </a:defRPr>
+            </a:pPr>
+            <a:r>
+              <a:t>Samples 4 corner patches; if mean intensity &gt; 127, inverts image so background is strictly 0 and stroke is bright.</a:t>
+            </a:r>
+          </a:p>
+          <a:p>
+            <a:pPr>
+              <a:defRPr sz="950" b="1">
+                <a:solidFill>
+                  <a:srgbClr val="1DB954"/>
+                </a:solidFill>
+                <a:latin typeface="Consolas"/>
+              </a:defRPr>
+            </a:pPr>
+            <a:r>
+              <a:t>STEP 3: FOREGROUND BINARIZATION</a:t>
+            </a:r>
+          </a:p>
+          <a:p>
+            <a:pPr>
+              <a:defRPr sz="900">
                 <a:solidFill>
                   <a:srgbClr val="A1A1AA"/>
                 </a:solidFill>
-              </a:defRPr>
-            </a:pPr>
-            <a:r>
-              <a:t>• Pair (7 vs 1): Slanted European-style '1' with top serif resembles uncrossed '7'.</a:t>
-            </a:r>
-          </a:p>
-          <a:p>
-            <a:pPr>
-              <a:defRPr sz="1000">
+                <a:latin typeface="Segoe UI"/>
+              </a:defRPr>
+            </a:pPr>
+            <a:r>
+              <a:t>Fixed threshold (tau=25) or Otsu adaptive binarization isolates stroke pixels from background noise.</a:t>
+            </a:r>
+          </a:p>
+          <a:p>
+            <a:pPr>
+              <a:defRPr sz="950" b="1">
+                <a:solidFill>
+                  <a:srgbClr val="1DB954"/>
+                </a:solidFill>
+                <a:latin typeface="Consolas"/>
+              </a:defRPr>
+            </a:pPr>
+            <a:r>
+              <a:t>STEP 4: TIGHT BOUNDING BOX</a:t>
+            </a:r>
+          </a:p>
+          <a:p>
+            <a:pPr>
+              <a:defRPr sz="900">
                 <a:solidFill>
                   <a:srgbClr val="A1A1AA"/>
                 </a:solidFill>
-              </a:defRPr>
-            </a:pPr>
-            <a:r>
-              <a:t>• Pair (5 vs 6): Incomplete lower loop on digit 6 misclassified as 5.</a:t>
-            </a:r>
-          </a:p>
-          <a:p>
-            <a:pPr>
-              <a:defRPr sz="1000">
+                <a:latin typeface="Segoe UI"/>
+              </a:defRPr>
+            </a:pPr>
+            <a:r>
+              <a:t>Extracts tight coordinates (x, y, w, h). If active pixels &lt; 8, immediately fails closed as empty.</a:t>
+            </a:r>
+          </a:p>
+          <a:p>
+            <a:pPr>
+              <a:defRPr sz="950" b="1">
+                <a:solidFill>
+                  <a:srgbClr val="1DB954"/>
+                </a:solidFill>
+                <a:latin typeface="Consolas"/>
+              </a:defRPr>
+            </a:pPr>
+            <a:r>
+              <a:t>STEP 5: ASPECT-PRESERVING SCALING</a:t>
+            </a:r>
+          </a:p>
+          <a:p>
+            <a:pPr>
+              <a:defRPr sz="900">
                 <a:solidFill>
                   <a:srgbClr val="A1A1AA"/>
                 </a:solidFill>
-              </a:defRPr>
-            </a:pPr>
-            <a:r>
-              <a:t>• Mitigation: Margin thresholding M = p_1 - p_2 detects ambiguous pairs even before final output.</a:t>
+                <a:latin typeface="Segoe UI"/>
+              </a:defRPr>
+            </a:pPr>
+            <a:r>
+              <a:t>Fits maximum dimension into an inner 20x20 box (s = 20 / max(w, h)) using INTER_AREA downsampling.</a:t>
+            </a:r>
+          </a:p>
+          <a:p>
+            <a:pPr>
+              <a:defRPr sz="950" b="1">
+                <a:solidFill>
+                  <a:srgbClr val="1DB954"/>
+                </a:solidFill>
+                <a:latin typeface="Consolas"/>
+              </a:defRPr>
+            </a:pPr>
+            <a:r>
+              <a:t>STEP 6 &amp; 7: MOMENTS &amp; CENTROIDING</a:t>
+            </a:r>
+          </a:p>
+          <a:p>
+            <a:pPr>
+              <a:defRPr sz="900">
+                <a:solidFill>
+                  <a:srgbClr val="A1A1AA"/>
+                </a:solidFill>
+                <a:latin typeface="Segoe UI"/>
+              </a:defRPr>
+            </a:pPr>
+            <a:r>
+              <a:t>Computes spatial moments m00, m10, m01. Translates center-of-mass (x_c, y_c) to canonical center (13.5, 13.5).</a:t>
+            </a:r>
+          </a:p>
+          <a:p>
+            <a:pPr>
+              <a:defRPr sz="950" b="1">
+                <a:solidFill>
+                  <a:srgbClr val="1DB954"/>
+                </a:solidFill>
+                <a:latin typeface="Consolas"/>
+              </a:defRPr>
+            </a:pPr>
+            <a:r>
+              <a:t>STEP 8 &amp; 9: SUB-PIXEL WARPING &amp; NORMALIZATION</a:t>
+            </a:r>
+          </a:p>
+          <a:p>
+            <a:pPr>
+              <a:defRPr sz="900">
+                <a:solidFill>
+                  <a:srgbClr val="A1A1AA"/>
+                </a:solidFill>
+                <a:latin typeface="Segoe UI"/>
+              </a:defRPr>
+            </a:pPr>
+            <a:r>
+              <a:t>Applies cv2.warpAffine with borderValue=0 and normalizes to [0.0, 1.0] float32.</a:t>
+            </a:r>
+          </a:p>
+          <a:p>
+            <a:pPr>
+              <a:defRPr sz="950" b="1">
+                <a:solidFill>
+                  <a:srgbClr val="1DB954"/>
+                </a:solidFill>
+                <a:latin typeface="Consolas"/>
+              </a:defRPr>
+            </a:pPr>
+            <a:r>
+              <a:t>STEP 10: STRICT TENSOR RESHAPE</a:t>
+            </a:r>
+          </a:p>
+          <a:p>
+            <a:pPr>
+              <a:defRPr sz="900">
+                <a:solidFill>
+                  <a:srgbClr val="A1A1AA"/>
+                </a:solidFill>
+                <a:latin typeface="Segoe UI"/>
+              </a:defRPr>
+            </a:pPr>
+            <a:r>
+              <a:t>Emits tensor of exact shape (1, 28, 28, 1) float32 for model inference.</a:t>
             </a:r>
           </a:p>
         </p:txBody>
@@ -8093,8 +8370,8 @@
         </p:nvSpPr>
         <p:spPr>
           <a:xfrm>
-            <a:off x="6217920" y="1463040"/>
-            <a:ext cx="5212080" cy="4572000"/>
+            <a:off x="7406640" y="1371600"/>
+            <a:ext cx="4023360" cy="4846320"/>
           </a:xfrm>
           <a:prstGeom prst="rect">
             <a:avLst/>
@@ -8138,8 +8415,8 @@
         </p:nvSpPr>
         <p:spPr>
           <a:xfrm>
-            <a:off x="6400800" y="1600200"/>
-            <a:ext cx="4846320" cy="365760"/>
+            <a:off x="7589519" y="1508760"/>
+            <a:ext cx="3657600" cy="320040"/>
           </a:xfrm>
           <a:prstGeom prst="rect">
             <a:avLst/>
@@ -8157,98 +8434,39 @@
                 <a:solidFill>
                   <a:srgbClr val="A1A1AA"/>
                 </a:solidFill>
-                <a:latin typeface="Segoe UI"/>
-              </a:defRPr>
-            </a:pPr>
-            <a:r>
-              <a:t>HIGH-CONFIDENCE SILENT FAILURE MINING</a:t>
-            </a:r>
-          </a:p>
-        </p:txBody>
-      </p:sp>
-      <p:sp>
-        <p:nvSpPr>
-          <p:cNvPr id="8" name="TextBox 7"/>
-          <p:cNvSpPr txBox="1"/>
+                <a:latin typeface="Consolas"/>
+              </a:defRPr>
+            </a:pPr>
+            <a:r>
+              <a:t>REPRESENTATIVE CENTROIDS VS OUTLIERS</a:t>
+            </a:r>
+          </a:p>
+        </p:txBody>
+      </p:sp>
+      <p:pic>
+        <p:nvPicPr>
+          <p:cNvPr id="8" name="Picture 7" descr="representative_examples_per_class.png"/>
+          <p:cNvPicPr>
+            <a:picLocks noChangeAspect="1"/>
+          </p:cNvPicPr>
           <p:nvPr/>
-        </p:nvSpPr>
-        <p:spPr>
-          <a:xfrm>
-            <a:off x="6400800" y="2011680"/>
-            <a:ext cx="4846320" cy="3840480"/>
+        </p:nvPicPr>
+        <p:blipFill>
+          <a:blip r:embed="rId2"/>
+          <a:stretch>
+            <a:fillRect/>
+          </a:stretch>
+        </p:blipFill>
+        <p:spPr>
+          <a:xfrm>
+            <a:off x="7589520" y="1920240"/>
+            <a:ext cx="3657600" cy="1024128"/>
           </a:xfrm>
           <a:prstGeom prst="rect">
             <a:avLst/>
           </a:prstGeom>
-          <a:noFill/>
-        </p:spPr>
-        <p:txBody>
-          <a:bodyPr wrap="square">
-            <a:spAutoFit/>
-          </a:bodyPr>
-          <a:lstStyle/>
-          <a:p>
-            <a:pPr>
-              <a:defRPr b="1" sz="1200">
-                <a:solidFill>
-                  <a:srgbClr val="FF3333"/>
-                </a:solidFill>
-              </a:defRPr>
-            </a:pPr>
-            <a:r>
-              <a:t>Audit of Failures with p &gt;= 80%:</a:t>
-            </a:r>
-          </a:p>
-          <a:p>
-            <a:pPr>
-              <a:defRPr sz="1000">
-                <a:solidFill>
-                  <a:srgbClr val="A1A1AA"/>
-                </a:solidFill>
-              </a:defRPr>
-            </a:pPr>
-            <a:r>
-              <a:t>• Silent Error Hazard: Standard systems deploy models without checking if incorrect predictions carry high confidence.</a:t>
-            </a:r>
-          </a:p>
-          <a:p>
-            <a:pPr>
-              <a:defRPr sz="1000">
-                <a:solidFill>
-                  <a:srgbClr val="A1A1AA"/>
-                </a:solidFill>
-              </a:defRPr>
-            </a:pPr>
-            <a:r>
-              <a:t>• Automated Mining: Our pipeline automatically extracts test samples where prediction != label and p &gt;= 0.80.</a:t>
-            </a:r>
-          </a:p>
-          <a:p>
-            <a:pPr>
-              <a:defRPr sz="1000">
-                <a:solidFill>
-                  <a:srgbClr val="A1A1AA"/>
-                </a:solidFill>
-              </a:defRPr>
-            </a:pPr>
-            <a:r>
-              <a:t>• Forensic Discovery: Audit reveals that 65% of high-confidence failures represent genuinely ambiguous ground-truth labels in MNIST (human labeling errors or severe malformations).</a:t>
-            </a:r>
-          </a:p>
-          <a:p>
-            <a:pPr>
-              <a:defRPr sz="1000">
-                <a:solidFill>
-                  <a:srgbClr val="A1A1AA"/>
-                </a:solidFill>
-              </a:defRPr>
-            </a:pPr>
-            <a:r>
-              <a:t>• Artifact Retention: All failures saved as PNGs and JSON descriptors in experiments/failures/ for regression testing.</a:t>
-            </a:r>
-          </a:p>
-        </p:txBody>
-      </p:sp>
+        </p:spPr>
+      </p:pic>
     </p:spTree>
   </p:cSld>
   <p:clrMapOvr>
@@ -8284,7 +8502,7 @@
         <p:spPr>
           <a:xfrm>
             <a:off x="731520" y="365760"/>
-            <a:ext cx="10698480" cy="914400"/>
+            <a:ext cx="10698480" cy="822960"/>
           </a:xfrm>
           <a:prstGeom prst="rect">
             <a:avLst/>
@@ -8302,24 +8520,24 @@
                 <a:solidFill>
                   <a:srgbClr val="1DB954"/>
                 </a:solidFill>
+                <a:latin typeface="Consolas"/>
+              </a:defRPr>
+            </a:pPr>
+            <a:r>
+              <a:t>ENGINEERING PHILOSOPHY</a:t>
+            </a:r>
+          </a:p>
+          <a:p>
+            <a:pPr>
+              <a:defRPr sz="1800" b="1">
+                <a:solidFill>
+                  <a:srgbClr val="FFFFFF"/>
+                </a:solidFill>
                 <a:latin typeface="Segoe UI"/>
               </a:defRPr>
             </a:pPr>
             <a:r>
-              <a:t>DIGITVISION AI — SCIENTIFIC RESEARCH BRIEF</a:t>
-            </a:r>
-          </a:p>
-          <a:p>
-            <a:pPr>
-              <a:defRPr sz="1800" b="1">
-                <a:solidFill>
-                  <a:srgbClr val="FFFFFF"/>
-                </a:solidFill>
-                <a:latin typeface="Segoe UI"/>
-              </a:defRPr>
-            </a:pPr>
-            <a:r>
-              <a:t>REAL-WORLD DISTRIBUTION SHIFT &amp; PERTURBATIONS</a:t>
+              <a:t>FIVE SYNCHRONIZED DELIVERABLES &amp; SCIENTIFIC RIGOUR</a:t>
             </a:r>
           </a:p>
         </p:txBody>
@@ -8332,8 +8550,8 @@
         </p:nvSpPr>
         <p:spPr>
           <a:xfrm>
-            <a:off x="731520" y="1463040"/>
-            <a:ext cx="10698480" cy="4572000"/>
+            <a:off x="731520" y="1371600"/>
+            <a:ext cx="10698480" cy="868680"/>
           </a:xfrm>
           <a:prstGeom prst="rect">
             <a:avLst/>
@@ -8377,8 +8595,8 @@
         </p:nvSpPr>
         <p:spPr>
           <a:xfrm>
-            <a:off x="914400" y="1600200"/>
-            <a:ext cx="10332719" cy="365760"/>
+            <a:off x="914400" y="1508760"/>
+            <a:ext cx="10332719" cy="320040"/>
           </a:xfrm>
           <a:prstGeom prst="rect">
             <a:avLst/>
@@ -8396,11 +8614,11 @@
                 <a:solidFill>
                   <a:srgbClr val="A1A1AA"/>
                 </a:solidFill>
-                <a:latin typeface="Segoe UI"/>
-              </a:defRPr>
-            </a:pPr>
-            <a:r>
-              <a:t>ROBUSTNESS BENCHMARKING ACROSS 6 CORRUPTIONS X 5 SEVERITIES</a:t>
+                <a:latin typeface="Consolas"/>
+              </a:defRPr>
+            </a:pPr>
+            <a:r>
+              <a:t>1. CODE + DOCS + PRESENTATION INVARIANT</a:t>
             </a:r>
           </a:p>
         </p:txBody>
@@ -8413,8 +8631,8 @@
         </p:nvSpPr>
         <p:spPr>
           <a:xfrm>
-            <a:off x="914400" y="2011680"/>
-            <a:ext cx="10332720" cy="3840480"/>
+            <a:off x="914400" y="1737360"/>
+            <a:ext cx="10332720" cy="457200"/>
           </a:xfrm>
           <a:prstGeom prst="rect">
             <a:avLst/>
@@ -8428,86 +8646,483 @@
           <a:lstStyle/>
           <a:p>
             <a:pPr>
-              <a:defRPr b="1" sz="1200">
-                <a:solidFill>
-                  <a:srgbClr val="FFFFFF"/>
-                </a:solidFill>
-              </a:defRPr>
-            </a:pPr>
-            <a:r>
-              <a:t>Empirical Degradation Analysis Under Distribution Shifts:</a:t>
-            </a:r>
-          </a:p>
-          <a:p>
-            <a:pPr>
               <a:defRPr sz="1100">
                 <a:solidFill>
                   <a:srgbClr val="A1A1AA"/>
                 </a:solidFill>
-              </a:defRPr>
-            </a:pPr>
-            <a:r>
-              <a:t>• 1. Gaussian Additive Noise (sigma = 0.06 to 0.38): Deep ConvNet maintains &gt;94% accuracy up to severity 3; classical models degrade to &lt;65%.</a:t>
-            </a:r>
-          </a:p>
+                <a:latin typeface="Segoe UI"/>
+              </a:defRPr>
+            </a:pPr>
+            <a:r>
+              <a:t>No code is merged without updating documentation, experiment logs, and presentation slides simultaneously. Deliverables never drift out of sync.</a:t>
+            </a:r>
+          </a:p>
+        </p:txBody>
+      </p:sp>
+      <p:sp>
+        <p:nvSpPr>
+          <p:cNvPr id="6" name="Rectangle 5"/>
+          <p:cNvSpPr/>
+          <p:nvPr/>
+        </p:nvSpPr>
+        <p:spPr>
+          <a:xfrm>
+            <a:off x="731520" y="2377439"/>
+            <a:ext cx="10698480" cy="868680"/>
+          </a:xfrm>
+          <a:prstGeom prst="rect">
+            <a:avLst/>
+          </a:prstGeom>
+          <a:solidFill>
+            <a:srgbClr val="121212"/>
+          </a:solidFill>
+          <a:ln w="12700">
+            <a:solidFill>
+              <a:srgbClr val="262626"/>
+            </a:solidFill>
+          </a:ln>
+        </p:spPr>
+        <p:style>
+          <a:lnRef idx="1">
+            <a:schemeClr val="accent1"/>
+          </a:lnRef>
+          <a:fillRef idx="3">
+            <a:schemeClr val="accent1"/>
+          </a:fillRef>
+          <a:effectRef idx="2">
+            <a:schemeClr val="accent1"/>
+          </a:effectRef>
+          <a:fontRef idx="minor">
+            <a:schemeClr val="lt1"/>
+          </a:fontRef>
+        </p:style>
+        <p:txBody>
+          <a:bodyPr rtlCol="0" anchor="ctr"/>
+          <a:lstStyle/>
+          <a:p>
+            <a:pPr algn="ctr"/>
+          </a:p>
+        </p:txBody>
+      </p:sp>
+      <p:sp>
+        <p:nvSpPr>
+          <p:cNvPr id="7" name="TextBox 6"/>
+          <p:cNvSpPr txBox="1"/>
+          <p:nvPr/>
+        </p:nvSpPr>
+        <p:spPr>
+          <a:xfrm>
+            <a:off x="914400" y="2514599"/>
+            <a:ext cx="10332719" cy="320040"/>
+          </a:xfrm>
+          <a:prstGeom prst="rect">
+            <a:avLst/>
+          </a:prstGeom>
+          <a:noFill/>
+        </p:spPr>
+        <p:txBody>
+          <a:bodyPr wrap="square" lIns="0" tIns="0" rIns="0" bIns="0">
+            <a:spAutoFit/>
+          </a:bodyPr>
+          <a:lstStyle/>
+          <a:p>
+            <a:pPr>
+              <a:defRPr sz="1000" b="1">
+                <a:solidFill>
+                  <a:srgbClr val="A1A1AA"/>
+                </a:solidFill>
+                <a:latin typeface="Consolas"/>
+              </a:defRPr>
+            </a:pPr>
+            <a:r>
+              <a:t>2. ZERO METRIC FABRICATION</a:t>
+            </a:r>
+          </a:p>
+        </p:txBody>
+      </p:sp>
+      <p:sp>
+        <p:nvSpPr>
+          <p:cNvPr id="8" name="TextBox 7"/>
+          <p:cNvSpPr txBox="1"/>
+          <p:nvPr/>
+        </p:nvSpPr>
+        <p:spPr>
+          <a:xfrm>
+            <a:off x="914400" y="2743199"/>
+            <a:ext cx="10332720" cy="457200"/>
+          </a:xfrm>
+          <a:prstGeom prst="rect">
+            <a:avLst/>
+          </a:prstGeom>
+          <a:noFill/>
+        </p:spPr>
+        <p:txBody>
+          <a:bodyPr wrap="square">
+            <a:spAutoFit/>
+          </a:bodyPr>
+          <a:lstStyle/>
           <a:p>
             <a:pPr>
               <a:defRPr sz="1100">
                 <a:solidFill>
                   <a:srgbClr val="A1A1AA"/>
                 </a:solidFill>
-              </a:defRPr>
-            </a:pPr>
-            <a:r>
-              <a:t>• 2. Rotational Shift (+/- 12 to +/- 50 degrees): Convolutional models exhibit rotational stability up to 25 degrees; beyond 40 degrees digits '6' and '9' cross-corrupt.</a:t>
-            </a:r>
-          </a:p>
+                <a:latin typeface="Segoe UI"/>
+              </a:defRPr>
+            </a:pPr>
+            <a:r>
+              <a:t>Every single accuracy percentage, latency millisecond, parameter count, and confusion matrix originates from executable code. No fabricated numbers.</a:t>
+            </a:r>
+          </a:p>
+        </p:txBody>
+      </p:sp>
+      <p:sp>
+        <p:nvSpPr>
+          <p:cNvPr id="9" name="Rectangle 8"/>
+          <p:cNvSpPr/>
+          <p:nvPr/>
+        </p:nvSpPr>
+        <p:spPr>
+          <a:xfrm>
+            <a:off x="731520" y="3383279"/>
+            <a:ext cx="10698480" cy="868680"/>
+          </a:xfrm>
+          <a:prstGeom prst="rect">
+            <a:avLst/>
+          </a:prstGeom>
+          <a:solidFill>
+            <a:srgbClr val="121212"/>
+          </a:solidFill>
+          <a:ln w="12700">
+            <a:solidFill>
+              <a:srgbClr val="262626"/>
+            </a:solidFill>
+          </a:ln>
+        </p:spPr>
+        <p:style>
+          <a:lnRef idx="1">
+            <a:schemeClr val="accent1"/>
+          </a:lnRef>
+          <a:fillRef idx="3">
+            <a:schemeClr val="accent1"/>
+          </a:fillRef>
+          <a:effectRef idx="2">
+            <a:schemeClr val="accent1"/>
+          </a:effectRef>
+          <a:fontRef idx="minor">
+            <a:schemeClr val="lt1"/>
+          </a:fontRef>
+        </p:style>
+        <p:txBody>
+          <a:bodyPr rtlCol="0" anchor="ctr"/>
+          <a:lstStyle/>
+          <a:p>
+            <a:pPr algn="ctr"/>
+          </a:p>
+        </p:txBody>
+      </p:sp>
+      <p:sp>
+        <p:nvSpPr>
+          <p:cNvPr id="10" name="TextBox 9"/>
+          <p:cNvSpPr txBox="1"/>
+          <p:nvPr/>
+        </p:nvSpPr>
+        <p:spPr>
+          <a:xfrm>
+            <a:off x="914400" y="3520439"/>
+            <a:ext cx="10332719" cy="320040"/>
+          </a:xfrm>
+          <a:prstGeom prst="rect">
+            <a:avLst/>
+          </a:prstGeom>
+          <a:noFill/>
+        </p:spPr>
+        <p:txBody>
+          <a:bodyPr wrap="square" lIns="0" tIns="0" rIns="0" bIns="0">
+            <a:spAutoFit/>
+          </a:bodyPr>
+          <a:lstStyle/>
+          <a:p>
+            <a:pPr>
+              <a:defRPr sz="1000" b="1">
+                <a:solidFill>
+                  <a:srgbClr val="A1A1AA"/>
+                </a:solidFill>
+                <a:latin typeface="Consolas"/>
+              </a:defRPr>
+            </a:pPr>
+            <a:r>
+              <a:t>3. FAIL-CLOSED EPISTEMIC SAFETY</a:t>
+            </a:r>
+          </a:p>
+        </p:txBody>
+      </p:sp>
+      <p:sp>
+        <p:nvSpPr>
+          <p:cNvPr id="11" name="TextBox 10"/>
+          <p:cNvSpPr txBox="1"/>
+          <p:nvPr/>
+        </p:nvSpPr>
+        <p:spPr>
+          <a:xfrm>
+            <a:off x="914400" y="3749039"/>
+            <a:ext cx="10332720" cy="457200"/>
+          </a:xfrm>
+          <a:prstGeom prst="rect">
+            <a:avLst/>
+          </a:prstGeom>
+          <a:noFill/>
+        </p:spPr>
+        <p:txBody>
+          <a:bodyPr wrap="square">
+            <a:spAutoFit/>
+          </a:bodyPr>
+          <a:lstStyle/>
           <a:p>
             <a:pPr>
               <a:defRPr sz="1100">
                 <a:solidFill>
                   <a:srgbClr val="A1A1AA"/>
                 </a:solidFill>
-              </a:defRPr>
-            </a:pPr>
-            <a:r>
-              <a:t>• 3. Affine Shear Distortion (factor 0.10 to 0.50): Simulates rapid, slanted handwriting cursive strokes.</a:t>
-            </a:r>
-          </a:p>
+                <a:latin typeface="Segoe UI"/>
+              </a:defRPr>
+            </a:pPr>
+            <a:r>
+              <a:t>Rather than emitting deceptive high-confidence guesses on malformed inputs, the system fails closed at the quality gatekeeper.</a:t>
+            </a:r>
+          </a:p>
+        </p:txBody>
+      </p:sp>
+      <p:sp>
+        <p:nvSpPr>
+          <p:cNvPr id="12" name="Rectangle 11"/>
+          <p:cNvSpPr/>
+          <p:nvPr/>
+        </p:nvSpPr>
+        <p:spPr>
+          <a:xfrm>
+            <a:off x="731520" y="4389120"/>
+            <a:ext cx="10698480" cy="868680"/>
+          </a:xfrm>
+          <a:prstGeom prst="rect">
+            <a:avLst/>
+          </a:prstGeom>
+          <a:solidFill>
+            <a:srgbClr val="121212"/>
+          </a:solidFill>
+          <a:ln w="12700">
+            <a:solidFill>
+              <a:srgbClr val="262626"/>
+            </a:solidFill>
+          </a:ln>
+        </p:spPr>
+        <p:style>
+          <a:lnRef idx="1">
+            <a:schemeClr val="accent1"/>
+          </a:lnRef>
+          <a:fillRef idx="3">
+            <a:schemeClr val="accent1"/>
+          </a:fillRef>
+          <a:effectRef idx="2">
+            <a:schemeClr val="accent1"/>
+          </a:effectRef>
+          <a:fontRef idx="minor">
+            <a:schemeClr val="lt1"/>
+          </a:fontRef>
+        </p:style>
+        <p:txBody>
+          <a:bodyPr rtlCol="0" anchor="ctr"/>
+          <a:lstStyle/>
+          <a:p>
+            <a:pPr algn="ctr"/>
+          </a:p>
+        </p:txBody>
+      </p:sp>
+      <p:sp>
+        <p:nvSpPr>
+          <p:cNvPr id="13" name="TextBox 12"/>
+          <p:cNvSpPr txBox="1"/>
+          <p:nvPr/>
+        </p:nvSpPr>
+        <p:spPr>
+          <a:xfrm>
+            <a:off x="914400" y="4526280"/>
+            <a:ext cx="10332719" cy="320040"/>
+          </a:xfrm>
+          <a:prstGeom prst="rect">
+            <a:avLst/>
+          </a:prstGeom>
+          <a:noFill/>
+        </p:spPr>
+        <p:txBody>
+          <a:bodyPr wrap="square" lIns="0" tIns="0" rIns="0" bIns="0">
+            <a:spAutoFit/>
+          </a:bodyPr>
+          <a:lstStyle/>
+          <a:p>
+            <a:pPr>
+              <a:defRPr sz="1000" b="1">
+                <a:solidFill>
+                  <a:srgbClr val="A1A1AA"/>
+                </a:solidFill>
+                <a:latin typeface="Consolas"/>
+              </a:defRPr>
+            </a:pPr>
+            <a:r>
+              <a:t>4. ARCHITECTURAL MODULARITY</a:t>
+            </a:r>
+          </a:p>
+        </p:txBody>
+      </p:sp>
+      <p:sp>
+        <p:nvSpPr>
+          <p:cNvPr id="14" name="TextBox 13"/>
+          <p:cNvSpPr txBox="1"/>
+          <p:nvPr/>
+        </p:nvSpPr>
+        <p:spPr>
+          <a:xfrm>
+            <a:off x="914400" y="4754880"/>
+            <a:ext cx="10332720" cy="457200"/>
+          </a:xfrm>
+          <a:prstGeom prst="rect">
+            <a:avLst/>
+          </a:prstGeom>
+          <a:noFill/>
+        </p:spPr>
+        <p:txBody>
+          <a:bodyPr wrap="square">
+            <a:spAutoFit/>
+          </a:bodyPr>
+          <a:lstStyle/>
           <a:p>
             <a:pPr>
               <a:defRPr sz="1100">
                 <a:solidFill>
                   <a:srgbClr val="A1A1AA"/>
                 </a:solidFill>
-              </a:defRPr>
-            </a:pPr>
-            <a:r>
-              <a:t>• 4. Stroke Thickness Morphology: Morphological dilation (thick marker) and erosion (faint ballpoint pen).</a:t>
-            </a:r>
-          </a:p>
+                <a:latin typeface="Segoe UI"/>
+              </a:defRPr>
+            </a:pPr>
+            <a:r>
+              <a:t>Centralized configuration (src/config.py) eliminates magic numbers. Discrete packages for data, models, intelligence, and XAI prevent tight coupling.</a:t>
+            </a:r>
+          </a:p>
+        </p:txBody>
+      </p:sp>
+      <p:sp>
+        <p:nvSpPr>
+          <p:cNvPr id="15" name="Rectangle 14"/>
+          <p:cNvSpPr/>
+          <p:nvPr/>
+        </p:nvSpPr>
+        <p:spPr>
+          <a:xfrm>
+            <a:off x="731520" y="5394959"/>
+            <a:ext cx="10698480" cy="868680"/>
+          </a:xfrm>
+          <a:prstGeom prst="rect">
+            <a:avLst/>
+          </a:prstGeom>
+          <a:solidFill>
+            <a:srgbClr val="121212"/>
+          </a:solidFill>
+          <a:ln w="12700">
+            <a:solidFill>
+              <a:srgbClr val="262626"/>
+            </a:solidFill>
+          </a:ln>
+        </p:spPr>
+        <p:style>
+          <a:lnRef idx="1">
+            <a:schemeClr val="accent1"/>
+          </a:lnRef>
+          <a:fillRef idx="3">
+            <a:schemeClr val="accent1"/>
+          </a:fillRef>
+          <a:effectRef idx="2">
+            <a:schemeClr val="accent1"/>
+          </a:effectRef>
+          <a:fontRef idx="minor">
+            <a:schemeClr val="lt1"/>
+          </a:fontRef>
+        </p:style>
+        <p:txBody>
+          <a:bodyPr rtlCol="0" anchor="ctr"/>
+          <a:lstStyle/>
+          <a:p>
+            <a:pPr algn="ctr"/>
+          </a:p>
+        </p:txBody>
+      </p:sp>
+      <p:sp>
+        <p:nvSpPr>
+          <p:cNvPr id="16" name="TextBox 15"/>
+          <p:cNvSpPr txBox="1"/>
+          <p:nvPr/>
+        </p:nvSpPr>
+        <p:spPr>
+          <a:xfrm>
+            <a:off x="914400" y="5532120"/>
+            <a:ext cx="10332719" cy="320040"/>
+          </a:xfrm>
+          <a:prstGeom prst="rect">
+            <a:avLst/>
+          </a:prstGeom>
+          <a:noFill/>
+        </p:spPr>
+        <p:txBody>
+          <a:bodyPr wrap="square" lIns="0" tIns="0" rIns="0" bIns="0">
+            <a:spAutoFit/>
+          </a:bodyPr>
+          <a:lstStyle/>
+          <a:p>
+            <a:pPr>
+              <a:defRPr sz="1000" b="1">
+                <a:solidFill>
+                  <a:srgbClr val="A1A1AA"/>
+                </a:solidFill>
+                <a:latin typeface="Consolas"/>
+              </a:defRPr>
+            </a:pPr>
+            <a:r>
+              <a:t>5. EXECUTABLE VERIFICATION HARNESS</a:t>
+            </a:r>
+          </a:p>
+        </p:txBody>
+      </p:sp>
+      <p:sp>
+        <p:nvSpPr>
+          <p:cNvPr id="17" name="TextBox 16"/>
+          <p:cNvSpPr txBox="1"/>
+          <p:nvPr/>
+        </p:nvSpPr>
+        <p:spPr>
+          <a:xfrm>
+            <a:off x="914400" y="5760720"/>
+            <a:ext cx="10332720" cy="457200"/>
+          </a:xfrm>
+          <a:prstGeom prst="rect">
+            <a:avLst/>
+          </a:prstGeom>
+          <a:noFill/>
+        </p:spPr>
+        <p:txBody>
+          <a:bodyPr wrap="square">
+            <a:spAutoFit/>
+          </a:bodyPr>
+          <a:lstStyle/>
           <a:p>
             <a:pPr>
               <a:defRPr sz="1100">
                 <a:solidFill>
                   <a:srgbClr val="A1A1AA"/>
                 </a:solidFill>
-              </a:defRPr>
-            </a:pPr>
-            <a:r>
-              <a:t>• 5. Centroid Misalignment: Tests canonical preprocessor's centering robustness when shifts occur.</a:t>
-            </a:r>
-          </a:p>
-          <a:p>
-            <a:pPr>
-              <a:defRPr sz="1100">
-                <a:solidFill>
-                  <a:srgbClr val="A1A1AA"/>
-                </a:solidFill>
-              </a:defRPr>
-            </a:pPr>
-            <a:r>
-              <a:t>• 6. Contrast Attenuation (factor 0.80 down to 0.20): Simulates poor lighting phone camera captures.</a:t>
+                <a:latin typeface="Segoe UI"/>
+              </a:defRPr>
+            </a:pPr>
+            <a:r>
+              <a:t>A comprehensive test suite of 33 unit tests validates every invariant from moments and bounding boxes to probability simplex bounds.</a:t>
             </a:r>
           </a:p>
         </p:txBody>
@@ -8838,4 +9453,324 @@
   </a:objectDefaults>
   <a:extraClrSchemeLst/>
 </a:theme>
+</file>
+
+<file path=ppt/theme/theme2.xml><?xml version="1.0" encoding="utf-8"?>
+<a:theme xmlns:a="http://schemas.openxmlformats.org/drawingml/2006/main" name="Office Theme">
+  <a:themeElements>
+    <a:clrScheme name="Office">
+      <a:dk1>
+        <a:sysClr val="windowText" lastClr="000000"/>
+      </a:dk1>
+      <a:lt1>
+        <a:sysClr val="window" lastClr="FFFFFF"/>
+      </a:lt1>
+      <a:dk2>
+        <a:srgbClr val="1F497D"/>
+      </a:dk2>
+      <a:lt2>
+        <a:srgbClr val="EEECE1"/>
+      </a:lt2>
+      <a:accent1>
+        <a:srgbClr val="4F81BD"/>
+      </a:accent1>
+      <a:accent2>
+        <a:srgbClr val="C0504D"/>
+      </a:accent2>
+      <a:accent3>
+        <a:srgbClr val="9BBB59"/>
+      </a:accent3>
+      <a:accent4>
+        <a:srgbClr val="8064A2"/>
+      </a:accent4>
+      <a:accent5>
+        <a:srgbClr val="4BACC6"/>
+      </a:accent5>
+      <a:accent6>
+        <a:srgbClr val="F79646"/>
+      </a:accent6>
+      <a:hlink>
+        <a:srgbClr val="0000FF"/>
+      </a:hlink>
+      <a:folHlink>
+        <a:srgbClr val="800080"/>
+      </a:folHlink>
+    </a:clrScheme>
+    <a:fontScheme name="Office">
+      <a:majorFont>
+        <a:latin typeface="Calibri"/>
+        <a:ea typeface=""/>
+        <a:cs typeface=""/>
+        <a:font script="Jpan" typeface="ＭＳ Ｐゴシック"/>
+        <a:font script="Hang" typeface="맑은 고딕"/>
+        <a:font script="Hans" typeface="宋体"/>
+        <a:font script="Hant" typeface="新細明體"/>
+        <a:font script="Arab" typeface="Times New Roman"/>
+        <a:font script="Hebr" typeface="Times New Roman"/>
+        <a:font script="Thai" typeface="Angsana New"/>
+        <a:font script="Ethi" typeface="Nyala"/>
+        <a:font script="Beng" typeface="Vrinda"/>
+        <a:font script="Gujr" typeface="Shruti"/>
+        <a:font script="Khmr" typeface="MoolBoran"/>
+        <a:font script="Knda" typeface="Tunga"/>
+        <a:font script="Guru" typeface="Raavi"/>
+        <a:font script="Cans" typeface="Euphemia"/>
+        <a:font script="Cher" typeface="Plantagenet Cherokee"/>
+        <a:font script="Yiii" typeface="Microsoft Yi Baiti"/>
+        <a:font script="Tibt" typeface="Microsoft Himalaya"/>
+        <a:font script="Thaa" typeface="MV Boli"/>
+        <a:font script="Deva" typeface="Mangal"/>
+        <a:font script="Telu" typeface="Gautami"/>
+        <a:font script="Taml" typeface="Latha"/>
+        <a:font script="Syrc" typeface="Estrangelo Edessa"/>
+        <a:font script="Orya" typeface="Kalinga"/>
+        <a:font script="Mlym" typeface="Kartika"/>
+        <a:font script="Laoo" typeface="DokChampa"/>
+        <a:font script="Sinh" typeface="Iskoola Pota"/>
+        <a:font script="Mong" typeface="Mongolian Baiti"/>
+        <a:font script="Viet" typeface="Times New Roman"/>
+        <a:font script="Uigh" typeface="Microsoft Uighur"/>
+        <a:font script="Geor" typeface="Sylfaen"/>
+      </a:majorFont>
+      <a:minorFont>
+        <a:latin typeface="Calibri"/>
+        <a:ea typeface=""/>
+        <a:cs typeface=""/>
+        <a:font script="Jpan" typeface="ＭＳ Ｐゴシック"/>
+        <a:font script="Hang" typeface="맑은 고딕"/>
+        <a:font script="Hans" typeface="宋体"/>
+        <a:font script="Hant" typeface="新細明體"/>
+        <a:font script="Arab" typeface="Arial"/>
+        <a:font script="Hebr" typeface="Arial"/>
+        <a:font script="Thai" typeface="Cordia New"/>
+        <a:font script="Ethi" typeface="Nyala"/>
+        <a:font script="Beng" typeface="Vrinda"/>
+        <a:font script="Gujr" typeface="Shruti"/>
+        <a:font script="Khmr" typeface="DaunPenh"/>
+        <a:font script="Knda" typeface="Tunga"/>
+        <a:font script="Guru" typeface="Raavi"/>
+        <a:font script="Cans" typeface="Euphemia"/>
+        <a:font script="Cher" typeface="Plantagenet Cherokee"/>
+        <a:font script="Yiii" typeface="Microsoft Yi Baiti"/>
+        <a:font script="Tibt" typeface="Microsoft Himalaya"/>
+        <a:font script="Thaa" typeface="MV Boli"/>
+        <a:font script="Deva" typeface="Mangal"/>
+        <a:font script="Telu" typeface="Gautami"/>
+        <a:font script="Taml" typeface="Latha"/>
+        <a:font script="Syrc" typeface="Estrangelo Edessa"/>
+        <a:font script="Orya" typeface="Kalinga"/>
+        <a:font script="Mlym" typeface="Kartika"/>
+        <a:font script="Laoo" typeface="DokChampa"/>
+        <a:font script="Sinh" typeface="Iskoola Pota"/>
+        <a:font script="Mong" typeface="Mongolian Baiti"/>
+        <a:font script="Viet" typeface="Arial"/>
+        <a:font script="Uigh" typeface="Microsoft Uighur"/>
+        <a:font script="Geor" typeface="Sylfaen"/>
+      </a:minorFont>
+    </a:fontScheme>
+    <a:fmtScheme name="Office">
+      <a:fillStyleLst>
+        <a:solidFill>
+          <a:schemeClr val="phClr"/>
+        </a:solidFill>
+        <a:gradFill rotWithShape="1">
+          <a:gsLst>
+            <a:gs pos="0">
+              <a:schemeClr val="phClr">
+                <a:tint val="50000"/>
+                <a:satMod val="300000"/>
+              </a:schemeClr>
+            </a:gs>
+            <a:gs pos="35000">
+              <a:schemeClr val="phClr">
+                <a:tint val="37000"/>
+                <a:satMod val="300000"/>
+              </a:schemeClr>
+            </a:gs>
+            <a:gs pos="100000">
+              <a:schemeClr val="phClr">
+                <a:tint val="15000"/>
+                <a:satMod val="350000"/>
+              </a:schemeClr>
+            </a:gs>
+          </a:gsLst>
+          <a:lin ang="16200000" scaled="1"/>
+        </a:gradFill>
+        <a:gradFill rotWithShape="1">
+          <a:gsLst>
+            <a:gs pos="0">
+              <a:schemeClr val="phClr">
+                <a:tint val="100000"/>
+                <a:shade val="100000"/>
+                <a:satMod val="130000"/>
+              </a:schemeClr>
+            </a:gs>
+            <a:gs pos="100000">
+              <a:schemeClr val="phClr">
+                <a:tint val="50000"/>
+                <a:shade val="100000"/>
+                <a:satMod val="350000"/>
+              </a:schemeClr>
+            </a:gs>
+          </a:gsLst>
+          <a:lin ang="16200000" scaled="0"/>
+        </a:gradFill>
+      </a:fillStyleLst>
+      <a:lnStyleLst>
+        <a:ln w="9525" cap="flat" cmpd="sng" algn="ctr">
+          <a:solidFill>
+            <a:schemeClr val="phClr">
+              <a:shade val="95000"/>
+              <a:satMod val="105000"/>
+            </a:schemeClr>
+          </a:solidFill>
+          <a:prstDash val="solid"/>
+        </a:ln>
+        <a:ln w="25400" cap="flat" cmpd="sng" algn="ctr">
+          <a:solidFill>
+            <a:schemeClr val="phClr"/>
+          </a:solidFill>
+          <a:prstDash val="solid"/>
+        </a:ln>
+        <a:ln w="38100" cap="flat" cmpd="sng" algn="ctr">
+          <a:solidFill>
+            <a:schemeClr val="phClr"/>
+          </a:solidFill>
+          <a:prstDash val="solid"/>
+        </a:ln>
+      </a:lnStyleLst>
+      <a:effectStyleLst>
+        <a:effectStyle>
+          <a:effectLst>
+            <a:outerShdw blurRad="40000" dist="20000" dir="5400000" rotWithShape="0">
+              <a:srgbClr val="000000">
+                <a:alpha val="38000"/>
+              </a:srgbClr>
+            </a:outerShdw>
+          </a:effectLst>
+        </a:effectStyle>
+        <a:effectStyle>
+          <a:effectLst>
+            <a:outerShdw blurRad="40000" dist="23000" dir="5400000" rotWithShape="0">
+              <a:srgbClr val="000000">
+                <a:alpha val="35000"/>
+              </a:srgbClr>
+            </a:outerShdw>
+          </a:effectLst>
+        </a:effectStyle>
+        <a:effectStyle>
+          <a:effectLst>
+            <a:outerShdw blurRad="40000" dist="23000" dir="5400000" rotWithShape="0">
+              <a:srgbClr val="000000">
+                <a:alpha val="35000"/>
+              </a:srgbClr>
+            </a:outerShdw>
+          </a:effectLst>
+          <a:scene3d>
+            <a:camera prst="orthographicFront">
+              <a:rot lat="0" lon="0" rev="0"/>
+            </a:camera>
+            <a:lightRig rig="threePt" dir="t">
+              <a:rot lat="0" lon="0" rev="1200000"/>
+            </a:lightRig>
+          </a:scene3d>
+          <a:sp3d>
+            <a:bevelT w="63500" h="25400"/>
+          </a:sp3d>
+        </a:effectStyle>
+      </a:effectStyleLst>
+      <a:bgFillStyleLst>
+        <a:solidFill>
+          <a:schemeClr val="phClr"/>
+        </a:solidFill>
+        <a:gradFill rotWithShape="1">
+          <a:gsLst>
+            <a:gs pos="0">
+              <a:schemeClr val="phClr">
+                <a:tint val="40000"/>
+                <a:satMod val="350000"/>
+              </a:schemeClr>
+            </a:gs>
+            <a:gs pos="40000">
+              <a:schemeClr val="phClr">
+                <a:tint val="45000"/>
+                <a:shade val="99000"/>
+                <a:satMod val="350000"/>
+              </a:schemeClr>
+            </a:gs>
+            <a:gs pos="100000">
+              <a:schemeClr val="phClr">
+                <a:shade val="20000"/>
+                <a:satMod val="255000"/>
+              </a:schemeClr>
+            </a:gs>
+          </a:gsLst>
+          <a:path path="circle">
+            <a:fillToRect l="50000" t="-80000" r="50000" b="180000"/>
+          </a:path>
+        </a:gradFill>
+        <a:gradFill rotWithShape="1">
+          <a:gsLst>
+            <a:gs pos="0">
+              <a:schemeClr val="phClr">
+                <a:tint val="80000"/>
+                <a:satMod val="300000"/>
+              </a:schemeClr>
+            </a:gs>
+            <a:gs pos="100000">
+              <a:schemeClr val="phClr">
+                <a:shade val="30000"/>
+                <a:satMod val="200000"/>
+              </a:schemeClr>
+            </a:gs>
+          </a:gsLst>
+          <a:path path="circle">
+            <a:fillToRect l="50000" t="50000" r="50000" b="50000"/>
+          </a:path>
+        </a:gradFill>
+      </a:bgFillStyleLst>
+    </a:fmtScheme>
+  </a:themeElements>
+  <a:objectDefaults>
+    <a:spDef>
+      <a:spPr/>
+      <a:bodyPr/>
+      <a:lstStyle/>
+      <a:style>
+        <a:lnRef idx="1">
+          <a:schemeClr val="accent1"/>
+        </a:lnRef>
+        <a:fillRef idx="3">
+          <a:schemeClr val="accent1"/>
+        </a:fillRef>
+        <a:effectRef idx="2">
+          <a:schemeClr val="accent1"/>
+        </a:effectRef>
+        <a:fontRef idx="minor">
+          <a:schemeClr val="lt1"/>
+        </a:fontRef>
+      </a:style>
+    </a:spDef>
+    <a:lnDef>
+      <a:spPr/>
+      <a:bodyPr/>
+      <a:lstStyle/>
+      <a:style>
+        <a:lnRef idx="2">
+          <a:schemeClr val="accent1"/>
+        </a:lnRef>
+        <a:fillRef idx="0">
+          <a:schemeClr val="accent1"/>
+        </a:fillRef>
+        <a:effectRef idx="1">
+          <a:schemeClr val="accent1"/>
+        </a:effectRef>
+        <a:fontRef idx="minor">
+          <a:schemeClr val="tx1"/>
+        </a:fontRef>
+      </a:style>
+    </a:lnDef>
+  </a:objectDefaults>
+  <a:extraClrSchemeLst/>
+</a:theme>
 </file>
--- a/src/presentation/DigitVision_AI_Presentation.pptx
+++ b/src/presentation/DigitVision_AI_Presentation.pptx
@@ -15,6 +15,16 @@
     <p:sldId id="263" r:id="rId15"/>
     <p:sldId id="264" r:id="rId16"/>
     <p:sldId id="265" r:id="rId17"/>
+    <p:sldId id="266" r:id="rId18"/>
+    <p:sldId id="267" r:id="rId19"/>
+    <p:sldId id="268" r:id="rId20"/>
+    <p:sldId id="269" r:id="rId21"/>
+    <p:sldId id="270" r:id="rId22"/>
+    <p:sldId id="271" r:id="rId23"/>
+    <p:sldId id="272" r:id="rId24"/>
+    <p:sldId id="273" r:id="rId25"/>
+    <p:sldId id="274" r:id="rId26"/>
+    <p:sldId id="275" r:id="rId27"/>
   </p:sldIdLst>
   <p:sldSz cx="12191695" cy="6858000" type="screen4x3"/>
   <p:notesSz cx="6858000" cy="9144000"/>
@@ -516,7 +526,7 @@
           </a:p>
           <a:p>
             <a:r>
-              <a:t>Introduces the DIGITVISION AI platform, its production-grade research scope, and its completion of Phase 01: Data Intelligence, Preprocessing Invariant, and Empirical Foundation.</a:t>
+              <a:t>Introduces the project title, institutional affiliation, team members, and overall academic-engineering scope of DigitVision AI.</a:t>
             </a:r>
           </a:p>
           <a:p/>
@@ -527,7 +537,7 @@
           </a:p>
           <a:p>
             <a:r>
-              <a:t>Establishes from the outset that this is not an academic toy script, but an industrial-grade ML engineering system enforcing strict invariants, leak-free partitioning, and synchronized documentation.</a:t>
+              <a:t>Frames the presentation as an evidence-backed, rigorous engineering effort that goes beyond standard classification to offer confidence calibration and visual explainability.</a:t>
             </a:r>
           </a:p>
           <a:p/>
@@ -538,7 +548,7 @@
           </a:p>
           <a:p>
             <a:r>
-              <a:t>Phase 01 builds the empirical bedrock: dataset curation, mathematical definition of spatial vs flattened feature spaces, 5-figure empirical EDA, and the single canonical preprocessing pipeline that guarantees zero training-inference skew.</a:t>
+              <a:t>DigitVision AI couples a dual-block 2D CNN with a canonical 7-stage preprocessing pipeline, post-hoc temperature scaling, Shannon entropy diagnostics, and Grad-CAM saliency heatmaps.</a:t>
             </a:r>
           </a:p>
           <a:p/>
@@ -549,7 +559,7 @@
           </a:p>
           <a:p>
             <a:r>
-              <a:t>Q: What is the primary architectural contribution of Phase 01 over standard MNIST demo code?</a:t>
+              <a:t>Q: What distinguishes DigitVision AI from an ordinary MNIST classifier?</a:t>
             </a:r>
           </a:p>
           <a:p/>
@@ -560,7 +570,7 @@
           </a:p>
           <a:p>
             <a:r>
-              <a:t>A: Standard MNIST projects feed pre-centered raw images directly into a model and fail when given off-center canvas drawings. Phase 01 formalizes a single Canonical Preprocessing Invariant (contrast inversion, bounding-box scaling into a 20x20 box, and spatial moment centroid alignment to (13.5, 13.5)) shared identically across training and inference, backed by 33 unit tests and a zero-leakage evaluation protocol.</a:t>
+              <a:t>A: Standard projects merely predict top-1 classes from pre-centered images. DigitVision AI enforces a mathematical preprocessing invariant for live canvas drawings, calibrates probabilities via temperature scaling, computes epistemic entropy, and renders real-time Grad-CAM saliency maps.</a:t>
             </a:r>
           </a:p>
         </p:txBody>
@@ -635,7 +645,7 @@
           </a:p>
           <a:p>
             <a:r>
-              <a:t>Summarizes the verified completion of Phase 01 as an executable milestone and certifies readiness for Phase 02 hand-off.</a:t>
+              <a:t>Surveys foundational literature (LeCun, Cireșan, Guo, Selvaraju) and explains how DigitVision AI bridges the identified gaps.</a:t>
             </a:r>
           </a:p>
           <a:p/>
@@ -646,7 +656,7 @@
           </a:p>
           <a:p>
             <a:r>
-              <a:t>Enforces professional milestone boundaries. Phase 01 is 100% verified, self-contained, and tested, leaving a pristine foundation for Phase 02.</a:t>
+              <a:t>Demonstrates strong academic grounding by situating the project in relation to published peer-reviewed research.</a:t>
             </a:r>
           </a:p>
           <a:p/>
@@ -657,7 +667,7 @@
           </a:p>
           <a:p>
             <a:r>
-              <a:t>All 13 requirement sections of Phase 01 have been executed. The test suite is 33/33 passing, manifest JSON generated, all 5 EDA figures saved in artifacts/data/, and formal documentation written.</a:t>
+              <a:t>Existing literature either focuses purely on accuracy or studies calibration/XAI in isolation on large ImageNet models. DigitVision AI synthesizes these into a complete, interactive micro-project.</a:t>
             </a:r>
           </a:p>
           <a:p/>
@@ -668,7 +678,7 @@
           </a:p>
           <a:p>
             <a:r>
-              <a:t>Q: How do you ensure that the next agent working on Phase 02 will not break Phase 01 invariants?</a:t>
+              <a:t>Q: What is the primary research gap your project addresses?</a:t>
             </a:r>
           </a:p>
           <a:p/>
@@ -679,7 +689,1078 @@
           </a:p>
           <a:p>
             <a:r>
-              <a:t>A: Through automated regression testing. Every Phase 01 invariant is codified in tests/test_preprocessing.py and tests/test_data.py. Any future agent running pytest will immediately trigger assertion failures if canonical output shapes, moments, or partition isolation rules are violated.</a:t>
+              <a:t>A: Most handwritten digit recognition systems stop at raw categorical classification, leaving models susceptible to train-inference skew, overconfident mispredictions, and black-box opacity. DigitVision AI addresses this gap by coupling a canonical preprocessing invariant with post-hoc temperature calibration, Shannon entropy gating, and real-time Grad-CAM.</a:t>
+            </a:r>
+          </a:p>
+        </p:txBody>
+      </p:sp>
+      <p:sp>
+        <p:nvSpPr>
+          <p:cNvPr id="4" name="Slide Number Placeholder 3"/>
+          <p:cNvSpPr>
+            <a:spLocks noGrp="1"/>
+          </p:cNvSpPr>
+          <p:nvPr>
+            <p:ph type="sldNum" idx="5" sz="quarter"/>
+          </p:nvPr>
+        </p:nvSpPr>
+        <p:spPr/>
+      </p:sp>
+    </p:spTree>
+  </p:cSld>
+  <p:clrMapOvr>
+    <a:masterClrMapping/>
+  </p:clrMapOvr>
+</p:notes>
+</file>
+
+<file path=ppt/notesSlides/notesSlide11.xml><?xml version="1.0" encoding="utf-8"?>
+<p:notes xmlns:a="http://schemas.openxmlformats.org/drawingml/2006/main" xmlns:p="http://schemas.openxmlformats.org/presentationml/2006/main" xmlns:r="http://schemas.openxmlformats.org/officeDocument/2006/relationships">
+  <p:cSld>
+    <p:spTree>
+      <p:nvGrpSpPr>
+        <p:cNvPr id="1" name=""/>
+        <p:cNvGrpSpPr/>
+        <p:nvPr/>
+      </p:nvGrpSpPr>
+      <p:grpSpPr>
+        <a:xfrm>
+          <a:off x="0" y="0"/>
+          <a:ext cx="0" cy="0"/>
+          <a:chOff x="0" y="0"/>
+          <a:chExt cx="0" cy="0"/>
+        </a:xfrm>
+      </p:grpSpPr>
+      <p:sp>
+        <p:nvSpPr>
+          <p:cNvPr id="2" name="Slide Image Placeholder 1"/>
+          <p:cNvSpPr>
+            <a:spLocks noGrp="1"/>
+          </p:cNvSpPr>
+          <p:nvPr>
+            <p:ph type="sldImg" idx="2"/>
+          </p:nvPr>
+        </p:nvSpPr>
+        <p:spPr/>
+      </p:sp>
+      <p:sp>
+        <p:nvSpPr>
+          <p:cNvPr id="3" name="Notes Placeholder 2"/>
+          <p:cNvSpPr>
+            <a:spLocks noGrp="1"/>
+          </p:cNvSpPr>
+          <p:nvPr>
+            <p:ph type="body" idx="3" sz="quarter"/>
+          </p:nvPr>
+        </p:nvSpPr>
+        <p:spPr/>
+        <p:txBody>
+          <a:bodyPr/>
+          <a:lstStyle/>
+          <a:p>
+            <a:r>
+              <a:t>1. WHAT THE SLIDE COMMUNICATES:</a:t>
+            </a:r>
+          </a:p>
+          <a:p>
+            <a:r>
+              <a:t>Presents the theoretical diversity across all 7 evaluated machine learning paradigms from trivial baselines to modern deep networks.</a:t>
+            </a:r>
+          </a:p>
+          <a:p/>
+          <a:p>
+            <a:r>
+              <a:t>2. WHY IT MATTERS:</a:t>
+            </a:r>
+          </a:p>
+          <a:p>
+            <a:r>
+              <a:t>Proves that deep learning was selected based on rigorous comparative empirical evidence rather than arbitrary assumption.</a:t>
+            </a:r>
+          </a:p>
+          <a:p/>
+          <a:p>
+            <a:r>
+              <a:t>3. TECHNICAL EXPLANATION:</a:t>
+            </a:r>
+          </a:p>
+          <a:p>
+            <a:r>
+              <a:t>Comparing linear, tree ensemble, kernel, and convolutional networks exposes the exact performance gains provided by local receptive fields and weight sharing.</a:t>
+            </a:r>
+          </a:p>
+          <a:p/>
+          <a:p>
+            <a:r>
+              <a:t>4. LIKELY VIVA QUESTION:</a:t>
+            </a:r>
+          </a:p>
+          <a:p>
+            <a:r>
+              <a:t>Q: Why evaluate a Dummy Baseline and Logistic Regression?</a:t>
+            </a:r>
+          </a:p>
+          <a:p/>
+          <a:p>
+            <a:r>
+              <a:t>5. STRONG ANSWER:</a:t>
+            </a:r>
+          </a:p>
+          <a:p>
+            <a:r>
+              <a:t>A: The Dummy Baseline confirms that the problem is statistically non-trivial (11.35% chance vs 98.31%). Logistic Regression sets the empirical ceiling for linearly separable decision boundaries (91.49%), proving that non-linear spatial feature extraction is necessary to achieve high performance.</a:t>
+            </a:r>
+          </a:p>
+        </p:txBody>
+      </p:sp>
+      <p:sp>
+        <p:nvSpPr>
+          <p:cNvPr id="4" name="Slide Number Placeholder 3"/>
+          <p:cNvSpPr>
+            <a:spLocks noGrp="1"/>
+          </p:cNvSpPr>
+          <p:nvPr>
+            <p:ph type="sldNum" idx="5" sz="quarter"/>
+          </p:nvPr>
+        </p:nvSpPr>
+        <p:spPr/>
+      </p:sp>
+    </p:spTree>
+  </p:cSld>
+  <p:clrMapOvr>
+    <a:masterClrMapping/>
+  </p:clrMapOvr>
+</p:notes>
+</file>
+
+<file path=ppt/notesSlides/notesSlide12.xml><?xml version="1.0" encoding="utf-8"?>
+<p:notes xmlns:a="http://schemas.openxmlformats.org/drawingml/2006/main" xmlns:p="http://schemas.openxmlformats.org/presentationml/2006/main" xmlns:r="http://schemas.openxmlformats.org/officeDocument/2006/relationships">
+  <p:cSld>
+    <p:spTree>
+      <p:nvGrpSpPr>
+        <p:cNvPr id="1" name=""/>
+        <p:cNvGrpSpPr/>
+        <p:nvPr/>
+      </p:nvGrpSpPr>
+      <p:grpSpPr>
+        <a:xfrm>
+          <a:off x="0" y="0"/>
+          <a:ext cx="0" cy="0"/>
+          <a:chOff x="0" y="0"/>
+          <a:chExt cx="0" cy="0"/>
+        </a:xfrm>
+      </p:grpSpPr>
+      <p:sp>
+        <p:nvSpPr>
+          <p:cNvPr id="2" name="Slide Image Placeholder 1"/>
+          <p:cNvSpPr>
+            <a:spLocks noGrp="1"/>
+          </p:cNvSpPr>
+          <p:nvPr>
+            <p:ph type="sldImg" idx="2"/>
+          </p:nvPr>
+        </p:nvSpPr>
+        <p:spPr/>
+      </p:sp>
+      <p:sp>
+        <p:nvSpPr>
+          <p:cNvPr id="3" name="Notes Placeholder 2"/>
+          <p:cNvSpPr>
+            <a:spLocks noGrp="1"/>
+          </p:cNvSpPr>
+          <p:nvPr>
+            <p:ph type="body" idx="3" sz="quarter"/>
+          </p:nvPr>
+        </p:nvSpPr>
+        <p:spPr/>
+        <p:txBody>
+          <a:bodyPr/>
+          <a:lstStyle/>
+          <a:p>
+            <a:r>
+              <a:t>1. WHAT THE SLIDE COMMUNICATES:</a:t>
+            </a:r>
+          </a:p>
+          <a:p>
+            <a:r>
+              <a:t>Explains the dual-block DeepConvNet topology, parameter allocation, and the critical debugging resolution of the CPU BatchNorm divergence issue.</a:t>
+            </a:r>
+          </a:p>
+          <a:p/>
+          <a:p>
+            <a:r>
+              <a:t>2. WHY IT MATTERS:</a:t>
+            </a:r>
+          </a:p>
+          <a:p>
+            <a:r>
+              <a:t>Demonstrates high-level debugging competence and explains the exact design choices that enabled 98.31% test accuracy.</a:t>
+            </a:r>
+          </a:p>
+          <a:p/>
+          <a:p>
+            <a:r>
+              <a:t>3. TECHNICAL EXPLANATION:</a:t>
+            </a:r>
+          </a:p>
+          <a:p>
+            <a:r>
+              <a:t>Keras 3 on Windows CPU exhibited running variance divergence when BatchNorm was placed after ReLU. Substituting Spatial Dropout eliminated the divergence and provided regularized convergence.</a:t>
+            </a:r>
+          </a:p>
+          <a:p/>
+          <a:p>
+            <a:r>
+              <a:t>4. LIKELY VIVA QUESTION:</a:t>
+            </a:r>
+          </a:p>
+          <a:p>
+            <a:r>
+              <a:t>Q: Why did you choose two stacked 3x3 convolutional layers instead of one 5x5 layer?</a:t>
+            </a:r>
+          </a:p>
+          <a:p/>
+          <a:p>
+            <a:r>
+              <a:t>5. STRONG ANSWER:</a:t>
+            </a:r>
+          </a:p>
+          <a:p>
+            <a:r>
+              <a:t>A: Two consecutive 3x3 convolutions have the exact same effective receptive field (5x5) as a single 5x5 convolution, but require only 2*(3*3)=18 kernel weights instead of 25 (a 28% parameter reduction), while incorporating two non-linear ReLU activations instead of one.</a:t>
+            </a:r>
+          </a:p>
+        </p:txBody>
+      </p:sp>
+      <p:sp>
+        <p:nvSpPr>
+          <p:cNvPr id="4" name="Slide Number Placeholder 3"/>
+          <p:cNvSpPr>
+            <a:spLocks noGrp="1"/>
+          </p:cNvSpPr>
+          <p:nvPr>
+            <p:ph type="sldNum" idx="5" sz="quarter"/>
+          </p:nvPr>
+        </p:nvSpPr>
+        <p:spPr/>
+      </p:sp>
+    </p:spTree>
+  </p:cSld>
+  <p:clrMapOvr>
+    <a:masterClrMapping/>
+  </p:clrMapOvr>
+</p:notes>
+</file>
+
+<file path=ppt/notesSlides/notesSlide13.xml><?xml version="1.0" encoding="utf-8"?>
+<p:notes xmlns:a="http://schemas.openxmlformats.org/drawingml/2006/main" xmlns:p="http://schemas.openxmlformats.org/presentationml/2006/main" xmlns:r="http://schemas.openxmlformats.org/officeDocument/2006/relationships">
+  <p:cSld>
+    <p:spTree>
+      <p:nvGrpSpPr>
+        <p:cNvPr id="1" name=""/>
+        <p:cNvGrpSpPr/>
+        <p:nvPr/>
+      </p:nvGrpSpPr>
+      <p:grpSpPr>
+        <a:xfrm>
+          <a:off x="0" y="0"/>
+          <a:ext cx="0" cy="0"/>
+          <a:chOff x="0" y="0"/>
+          <a:chExt cx="0" cy="0"/>
+        </a:xfrm>
+      </p:grpSpPr>
+      <p:sp>
+        <p:nvSpPr>
+          <p:cNvPr id="2" name="Slide Image Placeholder 1"/>
+          <p:cNvSpPr>
+            <a:spLocks noGrp="1"/>
+          </p:cNvSpPr>
+          <p:nvPr>
+            <p:ph type="sldImg" idx="2"/>
+          </p:nvPr>
+        </p:nvSpPr>
+        <p:spPr/>
+      </p:sp>
+      <p:sp>
+        <p:nvSpPr>
+          <p:cNvPr id="3" name="Notes Placeholder 2"/>
+          <p:cNvSpPr>
+            <a:spLocks noGrp="1"/>
+          </p:cNvSpPr>
+          <p:nvPr>
+            <p:ph type="body" idx="3" sz="quarter"/>
+          </p:nvPr>
+        </p:nvSpPr>
+        <p:spPr/>
+        <p:txBody>
+          <a:bodyPr/>
+          <a:lstStyle/>
+          <a:p>
+            <a:r>
+              <a:t>1. WHAT THE SLIDE COMMUNICATES:</a:t>
+            </a:r>
+          </a:p>
+          <a:p>
+            <a:r>
+              <a:t>Documents the exact training settings, Adam optimization hyperparameters, regularization parameters, and the Windows 11 execution environment.</a:t>
+            </a:r>
+          </a:p>
+          <a:p/>
+          <a:p>
+            <a:r>
+              <a:t>2. WHY IT MATTERS:</a:t>
+            </a:r>
+          </a:p>
+          <a:p>
+            <a:r>
+              <a:t>Provides 100% transparency and guarantees that every training experiment is fully reproducible from code.</a:t>
+            </a:r>
+          </a:p>
+          <a:p/>
+          <a:p>
+            <a:r>
+              <a:t>3. TECHNICAL EXPLANATION:</a:t>
+            </a:r>
+          </a:p>
+          <a:p>
+            <a:r>
+              <a:t>Adam adapts per-parameter learning rates based on running first and second gradient moments. A batch size of 256 offers an optimal trade-off between vectorization throughput and gradient variance.</a:t>
+            </a:r>
+          </a:p>
+          <a:p/>
+          <a:p>
+            <a:r>
+              <a:t>4. LIKELY VIVA QUESTION:</a:t>
+            </a:r>
+          </a:p>
+          <a:p>
+            <a:r>
+              <a:t>Q: Why was Adam chosen over standard SGD with momentum?</a:t>
+            </a:r>
+          </a:p>
+          <a:p/>
+          <a:p>
+            <a:r>
+              <a:t>5. STRONG ANSWER:</a:t>
+            </a:r>
+          </a:p>
+          <a:p>
+            <a:r>
+              <a:t>A: Adam combines the benefits of AdaGrad (handling sparse gradients) and RMSprop (handling non-stationary objectives) by maintaining exponentially decaying averages of past gradients and past squared gradients. This enabled rapid, stable convergence in just 4 epochs on CPU without manual learning-rate annealing.</a:t>
+            </a:r>
+          </a:p>
+        </p:txBody>
+      </p:sp>
+      <p:sp>
+        <p:nvSpPr>
+          <p:cNvPr id="4" name="Slide Number Placeholder 3"/>
+          <p:cNvSpPr>
+            <a:spLocks noGrp="1"/>
+          </p:cNvSpPr>
+          <p:nvPr>
+            <p:ph type="sldNum" idx="5" sz="quarter"/>
+          </p:nvPr>
+        </p:nvSpPr>
+        <p:spPr/>
+      </p:sp>
+    </p:spTree>
+  </p:cSld>
+  <p:clrMapOvr>
+    <a:masterClrMapping/>
+  </p:clrMapOvr>
+</p:notes>
+</file>
+
+<file path=ppt/notesSlides/notesSlide14.xml><?xml version="1.0" encoding="utf-8"?>
+<p:notes xmlns:a="http://schemas.openxmlformats.org/drawingml/2006/main" xmlns:p="http://schemas.openxmlformats.org/presentationml/2006/main" xmlns:r="http://schemas.openxmlformats.org/officeDocument/2006/relationships">
+  <p:cSld>
+    <p:spTree>
+      <p:nvGrpSpPr>
+        <p:cNvPr id="1" name=""/>
+        <p:cNvGrpSpPr/>
+        <p:nvPr/>
+      </p:nvGrpSpPr>
+      <p:grpSpPr>
+        <a:xfrm>
+          <a:off x="0" y="0"/>
+          <a:ext cx="0" cy="0"/>
+          <a:chOff x="0" y="0"/>
+          <a:chExt cx="0" cy="0"/>
+        </a:xfrm>
+      </p:grpSpPr>
+      <p:sp>
+        <p:nvSpPr>
+          <p:cNvPr id="2" name="Slide Image Placeholder 1"/>
+          <p:cNvSpPr>
+            <a:spLocks noGrp="1"/>
+          </p:cNvSpPr>
+          <p:nvPr>
+            <p:ph type="sldImg" idx="2"/>
+          </p:nvPr>
+        </p:nvSpPr>
+        <p:spPr/>
+      </p:sp>
+      <p:sp>
+        <p:nvSpPr>
+          <p:cNvPr id="3" name="Notes Placeholder 2"/>
+          <p:cNvSpPr>
+            <a:spLocks noGrp="1"/>
+          </p:cNvSpPr>
+          <p:nvPr>
+            <p:ph type="body" idx="3" sz="quarter"/>
+          </p:nvPr>
+        </p:nvSpPr>
+        <p:spPr/>
+        <p:txBody>
+          <a:bodyPr/>
+          <a:lstStyle/>
+          <a:p>
+            <a:r>
+              <a:t>1. WHAT THE SLIDE COMMUNICATES:</a:t>
+            </a:r>
+          </a:p>
+          <a:p>
+            <a:r>
+              <a:t>Shows the executed training and validation loss and accuracy trajectories over 4 epochs.</a:t>
+            </a:r>
+          </a:p>
+          <a:p/>
+          <a:p>
+            <a:r>
+              <a:t>2. WHY IT MATTERS:</a:t>
+            </a:r>
+          </a:p>
+          <a:p>
+            <a:r>
+              <a:t>Proves that the model converged smoothly without overfitting or divergence, achieving a healthy generalization gap.</a:t>
+            </a:r>
+          </a:p>
+          <a:p/>
+          <a:p>
+            <a:r>
+              <a:t>3. TECHNICAL EXPLANATION:</a:t>
+            </a:r>
+          </a:p>
+          <a:p>
+            <a:r>
+              <a:t>Validation loss decreased monotonically to 0.0534, while validation accuracy reached 98.23%. Validation accuracy exceeding training accuracy is normal during training with Dropout.</a:t>
+            </a:r>
+          </a:p>
+          <a:p/>
+          <a:p>
+            <a:r>
+              <a:t>4. LIKELY VIVA QUESTION:</a:t>
+            </a:r>
+          </a:p>
+          <a:p>
+            <a:r>
+              <a:t>Q: Why is validation accuracy higher than training accuracy during training?</a:t>
+            </a:r>
+          </a:p>
+          <a:p/>
+          <a:p>
+            <a:r>
+              <a:t>5. STRONG ANSWER:</a:t>
+            </a:r>
+          </a:p>
+          <a:p>
+            <a:r>
+              <a:t>A: Because Dropout (0.25 in conv layers, 0.40 in dense) is active during training, intentionally penalizing network capacity. During validation evaluation, Dropout is disabled, allowing the full ensemble of weights to participate in inference, yielding a higher accuracy.</a:t>
+            </a:r>
+          </a:p>
+        </p:txBody>
+      </p:sp>
+      <p:sp>
+        <p:nvSpPr>
+          <p:cNvPr id="4" name="Slide Number Placeholder 3"/>
+          <p:cNvSpPr>
+            <a:spLocks noGrp="1"/>
+          </p:cNvSpPr>
+          <p:nvPr>
+            <p:ph type="sldNum" idx="5" sz="quarter"/>
+          </p:nvPr>
+        </p:nvSpPr>
+        <p:spPr/>
+      </p:sp>
+    </p:spTree>
+  </p:cSld>
+  <p:clrMapOvr>
+    <a:masterClrMapping/>
+  </p:clrMapOvr>
+</p:notes>
+</file>
+
+<file path=ppt/notesSlides/notesSlide15.xml><?xml version="1.0" encoding="utf-8"?>
+<p:notes xmlns:a="http://schemas.openxmlformats.org/drawingml/2006/main" xmlns:p="http://schemas.openxmlformats.org/presentationml/2006/main" xmlns:r="http://schemas.openxmlformats.org/officeDocument/2006/relationships">
+  <p:cSld>
+    <p:spTree>
+      <p:nvGrpSpPr>
+        <p:cNvPr id="1" name=""/>
+        <p:cNvGrpSpPr/>
+        <p:nvPr/>
+      </p:nvGrpSpPr>
+      <p:grpSpPr>
+        <a:xfrm>
+          <a:off x="0" y="0"/>
+          <a:ext cx="0" cy="0"/>
+          <a:chOff x="0" y="0"/>
+          <a:chExt cx="0" cy="0"/>
+        </a:xfrm>
+      </p:grpSpPr>
+      <p:sp>
+        <p:nvSpPr>
+          <p:cNvPr id="2" name="Slide Image Placeholder 1"/>
+          <p:cNvSpPr>
+            <a:spLocks noGrp="1"/>
+          </p:cNvSpPr>
+          <p:nvPr>
+            <p:ph type="sldImg" idx="2"/>
+          </p:nvPr>
+        </p:nvSpPr>
+        <p:spPr/>
+      </p:sp>
+      <p:sp>
+        <p:nvSpPr>
+          <p:cNvPr id="3" name="Notes Placeholder 2"/>
+          <p:cNvSpPr>
+            <a:spLocks noGrp="1"/>
+          </p:cNvSpPr>
+          <p:nvPr>
+            <p:ph type="body" idx="3" sz="quarter"/>
+          </p:nvPr>
+        </p:nvSpPr>
+        <p:spPr/>
+        <p:txBody>
+          <a:bodyPr/>
+          <a:lstStyle/>
+          <a:p>
+            <a:r>
+              <a:t>1. WHAT THE SLIDE COMMUNICATES:</a:t>
+            </a:r>
+          </a:p>
+          <a:p>
+            <a:r>
+              <a:t>Presents the final empirical benchmark table comparing all 7 models across accuracy, macro F1, training time, and latency.</a:t>
+            </a:r>
+          </a:p>
+          <a:p/>
+          <a:p>
+            <a:r>
+              <a:t>2. WHY IT MATTERS:</a:t>
+            </a:r>
+          </a:p>
+          <a:p>
+            <a:r>
+              <a:t>Provides undeniable quantitative evidence justifying why the DeepConvNet was chosen as the production model.</a:t>
+            </a:r>
+          </a:p>
+          <a:p/>
+          <a:p>
+            <a:r>
+              <a:t>3. TECHNICAL EXPLANATION:</a:t>
+            </a:r>
+          </a:p>
+          <a:p>
+            <a:r>
+              <a:t>All models were tested on the exact same 10,000 isolated test images with zero data leakage. Random Forest had high latency (102ms), SVM reached 96.11%, but DeepConvNet won decisively at 98.31%.</a:t>
+            </a:r>
+          </a:p>
+          <a:p/>
+          <a:p>
+            <a:r>
+              <a:t>4. LIKELY VIVA QUESTION:</a:t>
+            </a:r>
+          </a:p>
+          <a:p>
+            <a:r>
+              <a:t>Q: Why did Random Forest have a slower inference latency (102 ms) than the Deep ConvNet (9.14 ms)?</a:t>
+            </a:r>
+          </a:p>
+          <a:p/>
+          <a:p>
+            <a:r>
+              <a:t>5. STRONG ANSWER:</a:t>
+            </a:r>
+          </a:p>
+          <a:p>
+            <a:r>
+              <a:t>A: Random Forest evaluates 60 independent, deep decision trees sequentially in Python across 784 dimensions, traversing numerous conditional branch statements per sample. The ConvNet, in contrast, executes SIMD vectorized tensor operations, achieving much higher inference throughput.</a:t>
+            </a:r>
+          </a:p>
+        </p:txBody>
+      </p:sp>
+      <p:sp>
+        <p:nvSpPr>
+          <p:cNvPr id="4" name="Slide Number Placeholder 3"/>
+          <p:cNvSpPr>
+            <a:spLocks noGrp="1"/>
+          </p:cNvSpPr>
+          <p:nvPr>
+            <p:ph type="sldNum" idx="5" sz="quarter"/>
+          </p:nvPr>
+        </p:nvSpPr>
+        <p:spPr/>
+      </p:sp>
+    </p:spTree>
+  </p:cSld>
+  <p:clrMapOvr>
+    <a:masterClrMapping/>
+  </p:clrMapOvr>
+</p:notes>
+</file>
+
+<file path=ppt/notesSlides/notesSlide16.xml><?xml version="1.0" encoding="utf-8"?>
+<p:notes xmlns:a="http://schemas.openxmlformats.org/drawingml/2006/main" xmlns:p="http://schemas.openxmlformats.org/presentationml/2006/main" xmlns:r="http://schemas.openxmlformats.org/officeDocument/2006/relationships">
+  <p:cSld>
+    <p:spTree>
+      <p:nvGrpSpPr>
+        <p:cNvPr id="1" name=""/>
+        <p:cNvGrpSpPr/>
+        <p:nvPr/>
+      </p:nvGrpSpPr>
+      <p:grpSpPr>
+        <a:xfrm>
+          <a:off x="0" y="0"/>
+          <a:ext cx="0" cy="0"/>
+          <a:chOff x="0" y="0"/>
+          <a:chExt cx="0" cy="0"/>
+        </a:xfrm>
+      </p:grpSpPr>
+      <p:sp>
+        <p:nvSpPr>
+          <p:cNvPr id="2" name="Slide Image Placeholder 1"/>
+          <p:cNvSpPr>
+            <a:spLocks noGrp="1"/>
+          </p:cNvSpPr>
+          <p:nvPr>
+            <p:ph type="sldImg" idx="2"/>
+          </p:nvPr>
+        </p:nvSpPr>
+        <p:spPr/>
+      </p:sp>
+      <p:sp>
+        <p:nvSpPr>
+          <p:cNvPr id="3" name="Notes Placeholder 2"/>
+          <p:cNvSpPr>
+            <a:spLocks noGrp="1"/>
+          </p:cNvSpPr>
+          <p:nvPr>
+            <p:ph type="body" idx="3" sz="quarter"/>
+          </p:nvPr>
+        </p:nvSpPr>
+        <p:spPr/>
+        <p:txBody>
+          <a:bodyPr/>
+          <a:lstStyle/>
+          <a:p>
+            <a:r>
+              <a:t>1. WHAT THE SLIDE COMMUNICATES:</a:t>
+            </a:r>
+          </a:p>
+          <a:p>
+            <a:r>
+              <a:t>Analyzes the 10x10 confusion matrix, multi-class ROC curves, and Precision-Recall characteristics of the DeepConvNet.</a:t>
+            </a:r>
+          </a:p>
+          <a:p/>
+          <a:p>
+            <a:r>
+              <a:t>2. WHY IT MATTERS:</a:t>
+            </a:r>
+          </a:p>
+          <a:p>
+            <a:r>
+              <a:t>Reveals the exact failure modes and class-specific discrimination boundaries rather than merely quoting aggregate accuracy.</a:t>
+            </a:r>
+          </a:p>
+          <a:p/>
+          <a:p>
+            <a:r>
+              <a:t>3. TECHNICAL EXPLANATION:</a:t>
+            </a:r>
+          </a:p>
+          <a:p>
+            <a:r>
+              <a:t>Errors are concentrated in anatomically similar pairs such as (4, 9) and (3, 5). ROC-AUC &gt; 0.999 demonstrates outstanding ranking separation between true and false classes.</a:t>
+            </a:r>
+          </a:p>
+          <a:p/>
+          <a:p>
+            <a:r>
+              <a:t>4. LIKELY VIVA QUESTION:</a:t>
+            </a:r>
+          </a:p>
+          <a:p>
+            <a:r>
+              <a:t>Q: Why are digits 4 and 9 the most commonly confused pair?</a:t>
+            </a:r>
+          </a:p>
+          <a:p/>
+          <a:p>
+            <a:r>
+              <a:t>5. STRONG ANSWER:</a:t>
+            </a:r>
+          </a:p>
+          <a:p>
+            <a:r>
+              <a:t>A: Digits 4 and 9 share structural topological features: a long vertical right stem, a horizontal midline juncture, and an upper enclosed or semi-enclosed loop. When a human writer fails to close the loop of a 9 or draws a closed-top 4, spatial activations overlap significantly.</a:t>
+            </a:r>
+          </a:p>
+        </p:txBody>
+      </p:sp>
+      <p:sp>
+        <p:nvSpPr>
+          <p:cNvPr id="4" name="Slide Number Placeholder 3"/>
+          <p:cNvSpPr>
+            <a:spLocks noGrp="1"/>
+          </p:cNvSpPr>
+          <p:nvPr>
+            <p:ph type="sldNum" idx="5" sz="quarter"/>
+          </p:nvPr>
+        </p:nvSpPr>
+        <p:spPr/>
+      </p:sp>
+    </p:spTree>
+  </p:cSld>
+  <p:clrMapOvr>
+    <a:masterClrMapping/>
+  </p:clrMapOvr>
+</p:notes>
+</file>
+
+<file path=ppt/notesSlides/notesSlide17.xml><?xml version="1.0" encoding="utf-8"?>
+<p:notes xmlns:a="http://schemas.openxmlformats.org/drawingml/2006/main" xmlns:p="http://schemas.openxmlformats.org/presentationml/2006/main" xmlns:r="http://schemas.openxmlformats.org/officeDocument/2006/relationships">
+  <p:cSld>
+    <p:spTree>
+      <p:nvGrpSpPr>
+        <p:cNvPr id="1" name=""/>
+        <p:cNvGrpSpPr/>
+        <p:nvPr/>
+      </p:nvGrpSpPr>
+      <p:grpSpPr>
+        <a:xfrm>
+          <a:off x="0" y="0"/>
+          <a:ext cx="0" cy="0"/>
+          <a:chOff x="0" y="0"/>
+          <a:chExt cx="0" cy="0"/>
+        </a:xfrm>
+      </p:grpSpPr>
+      <p:sp>
+        <p:nvSpPr>
+          <p:cNvPr id="2" name="Slide Image Placeholder 1"/>
+          <p:cNvSpPr>
+            <a:spLocks noGrp="1"/>
+          </p:cNvSpPr>
+          <p:nvPr>
+            <p:ph type="sldImg" idx="2"/>
+          </p:nvPr>
+        </p:nvSpPr>
+        <p:spPr/>
+      </p:sp>
+      <p:sp>
+        <p:nvSpPr>
+          <p:cNvPr id="3" name="Notes Placeholder 2"/>
+          <p:cNvSpPr>
+            <a:spLocks noGrp="1"/>
+          </p:cNvSpPr>
+          <p:nvPr>
+            <p:ph type="body" idx="3" sz="quarter"/>
+          </p:nvPr>
+        </p:nvSpPr>
+        <p:spPr/>
+        <p:txBody>
+          <a:bodyPr/>
+          <a:lstStyle/>
+          <a:p>
+            <a:r>
+              <a:t>1. WHAT THE SLIDE COMMUNICATES:</a:t>
+            </a:r>
+          </a:p>
+          <a:p>
+            <a:r>
+              <a:t>Explains post-hoc temperature scaling, Expected Calibration Error (ECE), and Shannon entropy confidence diagnostics.</a:t>
+            </a:r>
+          </a:p>
+          <a:p/>
+          <a:p>
+            <a:r>
+              <a:t>2. WHY IT MATTERS:</a:t>
+            </a:r>
+          </a:p>
+          <a:p>
+            <a:r>
+              <a:t>Proves that DigitVision AI avoids overconfident hallucinations and knows when to reject uncertain predictions.</a:t>
+            </a:r>
+          </a:p>
+          <a:p/>
+          <a:p>
+            <a:r>
+              <a:t>3. TECHNICAL EXPLANATION:</a:t>
+            </a:r>
+          </a:p>
+          <a:p>
+            <a:r>
+              <a:t>Temperature scaling softens or sharpens the softmax distribution without altering the argmax prediction order. Shannon entropy measures distribution dispersion to detect out-of-distribution inputs.</a:t>
+            </a:r>
+          </a:p>
+          <a:p/>
+          <a:p>
+            <a:r>
+              <a:t>4. LIKELY VIVA QUESTION:</a:t>
+            </a:r>
+          </a:p>
+          <a:p>
+            <a:r>
+              <a:t>Q: Does temperature scaling change the model's accuracy?</a:t>
+            </a:r>
+          </a:p>
+          <a:p/>
+          <a:p>
+            <a:r>
+              <a:t>5. STRONG ANSWER:</a:t>
+            </a:r>
+          </a:p>
+          <a:p>
+            <a:r>
+              <a:t>A: No. Temperature scaling is a strictly monotonic transformation of the logits: dividing by T &gt; 0 preserves the rank ordering of all class scores. Therefore, accuracy remains identical while the output probabilities become well-calibrated.</a:t>
+            </a:r>
+          </a:p>
+        </p:txBody>
+      </p:sp>
+      <p:sp>
+        <p:nvSpPr>
+          <p:cNvPr id="4" name="Slide Number Placeholder 3"/>
+          <p:cNvSpPr>
+            <a:spLocks noGrp="1"/>
+          </p:cNvSpPr>
+          <p:nvPr>
+            <p:ph type="sldNum" idx="5" sz="quarter"/>
+          </p:nvPr>
+        </p:nvSpPr>
+        <p:spPr/>
+      </p:sp>
+    </p:spTree>
+  </p:cSld>
+  <p:clrMapOvr>
+    <a:masterClrMapping/>
+  </p:clrMapOvr>
+</p:notes>
+</file>
+
+<file path=ppt/notesSlides/notesSlide18.xml><?xml version="1.0" encoding="utf-8"?>
+<p:notes xmlns:a="http://schemas.openxmlformats.org/drawingml/2006/main" xmlns:p="http://schemas.openxmlformats.org/presentationml/2006/main" xmlns:r="http://schemas.openxmlformats.org/officeDocument/2006/relationships">
+  <p:cSld>
+    <p:spTree>
+      <p:nvGrpSpPr>
+        <p:cNvPr id="1" name=""/>
+        <p:cNvGrpSpPr/>
+        <p:nvPr/>
+      </p:nvGrpSpPr>
+      <p:grpSpPr>
+        <a:xfrm>
+          <a:off x="0" y="0"/>
+          <a:ext cx="0" cy="0"/>
+          <a:chOff x="0" y="0"/>
+          <a:chExt cx="0" cy="0"/>
+        </a:xfrm>
+      </p:grpSpPr>
+      <p:sp>
+        <p:nvSpPr>
+          <p:cNvPr id="2" name="Slide Image Placeholder 1"/>
+          <p:cNvSpPr>
+            <a:spLocks noGrp="1"/>
+          </p:cNvSpPr>
+          <p:nvPr>
+            <p:ph type="sldImg" idx="2"/>
+          </p:nvPr>
+        </p:nvSpPr>
+        <p:spPr/>
+      </p:sp>
+      <p:sp>
+        <p:nvSpPr>
+          <p:cNvPr id="3" name="Notes Placeholder 2"/>
+          <p:cNvSpPr>
+            <a:spLocks noGrp="1"/>
+          </p:cNvSpPr>
+          <p:nvPr>
+            <p:ph type="body" idx="3" sz="quarter"/>
+          </p:nvPr>
+        </p:nvSpPr>
+        <p:spPr/>
+        <p:txBody>
+          <a:bodyPr/>
+          <a:lstStyle/>
+          <a:p>
+            <a:r>
+              <a:t>1. WHAT THE SLIDE COMMUNICATES:</a:t>
+            </a:r>
+          </a:p>
+          <a:p>
+            <a:r>
+              <a:t>Presents visual attribution via Grad-CAM and details physical stroke forensics computed during inference.</a:t>
+            </a:r>
+          </a:p>
+          <a:p/>
+          <a:p>
+            <a:r>
+              <a:t>2. WHY IT MATTERS:</a:t>
+            </a:r>
+          </a:p>
+          <a:p>
+            <a:r>
+              <a:t>Transforms the model from an opaque black box into an auditable intelligence system that provides visual evidence for every decision.</a:t>
+            </a:r>
+          </a:p>
+          <a:p/>
+          <a:p>
+            <a:r>
+              <a:t>3. TECHNICAL EXPLANATION:</a:t>
+            </a:r>
+          </a:p>
+          <a:p>
+            <a:r>
+              <a:t>Grad-CAM computes the gradient of the predicted class score with respect to feature maps in 'conv_cam', creating a coarse localization map highlighting discriminative regions.</a:t>
+            </a:r>
+          </a:p>
+          <a:p/>
+          <a:p>
+            <a:r>
+              <a:t>4. LIKELY VIVA QUESTION:</a:t>
+            </a:r>
+          </a:p>
+          <a:p>
+            <a:r>
+              <a:t>Q: Why is the ReLU activation applied at the end of Grad-CAM?</a:t>
+            </a:r>
+          </a:p>
+          <a:p/>
+          <a:p>
+            <a:r>
+              <a:t>5. STRONG ANSWER:</a:t>
+            </a:r>
+          </a:p>
+          <a:p>
+            <a:r>
+              <a:t>A: ReLU is applied because we are only interested in features that have a positive influence on the target class score. Features with negative gradients indicate evidence for competing classes, so suppressing them yields clean, focused visual attribution.</a:t>
+            </a:r>
+          </a:p>
+        </p:txBody>
+      </p:sp>
+      <p:sp>
+        <p:nvSpPr>
+          <p:cNvPr id="4" name="Slide Number Placeholder 3"/>
+          <p:cNvSpPr>
+            <a:spLocks noGrp="1"/>
+          </p:cNvSpPr>
+          <p:nvPr>
+            <p:ph type="sldNum" idx="5" sz="quarter"/>
+          </p:nvPr>
+        </p:nvSpPr>
+        <p:spPr/>
+      </p:sp>
+    </p:spTree>
+  </p:cSld>
+  <p:clrMapOvr>
+    <a:masterClrMapping/>
+  </p:clrMapOvr>
+</p:notes>
+</file>
+
+<file path=ppt/notesSlides/notesSlide19.xml><?xml version="1.0" encoding="utf-8"?>
+<p:notes xmlns:a="http://schemas.openxmlformats.org/drawingml/2006/main" xmlns:p="http://schemas.openxmlformats.org/presentationml/2006/main" xmlns:r="http://schemas.openxmlformats.org/officeDocument/2006/relationships">
+  <p:cSld>
+    <p:spTree>
+      <p:nvGrpSpPr>
+        <p:cNvPr id="1" name=""/>
+        <p:cNvGrpSpPr/>
+        <p:nvPr/>
+      </p:nvGrpSpPr>
+      <p:grpSpPr>
+        <a:xfrm>
+          <a:off x="0" y="0"/>
+          <a:ext cx="0" cy="0"/>
+          <a:chOff x="0" y="0"/>
+          <a:chExt cx="0" cy="0"/>
+        </a:xfrm>
+      </p:grpSpPr>
+      <p:sp>
+        <p:nvSpPr>
+          <p:cNvPr id="2" name="Slide Image Placeholder 1"/>
+          <p:cNvSpPr>
+            <a:spLocks noGrp="1"/>
+          </p:cNvSpPr>
+          <p:nvPr>
+            <p:ph type="sldImg" idx="2"/>
+          </p:nvPr>
+        </p:nvSpPr>
+        <p:spPr/>
+      </p:sp>
+      <p:sp>
+        <p:nvSpPr>
+          <p:cNvPr id="3" name="Notes Placeholder 2"/>
+          <p:cNvSpPr>
+            <a:spLocks noGrp="1"/>
+          </p:cNvSpPr>
+          <p:nvPr>
+            <p:ph type="body" idx="3" sz="quarter"/>
+          </p:nvPr>
+        </p:nvSpPr>
+        <p:spPr/>
+        <p:txBody>
+          <a:bodyPr/>
+          <a:lstStyle/>
+          <a:p>
+            <a:r>
+              <a:t>1. WHAT THE SLIDE COMMUNICATES:</a:t>
+            </a:r>
+          </a:p>
+          <a:p>
+            <a:r>
+              <a:t>Demonstrates the live ML Mission Control web application deployed on FastAPI at 127.0.0.1:8000.</a:t>
+            </a:r>
+          </a:p>
+          <a:p/>
+          <a:p>
+            <a:r>
+              <a:t>2. WHY IT MATTERS:</a:t>
+            </a:r>
+          </a:p>
+          <a:p>
+            <a:r>
+              <a:t>Proves that the system is fully operational and capable of serving real-time inferences with complete telemetry and Grad-CAM visualizations.</a:t>
+            </a:r>
+          </a:p>
+          <a:p/>
+          <a:p>
+            <a:r>
+              <a:t>3. TECHNICAL EXPLANATION:</a:t>
+            </a:r>
+          </a:p>
+          <a:p>
+            <a:r>
+              <a:t>FastAPI handles asynchronous POST requests containing base64 image payloads. The canonical preprocessor processes the payload and returns JSON telemetry and base64 heatmap overlays.</a:t>
+            </a:r>
+          </a:p>
+          <a:p/>
+          <a:p>
+            <a:r>
+              <a:t>4. LIKELY VIVA QUESTION:</a:t>
+            </a:r>
+          </a:p>
+          <a:p>
+            <a:r>
+              <a:t>Q: How does the application perform under noisy or rotated input?</a:t>
+            </a:r>
+          </a:p>
+          <a:p/>
+          <a:p>
+            <a:r>
+              <a:t>5. STRONG ANSWER:</a:t>
+            </a:r>
+          </a:p>
+          <a:p>
+            <a:r>
+              <a:t>A: As shown in the robustness curves on the left, our model maintains &gt;95% accuracy up to +-15 degrees of rotation and moderate Gaussian noise. Beyond 25 degrees, accuracy degrades gracefully, and the Shannon entropy trigger flags the prediction as uncertain.</a:t>
             </a:r>
           </a:p>
         </p:txBody>
@@ -754,7 +1835,7 @@
           </a:p>
           <a:p>
             <a:r>
-              <a:t>Articulates the three fundamental failure modes of standard digit classifiers: silent train-inference skew, overconfidence without calibration, and opaque black-box decisions.</a:t>
+              <a:t>Articulates the three core failure modes: train-inference skew, overconfident uncalibrated softmax outputs, and black-box opacity.</a:t>
             </a:r>
           </a:p>
           <a:p/>
@@ -765,7 +1846,7 @@
           </a:p>
           <a:p>
             <a:r>
-              <a:t>Demonstrates deep awareness of why 99% test-accuracy models fail in production and motivates the multi-tier engineering defenses built into DIGITVISION AI.</a:t>
+              <a:t>Proves deep awareness of why high laboratory test accuracy often collapses in production interactive environments.</a:t>
             </a:r>
           </a:p>
           <a:p/>
@@ -776,7 +1857,7 @@
           </a:p>
           <a:p>
             <a:r>
-              <a:t>MNIST models trained on clean data lack translation and scale invariance. If an interactive canvas does not replicate the NIST center-of-mass centering and 20x20 bounding box fit, activation patterns diverge completely from the convolutional receptive fields.</a:t>
+              <a:t>Convolutional receptive fields require spatial normalization. In the absence of center-of-mass centering and bounding-box scaling, filters fire on background zero-weights.</a:t>
             </a:r>
           </a:p>
           <a:p/>
@@ -787,7 +1868,7 @@
           </a:p>
           <a:p>
             <a:r>
-              <a:t>Q: Why does a 99% accurate MNIST CNN misclassify a clearly drawn digit '2' drawn in the corner of a web canvas?</a:t>
+              <a:t>Q: Why does a 99% accurate MNIST CNN fail when given an off-center drawing from a web canvas?</a:t>
             </a:r>
           </a:p>
           <a:p/>
@@ -798,7 +1879,126 @@
           </a:p>
           <a:p>
             <a:r>
-              <a:t>A: Because standard convolutional layers with pooling are only shift-invariant for small pixel perturbations, not large translation shifts. Native MNIST digits are centered by their center-of-mass to (13.5, 13.5) and scaled to a 20x20 box. Drawing in a canvas corner alters the receptive field activations to background zero-weights, causing complete misclassification unless centered via image moments.</a:t>
+              <a:t>A: Because standard convolutional layers with pooling are only invariant to small pixel shifts, not global translation or scale changes. Without moment-based centroid alignment, features are spatially misaligned with learned kernel weights.</a:t>
+            </a:r>
+          </a:p>
+        </p:txBody>
+      </p:sp>
+      <p:sp>
+        <p:nvSpPr>
+          <p:cNvPr id="4" name="Slide Number Placeholder 3"/>
+          <p:cNvSpPr>
+            <a:spLocks noGrp="1"/>
+          </p:cNvSpPr>
+          <p:nvPr>
+            <p:ph type="sldNum" idx="5" sz="quarter"/>
+          </p:nvPr>
+        </p:nvSpPr>
+        <p:spPr/>
+      </p:sp>
+    </p:spTree>
+  </p:cSld>
+  <p:clrMapOvr>
+    <a:masterClrMapping/>
+  </p:clrMapOvr>
+</p:notes>
+</file>
+
+<file path=ppt/notesSlides/notesSlide20.xml><?xml version="1.0" encoding="utf-8"?>
+<p:notes xmlns:a="http://schemas.openxmlformats.org/drawingml/2006/main" xmlns:p="http://schemas.openxmlformats.org/presentationml/2006/main" xmlns:r="http://schemas.openxmlformats.org/officeDocument/2006/relationships">
+  <p:cSld>
+    <p:spTree>
+      <p:nvGrpSpPr>
+        <p:cNvPr id="1" name=""/>
+        <p:cNvGrpSpPr/>
+        <p:nvPr/>
+      </p:nvGrpSpPr>
+      <p:grpSpPr>
+        <a:xfrm>
+          <a:off x="0" y="0"/>
+          <a:ext cx="0" cy="0"/>
+          <a:chOff x="0" y="0"/>
+          <a:chExt cx="0" cy="0"/>
+        </a:xfrm>
+      </p:grpSpPr>
+      <p:sp>
+        <p:nvSpPr>
+          <p:cNvPr id="2" name="Slide Image Placeholder 1"/>
+          <p:cNvSpPr>
+            <a:spLocks noGrp="1"/>
+          </p:cNvSpPr>
+          <p:nvPr>
+            <p:ph type="sldImg" idx="2"/>
+          </p:nvPr>
+        </p:nvSpPr>
+        <p:spPr/>
+      </p:sp>
+      <p:sp>
+        <p:nvSpPr>
+          <p:cNvPr id="3" name="Notes Placeholder 2"/>
+          <p:cNvSpPr>
+            <a:spLocks noGrp="1"/>
+          </p:cNvSpPr>
+          <p:nvPr>
+            <p:ph type="body" idx="3" sz="quarter"/>
+          </p:nvPr>
+        </p:nvSpPr>
+        <p:spPr/>
+        <p:txBody>
+          <a:bodyPr/>
+          <a:lstStyle/>
+          <a:p>
+            <a:r>
+              <a:t>1. WHAT THE SLIDE COMMUNICATES:</a:t>
+            </a:r>
+          </a:p>
+          <a:p>
+            <a:r>
+              <a:t>Summarizes the successful achievement of all 7 pre-defined objectives, candidly outlines architectural limitations, and charts the future research roadmap.</a:t>
+            </a:r>
+          </a:p>
+          <a:p/>
+          <a:p>
+            <a:r>
+              <a:t>2. WHY IT MATTERS:</a:t>
+            </a:r>
+          </a:p>
+          <a:p>
+            <a:r>
+              <a:t>Concludes the defense with intellectual honesty and scientific rigor, proving that the project was executed thoroughly and thoughtfully.</a:t>
+            </a:r>
+          </a:p>
+          <a:p/>
+          <a:p>
+            <a:r>
+              <a:t>3. TECHNICAL EXPLANATION:</a:t>
+            </a:r>
+          </a:p>
+          <a:p>
+            <a:r>
+              <a:t>All 7 objectives defined in Chapter 1 were achieved. Future extensions include WebAssembly client-side execution, EMNIST alphanumeric scaling, and Monte Carlo dropout.</a:t>
+            </a:r>
+          </a:p>
+          <a:p/>
+          <a:p>
+            <a:r>
+              <a:t>4. LIKELY VIVA QUESTION:</a:t>
+            </a:r>
+          </a:p>
+          <a:p>
+            <a:r>
+              <a:t>Q: If you had two more months to extend this project, what would be your top priority?</a:t>
+            </a:r>
+          </a:p>
+          <a:p/>
+          <a:p>
+            <a:r>
+              <a:t>5. STRONG ANSWER:</a:t>
+            </a:r>
+          </a:p>
+          <a:p>
+            <a:r>
+              <a:t>A: My top priority would be deploying the model to on-device WebAssembly via ONNX Runtime to eliminate server latency, followed by implementing Monte Carlo Dropout to explicitly disentangle data noise (aleatoric uncertainty) from model parameter ignorance (epistemic uncertainty).</a:t>
             </a:r>
           </a:p>
         </p:txBody>
@@ -873,7 +2073,7 @@
           </a:p>
           <a:p>
             <a:r>
-              <a:t>Defines the 4 concrete, executable engineering goals that make DIGITVISION AI a comprehensive, production-grade intelligence platform.</a:t>
+              <a:t>Explains the foundational motivation behind DigitVision AI, highlighting why safety-critical applications demand calibrated confidence and explainability.</a:t>
             </a:r>
           </a:p>
           <a:p/>
@@ -884,7 +2084,7 @@
           </a:p>
           <a:p>
             <a:r>
-              <a:t>Proves that the system is built with scientific discipline and multi-tier architectural redundancy rather than ad-hoc heuristics.</a:t>
+              <a:t>Connects academic machine learning to real-world deployment challenges where silent failures are intolerable.</a:t>
             </a:r>
           </a:p>
           <a:p/>
@@ -895,7 +2095,7 @@
           </a:p>
           <a:p>
             <a:r>
-              <a:t>The project unifies data integrity, classical ML baselines, deep neural vision, post-hoc calibration, input-quality gating, and gradient-weighted visual explanations into a single coherent software pipeline.</a:t>
+              <a:t>Raw deep neural network outputs frequently produce uncalibrated overconfidence due to cross-entropy over-parameterization. Calibrating logits and computing entropy provides an epistemic safety threshold.</a:t>
             </a:r>
           </a:p>
           <a:p/>
@@ -906,7 +2106,7 @@
           </a:p>
           <a:p>
             <a:r>
-              <a:t>Q: What is the role of the input-quality gating objective in an ML pipeline?</a:t>
+              <a:t>Q: What is the danger of relying on raw softmax probabilities for decision making?</a:t>
             </a:r>
           </a:p>
           <a:p/>
@@ -917,7 +2117,7 @@
           </a:p>
           <a:p>
             <a:r>
-              <a:t>A: Input-quality gating acts as an epistemic firewall. Rather than allowing out-of-distribution inputs (blank canvas, solid blocks, speckle noise) to trigger erroneous model inferences, the system assesses physical stroke topology and fails closed, emitting informative diagnostic flags.</a:t>
+              <a:t>A: Modern deep networks trained with negative log-likelihood are prone to overconfidence because cross-entropy encourages driving output logits to extreme values, yielding near-100% probabilities even on out-of-distribution or corrupted samples.</a:t>
             </a:r>
           </a:p>
         </p:txBody>
@@ -992,7 +2192,7 @@
           </a:p>
           <a:p>
             <a:r>
-              <a:t>Presents the structural design of the Phase 01 codebase, detailing modular separation between configuration, data pipeline, canonical preprocessing, quality gating, and tests.</a:t>
+              <a:t>Presents the 7 concrete, executable engineering and research objectives established prior to model training.</a:t>
             </a:r>
           </a:p>
           <a:p/>
@@ -1003,7 +2203,7 @@
           </a:p>
           <a:p>
             <a:r>
-              <a:t>Architectural modularity ensures zero coupling between data ingestion and model inference, enabling rapid extension into Phase 02 while maintaining mathematical invariants.</a:t>
+              <a:t>Establishes transparent evaluation benchmarks and proves that all project claims are tied to predefined measurable targets.</a:t>
             </a:r>
           </a:p>
           <a:p/>
@@ -1014,7 +2214,7 @@
           </a:p>
           <a:p>
             <a:r>
-              <a:t>Each layer operates under strict type annotations and explicit contracts. The preprocessing pipeline takes multi-modal inputs and returns a guaranteed (1, 28, 28, 1) float32 tensor with diagnostic metadata.</a:t>
+              <a:t>Every objective is directly validated by reproducible code artifacts in the repository and verified in Table 9.1 of the final report.</a:t>
             </a:r>
           </a:p>
           <a:p/>
@@ -1025,7 +2225,7 @@
           </a:p>
           <a:p>
             <a:r>
-              <a:t>Q: How does src/config.py prevent subtle bugs during multi-agent engineering?</a:t>
+              <a:t>Q: What was the pre-defined success criterion, and how did you select it?</a:t>
             </a:r>
           </a:p>
           <a:p/>
@@ -1036,7 +2236,7 @@
           </a:p>
           <a:p>
             <a:r>
-              <a:t>A: By centralizing all random seeds, partition sizes (20k/3k/10k), canvas dimensions (28x28, 20x20 inner), and directory paths into a single module, eliminating magic numbers and ensuring that offline evaluation and live serving always operate on identical hyperparameters.</a:t>
+              <a:t>A: The success criterion was set at &gt;=95.0% test accuracy and &gt;=0.950 macro F1-score on the held-out 10,000 test set. This was selected because 95% represents the operational threshold for reliable digit recognition, which our DeepConvNet exceeded by achieving 98.31%.</a:t>
             </a:r>
           </a:p>
         </p:txBody>
@@ -1111,7 +2311,7 @@
           </a:p>
           <a:p>
             <a:r>
-              <a:t>Explains the origin of MNIST, its 70,000-sample composition, and the strict air-gapped partition hygiene isolating the 10,000 test images.</a:t>
+              <a:t>Defines the formal mathematical framework: tensor input space, categorical label space, loss formulation, and metric definitions.</a:t>
             </a:r>
           </a:p>
           <a:p/>
@@ -1122,7 +2322,7 @@
           </a:p>
           <a:p>
             <a:r>
-              <a:t>Data leakage is the most rampant flaw in ML benchmarks. Proves that our reported metrics reflect true generalization performance.</a:t>
+              <a:t>Grounds the implementation in sound statistical machine learning theory rather than informal heuristics.</a:t>
             </a:r>
           </a:p>
           <a:p/>
@@ -1133,7 +2333,7 @@
           </a:p>
           <a:p>
             <a:r>
-              <a:t>The dataset is loaded by MNISTPipeline in src/data/dataset.py, splitting into 20k train, 3k val, and 10k test. The sample grid embedded on the right is an actual executed rendering showing stroke diversity across all 10 classes.</a:t>
+              <a:t>The task is supervised multi-class classification. The model maps 28x28 grayscale tensors to a 10-dimensional probability simplex via softmax logits.</a:t>
             </a:r>
           </a:p>
           <a:p/>
@@ -1144,7 +2344,7 @@
           </a:p>
           <a:p>
             <a:r>
-              <a:t>Q: Why did you use 20,000 training samples instead of the full 60,000?</a:t>
+              <a:t>Q: Why use Macro F1-score alongside Accuracy when MNIST is nearly balanced?</a:t>
             </a:r>
           </a:p>
           <a:p/>
@@ -1155,7 +2355,7 @@
           </a:p>
           <a:p>
             <a:r>
-              <a:t>A: In Phase 01, using a 20,000 training partition provides statistical sample sufficiency (&gt;98.2% test accuracy on ConvNet) while enabling rapid hyperparameter exploration and rapid test-suite execution. The pipeline is fully parameter-driven and can scale to 60,000 with a single configuration flag.</a:t>
+              <a:t>A: While MNIST has roughly 1,000 samples per class in the test set, slight support variations (e.g., 892 vs 1,135) can mask minority class degradation in global accuracy. Macro F1 assigns equal weight to every digit class, ensuring robust multi-class verification.</a:t>
             </a:r>
           </a:p>
         </p:txBody>
@@ -1230,7 +2430,7 @@
           </a:p>
           <a:p>
             <a:r>
-              <a:t>Formalizes the mathematical definitions of the tensor space X in [0,1]^(28x28x1) versus flattened X_flat in [0,1]^784, and details empirical pixel statistics.</a:t>
+              <a:t>Presents the complete architectural flow from raw user stroke input to calibrated prediction, forensic telemetry, and explainability heatmaps.</a:t>
             </a:r>
           </a:p>
           <a:p/>
@@ -1241,7 +2441,7 @@
           </a:p>
           <a:p>
             <a:r>
-              <a:t>Distinguishing spatial tensors from flattened vectors avoids architectural confusion between CNNs and classical classifiers. Real sparsity metrics explain why convolution and sparse operations are computationally efficient.</a:t>
+              <a:t>Proves that all system components operate as a cohesive, coupled pipeline with zero architectural disconnects.</a:t>
             </a:r>
           </a:p>
           <a:p/>
@@ -1252,7 +2452,7 @@
           </a:p>
           <a:p>
             <a:r>
-              <a:t>Over 80.88% of pixels in MNIST are pure zeros (background). The pixel histogram shows an extreme bimodal distribution: a spike at 0.0 (background) and a continuous curve across [0.2, 1.0] representing antialiased stroke edges.</a:t>
+              <a:t>The architecture decouples UI rendering from backend inference via asynchronous FastAPI endpoints. The canonical preprocessor acts as the universal normalization contract.</a:t>
             </a:r>
           </a:p>
           <a:p/>
@@ -1263,7 +2463,7 @@
           </a:p>
           <a:p>
             <a:r>
-              <a:t>Q: Why is the global standard deviation 0.3081 so high relative to the mean 0.1307?</a:t>
+              <a:t>Q: How does the system ensure zero skew between live web drawings and training images?</a:t>
             </a:r>
           </a:p>
           <a:p/>
@@ -1274,7 +2474,7 @@
           </a:p>
           <a:p>
             <a:r>
-              <a:t>A: Because the distribution is heavily bimodal. Over 80% of pixels are zeros, pulling the mean down to 0.1307, while stroke pixels reach 1.0, creating substantial dispersion and yielding a high standard deviation.</a:t>
+              <a:t>A: By executing the exact same Python function canonical_preprocess_tensor() from src/preprocessing/canonical.py across both dataset loading and the live FastAPI web endpoint. The identical 7-stage sequence guarantees invariant representation parity.</a:t>
             </a:r>
           </a:p>
         </p:txBody>
@@ -1349,7 +2549,7 @@
           </a:p>
           <a:p>
             <a:r>
-              <a:t>Presents empirical EDA results: exact class frequencies confirming balance and mean prototype images highlighting spatial stroke concentration.</a:t>
+              <a:t>Documents authentic NIST provenance, formal citations, and strict zero-leakage data hygiene protocols.</a:t>
             </a:r>
           </a:p>
           <a:p/>
@@ -1360,7 +2560,7 @@
           </a:p>
           <a:p>
             <a:r>
-              <a:t>Proves that class imbalance is not a confounding factor (imbalance ratio &lt; 1.28) and reveals topological overlaps between digits like 3, 5, and 8.</a:t>
+              <a:t>Refutes undocumented Kaggle datasets and guarantees that reported test numbers reflect genuine out-of-sample generalization.</a:t>
             </a:r>
           </a:p>
           <a:p/>
@@ -1371,7 +2571,7 @@
           </a:p>
           <a:p>
             <a:r>
-              <a:t>The class distribution chart proves consistent balance across Train, Validation, and Test splits. The average image per class displays the conditional mean image E[X | y=k], revealing the shared stroke trajectory and variance around loops and endpoints.</a:t>
+              <a:t>MNIST was created by mixing NIST SD-3 and SD-19 to balance writing styles between Census workers and high school students. Our pipeline preserves this provenance and verifies set disjointness.</a:t>
             </a:r>
           </a:p>
           <a:p/>
@@ -1382,7 +2582,7 @@
           </a:p>
           <a:p>
             <a:r>
-              <a:t>Q: What do the average digit images tell us about model design?</a:t>
+              <a:t>Q: How did you prove that there is zero data leakage between training and testing?</a:t>
             </a:r>
           </a:p>
           <a:p/>
@@ -1393,7 +2593,7 @@
           </a:p>
           <a:p>
             <a:r>
-              <a:t>A: They reveal that certain digits (such as '1') have minimal spatial variance, occupying a narrow central column, whereas digits like '0', '8', and '2' have high spatial variance across their loops. This justifies using multi-scale convolutional kernels (3x3 receptive fields) to capture local stroke junctions.</a:t>
+              <a:t>A: Through automated regression assertions in tests/test_data.py that verify index disjointness (train_idx intersection test_idx is empty), and by fitting all preprocessing parameters strictly on the training partition before evaluating the air-gapped test set.</a:t>
             </a:r>
           </a:p>
         </p:txBody>
@@ -1468,7 +2668,7 @@
           </a:p>
           <a:p>
             <a:r>
-              <a:t>Walks through the exact 10 algorithmic stages of the Canonical Preprocessing Invariant implemented in src/preprocessing/canonical.py.</a:t>
+              <a:t>Presents empirical EDA findings through executed visualizations: 10x10 sample diversity grid and per-class average digit representations.</a:t>
             </a:r>
           </a:p>
           <a:p/>
@@ -1479,7 +2679,7 @@
           </a:p>
           <a:p>
             <a:r>
-              <a:t>This single function eliminates the #1 cause of deployment failure in vision models: train/inference skew. Every input to every model passes through this exact logic.</a:t>
+              <a:t>Proves that data characteristics were empirically measured and understood prior to modeling rather than treated as an abstract black box.</a:t>
             </a:r>
           </a:p>
           <a:p/>
@@ -1490,7 +2690,7 @@
           </a:p>
           <a:p>
             <a:r>
-              <a:t>Centering by bounding box center is vulnerable to asymmetric strokes (e.g. digit '1' or '7'). Centering by spatial center-of-mass (m10/m00, m01/m00) guarantees that the physical mass of the stroke is centered at (13.5, 13.5), exactly matching Yann LeCun's NIST normalization standard.</a:t>
+              <a:t>Bimodal intensity distributions justify Otsu thresholding. Mean digit heatmaps demonstrate that the anatomical centers of mass are strictly aligned to the geometric center (13.5, 13.5).</a:t>
             </a:r>
           </a:p>
           <a:p/>
@@ -1501,7 +2701,7 @@
           </a:p>
           <a:p>
             <a:r>
-              <a:t>Q: Why center by center-of-mass instead of the geometric bounding box center?</a:t>
+              <a:t>Q: What do the average digit images tell us about class separability?</a:t>
             </a:r>
           </a:p>
           <a:p/>
@@ -1512,7 +2712,7 @@
           </a:p>
           <a:p>
             <a:r>
-              <a:t>A: Geometric bounding box center only considers extreme pixel coordinates, meaning a single stray pixel or ascender/descender shifts the center drastically. Center-of-mass computes the weighted intensity centroid across all stroke pixels using zeroth and first-order spatial moments, which is robust to noise and matches how MNIST was originally standardized.</a:t>
+              <a:t>A: Average digit images reveal class-specific stroke density regions. Digits like '0' and '1' possess highly distinct spatial density contours, whereas digits '4' and '9' exhibit overlapping stroke paths in their upper loops, explaining why they are more prone to subtle confusion.</a:t>
             </a:r>
           </a:p>
         </p:txBody>
@@ -1587,7 +2787,7 @@
           </a:p>
           <a:p>
             <a:r>
-              <a:t>Articulates the core engineering discipline guiding DIGITVISION AI: synchronization of all 5 deliverables, strict zero-fabrication, fail-closed safety, and executable testing.</a:t>
+              <a:t>Details the 7-stage canonical preprocessing pipeline and explains how center-of-mass moment centering solves translation skew.</a:t>
             </a:r>
           </a:p>
           <a:p/>
@@ -1598,7 +2798,7 @@
           </a:p>
           <a:p>
             <a:r>
-              <a:t>Distinguishes rigorous machine learning software engineering from quick, unmaintainable notebook prototypes.</a:t>
+              <a:t>Demonstrates the engineering rigor that guarantees 100% feature representation parity across offline datasets and live interactive web canvas drawings.</a:t>
             </a:r>
           </a:p>
           <a:p/>
@@ -1609,7 +2809,7 @@
           </a:p>
           <a:p>
             <a:r>
-              <a:t>Whenever an experiment is executed or an invariant is updated, scripts write to the master JSON registry (experiment_results.json), and documentation and presentation scripts pull directly from this single source of truth.</a:t>
+              <a:t>Raw input is thresholded with Otsu binarization, cropped, scaled to 20x20 maintaining aspect ratio, and translated so its center of mass coincides exactly with (13.5, 13.5).</a:t>
             </a:r>
           </a:p>
           <a:p/>
@@ -1620,7 +2820,7 @@
           </a:p>
           <a:p>
             <a:r>
-              <a:t>Q: What happens if a developer introduces a new preprocessing flag only in the web app?</a:t>
+              <a:t>Q: Why center the digit using Center-of-Mass rather than the center of the bounding box?</a:t>
             </a:r>
           </a:p>
           <a:p/>
@@ -1631,7 +2831,7 @@
           </a:p>
           <a:p>
             <a:r>
-              <a:t>A: It violates our core invariant. Our test suite (test_preprocessing.py) and architectural rules mandate that all inference calls route through src/preprocessing/canonical.py. If a developer introduces divergent logic, automated verification audits flag it immediately.</a:t>
+              <a:t>A: Bounding box centers are vulnerable to asymmetric stroke flourishes or ascenders. The NIST preprocessing specification that produced MNIST used Center of Mass (first-order spatial moments), because the perceptual center of a handwritten glyph corresponds to its stroke mass.</a:t>
             </a:r>
           </a:p>
         </p:txBody>
@@ -4676,7 +5876,7 @@
               </a:defRPr>
             </a:pPr>
             <a:r>
-              <a:t>PHASE 01: DATA INTELLIGENCE &amp; FOUNDATION</a:t>
+              <a:t>DEPARTMENT OF COMPUTER SCIENCE &amp; ENGINEERING (AI &amp; ML) — B.TECH MICRO PROJECT DEFENSE</a:t>
             </a:r>
           </a:p>
           <a:p>
@@ -4716,7 +5916,7 @@
               </a:defRPr>
             </a:pPr>
             <a:r>
-              <a:t>Canonical Preprocessing Invariant  |  Mathematical Foundations  |  Empirical EDA  |  Isolated Benchmark Suite</a:t>
+              <a:t>Dual-Block DeepConvNet (98.31% Test Acc) | Temperature Scaled (ECE Minimal) | Grad-CAM Grounded | Deep Obsidian HUD</a:t>
             </a:r>
           </a:p>
         </p:txBody>
@@ -4797,7 +5997,7 @@
               </a:defRPr>
             </a:pPr>
             <a:r>
-              <a:t>ENGINEERING RUNTIME: PYTHON 3.13  •  TEST SUITE: 33/33 PASSING  •  DATASET: MNIST 70,000 SAMPLES</a:t>
+              <a:t>STUDENT TEAM: 22VE1A6701, 22VE1A6702, 22VE1A6703, 22VE1A6704  •  SREYAS INSTITUTE OF ENGINEERING &amp; TECHNOLOGY</a:t>
             </a:r>
           </a:p>
           <a:p>
@@ -4810,7 +6010,7 @@
               </a:defRPr>
             </a:pPr>
             <a:r>
-              <a:t>Core Invariant: Raw Image → Grayscale → Contrast Norm → Otsu/Threshold → BBox → 20×20 Aspect Scaling → Center-of-Mass (13.5, 13.5) → (1, 28, 28, 1) float32</a:t>
+              <a:t>Academic Regulation: R22 | Academic Year: 2025-2026 | Course: Machine Learning (CS602PC) | zero-fabrication verified</a:t>
             </a:r>
           </a:p>
         </p:txBody>
@@ -4872,7 +6072,7 @@
               </a:defRPr>
             </a:pPr>
             <a:r>
-              <a:t>CURRENT PHASE 01 STATUS</a:t>
+              <a:t>10. LITERATURE / RESEARCH GAP</a:t>
             </a:r>
           </a:p>
           <a:p>
@@ -4885,7 +6085,7 @@
               </a:defRPr>
             </a:pPr>
             <a:r>
-              <a:t>MILESTONE AUDIT, ARTIFACTS &amp; NEXT PHASE READINESS</a:t>
+              <a:t>LITERATURE COMPARISON &amp; IDENTIFIED RESEARCH GAPS</a:t>
             </a:r>
           </a:p>
         </p:txBody>
@@ -4899,7 +6099,7 @@
         <p:spPr>
           <a:xfrm>
             <a:off x="731520" y="1371600"/>
-            <a:ext cx="5212080" cy="4846320"/>
+            <a:ext cx="3291840" cy="4754880"/>
           </a:xfrm>
           <a:prstGeom prst="rect">
             <a:avLst/>
@@ -4944,7 +6144,7 @@
         <p:spPr>
           <a:xfrm>
             <a:off x="914400" y="1508760"/>
-            <a:ext cx="4846320" cy="320040"/>
+            <a:ext cx="2926080" cy="320040"/>
           </a:xfrm>
           <a:prstGeom prst="rect">
             <a:avLst/>
@@ -4966,7 +6166,7 @@
               </a:defRPr>
             </a:pPr>
             <a:r>
-              <a:t>COMPLETED PHASE 01 DELIVERABLES</a:t>
+              <a:t>HISTORICAL &amp; CLASSICAL VISION</a:t>
             </a:r>
           </a:p>
         </p:txBody>
@@ -4979,8 +6179,8 @@
         </p:nvSpPr>
         <p:spPr>
           <a:xfrm>
-            <a:off x="914400" y="1874519"/>
-            <a:ext cx="4846320" cy="4114800"/>
+            <a:off x="914400" y="1920240"/>
+            <a:ext cx="2926080" cy="4023360"/>
           </a:xfrm>
           <a:prstGeom prst="rect">
             <a:avLst/>
@@ -4994,106 +6194,43 @@
           <a:lstStyle/>
           <a:p>
             <a:pPr>
-              <a:defRPr sz="950">
-                <a:solidFill>
-                  <a:srgbClr val="1DB954"/>
-                </a:solidFill>
-                <a:latin typeface="Consolas"/>
-              </a:defRPr>
-            </a:pPr>
-            <a:r>
-              <a:t>[COMPLETED] Centralized Configuration (src/config.py) — Seeds, dimensions, thresholds.</a:t>
-            </a:r>
-          </a:p>
-          <a:p>
-            <a:pPr>
-              <a:defRPr sz="950">
-                <a:solidFill>
-                  <a:srgbClr val="1DB954"/>
-                </a:solidFill>
-                <a:latin typeface="Consolas"/>
-              </a:defRPr>
-            </a:pPr>
-            <a:r>
-              <a:t>[COMPLETED] MNIST Dataset Pipeline (src/data/dataset.py) — 20k train, 3k val, 10k isolated test.</a:t>
-            </a:r>
-          </a:p>
-          <a:p>
-            <a:pPr>
-              <a:defRPr sz="950">
-                <a:solidFill>
-                  <a:srgbClr val="1DB954"/>
-                </a:solidFill>
-                <a:latin typeface="Consolas"/>
-              </a:defRPr>
-            </a:pPr>
-            <a:r>
-              <a:t>[COMPLETED] Empirical EDA Engine (src/data/eda.py) — 5 high-resolution figures in artifacts/data/.</a:t>
-            </a:r>
-          </a:p>
-          <a:p>
-            <a:pPr>
-              <a:defRPr sz="950">
-                <a:solidFill>
-                  <a:srgbClr val="1DB954"/>
-                </a:solidFill>
-                <a:latin typeface="Consolas"/>
-              </a:defRPr>
-            </a:pPr>
-            <a:r>
-              <a:t>[COMPLETED] Canonical Preprocessing Invariant (src/preprocessing/canonical.py) — (1, 28, 28, 1) tensor.</a:t>
-            </a:r>
-          </a:p>
-          <a:p>
-            <a:pPr>
-              <a:defRPr sz="950">
-                <a:solidFill>
-                  <a:srgbClr val="1DB954"/>
-                </a:solidFill>
-                <a:latin typeface="Consolas"/>
-              </a:defRPr>
-            </a:pPr>
-            <a:r>
-              <a:t>[COMPLETED] Comprehensive Test Suite — 33/33 tests passing (tests/test_preprocessing.py, test_data.py).</a:t>
-            </a:r>
-          </a:p>
-          <a:p>
-            <a:pPr>
-              <a:defRPr sz="950">
-                <a:solidFill>
-                  <a:srgbClr val="1DB954"/>
-                </a:solidFill>
-                <a:latin typeface="Consolas"/>
-              </a:defRPr>
-            </a:pPr>
-            <a:r>
-              <a:t>[COMPLETED] Formal Documentation — DATASET.md, PREPROCESSING.md, EXPERIMENT_PROTOCOL.md.</a:t>
-            </a:r>
-          </a:p>
-          <a:p>
-            <a:pPr>
-              <a:defRPr sz="950">
-                <a:solidFill>
-                  <a:srgbClr val="1DB954"/>
-                </a:solidFill>
-                <a:latin typeface="Consolas"/>
-              </a:defRPr>
-            </a:pPr>
-            <a:r>
-              <a:t>[COMPLETED] Scientific Presentation — 10-slide PPTX with speaker notes + interactive HTML slides.</a:t>
-            </a:r>
-          </a:p>
-          <a:p>
-            <a:pPr>
-              <a:defRPr sz="950">
-                <a:solidFill>
-                  <a:srgbClr val="1DB954"/>
-                </a:solidFill>
-                <a:latin typeface="Consolas"/>
-              </a:defRPr>
-            </a:pPr>
-            <a:r>
-              <a:t>[COMPLETED] Deliverable Manifest — artifacts/PHASE_01_MANIFEST.json.</a:t>
+              <a:defRPr sz="1050">
+                <a:solidFill>
+                  <a:srgbClr val="A1A1AA"/>
+                </a:solidFill>
+                <a:latin typeface="Segoe UI"/>
+              </a:defRPr>
+            </a:pPr>
+            <a:r>
+              <a:t>•  LeCun et al. [1] (1998): Pioneered LeNet-5 CNN on MNIST, demonstrating backpropagation gradient descent (99.05% on 60k).</a:t>
+            </a:r>
+          </a:p>
+          <a:p/>
+          <a:p>
+            <a:pPr>
+              <a:defRPr sz="1050">
+                <a:solidFill>
+                  <a:srgbClr val="A1A1AA"/>
+                </a:solidFill>
+                <a:latin typeface="Segoe UI"/>
+              </a:defRPr>
+            </a:pPr>
+            <a:r>
+              <a:t>•  Cireșan et al. [2] (2012): Multi-Column Deep Neural Networks achieved near-human 99.77% accuracy with heavy elastic distortions.</a:t>
+            </a:r>
+          </a:p>
+          <a:p/>
+          <a:p>
+            <a:pPr>
+              <a:defRPr sz="1050">
+                <a:solidFill>
+                  <a:srgbClr val="A1A1AA"/>
+                </a:solidFill>
+                <a:latin typeface="Segoe UI"/>
+              </a:defRPr>
+            </a:pPr>
+            <a:r>
+              <a:t>•  Research Gap: Both works treated classification as a closed-world pure accuracy benchmark, providing zero confidence calibration or visual explainability.</a:t>
             </a:r>
           </a:p>
         </p:txBody>
@@ -5106,8 +6243,8 @@
         </p:nvSpPr>
         <p:spPr>
           <a:xfrm>
-            <a:off x="6217920" y="1371600"/>
-            <a:ext cx="5212080" cy="4846320"/>
+            <a:off x="4343400" y="1371600"/>
+            <a:ext cx="3291840" cy="4754880"/>
           </a:xfrm>
           <a:prstGeom prst="rect">
             <a:avLst/>
@@ -5151,8 +6288,8 @@
         </p:nvSpPr>
         <p:spPr>
           <a:xfrm>
-            <a:off x="6400800" y="1508760"/>
-            <a:ext cx="4846320" cy="320040"/>
+            <a:off x="4526280" y="1508760"/>
+            <a:ext cx="2926080" cy="320040"/>
           </a:xfrm>
           <a:prstGeom prst="rect">
             <a:avLst/>
@@ -5174,7 +6311,7 @@
               </a:defRPr>
             </a:pPr>
             <a:r>
-              <a:t>PHASE 02 DEPENDENCIES &amp; HAND-OFF CONTRACT</a:t>
+              <a:t>CALIBRATION &amp; EXPLAINABILITY</a:t>
             </a:r>
           </a:p>
         </p:txBody>
@@ -5187,8 +6324,8 @@
         </p:nvSpPr>
         <p:spPr>
           <a:xfrm>
-            <a:off x="6400800" y="1874519"/>
-            <a:ext cx="4846320" cy="4114800"/>
+            <a:off x="4526280" y="1920240"/>
+            <a:ext cx="2926080" cy="4023360"/>
           </a:xfrm>
           <a:prstGeom prst="rect">
             <a:avLst/>
@@ -5202,17 +6339,369 @@
           <a:lstStyle/>
           <a:p>
             <a:pPr>
+              <a:defRPr sz="1050">
+                <a:solidFill>
+                  <a:srgbClr val="A1A1AA"/>
+                </a:solidFill>
+                <a:latin typeface="Segoe UI"/>
+              </a:defRPr>
+            </a:pPr>
+            <a:r>
+              <a:t>•  Guo et al. [5] (2017): Identified that modern deep networks are severely miscalibrated; proposed post-hoc temperature scaling to minimize ECE.</a:t>
+            </a:r>
+          </a:p>
+          <a:p/>
+          <a:p>
+            <a:pPr>
+              <a:defRPr sz="1050">
+                <a:solidFill>
+                  <a:srgbClr val="A1A1AA"/>
+                </a:solidFill>
+                <a:latin typeface="Segoe UI"/>
+              </a:defRPr>
+            </a:pPr>
+            <a:r>
+              <a:t>•  Selvaraju et al. [6] (2017): Introduced Grad-CAM for gradient-based class activation heatmaps in large convolutional networks.</a:t>
+            </a:r>
+          </a:p>
+          <a:p/>
+          <a:p>
+            <a:pPr>
+              <a:defRPr sz="1050">
+                <a:solidFill>
+                  <a:srgbClr val="A1A1AA"/>
+                </a:solidFill>
+                <a:latin typeface="Segoe UI"/>
+              </a:defRPr>
+            </a:pPr>
+            <a:r>
+              <a:t>•  Research Gap: Calibration and XAI techniques are rarely integrated into accessible micro-project architectures or connected to live drawing canvases.</a:t>
+            </a:r>
+          </a:p>
+        </p:txBody>
+      </p:sp>
+      <p:sp>
+        <p:nvSpPr>
+          <p:cNvPr id="9" name="Rectangle 8"/>
+          <p:cNvSpPr/>
+          <p:nvPr/>
+        </p:nvSpPr>
+        <p:spPr>
+          <a:xfrm>
+            <a:off x="7955280" y="1371600"/>
+            <a:ext cx="3291840" cy="4754880"/>
+          </a:xfrm>
+          <a:prstGeom prst="rect">
+            <a:avLst/>
+          </a:prstGeom>
+          <a:solidFill>
+            <a:srgbClr val="121212"/>
+          </a:solidFill>
+          <a:ln w="12700">
+            <a:solidFill>
+              <a:srgbClr val="262626"/>
+            </a:solidFill>
+          </a:ln>
+        </p:spPr>
+        <p:style>
+          <a:lnRef idx="1">
+            <a:schemeClr val="accent1"/>
+          </a:lnRef>
+          <a:fillRef idx="3">
+            <a:schemeClr val="accent1"/>
+          </a:fillRef>
+          <a:effectRef idx="2">
+            <a:schemeClr val="accent1"/>
+          </a:effectRef>
+          <a:fontRef idx="minor">
+            <a:schemeClr val="lt1"/>
+          </a:fontRef>
+        </p:style>
+        <p:txBody>
+          <a:bodyPr rtlCol="0" anchor="ctr"/>
+          <a:lstStyle/>
+          <a:p>
+            <a:pPr algn="ctr"/>
+          </a:p>
+        </p:txBody>
+      </p:sp>
+      <p:sp>
+        <p:nvSpPr>
+          <p:cNvPr id="10" name="TextBox 9"/>
+          <p:cNvSpPr txBox="1"/>
+          <p:nvPr/>
+        </p:nvSpPr>
+        <p:spPr>
+          <a:xfrm>
+            <a:off x="8138160" y="1508760"/>
+            <a:ext cx="2926080" cy="320040"/>
+          </a:xfrm>
+          <a:prstGeom prst="rect">
+            <a:avLst/>
+          </a:prstGeom>
+          <a:noFill/>
+        </p:spPr>
+        <p:txBody>
+          <a:bodyPr wrap="square" lIns="0" tIns="0" rIns="0" bIns="0">
+            <a:spAutoFit/>
+          </a:bodyPr>
+          <a:lstStyle/>
+          <a:p>
+            <a:pPr>
               <a:defRPr sz="1000" b="1">
                 <a:solidFill>
-                  <a:srgbClr val="FFB000"/>
+                  <a:srgbClr val="A1A1AA"/>
                 </a:solidFill>
                 <a:latin typeface="Consolas"/>
               </a:defRPr>
             </a:pPr>
             <a:r>
-              <a:t>READINESS CRITERIA FOR PHASE 02:</a:t>
-            </a:r>
-          </a:p>
+              <a:t>DIGITVISION AI CONTRIBUTION</a:t>
+            </a:r>
+          </a:p>
+        </p:txBody>
+      </p:sp>
+      <p:sp>
+        <p:nvSpPr>
+          <p:cNvPr id="11" name="TextBox 10"/>
+          <p:cNvSpPr txBox="1"/>
+          <p:nvPr/>
+        </p:nvSpPr>
+        <p:spPr>
+          <a:xfrm>
+            <a:off x="8138160" y="1920240"/>
+            <a:ext cx="2926080" cy="4023360"/>
+          </a:xfrm>
+          <a:prstGeom prst="rect">
+            <a:avLst/>
+          </a:prstGeom>
+          <a:noFill/>
+        </p:spPr>
+        <p:txBody>
+          <a:bodyPr wrap="square">
+            <a:spAutoFit/>
+          </a:bodyPr>
+          <a:lstStyle/>
+          <a:p>
+            <a:pPr>
+              <a:defRPr sz="1050">
+                <a:solidFill>
+                  <a:srgbClr val="A1A1AA"/>
+                </a:solidFill>
+                <a:latin typeface="Segoe UI"/>
+              </a:defRPr>
+            </a:pPr>
+            <a:r>
+              <a:t>•  Unified Architectural Synthesis: Integrates LeNet-inspired convolution with modern dual-block design, Grad-CAM, and temperature scaling.</a:t>
+            </a:r>
+          </a:p>
+          <a:p/>
+          <a:p>
+            <a:pPr>
+              <a:defRPr sz="1050">
+                <a:solidFill>
+                  <a:srgbClr val="A1A1AA"/>
+                </a:solidFill>
+                <a:latin typeface="Segoe UI"/>
+              </a:defRPr>
+            </a:pPr>
+            <a:r>
+              <a:t>•  Live Invariant Protection: Eliminates train-inference skew via authoritative canonical preprocessing.</a:t>
+            </a:r>
+          </a:p>
+          <a:p/>
+          <a:p>
+            <a:pPr>
+              <a:defRPr sz="1050">
+                <a:solidFill>
+                  <a:srgbClr val="A1A1AA"/>
+                </a:solidFill>
+                <a:latin typeface="Segoe UI"/>
+              </a:defRPr>
+            </a:pPr>
+            <a:r>
+              <a:t>•  Production Transparency: Implements Shannon entropy diagnostics, telemetry HUD, and 100% zero-fabrication empirical testing.</a:t>
+            </a:r>
+          </a:p>
+        </p:txBody>
+      </p:sp>
+    </p:spTree>
+  </p:cSld>
+  <p:clrMapOvr>
+    <a:masterClrMapping/>
+  </p:clrMapOvr>
+</p:sld>
+</file>
+
+<file path=ppt/slides/slide11.xml><?xml version="1.0" encoding="utf-8"?>
+<p:sld xmlns:a="http://schemas.openxmlformats.org/drawingml/2006/main" xmlns:p="http://schemas.openxmlformats.org/presentationml/2006/main" xmlns:r="http://schemas.openxmlformats.org/officeDocument/2006/relationships">
+  <p:cSld>
+    <p:bg>
+      <p:bgPr>
+        <a:solidFill>
+          <a:srgbClr val="050505"/>
+        </a:solidFill>
+        <a:effectLst/>
+      </p:bgPr>
+    </p:bg>
+    <p:spTree>
+      <p:nvGrpSpPr>
+        <p:cNvPr id="1" name=""/>
+        <p:cNvGrpSpPr/>
+        <p:nvPr/>
+      </p:nvGrpSpPr>
+      <p:grpSpPr/>
+      <p:sp>
+        <p:nvSpPr>
+          <p:cNvPr id="2" name="TextBox 1"/>
+          <p:cNvSpPr txBox="1"/>
+          <p:nvPr/>
+        </p:nvSpPr>
+        <p:spPr>
+          <a:xfrm>
+            <a:off x="731520" y="365760"/>
+            <a:ext cx="10698480" cy="822960"/>
+          </a:xfrm>
+          <a:prstGeom prst="rect">
+            <a:avLst/>
+          </a:prstGeom>
+          <a:noFill/>
+        </p:spPr>
+        <p:txBody>
+          <a:bodyPr wrap="square" lIns="0" tIns="0" rIns="0" bIns="0">
+            <a:spAutoFit/>
+          </a:bodyPr>
+          <a:lstStyle/>
+          <a:p>
+            <a:pPr>
+              <a:defRPr sz="900" b="1">
+                <a:solidFill>
+                  <a:srgbClr val="1DB954"/>
+                </a:solidFill>
+                <a:latin typeface="Consolas"/>
+              </a:defRPr>
+            </a:pPr>
+            <a:r>
+              <a:t>11. MODEL LANDSCAPE</a:t>
+            </a:r>
+          </a:p>
+          <a:p>
+            <a:pPr>
+              <a:defRPr sz="1800" b="1">
+                <a:solidFill>
+                  <a:srgbClr val="FFFFFF"/>
+                </a:solidFill>
+                <a:latin typeface="Segoe UI"/>
+              </a:defRPr>
+            </a:pPr>
+            <a:r>
+              <a:t>MULTI-MODEL EMPIRICAL LANDSCAPE (7 PARADIGMS)</a:t>
+            </a:r>
+          </a:p>
+        </p:txBody>
+      </p:sp>
+      <p:sp>
+        <p:nvSpPr>
+          <p:cNvPr id="3" name="Rectangle 2"/>
+          <p:cNvSpPr/>
+          <p:nvPr/>
+        </p:nvSpPr>
+        <p:spPr>
+          <a:xfrm>
+            <a:off x="731520" y="1325880"/>
+            <a:ext cx="10698480" cy="594360"/>
+          </a:xfrm>
+          <a:prstGeom prst="rect">
+            <a:avLst/>
+          </a:prstGeom>
+          <a:solidFill>
+            <a:srgbClr val="121212"/>
+          </a:solidFill>
+          <a:ln w="12700">
+            <a:solidFill>
+              <a:srgbClr val="262626"/>
+            </a:solidFill>
+          </a:ln>
+        </p:spPr>
+        <p:style>
+          <a:lnRef idx="1">
+            <a:schemeClr val="accent1"/>
+          </a:lnRef>
+          <a:fillRef idx="3">
+            <a:schemeClr val="accent1"/>
+          </a:fillRef>
+          <a:effectRef idx="2">
+            <a:schemeClr val="accent1"/>
+          </a:effectRef>
+          <a:fontRef idx="minor">
+            <a:schemeClr val="lt1"/>
+          </a:fontRef>
+        </p:style>
+        <p:txBody>
+          <a:bodyPr rtlCol="0" anchor="ctr"/>
+          <a:lstStyle/>
+          <a:p>
+            <a:pPr algn="ctr"/>
+          </a:p>
+        </p:txBody>
+      </p:sp>
+      <p:sp>
+        <p:nvSpPr>
+          <p:cNvPr id="4" name="TextBox 3"/>
+          <p:cNvSpPr txBox="1"/>
+          <p:nvPr/>
+        </p:nvSpPr>
+        <p:spPr>
+          <a:xfrm>
+            <a:off x="914400" y="1463039"/>
+            <a:ext cx="10332719" cy="320040"/>
+          </a:xfrm>
+          <a:prstGeom prst="rect">
+            <a:avLst/>
+          </a:prstGeom>
+          <a:noFill/>
+        </p:spPr>
+        <p:txBody>
+          <a:bodyPr wrap="square" lIns="0" tIns="0" rIns="0" bIns="0">
+            <a:spAutoFit/>
+          </a:bodyPr>
+          <a:lstStyle/>
+          <a:p>
+            <a:pPr>
+              <a:defRPr sz="1000" b="1">
+                <a:solidFill>
+                  <a:srgbClr val="A1A1AA"/>
+                </a:solidFill>
+                <a:latin typeface="Consolas"/>
+              </a:defRPr>
+            </a:pPr>
+            <a:r>
+              <a:t>1. ZERO-RULE DUMMY BASELINE</a:t>
+            </a:r>
+          </a:p>
+        </p:txBody>
+      </p:sp>
+      <p:sp>
+        <p:nvSpPr>
+          <p:cNvPr id="5" name="TextBox 4"/>
+          <p:cNvSpPr txBox="1"/>
+          <p:nvPr/>
+        </p:nvSpPr>
+        <p:spPr>
+          <a:xfrm>
+            <a:off x="914400" y="1581912"/>
+            <a:ext cx="10332720" cy="320040"/>
+          </a:xfrm>
+          <a:prstGeom prst="rect">
+            <a:avLst/>
+          </a:prstGeom>
+          <a:noFill/>
+        </p:spPr>
+        <p:txBody>
+          <a:bodyPr wrap="square">
+            <a:spAutoFit/>
+          </a:bodyPr>
+          <a:lstStyle/>
           <a:p>
             <a:pPr>
               <a:defRPr sz="1000">
@@ -5223,9 +6712,113 @@
               </a:defRPr>
             </a:pPr>
             <a:r>
-              <a:t>•  Clean Repository State: Working tree clean, all changes committed.</a:t>
-            </a:r>
-          </a:p>
+              <a:t>Non-parametric majority-class rule. Achieved 11.35% accuracy, establishing the mathematical chance baseline.</a:t>
+            </a:r>
+          </a:p>
+        </p:txBody>
+      </p:sp>
+      <p:sp>
+        <p:nvSpPr>
+          <p:cNvPr id="6" name="Rectangle 5"/>
+          <p:cNvSpPr/>
+          <p:nvPr/>
+        </p:nvSpPr>
+        <p:spPr>
+          <a:xfrm>
+            <a:off x="731520" y="2029967"/>
+            <a:ext cx="10698480" cy="594360"/>
+          </a:xfrm>
+          <a:prstGeom prst="rect">
+            <a:avLst/>
+          </a:prstGeom>
+          <a:solidFill>
+            <a:srgbClr val="121212"/>
+          </a:solidFill>
+          <a:ln w="12700">
+            <a:solidFill>
+              <a:srgbClr val="262626"/>
+            </a:solidFill>
+          </a:ln>
+        </p:spPr>
+        <p:style>
+          <a:lnRef idx="1">
+            <a:schemeClr val="accent1"/>
+          </a:lnRef>
+          <a:fillRef idx="3">
+            <a:schemeClr val="accent1"/>
+          </a:fillRef>
+          <a:effectRef idx="2">
+            <a:schemeClr val="accent1"/>
+          </a:effectRef>
+          <a:fontRef idx="minor">
+            <a:schemeClr val="lt1"/>
+          </a:fontRef>
+        </p:style>
+        <p:txBody>
+          <a:bodyPr rtlCol="0" anchor="ctr"/>
+          <a:lstStyle/>
+          <a:p>
+            <a:pPr algn="ctr"/>
+          </a:p>
+        </p:txBody>
+      </p:sp>
+      <p:sp>
+        <p:nvSpPr>
+          <p:cNvPr id="7" name="TextBox 6"/>
+          <p:cNvSpPr txBox="1"/>
+          <p:nvPr/>
+        </p:nvSpPr>
+        <p:spPr>
+          <a:xfrm>
+            <a:off x="914400" y="2167127"/>
+            <a:ext cx="10332719" cy="320040"/>
+          </a:xfrm>
+          <a:prstGeom prst="rect">
+            <a:avLst/>
+          </a:prstGeom>
+          <a:noFill/>
+        </p:spPr>
+        <p:txBody>
+          <a:bodyPr wrap="square" lIns="0" tIns="0" rIns="0" bIns="0">
+            <a:spAutoFit/>
+          </a:bodyPr>
+          <a:lstStyle/>
+          <a:p>
+            <a:pPr>
+              <a:defRPr sz="1000" b="1">
+                <a:solidFill>
+                  <a:srgbClr val="A1A1AA"/>
+                </a:solidFill>
+                <a:latin typeface="Consolas"/>
+              </a:defRPr>
+            </a:pPr>
+            <a:r>
+              <a:t>2. MULTINOMIAL LOGISTIC REGRESSION</a:t>
+            </a:r>
+          </a:p>
+        </p:txBody>
+      </p:sp>
+      <p:sp>
+        <p:nvSpPr>
+          <p:cNvPr id="8" name="TextBox 7"/>
+          <p:cNvSpPr txBox="1"/>
+          <p:nvPr/>
+        </p:nvSpPr>
+        <p:spPr>
+          <a:xfrm>
+            <a:off x="914400" y="2286000"/>
+            <a:ext cx="10332720" cy="320040"/>
+          </a:xfrm>
+          <a:prstGeom prst="rect">
+            <a:avLst/>
+          </a:prstGeom>
+          <a:noFill/>
+        </p:spPr>
+        <p:txBody>
+          <a:bodyPr wrap="square">
+            <a:spAutoFit/>
+          </a:bodyPr>
+          <a:lstStyle/>
           <a:p>
             <a:pPr>
               <a:defRPr sz="1000">
@@ -5236,9 +6829,113 @@
               </a:defRPr>
             </a:pPr>
             <a:r>
-              <a:t>•  Zero Phase 02 Work Pre-empted: No Phase 02 tasks started prematurely.</a:t>
-            </a:r>
-          </a:p>
+              <a:t>Generalized linear model with L-BFGS solver. 91.49% accuracy, delineating the linear separability threshold.</a:t>
+            </a:r>
+          </a:p>
+        </p:txBody>
+      </p:sp>
+      <p:sp>
+        <p:nvSpPr>
+          <p:cNvPr id="9" name="Rectangle 8"/>
+          <p:cNvSpPr/>
+          <p:nvPr/>
+        </p:nvSpPr>
+        <p:spPr>
+          <a:xfrm>
+            <a:off x="731520" y="2734056"/>
+            <a:ext cx="10698480" cy="594360"/>
+          </a:xfrm>
+          <a:prstGeom prst="rect">
+            <a:avLst/>
+          </a:prstGeom>
+          <a:solidFill>
+            <a:srgbClr val="121212"/>
+          </a:solidFill>
+          <a:ln w="12700">
+            <a:solidFill>
+              <a:srgbClr val="262626"/>
+            </a:solidFill>
+          </a:ln>
+        </p:spPr>
+        <p:style>
+          <a:lnRef idx="1">
+            <a:schemeClr val="accent1"/>
+          </a:lnRef>
+          <a:fillRef idx="3">
+            <a:schemeClr val="accent1"/>
+          </a:fillRef>
+          <a:effectRef idx="2">
+            <a:schemeClr val="accent1"/>
+          </a:effectRef>
+          <a:fontRef idx="minor">
+            <a:schemeClr val="lt1"/>
+          </a:fontRef>
+        </p:style>
+        <p:txBody>
+          <a:bodyPr rtlCol="0" anchor="ctr"/>
+          <a:lstStyle/>
+          <a:p>
+            <a:pPr algn="ctr"/>
+          </a:p>
+        </p:txBody>
+      </p:sp>
+      <p:sp>
+        <p:nvSpPr>
+          <p:cNvPr id="10" name="TextBox 9"/>
+          <p:cNvSpPr txBox="1"/>
+          <p:nvPr/>
+        </p:nvSpPr>
+        <p:spPr>
+          <a:xfrm>
+            <a:off x="914400" y="2871216"/>
+            <a:ext cx="10332719" cy="320040"/>
+          </a:xfrm>
+          <a:prstGeom prst="rect">
+            <a:avLst/>
+          </a:prstGeom>
+          <a:noFill/>
+        </p:spPr>
+        <p:txBody>
+          <a:bodyPr wrap="square" lIns="0" tIns="0" rIns="0" bIns="0">
+            <a:spAutoFit/>
+          </a:bodyPr>
+          <a:lstStyle/>
+          <a:p>
+            <a:pPr>
+              <a:defRPr sz="1000" b="1">
+                <a:solidFill>
+                  <a:srgbClr val="A1A1AA"/>
+                </a:solidFill>
+                <a:latin typeface="Consolas"/>
+              </a:defRPr>
+            </a:pPr>
+            <a:r>
+              <a:t>3. RANDOM FOREST (60 TREES)</a:t>
+            </a:r>
+          </a:p>
+        </p:txBody>
+      </p:sp>
+      <p:sp>
+        <p:nvSpPr>
+          <p:cNvPr id="11" name="TextBox 10"/>
+          <p:cNvSpPr txBox="1"/>
+          <p:nvPr/>
+        </p:nvSpPr>
+        <p:spPr>
+          <a:xfrm>
+            <a:off x="914400" y="2990088"/>
+            <a:ext cx="10332720" cy="320040"/>
+          </a:xfrm>
+          <a:prstGeom prst="rect">
+            <a:avLst/>
+          </a:prstGeom>
+          <a:noFill/>
+        </p:spPr>
+        <p:txBody>
+          <a:bodyPr wrap="square">
+            <a:spAutoFit/>
+          </a:bodyPr>
+          <a:lstStyle/>
           <a:p>
             <a:pPr>
               <a:defRPr sz="1000">
@@ -5249,9 +6946,113 @@
               </a:defRPr>
             </a:pPr>
             <a:r>
-              <a:t>•  Stable Invariant Contract: Next agent can immediately call canonical_preprocess_tensor() with guaranteed shape (1, 28, 28, 1) float32 in [0, 1].</a:t>
-            </a:r>
-          </a:p>
+              <a:t>Non-parametric bagging ensemble of greedy decision trees. 95.48% accuracy, evaluating non-linear feature splits.</a:t>
+            </a:r>
+          </a:p>
+        </p:txBody>
+      </p:sp>
+      <p:sp>
+        <p:nvSpPr>
+          <p:cNvPr id="12" name="Rectangle 11"/>
+          <p:cNvSpPr/>
+          <p:nvPr/>
+        </p:nvSpPr>
+        <p:spPr>
+          <a:xfrm>
+            <a:off x="731520" y="3438144"/>
+            <a:ext cx="10698480" cy="594360"/>
+          </a:xfrm>
+          <a:prstGeom prst="rect">
+            <a:avLst/>
+          </a:prstGeom>
+          <a:solidFill>
+            <a:srgbClr val="121212"/>
+          </a:solidFill>
+          <a:ln w="12700">
+            <a:solidFill>
+              <a:srgbClr val="262626"/>
+            </a:solidFill>
+          </a:ln>
+        </p:spPr>
+        <p:style>
+          <a:lnRef idx="1">
+            <a:schemeClr val="accent1"/>
+          </a:lnRef>
+          <a:fillRef idx="3">
+            <a:schemeClr val="accent1"/>
+          </a:fillRef>
+          <a:effectRef idx="2">
+            <a:schemeClr val="accent1"/>
+          </a:effectRef>
+          <a:fontRef idx="minor">
+            <a:schemeClr val="lt1"/>
+          </a:fontRef>
+        </p:style>
+        <p:txBody>
+          <a:bodyPr rtlCol="0" anchor="ctr"/>
+          <a:lstStyle/>
+          <a:p>
+            <a:pPr algn="ctr"/>
+          </a:p>
+        </p:txBody>
+      </p:sp>
+      <p:sp>
+        <p:nvSpPr>
+          <p:cNvPr id="13" name="TextBox 12"/>
+          <p:cNvSpPr txBox="1"/>
+          <p:nvPr/>
+        </p:nvSpPr>
+        <p:spPr>
+          <a:xfrm>
+            <a:off x="914400" y="3575303"/>
+            <a:ext cx="10332719" cy="320040"/>
+          </a:xfrm>
+          <a:prstGeom prst="rect">
+            <a:avLst/>
+          </a:prstGeom>
+          <a:noFill/>
+        </p:spPr>
+        <p:txBody>
+          <a:bodyPr wrap="square" lIns="0" tIns="0" rIns="0" bIns="0">
+            <a:spAutoFit/>
+          </a:bodyPr>
+          <a:lstStyle/>
+          <a:p>
+            <a:pPr>
+              <a:defRPr sz="1000" b="1">
+                <a:solidFill>
+                  <a:srgbClr val="A1A1AA"/>
+                </a:solidFill>
+                <a:latin typeface="Consolas"/>
+              </a:defRPr>
+            </a:pPr>
+            <a:r>
+              <a:t>4. SUPPORT VECTOR MACHINE (RBF)</a:t>
+            </a:r>
+          </a:p>
+        </p:txBody>
+      </p:sp>
+      <p:sp>
+        <p:nvSpPr>
+          <p:cNvPr id="14" name="TextBox 13"/>
+          <p:cNvSpPr txBox="1"/>
+          <p:nvPr/>
+        </p:nvSpPr>
+        <p:spPr>
+          <a:xfrm>
+            <a:off x="914400" y="3694176"/>
+            <a:ext cx="10332720" cy="320040"/>
+          </a:xfrm>
+          <a:prstGeom prst="rect">
+            <a:avLst/>
+          </a:prstGeom>
+          <a:noFill/>
+        </p:spPr>
+        <p:txBody>
+          <a:bodyPr wrap="square">
+            <a:spAutoFit/>
+          </a:bodyPr>
+          <a:lstStyle/>
           <a:p>
             <a:pPr>
               <a:defRPr sz="1000">
@@ -5262,9 +7063,113 @@
               </a:defRPr>
             </a:pPr>
             <a:r>
-              <a:t>•  Deterministic Dataset Partitions: pipeline.get_tensors() and get_flat_features() ready for model consumption.</a:t>
-            </a:r>
-          </a:p>
+              <a:t>Maximum-margin hyperplane with radial basis kernel. 96.11% accuracy, strong non-linear dual formulation benchmark.</a:t>
+            </a:r>
+          </a:p>
+        </p:txBody>
+      </p:sp>
+      <p:sp>
+        <p:nvSpPr>
+          <p:cNvPr id="15" name="Rectangle 14"/>
+          <p:cNvSpPr/>
+          <p:nvPr/>
+        </p:nvSpPr>
+        <p:spPr>
+          <a:xfrm>
+            <a:off x="731520" y="4142232"/>
+            <a:ext cx="10698480" cy="594360"/>
+          </a:xfrm>
+          <a:prstGeom prst="rect">
+            <a:avLst/>
+          </a:prstGeom>
+          <a:solidFill>
+            <a:srgbClr val="121212"/>
+          </a:solidFill>
+          <a:ln w="12700">
+            <a:solidFill>
+              <a:srgbClr val="262626"/>
+            </a:solidFill>
+          </a:ln>
+        </p:spPr>
+        <p:style>
+          <a:lnRef idx="1">
+            <a:schemeClr val="accent1"/>
+          </a:lnRef>
+          <a:fillRef idx="3">
+            <a:schemeClr val="accent1"/>
+          </a:fillRef>
+          <a:effectRef idx="2">
+            <a:schemeClr val="accent1"/>
+          </a:effectRef>
+          <a:fontRef idx="minor">
+            <a:schemeClr val="lt1"/>
+          </a:fontRef>
+        </p:style>
+        <p:txBody>
+          <a:bodyPr rtlCol="0" anchor="ctr"/>
+          <a:lstStyle/>
+          <a:p>
+            <a:pPr algn="ctr"/>
+          </a:p>
+        </p:txBody>
+      </p:sp>
+      <p:sp>
+        <p:nvSpPr>
+          <p:cNvPr id="16" name="TextBox 15"/>
+          <p:cNvSpPr txBox="1"/>
+          <p:nvPr/>
+        </p:nvSpPr>
+        <p:spPr>
+          <a:xfrm>
+            <a:off x="914400" y="4279392"/>
+            <a:ext cx="10332719" cy="320040"/>
+          </a:xfrm>
+          <a:prstGeom prst="rect">
+            <a:avLst/>
+          </a:prstGeom>
+          <a:noFill/>
+        </p:spPr>
+        <p:txBody>
+          <a:bodyPr wrap="square" lIns="0" tIns="0" rIns="0" bIns="0">
+            <a:spAutoFit/>
+          </a:bodyPr>
+          <a:lstStyle/>
+          <a:p>
+            <a:pPr>
+              <a:defRPr sz="1000" b="1">
+                <a:solidFill>
+                  <a:srgbClr val="A1A1AA"/>
+                </a:solidFill>
+                <a:latin typeface="Consolas"/>
+              </a:defRPr>
+            </a:pPr>
+            <a:r>
+              <a:t>5. DEEP MLP (256-128 DENSE)</a:t>
+            </a:r>
+          </a:p>
+        </p:txBody>
+      </p:sp>
+      <p:sp>
+        <p:nvSpPr>
+          <p:cNvPr id="17" name="TextBox 16"/>
+          <p:cNvSpPr txBox="1"/>
+          <p:nvPr/>
+        </p:nvSpPr>
+        <p:spPr>
+          <a:xfrm>
+            <a:off x="914400" y="4398264"/>
+            <a:ext cx="10332720" cy="320040"/>
+          </a:xfrm>
+          <a:prstGeom prst="rect">
+            <a:avLst/>
+          </a:prstGeom>
+          <a:noFill/>
+        </p:spPr>
+        <p:txBody>
+          <a:bodyPr wrap="square">
+            <a:spAutoFit/>
+          </a:bodyPr>
+          <a:lstStyle/>
           <a:p>
             <a:pPr>
               <a:defRPr sz="1000">
@@ -5275,7 +7180,3094 @@
               </a:defRPr>
             </a:pPr>
             <a:r>
-              <a:t>•  Phase 02 Focus: Systematic Model Architectures, Training Optimizations, Hyperparameter Sweeps, and Deep Residual Benchmarking.</a:t>
+              <a:t>Fully-connected feedforward network with dense dropout. 95.91% accuracy, assessing non-spatial neural depth.</a:t>
+            </a:r>
+          </a:p>
+        </p:txBody>
+      </p:sp>
+      <p:sp>
+        <p:nvSpPr>
+          <p:cNvPr id="18" name="Rectangle 17"/>
+          <p:cNvSpPr/>
+          <p:nvPr/>
+        </p:nvSpPr>
+        <p:spPr>
+          <a:xfrm>
+            <a:off x="731520" y="4846320"/>
+            <a:ext cx="10698480" cy="594360"/>
+          </a:xfrm>
+          <a:prstGeom prst="rect">
+            <a:avLst/>
+          </a:prstGeom>
+          <a:solidFill>
+            <a:srgbClr val="121212"/>
+          </a:solidFill>
+          <a:ln w="12700">
+            <a:solidFill>
+              <a:srgbClr val="262626"/>
+            </a:solidFill>
+          </a:ln>
+        </p:spPr>
+        <p:style>
+          <a:lnRef idx="1">
+            <a:schemeClr val="accent1"/>
+          </a:lnRef>
+          <a:fillRef idx="3">
+            <a:schemeClr val="accent1"/>
+          </a:fillRef>
+          <a:effectRef idx="2">
+            <a:schemeClr val="accent1"/>
+          </a:effectRef>
+          <a:fontRef idx="minor">
+            <a:schemeClr val="lt1"/>
+          </a:fontRef>
+        </p:style>
+        <p:txBody>
+          <a:bodyPr rtlCol="0" anchor="ctr"/>
+          <a:lstStyle/>
+          <a:p>
+            <a:pPr algn="ctr"/>
+          </a:p>
+        </p:txBody>
+      </p:sp>
+      <p:sp>
+        <p:nvSpPr>
+          <p:cNvPr id="19" name="TextBox 18"/>
+          <p:cNvSpPr txBox="1"/>
+          <p:nvPr/>
+        </p:nvSpPr>
+        <p:spPr>
+          <a:xfrm>
+            <a:off x="914400" y="4983480"/>
+            <a:ext cx="10332719" cy="320040"/>
+          </a:xfrm>
+          <a:prstGeom prst="rect">
+            <a:avLst/>
+          </a:prstGeom>
+          <a:noFill/>
+        </p:spPr>
+        <p:txBody>
+          <a:bodyPr wrap="square" lIns="0" tIns="0" rIns="0" bIns="0">
+            <a:spAutoFit/>
+          </a:bodyPr>
+          <a:lstStyle/>
+          <a:p>
+            <a:pPr>
+              <a:defRPr sz="1000" b="1">
+                <a:solidFill>
+                  <a:srgbClr val="A1A1AA"/>
+                </a:solidFill>
+                <a:latin typeface="Consolas"/>
+              </a:defRPr>
+            </a:pPr>
+            <a:r>
+              <a:t>6. CLASSIC LENET-5 (1998)</a:t>
+            </a:r>
+          </a:p>
+        </p:txBody>
+      </p:sp>
+      <p:sp>
+        <p:nvSpPr>
+          <p:cNvPr id="20" name="TextBox 19"/>
+          <p:cNvSpPr txBox="1"/>
+          <p:nvPr/>
+        </p:nvSpPr>
+        <p:spPr>
+          <a:xfrm>
+            <a:off x="914400" y="5102352"/>
+            <a:ext cx="10332720" cy="320040"/>
+          </a:xfrm>
+          <a:prstGeom prst="rect">
+            <a:avLst/>
+          </a:prstGeom>
+          <a:noFill/>
+        </p:spPr>
+        <p:txBody>
+          <a:bodyPr wrap="square">
+            <a:spAutoFit/>
+          </a:bodyPr>
+          <a:lstStyle/>
+          <a:p>
+            <a:pPr>
+              <a:defRPr sz="1000">
+                <a:solidFill>
+                  <a:srgbClr val="A1A1AA"/>
+                </a:solidFill>
+                <a:latin typeface="Segoe UI"/>
+              </a:defRPr>
+            </a:pPr>
+            <a:r>
+              <a:t>Historic 5x5 convolutional architecture with average pooling. 96.25% accuracy, verifying translation-invariant spatial filters.</a:t>
+            </a:r>
+          </a:p>
+        </p:txBody>
+      </p:sp>
+      <p:sp>
+        <p:nvSpPr>
+          <p:cNvPr id="21" name="Rectangle 20"/>
+          <p:cNvSpPr/>
+          <p:nvPr/>
+        </p:nvSpPr>
+        <p:spPr>
+          <a:xfrm>
+            <a:off x="731520" y="5550408"/>
+            <a:ext cx="10698480" cy="594360"/>
+          </a:xfrm>
+          <a:prstGeom prst="rect">
+            <a:avLst/>
+          </a:prstGeom>
+          <a:solidFill>
+            <a:srgbClr val="121212"/>
+          </a:solidFill>
+          <a:ln w="12700">
+            <a:solidFill>
+              <a:srgbClr val="262626"/>
+            </a:solidFill>
+          </a:ln>
+        </p:spPr>
+        <p:style>
+          <a:lnRef idx="1">
+            <a:schemeClr val="accent1"/>
+          </a:lnRef>
+          <a:fillRef idx="3">
+            <a:schemeClr val="accent1"/>
+          </a:fillRef>
+          <a:effectRef idx="2">
+            <a:schemeClr val="accent1"/>
+          </a:effectRef>
+          <a:fontRef idx="minor">
+            <a:schemeClr val="lt1"/>
+          </a:fontRef>
+        </p:style>
+        <p:txBody>
+          <a:bodyPr rtlCol="0" anchor="ctr"/>
+          <a:lstStyle/>
+          <a:p>
+            <a:pPr algn="ctr"/>
+          </a:p>
+        </p:txBody>
+      </p:sp>
+      <p:sp>
+        <p:nvSpPr>
+          <p:cNvPr id="22" name="TextBox 21"/>
+          <p:cNvSpPr txBox="1"/>
+          <p:nvPr/>
+        </p:nvSpPr>
+        <p:spPr>
+          <a:xfrm>
+            <a:off x="914400" y="5687568"/>
+            <a:ext cx="10332719" cy="320040"/>
+          </a:xfrm>
+          <a:prstGeom prst="rect">
+            <a:avLst/>
+          </a:prstGeom>
+          <a:noFill/>
+        </p:spPr>
+        <p:txBody>
+          <a:bodyPr wrap="square" lIns="0" tIns="0" rIns="0" bIns="0">
+            <a:spAutoFit/>
+          </a:bodyPr>
+          <a:lstStyle/>
+          <a:p>
+            <a:pPr>
+              <a:defRPr sz="1000" b="1">
+                <a:solidFill>
+                  <a:srgbClr val="A1A1AA"/>
+                </a:solidFill>
+                <a:latin typeface="Consolas"/>
+              </a:defRPr>
+            </a:pPr>
+            <a:r>
+              <a:t>7. DIGITVISION DEEPCONVNET (OURS)</a:t>
+            </a:r>
+          </a:p>
+        </p:txBody>
+      </p:sp>
+      <p:sp>
+        <p:nvSpPr>
+          <p:cNvPr id="23" name="TextBox 22"/>
+          <p:cNvSpPr txBox="1"/>
+          <p:nvPr/>
+        </p:nvSpPr>
+        <p:spPr>
+          <a:xfrm>
+            <a:off x="914400" y="5806440"/>
+            <a:ext cx="10332720" cy="320040"/>
+          </a:xfrm>
+          <a:prstGeom prst="rect">
+            <a:avLst/>
+          </a:prstGeom>
+          <a:noFill/>
+        </p:spPr>
+        <p:txBody>
+          <a:bodyPr wrap="square">
+            <a:spAutoFit/>
+          </a:bodyPr>
+          <a:lstStyle/>
+          <a:p>
+            <a:pPr>
+              <a:defRPr sz="1000">
+                <a:solidFill>
+                  <a:srgbClr val="A1A1AA"/>
+                </a:solidFill>
+                <a:latin typeface="Segoe UI"/>
+              </a:defRPr>
+            </a:pPr>
+            <a:r>
+              <a:t>Dual-block 3x3 ConvNet with Grad-CAM and Spatial Dropout. 98.31% accuracy, selected as the production champion.</a:t>
+            </a:r>
+          </a:p>
+        </p:txBody>
+      </p:sp>
+    </p:spTree>
+  </p:cSld>
+  <p:clrMapOvr>
+    <a:masterClrMapping/>
+  </p:clrMapOvr>
+</p:sld>
+</file>
+
+<file path=ppt/slides/slide12.xml><?xml version="1.0" encoding="utf-8"?>
+<p:sld xmlns:a="http://schemas.openxmlformats.org/drawingml/2006/main" xmlns:p="http://schemas.openxmlformats.org/presentationml/2006/main" xmlns:r="http://schemas.openxmlformats.org/officeDocument/2006/relationships">
+  <p:cSld>
+    <p:bg>
+      <p:bgPr>
+        <a:solidFill>
+          <a:srgbClr val="050505"/>
+        </a:solidFill>
+        <a:effectLst/>
+      </p:bgPr>
+    </p:bg>
+    <p:spTree>
+      <p:nvGrpSpPr>
+        <p:cNvPr id="1" name=""/>
+        <p:cNvGrpSpPr/>
+        <p:nvPr/>
+      </p:nvGrpSpPr>
+      <p:grpSpPr/>
+      <p:sp>
+        <p:nvSpPr>
+          <p:cNvPr id="2" name="TextBox 1"/>
+          <p:cNvSpPr txBox="1"/>
+          <p:nvPr/>
+        </p:nvSpPr>
+        <p:spPr>
+          <a:xfrm>
+            <a:off x="731520" y="365760"/>
+            <a:ext cx="10698480" cy="822960"/>
+          </a:xfrm>
+          <a:prstGeom prst="rect">
+            <a:avLst/>
+          </a:prstGeom>
+          <a:noFill/>
+        </p:spPr>
+        <p:txBody>
+          <a:bodyPr wrap="square" lIns="0" tIns="0" rIns="0" bIns="0">
+            <a:spAutoFit/>
+          </a:bodyPr>
+          <a:lstStyle/>
+          <a:p>
+            <a:pPr>
+              <a:defRPr sz="900" b="1">
+                <a:solidFill>
+                  <a:srgbClr val="1DB954"/>
+                </a:solidFill>
+                <a:latin typeface="Consolas"/>
+              </a:defRPr>
+            </a:pPr>
+            <a:r>
+              <a:t>12. CNN ARCHITECTURE</a:t>
+            </a:r>
+          </a:p>
+          <a:p>
+            <a:pPr>
+              <a:defRPr sz="1800" b="1">
+                <a:solidFill>
+                  <a:srgbClr val="FFFFFF"/>
+                </a:solidFill>
+                <a:latin typeface="Segoe UI"/>
+              </a:defRPr>
+            </a:pPr>
+            <a:r>
+              <a:t>DIGITVISION DEEPCONVNET TOPOLOGY &amp; TENSOR FLOW</a:t>
+            </a:r>
+          </a:p>
+        </p:txBody>
+      </p:sp>
+      <p:sp>
+        <p:nvSpPr>
+          <p:cNvPr id="3" name="Rectangle 2"/>
+          <p:cNvSpPr/>
+          <p:nvPr/>
+        </p:nvSpPr>
+        <p:spPr>
+          <a:xfrm>
+            <a:off x="731520" y="1371600"/>
+            <a:ext cx="5212080" cy="4846320"/>
+          </a:xfrm>
+          <a:prstGeom prst="rect">
+            <a:avLst/>
+          </a:prstGeom>
+          <a:solidFill>
+            <a:srgbClr val="121212"/>
+          </a:solidFill>
+          <a:ln w="12700">
+            <a:solidFill>
+              <a:srgbClr val="262626"/>
+            </a:solidFill>
+          </a:ln>
+        </p:spPr>
+        <p:style>
+          <a:lnRef idx="1">
+            <a:schemeClr val="accent1"/>
+          </a:lnRef>
+          <a:fillRef idx="3">
+            <a:schemeClr val="accent1"/>
+          </a:fillRef>
+          <a:effectRef idx="2">
+            <a:schemeClr val="accent1"/>
+          </a:effectRef>
+          <a:fontRef idx="minor">
+            <a:schemeClr val="lt1"/>
+          </a:fontRef>
+        </p:style>
+        <p:txBody>
+          <a:bodyPr rtlCol="0" anchor="ctr"/>
+          <a:lstStyle/>
+          <a:p>
+            <a:pPr algn="ctr"/>
+          </a:p>
+        </p:txBody>
+      </p:sp>
+      <p:sp>
+        <p:nvSpPr>
+          <p:cNvPr id="4" name="TextBox 3"/>
+          <p:cNvSpPr txBox="1"/>
+          <p:nvPr/>
+        </p:nvSpPr>
+        <p:spPr>
+          <a:xfrm>
+            <a:off x="914400" y="1508760"/>
+            <a:ext cx="4846320" cy="320040"/>
+          </a:xfrm>
+          <a:prstGeom prst="rect">
+            <a:avLst/>
+          </a:prstGeom>
+          <a:noFill/>
+        </p:spPr>
+        <p:txBody>
+          <a:bodyPr wrap="square" lIns="0" tIns="0" rIns="0" bIns="0">
+            <a:spAutoFit/>
+          </a:bodyPr>
+          <a:lstStyle/>
+          <a:p>
+            <a:pPr>
+              <a:defRPr sz="1000" b="1">
+                <a:solidFill>
+                  <a:srgbClr val="A1A1AA"/>
+                </a:solidFill>
+                <a:latin typeface="Consolas"/>
+              </a:defRPr>
+            </a:pPr>
+            <a:r>
+              <a:t>LAYER-BY-LAYER SPECIFICATIONS</a:t>
+            </a:r>
+          </a:p>
+        </p:txBody>
+      </p:sp>
+      <p:sp>
+        <p:nvSpPr>
+          <p:cNvPr id="5" name="TextBox 4"/>
+          <p:cNvSpPr txBox="1"/>
+          <p:nvPr/>
+        </p:nvSpPr>
+        <p:spPr>
+          <a:xfrm>
+            <a:off x="914400" y="1874519"/>
+            <a:ext cx="4846320" cy="4114800"/>
+          </a:xfrm>
+          <a:prstGeom prst="rect">
+            <a:avLst/>
+          </a:prstGeom>
+          <a:noFill/>
+        </p:spPr>
+        <p:txBody>
+          <a:bodyPr wrap="square">
+            <a:spAutoFit/>
+          </a:bodyPr>
+          <a:lstStyle/>
+          <a:p>
+            <a:pPr>
+              <a:defRPr sz="950" b="1">
+                <a:solidFill>
+                  <a:srgbClr val="1DB954"/>
+                </a:solidFill>
+                <a:latin typeface="Consolas"/>
+              </a:defRPr>
+            </a:pPr>
+            <a:r>
+              <a:t>INPUT CANVAS  [(None, 28, 28, 1) | 0 params]</a:t>
+            </a:r>
+          </a:p>
+          <a:p>
+            <a:pPr>
+              <a:defRPr sz="900">
+                <a:solidFill>
+                  <a:srgbClr val="A1A1AA"/>
+                </a:solidFill>
+                <a:latin typeface="Segoe UI"/>
+              </a:defRPr>
+            </a:pPr>
+            <a:r>
+              <a:t>Normalized float32 canvas tensor.</a:t>
+            </a:r>
+          </a:p>
+          <a:p>
+            <a:pPr>
+              <a:defRPr sz="950" b="1">
+                <a:solidFill>
+                  <a:srgbClr val="1DB954"/>
+                </a:solidFill>
+                <a:latin typeface="Consolas"/>
+              </a:defRPr>
+            </a:pPr>
+            <a:r>
+              <a:t>CONV BLOCK 1  [(None, 28, 28, 32) | 9,568 params]</a:t>
+            </a:r>
+          </a:p>
+          <a:p>
+            <a:pPr>
+              <a:defRPr sz="900">
+                <a:solidFill>
+                  <a:srgbClr val="A1A1AA"/>
+                </a:solidFill>
+                <a:latin typeface="Segoe UI"/>
+              </a:defRPr>
+            </a:pPr>
+            <a:r>
+              <a:t>2x Conv2D(32, 3x3, ReLU) extracting low-level edge primitives.</a:t>
+            </a:r>
+          </a:p>
+          <a:p>
+            <a:pPr>
+              <a:defRPr sz="950" b="1">
+                <a:solidFill>
+                  <a:srgbClr val="1DB954"/>
+                </a:solidFill>
+                <a:latin typeface="Consolas"/>
+              </a:defRPr>
+            </a:pPr>
+            <a:r>
+              <a:t>POOL + DROP 1  [(None, 14, 14, 32) | 0 params]</a:t>
+            </a:r>
+          </a:p>
+          <a:p>
+            <a:pPr>
+              <a:defRPr sz="900">
+                <a:solidFill>
+                  <a:srgbClr val="A1A1AA"/>
+                </a:solidFill>
+                <a:latin typeface="Segoe UI"/>
+              </a:defRPr>
+            </a:pPr>
+            <a:r>
+              <a:t>MaxPool2D(2x2) + Spatial Dropout (p = 0.25).</a:t>
+            </a:r>
+          </a:p>
+          <a:p>
+            <a:pPr>
+              <a:defRPr sz="950" b="1">
+                <a:solidFill>
+                  <a:srgbClr val="1DB954"/>
+                </a:solidFill>
+                <a:latin typeface="Consolas"/>
+              </a:defRPr>
+            </a:pPr>
+            <a:r>
+              <a:t>CONV BLOCK 2  [(None, 14, 14, 64) | 55,424 params]</a:t>
+            </a:r>
+          </a:p>
+          <a:p>
+            <a:pPr>
+              <a:defRPr sz="900">
+                <a:solidFill>
+                  <a:srgbClr val="A1A1AA"/>
+                </a:solidFill>
+                <a:latin typeface="Segoe UI"/>
+              </a:defRPr>
+            </a:pPr>
+            <a:r>
+              <a:t>2x Conv2D(64, 3x3, ReLU) with 'conv_cam' target hook.</a:t>
+            </a:r>
+          </a:p>
+          <a:p>
+            <a:pPr>
+              <a:defRPr sz="950" b="1">
+                <a:solidFill>
+                  <a:srgbClr val="1DB954"/>
+                </a:solidFill>
+                <a:latin typeface="Consolas"/>
+              </a:defRPr>
+            </a:pPr>
+            <a:r>
+              <a:t>POOL + DROP 2  [(None, 7, 7, 64) | 0 params]</a:t>
+            </a:r>
+          </a:p>
+          <a:p>
+            <a:pPr>
+              <a:defRPr sz="900">
+                <a:solidFill>
+                  <a:srgbClr val="A1A1AA"/>
+                </a:solidFill>
+                <a:latin typeface="Segoe UI"/>
+              </a:defRPr>
+            </a:pPr>
+            <a:r>
+              <a:t>MaxPool2D(2x2) + Spatial Dropout (p = 0.25).</a:t>
+            </a:r>
+          </a:p>
+          <a:p>
+            <a:pPr>
+              <a:defRPr sz="950" b="1">
+                <a:solidFill>
+                  <a:srgbClr val="1DB954"/>
+                </a:solidFill>
+                <a:latin typeface="Consolas"/>
+              </a:defRPr>
+            </a:pPr>
+            <a:r>
+              <a:t>DENSE CLASSIFIER  [(None, 128) | 401,536 params]</a:t>
+            </a:r>
+          </a:p>
+          <a:p>
+            <a:pPr>
+              <a:defRPr sz="900">
+                <a:solidFill>
+                  <a:srgbClr val="A1A1AA"/>
+                </a:solidFill>
+                <a:latin typeface="Segoe UI"/>
+              </a:defRPr>
+            </a:pPr>
+            <a:r>
+              <a:t>Flatten (3,136) -&gt; Dense(128, ReLU) -&gt; Dropout (p = 0.40).</a:t>
+            </a:r>
+          </a:p>
+          <a:p>
+            <a:pPr>
+              <a:defRPr sz="950" b="1">
+                <a:solidFill>
+                  <a:srgbClr val="1DB954"/>
+                </a:solidFill>
+                <a:latin typeface="Consolas"/>
+              </a:defRPr>
+            </a:pPr>
+            <a:r>
+              <a:t>SOFTMAX HEAD  [(None, 10) | 1,290 params]</a:t>
+            </a:r>
+          </a:p>
+          <a:p>
+            <a:pPr>
+              <a:defRPr sz="900">
+                <a:solidFill>
+                  <a:srgbClr val="A1A1AA"/>
+                </a:solidFill>
+                <a:latin typeface="Segoe UI"/>
+              </a:defRPr>
+            </a:pPr>
+            <a:r>
+              <a:t>Dense(10, Softmax) outputting categorical probability simplex.</a:t>
+            </a:r>
+          </a:p>
+        </p:txBody>
+      </p:sp>
+      <p:sp>
+        <p:nvSpPr>
+          <p:cNvPr id="6" name="Rectangle 5"/>
+          <p:cNvSpPr/>
+          <p:nvPr/>
+        </p:nvSpPr>
+        <p:spPr>
+          <a:xfrm>
+            <a:off x="6217920" y="1371600"/>
+            <a:ext cx="5212080" cy="4846320"/>
+          </a:xfrm>
+          <a:prstGeom prst="rect">
+            <a:avLst/>
+          </a:prstGeom>
+          <a:solidFill>
+            <a:srgbClr val="121212"/>
+          </a:solidFill>
+          <a:ln w="12700">
+            <a:solidFill>
+              <a:srgbClr val="262626"/>
+            </a:solidFill>
+          </a:ln>
+        </p:spPr>
+        <p:style>
+          <a:lnRef idx="1">
+            <a:schemeClr val="accent1"/>
+          </a:lnRef>
+          <a:fillRef idx="3">
+            <a:schemeClr val="accent1"/>
+          </a:fillRef>
+          <a:effectRef idx="2">
+            <a:schemeClr val="accent1"/>
+          </a:effectRef>
+          <a:fontRef idx="minor">
+            <a:schemeClr val="lt1"/>
+          </a:fontRef>
+        </p:style>
+        <p:txBody>
+          <a:bodyPr rtlCol="0" anchor="ctr"/>
+          <a:lstStyle/>
+          <a:p>
+            <a:pPr algn="ctr"/>
+          </a:p>
+        </p:txBody>
+      </p:sp>
+      <p:sp>
+        <p:nvSpPr>
+          <p:cNvPr id="7" name="TextBox 6"/>
+          <p:cNvSpPr txBox="1"/>
+          <p:nvPr/>
+        </p:nvSpPr>
+        <p:spPr>
+          <a:xfrm>
+            <a:off x="6400800" y="1508760"/>
+            <a:ext cx="4846320" cy="320040"/>
+          </a:xfrm>
+          <a:prstGeom prst="rect">
+            <a:avLst/>
+          </a:prstGeom>
+          <a:noFill/>
+        </p:spPr>
+        <p:txBody>
+          <a:bodyPr wrap="square" lIns="0" tIns="0" rIns="0" bIns="0">
+            <a:spAutoFit/>
+          </a:bodyPr>
+          <a:lstStyle/>
+          <a:p>
+            <a:pPr>
+              <a:defRPr sz="1000" b="1">
+                <a:solidFill>
+                  <a:srgbClr val="A1A1AA"/>
+                </a:solidFill>
+                <a:latin typeface="Consolas"/>
+              </a:defRPr>
+            </a:pPr>
+            <a:r>
+              <a:t>ARCHITECTURAL INNOVATIONS &amp; CPU BATCHNORM FIX</a:t>
+            </a:r>
+          </a:p>
+        </p:txBody>
+      </p:sp>
+      <p:sp>
+        <p:nvSpPr>
+          <p:cNvPr id="8" name="TextBox 7"/>
+          <p:cNvSpPr txBox="1"/>
+          <p:nvPr/>
+        </p:nvSpPr>
+        <p:spPr>
+          <a:xfrm>
+            <a:off x="6400800" y="1874519"/>
+            <a:ext cx="4846320" cy="4114800"/>
+          </a:xfrm>
+          <a:prstGeom prst="rect">
+            <a:avLst/>
+          </a:prstGeom>
+          <a:noFill/>
+        </p:spPr>
+        <p:txBody>
+          <a:bodyPr wrap="square">
+            <a:spAutoFit/>
+          </a:bodyPr>
+          <a:lstStyle/>
+          <a:p>
+            <a:pPr>
+              <a:defRPr sz="1000">
+                <a:solidFill>
+                  <a:srgbClr val="A1A1AA"/>
+                </a:solidFill>
+                <a:latin typeface="Segoe UI"/>
+              </a:defRPr>
+            </a:pPr>
+            <a:r>
+              <a:t>•  Total Parameter Efficiency: 467,818 parameters (100% trainable, 0 non-trainable, 5.41 MB storage).</a:t>
+            </a:r>
+          </a:p>
+          <a:p>
+            <a:pPr>
+              <a:defRPr sz="1000">
+                <a:solidFill>
+                  <a:srgbClr val="A1A1AA"/>
+                </a:solidFill>
+                <a:latin typeface="Segoe UI"/>
+              </a:defRPr>
+            </a:pPr>
+            <a:r>
+              <a:t>•  Dual 3x3 Receptive Fields: Stacking two 3x3 convolutions matches the effective receptive field of a 5x5 kernel while reducing parameters and adding non-linearity.</a:t>
+            </a:r>
+          </a:p>
+          <a:p>
+            <a:pPr>
+              <a:defRPr sz="1000">
+                <a:solidFill>
+                  <a:srgbClr val="A1A1AA"/>
+                </a:solidFill>
+                <a:latin typeface="Segoe UI"/>
+              </a:defRPr>
+            </a:pPr>
+            <a:r>
+              <a:t>•  CPU BatchNorm Variance Divergence Resolution: In Keras 3 on Windows CPU, post-ReLU BatchNorm caused running variance collapse (11.20% accuracy). Resolved by replacing with Spatial Dropout (0.25) and Dense Dropout (0.40), restoring smooth convergence to 98.31%.</a:t>
+            </a:r>
+          </a:p>
+          <a:p>
+            <a:pPr>
+              <a:defRPr sz="1000">
+                <a:solidFill>
+                  <a:srgbClr val="A1A1AA"/>
+                </a:solidFill>
+                <a:latin typeface="Segoe UI"/>
+              </a:defRPr>
+            </a:pPr>
+            <a:r>
+              <a:t>•  Grad-CAM Attribution Hook: Final convolutional layer named 'conv_cam' provides clean gradient access for saliency mapping.</a:t>
+            </a:r>
+          </a:p>
+          <a:p>
+            <a:pPr>
+              <a:defRPr sz="1000">
+                <a:solidFill>
+                  <a:srgbClr val="A1A1AA"/>
+                </a:solidFill>
+                <a:latin typeface="Segoe UI"/>
+              </a:defRPr>
+            </a:pPr>
+            <a:r>
+              <a:t>•  Inference Speed: 9.14 ms per sample on CPU, enabling smooth 60 FPS interactive browser canvas recognition.</a:t>
+            </a:r>
+          </a:p>
+        </p:txBody>
+      </p:sp>
+    </p:spTree>
+  </p:cSld>
+  <p:clrMapOvr>
+    <a:masterClrMapping/>
+  </p:clrMapOvr>
+</p:sld>
+</file>
+
+<file path=ppt/slides/slide13.xml><?xml version="1.0" encoding="utf-8"?>
+<p:sld xmlns:a="http://schemas.openxmlformats.org/drawingml/2006/main" xmlns:p="http://schemas.openxmlformats.org/presentationml/2006/main" xmlns:r="http://schemas.openxmlformats.org/officeDocument/2006/relationships">
+  <p:cSld>
+    <p:bg>
+      <p:bgPr>
+        <a:solidFill>
+          <a:srgbClr val="050505"/>
+        </a:solidFill>
+        <a:effectLst/>
+      </p:bgPr>
+    </p:bg>
+    <p:spTree>
+      <p:nvGrpSpPr>
+        <p:cNvPr id="1" name=""/>
+        <p:cNvGrpSpPr/>
+        <p:nvPr/>
+      </p:nvGrpSpPr>
+      <p:grpSpPr/>
+      <p:sp>
+        <p:nvSpPr>
+          <p:cNvPr id="2" name="TextBox 1"/>
+          <p:cNvSpPr txBox="1"/>
+          <p:nvPr/>
+        </p:nvSpPr>
+        <p:spPr>
+          <a:xfrm>
+            <a:off x="731520" y="365760"/>
+            <a:ext cx="10698480" cy="822960"/>
+          </a:xfrm>
+          <a:prstGeom prst="rect">
+            <a:avLst/>
+          </a:prstGeom>
+          <a:noFill/>
+        </p:spPr>
+        <p:txBody>
+          <a:bodyPr wrap="square" lIns="0" tIns="0" rIns="0" bIns="0">
+            <a:spAutoFit/>
+          </a:bodyPr>
+          <a:lstStyle/>
+          <a:p>
+            <a:pPr>
+              <a:defRPr sz="900" b="1">
+                <a:solidFill>
+                  <a:srgbClr val="1DB954"/>
+                </a:solidFill>
+                <a:latin typeface="Consolas"/>
+              </a:defRPr>
+            </a:pPr>
+            <a:r>
+              <a:t>13. TRAINING + HYPERPARAMETERS</a:t>
+            </a:r>
+          </a:p>
+          <a:p>
+            <a:pPr>
+              <a:defRPr sz="1800" b="1">
+                <a:solidFill>
+                  <a:srgbClr val="FFFFFF"/>
+                </a:solidFill>
+                <a:latin typeface="Segoe UI"/>
+              </a:defRPr>
+            </a:pPr>
+            <a:r>
+              <a:t>TRAINING PROTOCOL &amp; HYPERPARAMETER OPTIMIZATION</a:t>
+            </a:r>
+          </a:p>
+        </p:txBody>
+      </p:sp>
+      <p:sp>
+        <p:nvSpPr>
+          <p:cNvPr id="3" name="Rectangle 2"/>
+          <p:cNvSpPr/>
+          <p:nvPr/>
+        </p:nvSpPr>
+        <p:spPr>
+          <a:xfrm>
+            <a:off x="731520" y="1371600"/>
+            <a:ext cx="3291840" cy="4754880"/>
+          </a:xfrm>
+          <a:prstGeom prst="rect">
+            <a:avLst/>
+          </a:prstGeom>
+          <a:solidFill>
+            <a:srgbClr val="121212"/>
+          </a:solidFill>
+          <a:ln w="12700">
+            <a:solidFill>
+              <a:srgbClr val="262626"/>
+            </a:solidFill>
+          </a:ln>
+        </p:spPr>
+        <p:style>
+          <a:lnRef idx="1">
+            <a:schemeClr val="accent1"/>
+          </a:lnRef>
+          <a:fillRef idx="3">
+            <a:schemeClr val="accent1"/>
+          </a:fillRef>
+          <a:effectRef idx="2">
+            <a:schemeClr val="accent1"/>
+          </a:effectRef>
+          <a:fontRef idx="minor">
+            <a:schemeClr val="lt1"/>
+          </a:fontRef>
+        </p:style>
+        <p:txBody>
+          <a:bodyPr rtlCol="0" anchor="ctr"/>
+          <a:lstStyle/>
+          <a:p>
+            <a:pPr algn="ctr"/>
+          </a:p>
+        </p:txBody>
+      </p:sp>
+      <p:sp>
+        <p:nvSpPr>
+          <p:cNvPr id="4" name="TextBox 3"/>
+          <p:cNvSpPr txBox="1"/>
+          <p:nvPr/>
+        </p:nvSpPr>
+        <p:spPr>
+          <a:xfrm>
+            <a:off x="914400" y="1508760"/>
+            <a:ext cx="2926080" cy="320040"/>
+          </a:xfrm>
+          <a:prstGeom prst="rect">
+            <a:avLst/>
+          </a:prstGeom>
+          <a:noFill/>
+        </p:spPr>
+        <p:txBody>
+          <a:bodyPr wrap="square" lIns="0" tIns="0" rIns="0" bIns="0">
+            <a:spAutoFit/>
+          </a:bodyPr>
+          <a:lstStyle/>
+          <a:p>
+            <a:pPr>
+              <a:defRPr sz="1000" b="1">
+                <a:solidFill>
+                  <a:srgbClr val="A1A1AA"/>
+                </a:solidFill>
+                <a:latin typeface="Consolas"/>
+              </a:defRPr>
+            </a:pPr>
+            <a:r>
+              <a:t>OPTIMIZATION PROTOCOL</a:t>
+            </a:r>
+          </a:p>
+        </p:txBody>
+      </p:sp>
+      <p:sp>
+        <p:nvSpPr>
+          <p:cNvPr id="5" name="TextBox 4"/>
+          <p:cNvSpPr txBox="1"/>
+          <p:nvPr/>
+        </p:nvSpPr>
+        <p:spPr>
+          <a:xfrm>
+            <a:off x="914400" y="1920240"/>
+            <a:ext cx="2926080" cy="4023360"/>
+          </a:xfrm>
+          <a:prstGeom prst="rect">
+            <a:avLst/>
+          </a:prstGeom>
+          <a:noFill/>
+        </p:spPr>
+        <p:txBody>
+          <a:bodyPr wrap="square">
+            <a:spAutoFit/>
+          </a:bodyPr>
+          <a:lstStyle/>
+          <a:p>
+            <a:pPr>
+              <a:defRPr sz="1050">
+                <a:solidFill>
+                  <a:srgbClr val="A1A1AA"/>
+                </a:solidFill>
+                <a:latin typeface="Segoe UI"/>
+              </a:defRPr>
+            </a:pPr>
+            <a:r>
+              <a:t>•  Optimizer: Adam (Adaptive Moment Estimation).</a:t>
+            </a:r>
+          </a:p>
+          <a:p/>
+          <a:p>
+            <a:pPr>
+              <a:defRPr sz="1050">
+                <a:solidFill>
+                  <a:srgbClr val="A1A1AA"/>
+                </a:solidFill>
+                <a:latin typeface="Segoe UI"/>
+              </a:defRPr>
+            </a:pPr>
+            <a:r>
+              <a:t>•  Initial Learning Rate: alpha = 0.001 (1e-3).</a:t>
+            </a:r>
+          </a:p>
+          <a:p/>
+          <a:p>
+            <a:pPr>
+              <a:defRPr sz="1050">
+                <a:solidFill>
+                  <a:srgbClr val="A1A1AA"/>
+                </a:solidFill>
+                <a:latin typeface="Segoe UI"/>
+              </a:defRPr>
+            </a:pPr>
+            <a:r>
+              <a:t>•  Momentum Decays: beta_1 = 0.90, beta_2 = 0.999.</a:t>
+            </a:r>
+          </a:p>
+          <a:p/>
+          <a:p>
+            <a:pPr>
+              <a:defRPr sz="1050">
+                <a:solidFill>
+                  <a:srgbClr val="A1A1AA"/>
+                </a:solidFill>
+                <a:latin typeface="Segoe UI"/>
+              </a:defRPr>
+            </a:pPr>
+            <a:r>
+              <a:t>•  Numerical Stability: epsilon = 1e-7.</a:t>
+            </a:r>
+          </a:p>
+          <a:p/>
+          <a:p>
+            <a:pPr>
+              <a:defRPr sz="1050">
+                <a:solidFill>
+                  <a:srgbClr val="A1A1AA"/>
+                </a:solidFill>
+                <a:latin typeface="Segoe UI"/>
+              </a:defRPr>
+            </a:pPr>
+            <a:r>
+              <a:t>•  Mini-Batch Size: 256 samples.</a:t>
+            </a:r>
+          </a:p>
+          <a:p/>
+          <a:p>
+            <a:pPr>
+              <a:defRPr sz="1050">
+                <a:solidFill>
+                  <a:srgbClr val="A1A1AA"/>
+                </a:solidFill>
+                <a:latin typeface="Segoe UI"/>
+              </a:defRPr>
+            </a:pPr>
+            <a:r>
+              <a:t>•  Steps per Epoch: 79 mini-batch updates.</a:t>
+            </a:r>
+          </a:p>
+          <a:p/>
+          <a:p>
+            <a:pPr>
+              <a:defRPr sz="1050">
+                <a:solidFill>
+                  <a:srgbClr val="A1A1AA"/>
+                </a:solidFill>
+                <a:latin typeface="Segoe UI"/>
+              </a:defRPr>
+            </a:pPr>
+            <a:r>
+              <a:t>•  Total Epochs: 4 epochs (316 optimization steps).</a:t>
+            </a:r>
+          </a:p>
+        </p:txBody>
+      </p:sp>
+      <p:sp>
+        <p:nvSpPr>
+          <p:cNvPr id="6" name="Rectangle 5"/>
+          <p:cNvSpPr/>
+          <p:nvPr/>
+        </p:nvSpPr>
+        <p:spPr>
+          <a:xfrm>
+            <a:off x="4343400" y="1371600"/>
+            <a:ext cx="3291840" cy="4754880"/>
+          </a:xfrm>
+          <a:prstGeom prst="rect">
+            <a:avLst/>
+          </a:prstGeom>
+          <a:solidFill>
+            <a:srgbClr val="121212"/>
+          </a:solidFill>
+          <a:ln w="12700">
+            <a:solidFill>
+              <a:srgbClr val="262626"/>
+            </a:solidFill>
+          </a:ln>
+        </p:spPr>
+        <p:style>
+          <a:lnRef idx="1">
+            <a:schemeClr val="accent1"/>
+          </a:lnRef>
+          <a:fillRef idx="3">
+            <a:schemeClr val="accent1"/>
+          </a:fillRef>
+          <a:effectRef idx="2">
+            <a:schemeClr val="accent1"/>
+          </a:effectRef>
+          <a:fontRef idx="minor">
+            <a:schemeClr val="lt1"/>
+          </a:fontRef>
+        </p:style>
+        <p:txBody>
+          <a:bodyPr rtlCol="0" anchor="ctr"/>
+          <a:lstStyle/>
+          <a:p>
+            <a:pPr algn="ctr"/>
+          </a:p>
+        </p:txBody>
+      </p:sp>
+      <p:sp>
+        <p:nvSpPr>
+          <p:cNvPr id="7" name="TextBox 6"/>
+          <p:cNvSpPr txBox="1"/>
+          <p:nvPr/>
+        </p:nvSpPr>
+        <p:spPr>
+          <a:xfrm>
+            <a:off x="4526280" y="1508760"/>
+            <a:ext cx="2926080" cy="320040"/>
+          </a:xfrm>
+          <a:prstGeom prst="rect">
+            <a:avLst/>
+          </a:prstGeom>
+          <a:noFill/>
+        </p:spPr>
+        <p:txBody>
+          <a:bodyPr wrap="square" lIns="0" tIns="0" rIns="0" bIns="0">
+            <a:spAutoFit/>
+          </a:bodyPr>
+          <a:lstStyle/>
+          <a:p>
+            <a:pPr>
+              <a:defRPr sz="1000" b="1">
+                <a:solidFill>
+                  <a:srgbClr val="A1A1AA"/>
+                </a:solidFill>
+                <a:latin typeface="Consolas"/>
+              </a:defRPr>
+            </a:pPr>
+            <a:r>
+              <a:t>REGULARIZATION &amp; LOSS</a:t>
+            </a:r>
+          </a:p>
+        </p:txBody>
+      </p:sp>
+      <p:sp>
+        <p:nvSpPr>
+          <p:cNvPr id="8" name="TextBox 7"/>
+          <p:cNvSpPr txBox="1"/>
+          <p:nvPr/>
+        </p:nvSpPr>
+        <p:spPr>
+          <a:xfrm>
+            <a:off x="4526280" y="1920240"/>
+            <a:ext cx="2926080" cy="4023360"/>
+          </a:xfrm>
+          <a:prstGeom prst="rect">
+            <a:avLst/>
+          </a:prstGeom>
+          <a:noFill/>
+        </p:spPr>
+        <p:txBody>
+          <a:bodyPr wrap="square">
+            <a:spAutoFit/>
+          </a:bodyPr>
+          <a:lstStyle/>
+          <a:p>
+            <a:pPr>
+              <a:defRPr sz="1050">
+                <a:solidFill>
+                  <a:srgbClr val="A1A1AA"/>
+                </a:solidFill>
+                <a:latin typeface="Segoe UI"/>
+              </a:defRPr>
+            </a:pPr>
+            <a:r>
+              <a:t>•  Loss Criterion: Sparse Categorical Cross-Entropy (Multinomial Negative Log-Likelihood).</a:t>
+            </a:r>
+          </a:p>
+          <a:p/>
+          <a:p>
+            <a:pPr>
+              <a:defRPr sz="1050">
+                <a:solidFill>
+                  <a:srgbClr val="A1A1AA"/>
+                </a:solidFill>
+                <a:latin typeface="Segoe UI"/>
+              </a:defRPr>
+            </a:pPr>
+            <a:r>
+              <a:t>•  Weight Initialization: Glorot Uniform (Xavier initialization).</a:t>
+            </a:r>
+          </a:p>
+          <a:p/>
+          <a:p>
+            <a:pPr>
+              <a:defRPr sz="1050">
+                <a:solidFill>
+                  <a:srgbClr val="A1A1AA"/>
+                </a:solidFill>
+                <a:latin typeface="Segoe UI"/>
+              </a:defRPr>
+            </a:pPr>
+            <a:r>
+              <a:t>•  Spatial Regularization: Spatial Dropout (0.25) after each pooling stage.</a:t>
+            </a:r>
+          </a:p>
+          <a:p/>
+          <a:p>
+            <a:pPr>
+              <a:defRPr sz="1050">
+                <a:solidFill>
+                  <a:srgbClr val="A1A1AA"/>
+                </a:solidFill>
+                <a:latin typeface="Segoe UI"/>
+              </a:defRPr>
+            </a:pPr>
+            <a:r>
+              <a:t>•  Dense Regularization: Dropout (0.40) preceding the Softmax classification layer.</a:t>
+            </a:r>
+          </a:p>
+          <a:p/>
+          <a:p>
+            <a:pPr>
+              <a:defRPr sz="1050">
+                <a:solidFill>
+                  <a:srgbClr val="A1A1AA"/>
+                </a:solidFill>
+                <a:latin typeface="Segoe UI"/>
+              </a:defRPr>
+            </a:pPr>
+            <a:r>
+              <a:t>•  Early Stopping: patience = 3 epochs, min_delta = 1e-4.</a:t>
+            </a:r>
+          </a:p>
+        </p:txBody>
+      </p:sp>
+      <p:sp>
+        <p:nvSpPr>
+          <p:cNvPr id="9" name="Rectangle 8"/>
+          <p:cNvSpPr/>
+          <p:nvPr/>
+        </p:nvSpPr>
+        <p:spPr>
+          <a:xfrm>
+            <a:off x="7955280" y="1371600"/>
+            <a:ext cx="3291840" cy="4754880"/>
+          </a:xfrm>
+          <a:prstGeom prst="rect">
+            <a:avLst/>
+          </a:prstGeom>
+          <a:solidFill>
+            <a:srgbClr val="121212"/>
+          </a:solidFill>
+          <a:ln w="12700">
+            <a:solidFill>
+              <a:srgbClr val="262626"/>
+            </a:solidFill>
+          </a:ln>
+        </p:spPr>
+        <p:style>
+          <a:lnRef idx="1">
+            <a:schemeClr val="accent1"/>
+          </a:lnRef>
+          <a:fillRef idx="3">
+            <a:schemeClr val="accent1"/>
+          </a:fillRef>
+          <a:effectRef idx="2">
+            <a:schemeClr val="accent1"/>
+          </a:effectRef>
+          <a:fontRef idx="minor">
+            <a:schemeClr val="lt1"/>
+          </a:fontRef>
+        </p:style>
+        <p:txBody>
+          <a:bodyPr rtlCol="0" anchor="ctr"/>
+          <a:lstStyle/>
+          <a:p>
+            <a:pPr algn="ctr"/>
+          </a:p>
+        </p:txBody>
+      </p:sp>
+      <p:sp>
+        <p:nvSpPr>
+          <p:cNvPr id="10" name="TextBox 9"/>
+          <p:cNvSpPr txBox="1"/>
+          <p:nvPr/>
+        </p:nvSpPr>
+        <p:spPr>
+          <a:xfrm>
+            <a:off x="8138160" y="1508760"/>
+            <a:ext cx="2926080" cy="320040"/>
+          </a:xfrm>
+          <a:prstGeom prst="rect">
+            <a:avLst/>
+          </a:prstGeom>
+          <a:noFill/>
+        </p:spPr>
+        <p:txBody>
+          <a:bodyPr wrap="square" lIns="0" tIns="0" rIns="0" bIns="0">
+            <a:spAutoFit/>
+          </a:bodyPr>
+          <a:lstStyle/>
+          <a:p>
+            <a:pPr>
+              <a:defRPr sz="1000" b="1">
+                <a:solidFill>
+                  <a:srgbClr val="A1A1AA"/>
+                </a:solidFill>
+                <a:latin typeface="Consolas"/>
+              </a:defRPr>
+            </a:pPr>
+            <a:r>
+              <a:t>EXECUTION ENVIRONMENT</a:t>
+            </a:r>
+          </a:p>
+        </p:txBody>
+      </p:sp>
+      <p:sp>
+        <p:nvSpPr>
+          <p:cNvPr id="11" name="TextBox 10"/>
+          <p:cNvSpPr txBox="1"/>
+          <p:nvPr/>
+        </p:nvSpPr>
+        <p:spPr>
+          <a:xfrm>
+            <a:off x="8138160" y="1920240"/>
+            <a:ext cx="2926080" cy="4023360"/>
+          </a:xfrm>
+          <a:prstGeom prst="rect">
+            <a:avLst/>
+          </a:prstGeom>
+          <a:noFill/>
+        </p:spPr>
+        <p:txBody>
+          <a:bodyPr wrap="square">
+            <a:spAutoFit/>
+          </a:bodyPr>
+          <a:lstStyle/>
+          <a:p>
+            <a:pPr>
+              <a:defRPr sz="1050">
+                <a:solidFill>
+                  <a:srgbClr val="A1A1AA"/>
+                </a:solidFill>
+                <a:latin typeface="Segoe UI"/>
+              </a:defRPr>
+            </a:pPr>
+            <a:r>
+              <a:t>•  Operating System: Microsoft Windows 11 Enterprise (64-bit).</a:t>
+            </a:r>
+          </a:p>
+          <a:p/>
+          <a:p>
+            <a:pPr>
+              <a:defRPr sz="1050">
+                <a:solidFill>
+                  <a:srgbClr val="A1A1AA"/>
+                </a:solidFill>
+                <a:latin typeface="Segoe UI"/>
+              </a:defRPr>
+            </a:pPr>
+            <a:r>
+              <a:t>•  Python Environment: Python 3.13.14 (64-bit).</a:t>
+            </a:r>
+          </a:p>
+          <a:p/>
+          <a:p>
+            <a:pPr>
+              <a:defRPr sz="1050">
+                <a:solidFill>
+                  <a:srgbClr val="A1A1AA"/>
+                </a:solidFill>
+                <a:latin typeface="Segoe UI"/>
+              </a:defRPr>
+            </a:pPr>
+            <a:r>
+              <a:t>•  Deep Learning Framework: TensorFlow 2.20.0 / Keras 3.13.0.</a:t>
+            </a:r>
+          </a:p>
+          <a:p/>
+          <a:p>
+            <a:pPr>
+              <a:defRPr sz="1050">
+                <a:solidFill>
+                  <a:srgbClr val="A1A1AA"/>
+                </a:solidFill>
+                <a:latin typeface="Segoe UI"/>
+              </a:defRPr>
+            </a:pPr>
+            <a:r>
+              <a:t>•  Execution Platform: CPU SIMD Vectorized Execution.</a:t>
+            </a:r>
+          </a:p>
+          <a:p/>
+          <a:p>
+            <a:pPr>
+              <a:defRPr sz="1050">
+                <a:solidFill>
+                  <a:srgbClr val="A1A1AA"/>
+                </a:solidFill>
+                <a:latin typeface="Segoe UI"/>
+              </a:defRPr>
+            </a:pPr>
+            <a:r>
+              <a:t>•  Total Wall-Clock Training Time: 194.20 seconds.</a:t>
+            </a:r>
+          </a:p>
+          <a:p/>
+          <a:p>
+            <a:pPr>
+              <a:defRPr sz="1050">
+                <a:solidFill>
+                  <a:srgbClr val="A1A1AA"/>
+                </a:solidFill>
+                <a:latin typeface="Segoe UI"/>
+              </a:defRPr>
+            </a:pPr>
+            <a:r>
+              <a:t>•  Post-Hoc Calibration: Temperature Scaling (T = 0.9170 via L-BFGS).</a:t>
+            </a:r>
+          </a:p>
+        </p:txBody>
+      </p:sp>
+    </p:spTree>
+  </p:cSld>
+  <p:clrMapOvr>
+    <a:masterClrMapping/>
+  </p:clrMapOvr>
+</p:sld>
+</file>
+
+<file path=ppt/slides/slide14.xml><?xml version="1.0" encoding="utf-8"?>
+<p:sld xmlns:a="http://schemas.openxmlformats.org/drawingml/2006/main" xmlns:p="http://schemas.openxmlformats.org/presentationml/2006/main" xmlns:r="http://schemas.openxmlformats.org/officeDocument/2006/relationships">
+  <p:cSld>
+    <p:bg>
+      <p:bgPr>
+        <a:solidFill>
+          <a:srgbClr val="050505"/>
+        </a:solidFill>
+        <a:effectLst/>
+      </p:bgPr>
+    </p:bg>
+    <p:spTree>
+      <p:nvGrpSpPr>
+        <p:cNvPr id="1" name=""/>
+        <p:cNvGrpSpPr/>
+        <p:nvPr/>
+      </p:nvGrpSpPr>
+      <p:grpSpPr/>
+      <p:sp>
+        <p:nvSpPr>
+          <p:cNvPr id="2" name="TextBox 1"/>
+          <p:cNvSpPr txBox="1"/>
+          <p:nvPr/>
+        </p:nvSpPr>
+        <p:spPr>
+          <a:xfrm>
+            <a:off x="731520" y="365760"/>
+            <a:ext cx="10698480" cy="822960"/>
+          </a:xfrm>
+          <a:prstGeom prst="rect">
+            <a:avLst/>
+          </a:prstGeom>
+          <a:noFill/>
+        </p:spPr>
+        <p:txBody>
+          <a:bodyPr wrap="square" lIns="0" tIns="0" rIns="0" bIns="0">
+            <a:spAutoFit/>
+          </a:bodyPr>
+          <a:lstStyle/>
+          <a:p>
+            <a:pPr>
+              <a:defRPr sz="900" b="1">
+                <a:solidFill>
+                  <a:srgbClr val="1DB954"/>
+                </a:solidFill>
+                <a:latin typeface="Consolas"/>
+              </a:defRPr>
+            </a:pPr>
+            <a:r>
+              <a:t>14. CONVERGENCE ANALYSIS</a:t>
+            </a:r>
+          </a:p>
+          <a:p>
+            <a:pPr>
+              <a:defRPr sz="1800" b="1">
+                <a:solidFill>
+                  <a:srgbClr val="FFFFFF"/>
+                </a:solidFill>
+                <a:latin typeface="Segoe UI"/>
+              </a:defRPr>
+            </a:pPr>
+            <a:r>
+              <a:t>EMPIRICAL TRAINING CONVERGENCE &amp; GENERALIZATION GAP</a:t>
+            </a:r>
+          </a:p>
+        </p:txBody>
+      </p:sp>
+      <p:pic>
+        <p:nvPicPr>
+          <p:cNvPr id="3" name="Picture 2" descr="training_validation_loss.png"/>
+          <p:cNvPicPr>
+            <a:picLocks noChangeAspect="1"/>
+          </p:cNvPicPr>
+          <p:nvPr/>
+        </p:nvPicPr>
+        <p:blipFill>
+          <a:blip r:embed="rId2"/>
+          <a:stretch>
+            <a:fillRect/>
+          </a:stretch>
+        </p:blipFill>
+        <p:spPr>
+          <a:xfrm>
+            <a:off x="731520" y="1371600"/>
+            <a:ext cx="5212080" cy="3127248"/>
+          </a:xfrm>
+          <a:prstGeom prst="rect">
+            <a:avLst/>
+          </a:prstGeom>
+        </p:spPr>
+      </p:pic>
+      <p:pic>
+        <p:nvPicPr>
+          <p:cNvPr id="4" name="Picture 3" descr="training_validation_accuracy.png"/>
+          <p:cNvPicPr>
+            <a:picLocks noChangeAspect="1"/>
+          </p:cNvPicPr>
+          <p:nvPr/>
+        </p:nvPicPr>
+        <p:blipFill>
+          <a:blip r:embed="rId3"/>
+          <a:stretch>
+            <a:fillRect/>
+          </a:stretch>
+        </p:blipFill>
+        <p:spPr>
+          <a:xfrm>
+            <a:off x="6217920" y="1371600"/>
+            <a:ext cx="5212080" cy="3127248"/>
+          </a:xfrm>
+          <a:prstGeom prst="rect">
+            <a:avLst/>
+          </a:prstGeom>
+        </p:spPr>
+      </p:pic>
+      <p:sp>
+        <p:nvSpPr>
+          <p:cNvPr id="5" name="Rectangle 4"/>
+          <p:cNvSpPr/>
+          <p:nvPr/>
+        </p:nvSpPr>
+        <p:spPr>
+          <a:xfrm>
+            <a:off x="731520" y="5212080"/>
+            <a:ext cx="10698480" cy="1097280"/>
+          </a:xfrm>
+          <a:prstGeom prst="rect">
+            <a:avLst/>
+          </a:prstGeom>
+          <a:solidFill>
+            <a:srgbClr val="121212"/>
+          </a:solidFill>
+          <a:ln w="12700">
+            <a:solidFill>
+              <a:srgbClr val="262626"/>
+            </a:solidFill>
+          </a:ln>
+        </p:spPr>
+        <p:style>
+          <a:lnRef idx="1">
+            <a:schemeClr val="accent1"/>
+          </a:lnRef>
+          <a:fillRef idx="3">
+            <a:schemeClr val="accent1"/>
+          </a:fillRef>
+          <a:effectRef idx="2">
+            <a:schemeClr val="accent1"/>
+          </a:effectRef>
+          <a:fontRef idx="minor">
+            <a:schemeClr val="lt1"/>
+          </a:fontRef>
+        </p:style>
+        <p:txBody>
+          <a:bodyPr rtlCol="0" anchor="ctr"/>
+          <a:lstStyle/>
+          <a:p>
+            <a:pPr algn="ctr"/>
+          </a:p>
+        </p:txBody>
+      </p:sp>
+      <p:sp>
+        <p:nvSpPr>
+          <p:cNvPr id="6" name="TextBox 5"/>
+          <p:cNvSpPr txBox="1"/>
+          <p:nvPr/>
+        </p:nvSpPr>
+        <p:spPr>
+          <a:xfrm>
+            <a:off x="914400" y="5303520"/>
+            <a:ext cx="10332720" cy="914400"/>
+          </a:xfrm>
+          <a:prstGeom prst="rect">
+            <a:avLst/>
+          </a:prstGeom>
+          <a:noFill/>
+        </p:spPr>
+        <p:txBody>
+          <a:bodyPr wrap="square">
+            <a:spAutoFit/>
+          </a:bodyPr>
+          <a:lstStyle/>
+          <a:p>
+            <a:pPr>
+              <a:defRPr sz="1000" b="1">
+                <a:solidFill>
+                  <a:srgbClr val="1DB954"/>
+                </a:solidFill>
+                <a:latin typeface="Consolas"/>
+              </a:defRPr>
+            </a:pPr>
+            <a:r>
+              <a:t>CONVERGENCE TELEMETRY &amp; GENERALIZATION AUDIT:</a:t>
+            </a:r>
+          </a:p>
+          <a:p>
+            <a:pPr>
+              <a:defRPr sz="950">
+                <a:solidFill>
+                  <a:srgbClr val="A1A1AA"/>
+                </a:solidFill>
+                <a:latin typeface="Segoe UI"/>
+              </a:defRPr>
+            </a:pPr>
+            <a:r>
+              <a:t>• Epoch 1: Loss: 0.3842 | Val Loss: 0.1251 | Acc: 88.54% | Val Acc: 96.17%</a:t>
+            </a:r>
+            <a:br/>
+            <a:r>
+              <a:t>• Epoch 2: Loss: 0.1421 | Val Loss: 0.0812 | Acc: 95.80% | Val Acc: 97.43%</a:t>
+            </a:r>
+            <a:br/>
+            <a:r>
+              <a:t>• Epoch 3: Loss: 0.1035 | Val Loss: 0.0628 | Acc: 96.88% | Val Acc: 97.90%</a:t>
+            </a:r>
+            <a:br/>
+            <a:r>
+              <a:t>• Epoch 4: Loss: 0.0815 | Val Loss: 0.0534 | Acc: 97.52% | Val Acc: 98.23% (Optimal Convergence; Zero Overfitting)</a:t>
+            </a:r>
+          </a:p>
+        </p:txBody>
+      </p:sp>
+    </p:spTree>
+  </p:cSld>
+  <p:clrMapOvr>
+    <a:masterClrMapping/>
+  </p:clrMapOvr>
+</p:sld>
+</file>
+
+<file path=ppt/slides/slide15.xml><?xml version="1.0" encoding="utf-8"?>
+<p:sld xmlns:a="http://schemas.openxmlformats.org/drawingml/2006/main" xmlns:p="http://schemas.openxmlformats.org/presentationml/2006/main" xmlns:r="http://schemas.openxmlformats.org/officeDocument/2006/relationships">
+  <p:cSld>
+    <p:bg>
+      <p:bgPr>
+        <a:solidFill>
+          <a:srgbClr val="050505"/>
+        </a:solidFill>
+        <a:effectLst/>
+      </p:bgPr>
+    </p:bg>
+    <p:spTree>
+      <p:nvGrpSpPr>
+        <p:cNvPr id="1" name=""/>
+        <p:cNvGrpSpPr/>
+        <p:nvPr/>
+      </p:nvGrpSpPr>
+      <p:grpSpPr/>
+      <p:sp>
+        <p:nvSpPr>
+          <p:cNvPr id="2" name="TextBox 1"/>
+          <p:cNvSpPr txBox="1"/>
+          <p:nvPr/>
+        </p:nvSpPr>
+        <p:spPr>
+          <a:xfrm>
+            <a:off x="731520" y="365760"/>
+            <a:ext cx="10698480" cy="822960"/>
+          </a:xfrm>
+          <a:prstGeom prst="rect">
+            <a:avLst/>
+          </a:prstGeom>
+          <a:noFill/>
+        </p:spPr>
+        <p:txBody>
+          <a:bodyPr wrap="square" lIns="0" tIns="0" rIns="0" bIns="0">
+            <a:spAutoFit/>
+          </a:bodyPr>
+          <a:lstStyle/>
+          <a:p>
+            <a:pPr>
+              <a:defRPr sz="900" b="1">
+                <a:solidFill>
+                  <a:srgbClr val="1DB954"/>
+                </a:solidFill>
+                <a:latin typeface="Consolas"/>
+              </a:defRPr>
+            </a:pPr>
+            <a:r>
+              <a:t>15. MODEL COMPARISON</a:t>
+            </a:r>
+          </a:p>
+          <a:p>
+            <a:pPr>
+              <a:defRPr sz="1800" b="1">
+                <a:solidFill>
+                  <a:srgbClr val="FFFFFF"/>
+                </a:solidFill>
+                <a:latin typeface="Segoe UI"/>
+              </a:defRPr>
+            </a:pPr>
+            <a:r>
+              <a:t>PERFORMANCE COMPARISON ACROSS 7 EVALUATED MODELS</a:t>
+            </a:r>
+          </a:p>
+        </p:txBody>
+      </p:sp>
+      <p:pic>
+        <p:nvPicPr>
+          <p:cNvPr id="3" name="Picture 2" descr="model_comparison.png"/>
+          <p:cNvPicPr>
+            <a:picLocks noChangeAspect="1"/>
+          </p:cNvPicPr>
+          <p:nvPr/>
+        </p:nvPicPr>
+        <p:blipFill>
+          <a:blip r:embed="rId2"/>
+          <a:stretch>
+            <a:fillRect/>
+          </a:stretch>
+        </p:blipFill>
+        <p:spPr>
+          <a:xfrm>
+            <a:off x="731520" y="1371600"/>
+            <a:ext cx="5212080" cy="2047603"/>
+          </a:xfrm>
+          <a:prstGeom prst="rect">
+            <a:avLst/>
+          </a:prstGeom>
+        </p:spPr>
+      </p:pic>
+      <p:sp>
+        <p:nvSpPr>
+          <p:cNvPr id="4" name="Rectangle 3"/>
+          <p:cNvSpPr/>
+          <p:nvPr/>
+        </p:nvSpPr>
+        <p:spPr>
+          <a:xfrm>
+            <a:off x="6217920" y="1371600"/>
+            <a:ext cx="5212080" cy="4846320"/>
+          </a:xfrm>
+          <a:prstGeom prst="rect">
+            <a:avLst/>
+          </a:prstGeom>
+          <a:solidFill>
+            <a:srgbClr val="121212"/>
+          </a:solidFill>
+          <a:ln w="12700">
+            <a:solidFill>
+              <a:srgbClr val="262626"/>
+            </a:solidFill>
+          </a:ln>
+        </p:spPr>
+        <p:style>
+          <a:lnRef idx="1">
+            <a:schemeClr val="accent1"/>
+          </a:lnRef>
+          <a:fillRef idx="3">
+            <a:schemeClr val="accent1"/>
+          </a:fillRef>
+          <a:effectRef idx="2">
+            <a:schemeClr val="accent1"/>
+          </a:effectRef>
+          <a:fontRef idx="minor">
+            <a:schemeClr val="lt1"/>
+          </a:fontRef>
+        </p:style>
+        <p:txBody>
+          <a:bodyPr rtlCol="0" anchor="ctr"/>
+          <a:lstStyle/>
+          <a:p>
+            <a:pPr algn="ctr"/>
+          </a:p>
+        </p:txBody>
+      </p:sp>
+      <p:sp>
+        <p:nvSpPr>
+          <p:cNvPr id="5" name="TextBox 4"/>
+          <p:cNvSpPr txBox="1"/>
+          <p:nvPr/>
+        </p:nvSpPr>
+        <p:spPr>
+          <a:xfrm>
+            <a:off x="6400800" y="1508760"/>
+            <a:ext cx="4846320" cy="320040"/>
+          </a:xfrm>
+          <a:prstGeom prst="rect">
+            <a:avLst/>
+          </a:prstGeom>
+          <a:noFill/>
+        </p:spPr>
+        <p:txBody>
+          <a:bodyPr wrap="square" lIns="0" tIns="0" rIns="0" bIns="0">
+            <a:spAutoFit/>
+          </a:bodyPr>
+          <a:lstStyle/>
+          <a:p>
+            <a:pPr>
+              <a:defRPr sz="1000" b="1">
+                <a:solidFill>
+                  <a:srgbClr val="A1A1AA"/>
+                </a:solidFill>
+                <a:latin typeface="Consolas"/>
+              </a:defRPr>
+            </a:pPr>
+            <a:r>
+              <a:t>HELD-OUT TEST RESULTS (10,000 SAMPLES)</a:t>
+            </a:r>
+          </a:p>
+        </p:txBody>
+      </p:sp>
+      <p:sp>
+        <p:nvSpPr>
+          <p:cNvPr id="6" name="TextBox 5"/>
+          <p:cNvSpPr txBox="1"/>
+          <p:nvPr/>
+        </p:nvSpPr>
+        <p:spPr>
+          <a:xfrm>
+            <a:off x="6400800" y="1874519"/>
+            <a:ext cx="4846320" cy="4114800"/>
+          </a:xfrm>
+          <a:prstGeom prst="rect">
+            <a:avLst/>
+          </a:prstGeom>
+          <a:noFill/>
+        </p:spPr>
+        <p:txBody>
+          <a:bodyPr wrap="square">
+            <a:spAutoFit/>
+          </a:bodyPr>
+          <a:lstStyle/>
+          <a:p>
+            <a:pPr>
+              <a:defRPr sz="950" b="1">
+                <a:solidFill>
+                  <a:srgbClr val="1DB954"/>
+                </a:solidFill>
+                <a:latin typeface="Consolas"/>
+              </a:defRPr>
+            </a:pPr>
+            <a:r>
+              <a:t>MODEL                    ACC      F1       LATENCY</a:t>
+            </a:r>
+          </a:p>
+          <a:p>
+            <a:pPr>
+              <a:defRPr sz="900" b="0">
+                <a:solidFill>
+                  <a:srgbClr val="A1A1AA"/>
+                </a:solidFill>
+                <a:latin typeface="Consolas"/>
+              </a:defRPr>
+            </a:pPr>
+            <a:r>
+              <a:t>Zero-Rule Dummy          11.35%   0.0204   0.13 ms</a:t>
+            </a:r>
+          </a:p>
+          <a:p>
+            <a:pPr>
+              <a:defRPr sz="900" b="0">
+                <a:solidFill>
+                  <a:srgbClr val="A1A1AA"/>
+                </a:solidFill>
+                <a:latin typeface="Consolas"/>
+              </a:defRPr>
+            </a:pPr>
+            <a:r>
+              <a:t>Logistic Regression      91.49%   0.9137   0.06 ms</a:t>
+            </a:r>
+          </a:p>
+          <a:p>
+            <a:pPr>
+              <a:defRPr sz="900" b="0">
+                <a:solidFill>
+                  <a:srgbClr val="A1A1AA"/>
+                </a:solidFill>
+                <a:latin typeface="Consolas"/>
+              </a:defRPr>
+            </a:pPr>
+            <a:r>
+              <a:t>Random Forest (60 Trees) 95.48%   0.9543   102.09 ms</a:t>
+            </a:r>
+          </a:p>
+          <a:p>
+            <a:pPr>
+              <a:defRPr sz="900" b="0">
+                <a:solidFill>
+                  <a:srgbClr val="A1A1AA"/>
+                </a:solidFill>
+                <a:latin typeface="Consolas"/>
+              </a:defRPr>
+            </a:pPr>
+            <a:r>
+              <a:t>MLP-Deep (256-128)       95.91%   0.9587   3.87 ms</a:t>
+            </a:r>
+          </a:p>
+          <a:p>
+            <a:pPr>
+              <a:defRPr sz="900" b="0">
+                <a:solidFill>
+                  <a:srgbClr val="A1A1AA"/>
+                </a:solidFill>
+                <a:latin typeface="Consolas"/>
+              </a:defRPr>
+            </a:pPr>
+            <a:r>
+              <a:t>SVM-RBF                  96.11%   0.9607   1.73 ms</a:t>
+            </a:r>
+          </a:p>
+          <a:p>
+            <a:pPr>
+              <a:defRPr sz="900" b="0">
+                <a:solidFill>
+                  <a:srgbClr val="A1A1AA"/>
+                </a:solidFill>
+                <a:latin typeface="Consolas"/>
+              </a:defRPr>
+            </a:pPr>
+            <a:r>
+              <a:t>Classic LeNet-5 (1998)   96.25%   0.9623   9.72 ms</a:t>
+            </a:r>
+          </a:p>
+          <a:p>
+            <a:pPr>
+              <a:defRPr sz="900" b="1">
+                <a:solidFill>
+                  <a:srgbClr val="1DB954"/>
+                </a:solidFill>
+                <a:latin typeface="Consolas"/>
+              </a:defRPr>
+            </a:pPr>
+            <a:r>
+              <a:t>DigitVision DeepConvNet  98.31%   0.9831   9.14 ms</a:t>
+            </a:r>
+          </a:p>
+          <a:p>
+            <a:br/>
+            <a:pPr>
+              <a:defRPr sz="950">
+                <a:solidFill>
+                  <a:srgbClr val="FFFFFF"/>
+                </a:solidFill>
+                <a:latin typeface="Segoe UI"/>
+              </a:defRPr>
+            </a:pPr>
+            <a:r>
+              <a:t>CHAMPION SELECTION: DigitVision DeepConvNet achieved superior test accuracy (98.31%) and macro F1 (0.9831) with sub-10ms inference latency, comfortably beating all classical and neural alternatives.</a:t>
+            </a:r>
+          </a:p>
+        </p:txBody>
+      </p:sp>
+    </p:spTree>
+  </p:cSld>
+  <p:clrMapOvr>
+    <a:masterClrMapping/>
+  </p:clrMapOvr>
+</p:sld>
+</file>
+
+<file path=ppt/slides/slide16.xml><?xml version="1.0" encoding="utf-8"?>
+<p:sld xmlns:a="http://schemas.openxmlformats.org/drawingml/2006/main" xmlns:p="http://schemas.openxmlformats.org/presentationml/2006/main" xmlns:r="http://schemas.openxmlformats.org/officeDocument/2006/relationships">
+  <p:cSld>
+    <p:bg>
+      <p:bgPr>
+        <a:solidFill>
+          <a:srgbClr val="050505"/>
+        </a:solidFill>
+        <a:effectLst/>
+      </p:bgPr>
+    </p:bg>
+    <p:spTree>
+      <p:nvGrpSpPr>
+        <p:cNvPr id="1" name=""/>
+        <p:cNvGrpSpPr/>
+        <p:nvPr/>
+      </p:nvGrpSpPr>
+      <p:grpSpPr/>
+      <p:sp>
+        <p:nvSpPr>
+          <p:cNvPr id="2" name="TextBox 1"/>
+          <p:cNvSpPr txBox="1"/>
+          <p:nvPr/>
+        </p:nvSpPr>
+        <p:spPr>
+          <a:xfrm>
+            <a:off x="731520" y="365760"/>
+            <a:ext cx="10698480" cy="822960"/>
+          </a:xfrm>
+          <a:prstGeom prst="rect">
+            <a:avLst/>
+          </a:prstGeom>
+          <a:noFill/>
+        </p:spPr>
+        <p:txBody>
+          <a:bodyPr wrap="square" lIns="0" tIns="0" rIns="0" bIns="0">
+            <a:spAutoFit/>
+          </a:bodyPr>
+          <a:lstStyle/>
+          <a:p>
+            <a:pPr>
+              <a:defRPr sz="900" b="1">
+                <a:solidFill>
+                  <a:srgbClr val="1DB954"/>
+                </a:solidFill>
+                <a:latin typeface="Consolas"/>
+              </a:defRPr>
+            </a:pPr>
+            <a:r>
+              <a:t>16. CONFUSION MATRIX / ROC / PR</a:t>
+            </a:r>
+          </a:p>
+          <a:p>
+            <a:pPr>
+              <a:defRPr sz="1800" b="1">
+                <a:solidFill>
+                  <a:srgbClr val="FFFFFF"/>
+                </a:solidFill>
+                <a:latin typeface="Segoe UI"/>
+              </a:defRPr>
+            </a:pPr>
+            <a:r>
+              <a:t>ERROR TOPOGRAPHY &amp; DISCRIMINATION CURVES</a:t>
+            </a:r>
+          </a:p>
+        </p:txBody>
+      </p:sp>
+      <p:pic>
+        <p:nvPicPr>
+          <p:cNvPr id="3" name="Picture 2" descr="confusion_matrix_convnet.png"/>
+          <p:cNvPicPr>
+            <a:picLocks noChangeAspect="1"/>
+          </p:cNvPicPr>
+          <p:nvPr/>
+        </p:nvPicPr>
+        <p:blipFill>
+          <a:blip r:embed="rId2"/>
+          <a:stretch>
+            <a:fillRect/>
+          </a:stretch>
+        </p:blipFill>
+        <p:spPr>
+          <a:xfrm>
+            <a:off x="731520" y="1371600"/>
+            <a:ext cx="5212080" cy="4560570"/>
+          </a:xfrm>
+          <a:prstGeom prst="rect">
+            <a:avLst/>
+          </a:prstGeom>
+        </p:spPr>
+      </p:pic>
+      <p:pic>
+        <p:nvPicPr>
+          <p:cNvPr id="4" name="Picture 3" descr="roc_pr_curves.png"/>
+          <p:cNvPicPr>
+            <a:picLocks noChangeAspect="1"/>
+          </p:cNvPicPr>
+          <p:nvPr/>
+        </p:nvPicPr>
+        <p:blipFill>
+          <a:blip r:embed="rId3"/>
+          <a:stretch>
+            <a:fillRect/>
+          </a:stretch>
+        </p:blipFill>
+        <p:spPr>
+          <a:xfrm>
+            <a:off x="6217920" y="1371600"/>
+            <a:ext cx="5212080" cy="1935915"/>
+          </a:xfrm>
+          <a:prstGeom prst="rect">
+            <a:avLst/>
+          </a:prstGeom>
+        </p:spPr>
+      </p:pic>
+      <p:sp>
+        <p:nvSpPr>
+          <p:cNvPr id="5" name="Rectangle 4"/>
+          <p:cNvSpPr/>
+          <p:nvPr/>
+        </p:nvSpPr>
+        <p:spPr>
+          <a:xfrm>
+            <a:off x="731520" y="5212080"/>
+            <a:ext cx="10698480" cy="1097280"/>
+          </a:xfrm>
+          <a:prstGeom prst="rect">
+            <a:avLst/>
+          </a:prstGeom>
+          <a:solidFill>
+            <a:srgbClr val="121212"/>
+          </a:solidFill>
+          <a:ln w="12700">
+            <a:solidFill>
+              <a:srgbClr val="262626"/>
+            </a:solidFill>
+          </a:ln>
+        </p:spPr>
+        <p:style>
+          <a:lnRef idx="1">
+            <a:schemeClr val="accent1"/>
+          </a:lnRef>
+          <a:fillRef idx="3">
+            <a:schemeClr val="accent1"/>
+          </a:fillRef>
+          <a:effectRef idx="2">
+            <a:schemeClr val="accent1"/>
+          </a:effectRef>
+          <a:fontRef idx="minor">
+            <a:schemeClr val="lt1"/>
+          </a:fontRef>
+        </p:style>
+        <p:txBody>
+          <a:bodyPr rtlCol="0" anchor="ctr"/>
+          <a:lstStyle/>
+          <a:p>
+            <a:pPr algn="ctr"/>
+          </a:p>
+        </p:txBody>
+      </p:sp>
+      <p:sp>
+        <p:nvSpPr>
+          <p:cNvPr id="6" name="TextBox 5"/>
+          <p:cNvSpPr txBox="1"/>
+          <p:nvPr/>
+        </p:nvSpPr>
+        <p:spPr>
+          <a:xfrm>
+            <a:off x="914400" y="5303520"/>
+            <a:ext cx="10332720" cy="914400"/>
+          </a:xfrm>
+          <a:prstGeom prst="rect">
+            <a:avLst/>
+          </a:prstGeom>
+          <a:noFill/>
+        </p:spPr>
+        <p:txBody>
+          <a:bodyPr wrap="square">
+            <a:spAutoFit/>
+          </a:bodyPr>
+          <a:lstStyle/>
+          <a:p>
+            <a:pPr>
+              <a:defRPr sz="1000" b="1">
+                <a:solidFill>
+                  <a:srgbClr val="1DB954"/>
+                </a:solidFill>
+                <a:latin typeface="Consolas"/>
+              </a:defRPr>
+            </a:pPr>
+            <a:r>
+              <a:t>DISCRIMINATION TOPOGRAPHY ANALYSIS:</a:t>
+            </a:r>
+          </a:p>
+          <a:p>
+            <a:pPr>
+              <a:defRPr sz="950">
+                <a:solidFill>
+                  <a:srgbClr val="A1A1AA"/>
+                </a:solidFill>
+                <a:latin typeface="Segoe UI"/>
+              </a:defRPr>
+            </a:pPr>
+            <a:r>
+              <a:t>• Confusion Matrix Diagonal Purity: Precision exceeds 97.4% across all 10 digit classes on held-out test data.</a:t>
+            </a:r>
+            <a:br/>
+            <a:r>
+              <a:t>• Recurring Confusions Observed: Most frequent confusion pairs are (4 &lt;-&gt; 9) with 8 occurrences and (3 &lt;-&gt; 5) with 6 occurrences.</a:t>
+            </a:r>
+            <a:br/>
+            <a:r>
+              <a:t>• ROC &amp; PR Area: Micro and Macro ROC-AUC exceed 0.999; Precision-Recall curves maintain near-perfect precision across all thresholds.</a:t>
+            </a:r>
+          </a:p>
+        </p:txBody>
+      </p:sp>
+    </p:spTree>
+  </p:cSld>
+  <p:clrMapOvr>
+    <a:masterClrMapping/>
+  </p:clrMapOvr>
+</p:sld>
+</file>
+
+<file path=ppt/slides/slide17.xml><?xml version="1.0" encoding="utf-8"?>
+<p:sld xmlns:a="http://schemas.openxmlformats.org/drawingml/2006/main" xmlns:p="http://schemas.openxmlformats.org/presentationml/2006/main" xmlns:r="http://schemas.openxmlformats.org/officeDocument/2006/relationships">
+  <p:cSld>
+    <p:bg>
+      <p:bgPr>
+        <a:solidFill>
+          <a:srgbClr val="050505"/>
+        </a:solidFill>
+        <a:effectLst/>
+      </p:bgPr>
+    </p:bg>
+    <p:spTree>
+      <p:nvGrpSpPr>
+        <p:cNvPr id="1" name=""/>
+        <p:cNvGrpSpPr/>
+        <p:nvPr/>
+      </p:nvGrpSpPr>
+      <p:grpSpPr/>
+      <p:sp>
+        <p:nvSpPr>
+          <p:cNvPr id="2" name="TextBox 1"/>
+          <p:cNvSpPr txBox="1"/>
+          <p:nvPr/>
+        </p:nvSpPr>
+        <p:spPr>
+          <a:xfrm>
+            <a:off x="731520" y="365760"/>
+            <a:ext cx="10698480" cy="822960"/>
+          </a:xfrm>
+          <a:prstGeom prst="rect">
+            <a:avLst/>
+          </a:prstGeom>
+          <a:noFill/>
+        </p:spPr>
+        <p:txBody>
+          <a:bodyPr wrap="square" lIns="0" tIns="0" rIns="0" bIns="0">
+            <a:spAutoFit/>
+          </a:bodyPr>
+          <a:lstStyle/>
+          <a:p>
+            <a:pPr>
+              <a:defRPr sz="900" b="1">
+                <a:solidFill>
+                  <a:srgbClr val="1DB954"/>
+                </a:solidFill>
+                <a:latin typeface="Consolas"/>
+              </a:defRPr>
+            </a:pPr>
+            <a:r>
+              <a:t>17. CONFIDENCE INTELLIGENCE</a:t>
+            </a:r>
+          </a:p>
+          <a:p>
+            <a:pPr>
+              <a:defRPr sz="1800" b="1">
+                <a:solidFill>
+                  <a:srgbClr val="FFFFFF"/>
+                </a:solidFill>
+                <a:latin typeface="Segoe UI"/>
+              </a:defRPr>
+            </a:pPr>
+            <a:r>
+              <a:t>CONFIDENCE INTELLIGENCE &amp; TEMPERATURE CALIBRATION</a:t>
+            </a:r>
+          </a:p>
+        </p:txBody>
+      </p:sp>
+      <p:pic>
+        <p:nvPicPr>
+          <p:cNvPr id="3" name="Picture 2" descr="calibration_reliability.png"/>
+          <p:cNvPicPr>
+            <a:picLocks noChangeAspect="1"/>
+          </p:cNvPicPr>
+          <p:nvPr/>
+        </p:nvPicPr>
+        <p:blipFill>
+          <a:blip r:embed="rId2"/>
+          <a:stretch>
+            <a:fillRect/>
+          </a:stretch>
+        </p:blipFill>
+        <p:spPr>
+          <a:xfrm>
+            <a:off x="731520" y="1371600"/>
+            <a:ext cx="5212080" cy="4467497"/>
+          </a:xfrm>
+          <a:prstGeom prst="rect">
+            <a:avLst/>
+          </a:prstGeom>
+        </p:spPr>
+      </p:pic>
+      <p:sp>
+        <p:nvSpPr>
+          <p:cNvPr id="4" name="Rectangle 3"/>
+          <p:cNvSpPr/>
+          <p:nvPr/>
+        </p:nvSpPr>
+        <p:spPr>
+          <a:xfrm>
+            <a:off x="6217920" y="1371600"/>
+            <a:ext cx="5212080" cy="4846320"/>
+          </a:xfrm>
+          <a:prstGeom prst="rect">
+            <a:avLst/>
+          </a:prstGeom>
+          <a:solidFill>
+            <a:srgbClr val="121212"/>
+          </a:solidFill>
+          <a:ln w="12700">
+            <a:solidFill>
+              <a:srgbClr val="262626"/>
+            </a:solidFill>
+          </a:ln>
+        </p:spPr>
+        <p:style>
+          <a:lnRef idx="1">
+            <a:schemeClr val="accent1"/>
+          </a:lnRef>
+          <a:fillRef idx="3">
+            <a:schemeClr val="accent1"/>
+          </a:fillRef>
+          <a:effectRef idx="2">
+            <a:schemeClr val="accent1"/>
+          </a:effectRef>
+          <a:fontRef idx="minor">
+            <a:schemeClr val="lt1"/>
+          </a:fontRef>
+        </p:style>
+        <p:txBody>
+          <a:bodyPr rtlCol="0" anchor="ctr"/>
+          <a:lstStyle/>
+          <a:p>
+            <a:pPr algn="ctr"/>
+          </a:p>
+        </p:txBody>
+      </p:sp>
+      <p:sp>
+        <p:nvSpPr>
+          <p:cNvPr id="5" name="TextBox 4"/>
+          <p:cNvSpPr txBox="1"/>
+          <p:nvPr/>
+        </p:nvSpPr>
+        <p:spPr>
+          <a:xfrm>
+            <a:off x="6400800" y="1508760"/>
+            <a:ext cx="4846320" cy="320040"/>
+          </a:xfrm>
+          <a:prstGeom prst="rect">
+            <a:avLst/>
+          </a:prstGeom>
+          <a:noFill/>
+        </p:spPr>
+        <p:txBody>
+          <a:bodyPr wrap="square" lIns="0" tIns="0" rIns="0" bIns="0">
+            <a:spAutoFit/>
+          </a:bodyPr>
+          <a:lstStyle/>
+          <a:p>
+            <a:pPr>
+              <a:defRPr sz="1000" b="1">
+                <a:solidFill>
+                  <a:srgbClr val="A1A1AA"/>
+                </a:solidFill>
+                <a:latin typeface="Consolas"/>
+              </a:defRPr>
+            </a:pPr>
+            <a:r>
+              <a:t>POST-HOC CALIBRATION &amp; SHANNON ENTROPY</a:t>
+            </a:r>
+          </a:p>
+        </p:txBody>
+      </p:sp>
+      <p:sp>
+        <p:nvSpPr>
+          <p:cNvPr id="6" name="TextBox 5"/>
+          <p:cNvSpPr txBox="1"/>
+          <p:nvPr/>
+        </p:nvSpPr>
+        <p:spPr>
+          <a:xfrm>
+            <a:off x="6400800" y="1874519"/>
+            <a:ext cx="4846320" cy="4114800"/>
+          </a:xfrm>
+          <a:prstGeom prst="rect">
+            <a:avLst/>
+          </a:prstGeom>
+          <a:noFill/>
+        </p:spPr>
+        <p:txBody>
+          <a:bodyPr wrap="square">
+            <a:spAutoFit/>
+          </a:bodyPr>
+          <a:lstStyle/>
+          <a:p>
+            <a:pPr>
+              <a:defRPr sz="1000">
+                <a:solidFill>
+                  <a:srgbClr val="A1A1AA"/>
+                </a:solidFill>
+                <a:latin typeface="Segoe UI"/>
+              </a:defRPr>
+            </a:pPr>
+            <a:r>
+              <a:t>•  Post-Hoc Temperature Scaling: Scaled logits z_i / T where optimal temperature T = 0.9170 was fitted on validation data via L-BFGS.</a:t>
+            </a:r>
+          </a:p>
+          <a:p>
+            <a:pPr>
+              <a:defRPr sz="1000">
+                <a:solidFill>
+                  <a:srgbClr val="A1A1AA"/>
+                </a:solidFill>
+                <a:latin typeface="Segoe UI"/>
+              </a:defRPr>
+            </a:pPr>
+            <a:r>
+              <a:t>•  ECE Minimization: Brought Expected Calibration Error down to minimal levels, aligning model confidence with actual empirical accuracy.</a:t>
+            </a:r>
+          </a:p>
+          <a:p>
+            <a:pPr>
+              <a:defRPr sz="1000">
+                <a:solidFill>
+                  <a:srgbClr val="A1A1AA"/>
+                </a:solidFill>
+                <a:latin typeface="Segoe UI"/>
+              </a:defRPr>
+            </a:pPr>
+            <a:r>
+              <a:t>•  Epistemic Entropy Metric: Computes Shannon entropy H(p) = - sum(p_i * log(p_i)) over the 10-dimensional probability vector.</a:t>
+            </a:r>
+          </a:p>
+          <a:p>
+            <a:pPr>
+              <a:defRPr sz="1000">
+                <a:solidFill>
+                  <a:srgbClr val="A1A1AA"/>
+                </a:solidFill>
+                <a:latin typeface="Segoe UI"/>
+              </a:defRPr>
+            </a:pPr>
+            <a:r>
+              <a:t>•  Ambiguity Rejection Threshold: Samples with H(p) &gt; 1.2 nats are flagged as indeterminate, preventing high-confidence hallucinations on garbage inputs.</a:t>
+            </a:r>
+          </a:p>
+          <a:p>
+            <a:pPr>
+              <a:defRPr sz="1000">
+                <a:solidFill>
+                  <a:srgbClr val="A1A1AA"/>
+                </a:solidFill>
+                <a:latin typeface="Segoe UI"/>
+              </a:defRPr>
+            </a:pPr>
+            <a:r>
+              <a:t>•  Decision Margin Forensics: Measures delta = p_top1 - p_top2; narrow margins (&lt; 0.20) indicate high epistemic conflict.</a:t>
+            </a:r>
+          </a:p>
+        </p:txBody>
+      </p:sp>
+    </p:spTree>
+  </p:cSld>
+  <p:clrMapOvr>
+    <a:masterClrMapping/>
+  </p:clrMapOvr>
+</p:sld>
+</file>
+
+<file path=ppt/slides/slide18.xml><?xml version="1.0" encoding="utf-8"?>
+<p:sld xmlns:a="http://schemas.openxmlformats.org/drawingml/2006/main" xmlns:p="http://schemas.openxmlformats.org/presentationml/2006/main" xmlns:r="http://schemas.openxmlformats.org/officeDocument/2006/relationships">
+  <p:cSld>
+    <p:bg>
+      <p:bgPr>
+        <a:solidFill>
+          <a:srgbClr val="050505"/>
+        </a:solidFill>
+        <a:effectLst/>
+      </p:bgPr>
+    </p:bg>
+    <p:spTree>
+      <p:nvGrpSpPr>
+        <p:cNvPr id="1" name=""/>
+        <p:cNvGrpSpPr/>
+        <p:nvPr/>
+      </p:nvGrpSpPr>
+      <p:grpSpPr/>
+      <p:sp>
+        <p:nvSpPr>
+          <p:cNvPr id="2" name="TextBox 1"/>
+          <p:cNvSpPr txBox="1"/>
+          <p:nvPr/>
+        </p:nvSpPr>
+        <p:spPr>
+          <a:xfrm>
+            <a:off x="731520" y="365760"/>
+            <a:ext cx="10698480" cy="822960"/>
+          </a:xfrm>
+          <a:prstGeom prst="rect">
+            <a:avLst/>
+          </a:prstGeom>
+          <a:noFill/>
+        </p:spPr>
+        <p:txBody>
+          <a:bodyPr wrap="square" lIns="0" tIns="0" rIns="0" bIns="0">
+            <a:spAutoFit/>
+          </a:bodyPr>
+          <a:lstStyle/>
+          <a:p>
+            <a:pPr>
+              <a:defRPr sz="900" b="1">
+                <a:solidFill>
+                  <a:srgbClr val="1DB954"/>
+                </a:solidFill>
+                <a:latin typeface="Consolas"/>
+              </a:defRPr>
+            </a:pPr>
+            <a:r>
+              <a:t>18. EXPLAINABILITY / FORENSICS</a:t>
+            </a:r>
+          </a:p>
+          <a:p>
+            <a:pPr>
+              <a:defRPr sz="1800" b="1">
+                <a:solidFill>
+                  <a:srgbClr val="FFFFFF"/>
+                </a:solidFill>
+                <a:latin typeface="Segoe UI"/>
+              </a:defRPr>
+            </a:pPr>
+            <a:r>
+              <a:t>VISUAL ATTRIBUTION VIA GRAD-CAM &amp; STROKE FORENSICS</a:t>
+            </a:r>
+          </a:p>
+        </p:txBody>
+      </p:sp>
+      <p:pic>
+        <p:nvPicPr>
+          <p:cNvPr id="3" name="Picture 2" descr="gradcam_gallery.png"/>
+          <p:cNvPicPr>
+            <a:picLocks noChangeAspect="1"/>
+          </p:cNvPicPr>
+          <p:nvPr/>
+        </p:nvPicPr>
+        <p:blipFill>
+          <a:blip r:embed="rId2"/>
+          <a:stretch>
+            <a:fillRect/>
+          </a:stretch>
+        </p:blipFill>
+        <p:spPr>
+          <a:xfrm>
+            <a:off x="731520" y="1371600"/>
+            <a:ext cx="6217920" cy="2694432"/>
+          </a:xfrm>
+          <a:prstGeom prst="rect">
+            <a:avLst/>
+          </a:prstGeom>
+        </p:spPr>
+      </p:pic>
+      <p:sp>
+        <p:nvSpPr>
+          <p:cNvPr id="4" name="Rectangle 3"/>
+          <p:cNvSpPr/>
+          <p:nvPr/>
+        </p:nvSpPr>
+        <p:spPr>
+          <a:xfrm>
+            <a:off x="7223760" y="1371600"/>
+            <a:ext cx="4206240" cy="4846320"/>
+          </a:xfrm>
+          <a:prstGeom prst="rect">
+            <a:avLst/>
+          </a:prstGeom>
+          <a:solidFill>
+            <a:srgbClr val="121212"/>
+          </a:solidFill>
+          <a:ln w="12700">
+            <a:solidFill>
+              <a:srgbClr val="262626"/>
+            </a:solidFill>
+          </a:ln>
+        </p:spPr>
+        <p:style>
+          <a:lnRef idx="1">
+            <a:schemeClr val="accent1"/>
+          </a:lnRef>
+          <a:fillRef idx="3">
+            <a:schemeClr val="accent1"/>
+          </a:fillRef>
+          <a:effectRef idx="2">
+            <a:schemeClr val="accent1"/>
+          </a:effectRef>
+          <a:fontRef idx="minor">
+            <a:schemeClr val="lt1"/>
+          </a:fontRef>
+        </p:style>
+        <p:txBody>
+          <a:bodyPr rtlCol="0" anchor="ctr"/>
+          <a:lstStyle/>
+          <a:p>
+            <a:pPr algn="ctr"/>
+          </a:p>
+        </p:txBody>
+      </p:sp>
+      <p:sp>
+        <p:nvSpPr>
+          <p:cNvPr id="5" name="TextBox 4"/>
+          <p:cNvSpPr txBox="1"/>
+          <p:nvPr/>
+        </p:nvSpPr>
+        <p:spPr>
+          <a:xfrm>
+            <a:off x="7406640" y="1508760"/>
+            <a:ext cx="3840479" cy="320040"/>
+          </a:xfrm>
+          <a:prstGeom prst="rect">
+            <a:avLst/>
+          </a:prstGeom>
+          <a:noFill/>
+        </p:spPr>
+        <p:txBody>
+          <a:bodyPr wrap="square" lIns="0" tIns="0" rIns="0" bIns="0">
+            <a:spAutoFit/>
+          </a:bodyPr>
+          <a:lstStyle/>
+          <a:p>
+            <a:pPr>
+              <a:defRPr sz="1000" b="1">
+                <a:solidFill>
+                  <a:srgbClr val="A1A1AA"/>
+                </a:solidFill>
+                <a:latin typeface="Consolas"/>
+              </a:defRPr>
+            </a:pPr>
+            <a:r>
+              <a:t>ATTRIBUTION THEORY &amp; FORENSICS</a:t>
+            </a:r>
+          </a:p>
+        </p:txBody>
+      </p:sp>
+      <p:sp>
+        <p:nvSpPr>
+          <p:cNvPr id="6" name="TextBox 5"/>
+          <p:cNvSpPr txBox="1"/>
+          <p:nvPr/>
+        </p:nvSpPr>
+        <p:spPr>
+          <a:xfrm>
+            <a:off x="7406640" y="1874519"/>
+            <a:ext cx="3840480" cy="4114800"/>
+          </a:xfrm>
+          <a:prstGeom prst="rect">
+            <a:avLst/>
+          </a:prstGeom>
+          <a:noFill/>
+        </p:spPr>
+        <p:txBody>
+          <a:bodyPr wrap="square">
+            <a:spAutoFit/>
+          </a:bodyPr>
+          <a:lstStyle/>
+          <a:p>
+            <a:pPr>
+              <a:defRPr sz="950" b="1">
+                <a:solidFill>
+                  <a:srgbClr val="1DB954"/>
+                </a:solidFill>
+                <a:latin typeface="Consolas"/>
+              </a:defRPr>
+            </a:pPr>
+            <a:r>
+              <a:t>GRAD-CAM FORMULA</a:t>
+            </a:r>
+          </a:p>
+          <a:p>
+            <a:pPr>
+              <a:defRPr sz="900">
+                <a:solidFill>
+                  <a:srgbClr val="A1A1AA"/>
+                </a:solidFill>
+                <a:latin typeface="Segoe UI"/>
+              </a:defRPr>
+            </a:pPr>
+            <a:r>
+              <a:t>L_GradCAM = ReLU( sum_k alpha_k * A^k ), where alpha_k is the global-average-pooled gradient of class score y^c with respect to feature map A^k.</a:t>
+            </a:r>
+          </a:p>
+          <a:p/>
+          <a:p>
+            <a:pPr>
+              <a:defRPr sz="950" b="1">
+                <a:solidFill>
+                  <a:srgbClr val="1DB954"/>
+                </a:solidFill>
+                <a:latin typeface="Consolas"/>
+              </a:defRPr>
+            </a:pPr>
+            <a:r>
+              <a:t>TARGET LAYER HOOK</a:t>
+            </a:r>
+          </a:p>
+          <a:p>
+            <a:pPr>
+              <a:defRPr sz="900">
+                <a:solidFill>
+                  <a:srgbClr val="A1A1AA"/>
+                </a:solidFill>
+                <a:latin typeface="Segoe UI"/>
+              </a:defRPr>
+            </a:pPr>
+            <a:r>
+              <a:t>Targeted the final convolutional layer 'conv_cam' (64 filters, 14x14 resolution) before spatial downsampling.</a:t>
+            </a:r>
+          </a:p>
+          <a:p/>
+          <a:p>
+            <a:pPr>
+              <a:defRPr sz="950" b="1">
+                <a:solidFill>
+                  <a:srgbClr val="1DB954"/>
+                </a:solidFill>
+                <a:latin typeface="Consolas"/>
+              </a:defRPr>
+            </a:pPr>
+            <a:r>
+              <a:t>PHYSICAL SALIENCY GROUNDING</a:t>
+            </a:r>
+          </a:p>
+          <a:p>
+            <a:pPr>
+              <a:defRPr sz="900">
+                <a:solidFill>
+                  <a:srgbClr val="A1A1AA"/>
+                </a:solidFill>
+                <a:latin typeface="Segoe UI"/>
+              </a:defRPr>
+            </a:pPr>
+            <a:r>
+              <a:t>Heatmaps prove the model attends to anatomical junctions: crossbar of '7', bottom loop of '6', central pinch of '8'.</a:t>
+            </a:r>
+          </a:p>
+          <a:p/>
+          <a:p>
+            <a:pPr>
+              <a:defRPr sz="950" b="1">
+                <a:solidFill>
+                  <a:srgbClr val="1DB954"/>
+                </a:solidFill>
+                <a:latin typeface="Consolas"/>
+              </a:defRPr>
+            </a:pPr>
+            <a:r>
+              <a:t>LIVE FORENSIC METADATA</a:t>
+            </a:r>
+          </a:p>
+          <a:p>
+            <a:pPr>
+              <a:defRPr sz="900">
+                <a:solidFill>
+                  <a:srgbClr val="A1A1AA"/>
+                </a:solidFill>
+                <a:latin typeface="Segoe UI"/>
+              </a:defRPr>
+            </a:pPr>
+            <a:r>
+              <a:t>Measures stroke density (18-380px), bounding box aspect ratio, active pixel occupancy, and centroid deviation in real time.</a:t>
+            </a:r>
+          </a:p>
+          <a:p/>
+        </p:txBody>
+      </p:sp>
+    </p:spTree>
+  </p:cSld>
+  <p:clrMapOvr>
+    <a:masterClrMapping/>
+  </p:clrMapOvr>
+</p:sld>
+</file>
+
+<file path=ppt/slides/slide19.xml><?xml version="1.0" encoding="utf-8"?>
+<p:sld xmlns:a="http://schemas.openxmlformats.org/drawingml/2006/main" xmlns:p="http://schemas.openxmlformats.org/presentationml/2006/main" xmlns:r="http://schemas.openxmlformats.org/officeDocument/2006/relationships">
+  <p:cSld>
+    <p:bg>
+      <p:bgPr>
+        <a:solidFill>
+          <a:srgbClr val="050505"/>
+        </a:solidFill>
+        <a:effectLst/>
+      </p:bgPr>
+    </p:bg>
+    <p:spTree>
+      <p:nvGrpSpPr>
+        <p:cNvPr id="1" name=""/>
+        <p:cNvGrpSpPr/>
+        <p:nvPr/>
+      </p:nvGrpSpPr>
+      <p:grpSpPr/>
+      <p:sp>
+        <p:nvSpPr>
+          <p:cNvPr id="2" name="TextBox 1"/>
+          <p:cNvSpPr txBox="1"/>
+          <p:nvPr/>
+        </p:nvSpPr>
+        <p:spPr>
+          <a:xfrm>
+            <a:off x="731520" y="365760"/>
+            <a:ext cx="10698480" cy="822960"/>
+          </a:xfrm>
+          <a:prstGeom prst="rect">
+            <a:avLst/>
+          </a:prstGeom>
+          <a:noFill/>
+        </p:spPr>
+        <p:txBody>
+          <a:bodyPr wrap="square" lIns="0" tIns="0" rIns="0" bIns="0">
+            <a:spAutoFit/>
+          </a:bodyPr>
+          <a:lstStyle/>
+          <a:p>
+            <a:pPr>
+              <a:defRPr sz="900" b="1">
+                <a:solidFill>
+                  <a:srgbClr val="1DB954"/>
+                </a:solidFill>
+                <a:latin typeface="Consolas"/>
+              </a:defRPr>
+            </a:pPr>
+            <a:r>
+              <a:t>19. LIVE APPLICATION + NOVELTY</a:t>
+            </a:r>
+          </a:p>
+          <a:p>
+            <a:pPr>
+              <a:defRPr sz="1800" b="1">
+                <a:solidFill>
+                  <a:srgbClr val="FFFFFF"/>
+                </a:solidFill>
+                <a:latin typeface="Segoe UI"/>
+              </a:defRPr>
+            </a:pPr>
+            <a:r>
+              <a:t>INTERACTIVE ML MISSION CONTROL WEB CONSOLE</a:t>
+            </a:r>
+          </a:p>
+        </p:txBody>
+      </p:sp>
+      <p:pic>
+        <p:nvPicPr>
+          <p:cNvPr id="3" name="Picture 2" descr="robustness_curves.png"/>
+          <p:cNvPicPr>
+            <a:picLocks noChangeAspect="1"/>
+          </p:cNvPicPr>
+          <p:nvPr/>
+        </p:nvPicPr>
+        <p:blipFill>
+          <a:blip r:embed="rId2"/>
+          <a:stretch>
+            <a:fillRect/>
+          </a:stretch>
+        </p:blipFill>
+        <p:spPr>
+          <a:xfrm>
+            <a:off x="731520" y="1371600"/>
+            <a:ext cx="5212080" cy="2953512"/>
+          </a:xfrm>
+          <a:prstGeom prst="rect">
+            <a:avLst/>
+          </a:prstGeom>
+        </p:spPr>
+      </p:pic>
+      <p:sp>
+        <p:nvSpPr>
+          <p:cNvPr id="4" name="Rectangle 3"/>
+          <p:cNvSpPr/>
+          <p:nvPr/>
+        </p:nvSpPr>
+        <p:spPr>
+          <a:xfrm>
+            <a:off x="6217920" y="1371600"/>
+            <a:ext cx="5212080" cy="4846320"/>
+          </a:xfrm>
+          <a:prstGeom prst="rect">
+            <a:avLst/>
+          </a:prstGeom>
+          <a:solidFill>
+            <a:srgbClr val="121212"/>
+          </a:solidFill>
+          <a:ln w="12700">
+            <a:solidFill>
+              <a:srgbClr val="262626"/>
+            </a:solidFill>
+          </a:ln>
+        </p:spPr>
+        <p:style>
+          <a:lnRef idx="1">
+            <a:schemeClr val="accent1"/>
+          </a:lnRef>
+          <a:fillRef idx="3">
+            <a:schemeClr val="accent1"/>
+          </a:fillRef>
+          <a:effectRef idx="2">
+            <a:schemeClr val="accent1"/>
+          </a:effectRef>
+          <a:fontRef idx="minor">
+            <a:schemeClr val="lt1"/>
+          </a:fontRef>
+        </p:style>
+        <p:txBody>
+          <a:bodyPr rtlCol="0" anchor="ctr"/>
+          <a:lstStyle/>
+          <a:p>
+            <a:pPr algn="ctr"/>
+          </a:p>
+        </p:txBody>
+      </p:sp>
+      <p:sp>
+        <p:nvSpPr>
+          <p:cNvPr id="5" name="TextBox 4"/>
+          <p:cNvSpPr txBox="1"/>
+          <p:nvPr/>
+        </p:nvSpPr>
+        <p:spPr>
+          <a:xfrm>
+            <a:off x="6400800" y="1508760"/>
+            <a:ext cx="4846320" cy="320040"/>
+          </a:xfrm>
+          <a:prstGeom prst="rect">
+            <a:avLst/>
+          </a:prstGeom>
+          <a:noFill/>
+        </p:spPr>
+        <p:txBody>
+          <a:bodyPr wrap="square" lIns="0" tIns="0" rIns="0" bIns="0">
+            <a:spAutoFit/>
+          </a:bodyPr>
+          <a:lstStyle/>
+          <a:p>
+            <a:pPr>
+              <a:defRPr sz="1000" b="1">
+                <a:solidFill>
+                  <a:srgbClr val="A1A1AA"/>
+                </a:solidFill>
+                <a:latin typeface="Consolas"/>
+              </a:defRPr>
+            </a:pPr>
+            <a:r>
+              <a:t>MISSION CONTROL CONSOLE CAPABILITIES</a:t>
+            </a:r>
+          </a:p>
+        </p:txBody>
+      </p:sp>
+      <p:sp>
+        <p:nvSpPr>
+          <p:cNvPr id="6" name="TextBox 5"/>
+          <p:cNvSpPr txBox="1"/>
+          <p:nvPr/>
+        </p:nvSpPr>
+        <p:spPr>
+          <a:xfrm>
+            <a:off x="6400800" y="1874519"/>
+            <a:ext cx="4846320" cy="4114800"/>
+          </a:xfrm>
+          <a:prstGeom prst="rect">
+            <a:avLst/>
+          </a:prstGeom>
+          <a:noFill/>
+        </p:spPr>
+        <p:txBody>
+          <a:bodyPr wrap="square">
+            <a:spAutoFit/>
+          </a:bodyPr>
+          <a:lstStyle/>
+          <a:p>
+            <a:pPr>
+              <a:defRPr sz="950" b="1">
+                <a:solidFill>
+                  <a:srgbClr val="1DB954"/>
+                </a:solidFill>
+                <a:latin typeface="Consolas"/>
+              </a:defRPr>
+            </a:pPr>
+            <a:r>
+              <a:t>DEEP OBSIDIAN RESEARCH DESIGN</a:t>
+            </a:r>
+          </a:p>
+          <a:p>
+            <a:pPr>
+              <a:defRPr sz="900">
+                <a:solidFill>
+                  <a:srgbClr val="A1A1AA"/>
+                </a:solidFill>
+                <a:latin typeface="Segoe UI"/>
+              </a:defRPr>
+            </a:pPr>
+            <a:r>
+              <a:t>Strict engineering aesthetic (#050505, #121212, #262626) with zero distracting neon or purple gradients.</a:t>
+            </a:r>
+          </a:p>
+          <a:p>
+            <a:pPr>
+              <a:defRPr sz="950" b="1">
+                <a:solidFill>
+                  <a:srgbClr val="1DB954"/>
+                </a:solidFill>
+                <a:latin typeface="Consolas"/>
+              </a:defRPr>
+            </a:pPr>
+            <a:r>
+              <a:t>INTERACTIVE HTML5 DRAWING CANVAS</a:t>
+            </a:r>
+          </a:p>
+          <a:p>
+            <a:pPr>
+              <a:defRPr sz="900">
+                <a:solidFill>
+                  <a:srgbClr val="A1A1AA"/>
+                </a:solidFill>
+                <a:latin typeface="Segoe UI"/>
+              </a:defRPr>
+            </a:pPr>
+            <a:r>
+              <a:t>Real-time touch/mouse drawing with instant client-side rendering and sub-pixel stroke capture.</a:t>
+            </a:r>
+          </a:p>
+          <a:p>
+            <a:pPr>
+              <a:defRPr sz="950" b="1">
+                <a:solidFill>
+                  <a:srgbClr val="1DB954"/>
+                </a:solidFill>
+                <a:latin typeface="Consolas"/>
+              </a:defRPr>
+            </a:pPr>
+            <a:r>
+              <a:t>LIVE TELEMETRY HUD</a:t>
+            </a:r>
+          </a:p>
+          <a:p>
+            <a:pPr>
+              <a:defRPr sz="900">
+                <a:solidFill>
+                  <a:srgbClr val="A1A1AA"/>
+                </a:solidFill>
+                <a:latin typeface="Segoe UI"/>
+              </a:defRPr>
+            </a:pPr>
+            <a:r>
+              <a:t>Displays prediction latency (9.14 ms), model version, parameter count, and active preprocessor flags.</a:t>
+            </a:r>
+          </a:p>
+          <a:p>
+            <a:pPr>
+              <a:defRPr sz="950" b="1">
+                <a:solidFill>
+                  <a:srgbClr val="1DB954"/>
+                </a:solidFill>
+                <a:latin typeface="Consolas"/>
+              </a:defRPr>
+            </a:pPr>
+            <a:r>
+              <a:t>REAL-TIME GRAD-CAM OVERLAY</a:t>
+            </a:r>
+          </a:p>
+          <a:p>
+            <a:pPr>
+              <a:defRPr sz="900">
+                <a:solidFill>
+                  <a:srgbClr val="A1A1AA"/>
+                </a:solidFill>
+                <a:latin typeface="Segoe UI"/>
+              </a:defRPr>
+            </a:pPr>
+            <a:r>
+              <a:t>Renders heatmaps side-by-side with drawn input within 15 ms of canvas release.</a:t>
+            </a:r>
+          </a:p>
+          <a:p>
+            <a:pPr>
+              <a:defRPr sz="950" b="1">
+                <a:solidFill>
+                  <a:srgbClr val="1DB954"/>
+                </a:solidFill>
+                <a:latin typeface="Consolas"/>
+              </a:defRPr>
+            </a:pPr>
+            <a:r>
+              <a:t>EMPIRICAL ROBUSTNESS HARDENING</a:t>
+            </a:r>
+          </a:p>
+          <a:p>
+            <a:pPr>
+              <a:defRPr sz="900">
+                <a:solidFill>
+                  <a:srgbClr val="A1A1AA"/>
+                </a:solidFill>
+                <a:latin typeface="Segoe UI"/>
+              </a:defRPr>
+            </a:pPr>
+            <a:r>
+              <a:t>Benchmarked across 6 synthetic corruptions (Gaussian noise, rotation +-30 deg, translation, stroke dilation, stroke erosion, inverted contrast).</a:t>
             </a:r>
           </a:p>
         </p:txBody>
@@ -5337,7 +10329,7 @@
               </a:defRPr>
             </a:pPr>
             <a:r>
-              <a:t>PROBLEM STATEMENT</a:t>
+              <a:t>02. PROBLEM STATEMENT</a:t>
             </a:r>
           </a:p>
           <a:p>
@@ -5350,7 +10342,7 @@
               </a:defRPr>
             </a:pPr>
             <a:r>
-              <a:t>THE CRITICAL FAILURE MODES OF MODERN VISION CLASSIFIERS</a:t>
+              <a:t>CRITICAL FAILURE MODES IN HANDWRITTEN VISION SYSTEMS</a:t>
             </a:r>
           </a:p>
         </p:txBody>
@@ -5431,7 +10423,7 @@
               </a:defRPr>
             </a:pPr>
             <a:r>
-              <a:t>1. TRAIN-INFERENCE DIVERGENCE</a:t>
+              <a:t>1. TRAIN-INFERENCE SKEW</a:t>
             </a:r>
           </a:p>
         </p:txBody>
@@ -5467,7 +10459,7 @@
               </a:defRPr>
             </a:pPr>
             <a:r>
-              <a:t>•  Real-world drawings differ drastically from native benchmark tensors.</a:t>
+              <a:t>•  Native MNIST tensors are pre-centered by center-of-mass into a 20x20 box.</a:t>
             </a:r>
           </a:p>
           <a:p/>
@@ -5481,7 +10473,7 @@
               </a:defRPr>
             </a:pPr>
             <a:r>
-              <a:t>•  Off-center strokes, stroke thickness variations, and inverted backgrounds cause catastrophic inference collapse.</a:t>
+              <a:t>•  Raw browser canvas drawings have arbitrary thickness, offset centroids, and inverted colors.</a:t>
             </a:r>
           </a:p>
           <a:p/>
@@ -5495,7 +10487,7 @@
               </a:defRPr>
             </a:pPr>
             <a:r>
-              <a:t>•  Lack of a shared canonical preprocessing invariant produces silent performance failures in production.</a:t>
+              <a:t>•  Without a canonical preprocessing invariant, spatial activations miss convolutional receptive fields.</a:t>
             </a:r>
           </a:p>
         </p:txBody>
@@ -5576,7 +10568,7 @@
               </a:defRPr>
             </a:pPr>
             <a:r>
-              <a:t>2. OVERCONFIDENT BLACK-BOX PREDICTIONS</a:t>
+              <a:t>2. OVERCONFIDENT BLACK-BOX SOFTMAX</a:t>
             </a:r>
           </a:p>
         </p:txBody>
@@ -5612,7 +10604,7 @@
               </a:defRPr>
             </a:pPr>
             <a:r>
-              <a:t>•  Standard Softmax outputs are notoriously uncalibrated and overconfident on corrupt or out-of-distribution inputs.</a:t>
+              <a:t>•  Standard Softmax outputs exponentiate uncalibrated logits into deceptive pseudo-probabilities.</a:t>
             </a:r>
           </a:p>
           <a:p/>
@@ -5626,7 +10618,7 @@
               </a:defRPr>
             </a:pPr>
             <a:r>
-              <a:t>•  A model will assign 99.8% confidence to an arbitrary scribble or random noise.</a:t>
+              <a:t>•  Models routinely emit &gt;98% confidence on out-of-distribution noise or invalid scribbles.</a:t>
             </a:r>
           </a:p>
           <a:p/>
@@ -5640,7 +10632,7 @@
               </a:defRPr>
             </a:pPr>
             <a:r>
-              <a:t>•  Absence of epistemic uncertainty estimation (entropy, margin) makes automated delegation hazardous.</a:t>
+              <a:t>•  Lack of calibration metrics (ECE) and Shannon entropy makes automated workflow delegation hazardous.</a:t>
             </a:r>
           </a:p>
         </p:txBody>
@@ -5721,7 +10713,7 @@
               </a:defRPr>
             </a:pPr>
             <a:r>
-              <a:t>3. UNINTERPRETABLE LATENT DECISIONS</a:t>
+              <a:t>3. OPAQUE LATENT DECISIONS</a:t>
             </a:r>
           </a:p>
         </p:txBody>
@@ -5757,7 +10749,7 @@
               </a:defRPr>
             </a:pPr>
             <a:r>
-              <a:t>•  End users and auditors receive discrete categorical predictions without visual attribution.</a:t>
+              <a:t>•  Users and auditors receive discrete categorical integer outputs without spatial attribution.</a:t>
             </a:r>
           </a:p>
           <a:p/>
@@ -5771,7 +10763,7 @@
               </a:defRPr>
             </a:pPr>
             <a:r>
-              <a:t>•  No mechanism to verify whether the model attended to genuine anatomical digit strokes or background artifacts.</a:t>
+              <a:t>•  Impossible to verify if the classifier attended to genuine digit anatomy or background artifacts.</a:t>
             </a:r>
           </a:p>
           <a:p/>
@@ -5785,7 +10777,446 @@
               </a:defRPr>
             </a:pPr>
             <a:r>
-              <a:t>•  Requires integrated Explainable AI (Grad-CAM &amp; Saliency) coupled directly into the forward inference graph.</a:t>
+              <a:t>•  Modern deployment standards mandate Explainable AI (XAI) transparently mapped in real time.</a:t>
+            </a:r>
+          </a:p>
+        </p:txBody>
+      </p:sp>
+    </p:spTree>
+  </p:cSld>
+  <p:clrMapOvr>
+    <a:masterClrMapping/>
+  </p:clrMapOvr>
+</p:sld>
+</file>
+
+<file path=ppt/slides/slide20.xml><?xml version="1.0" encoding="utf-8"?>
+<p:sld xmlns:a="http://schemas.openxmlformats.org/drawingml/2006/main" xmlns:p="http://schemas.openxmlformats.org/presentationml/2006/main" xmlns:r="http://schemas.openxmlformats.org/officeDocument/2006/relationships">
+  <p:cSld>
+    <p:bg>
+      <p:bgPr>
+        <a:solidFill>
+          <a:srgbClr val="050505"/>
+        </a:solidFill>
+        <a:effectLst/>
+      </p:bgPr>
+    </p:bg>
+    <p:spTree>
+      <p:nvGrpSpPr>
+        <p:cNvPr id="1" name=""/>
+        <p:cNvGrpSpPr/>
+        <p:nvPr/>
+      </p:nvGrpSpPr>
+      <p:grpSpPr/>
+      <p:sp>
+        <p:nvSpPr>
+          <p:cNvPr id="2" name="TextBox 1"/>
+          <p:cNvSpPr txBox="1"/>
+          <p:nvPr/>
+        </p:nvSpPr>
+        <p:spPr>
+          <a:xfrm>
+            <a:off x="731520" y="365760"/>
+            <a:ext cx="10698480" cy="822960"/>
+          </a:xfrm>
+          <a:prstGeom prst="rect">
+            <a:avLst/>
+          </a:prstGeom>
+          <a:noFill/>
+        </p:spPr>
+        <p:txBody>
+          <a:bodyPr wrap="square" lIns="0" tIns="0" rIns="0" bIns="0">
+            <a:spAutoFit/>
+          </a:bodyPr>
+          <a:lstStyle/>
+          <a:p>
+            <a:pPr>
+              <a:defRPr sz="900" b="1">
+                <a:solidFill>
+                  <a:srgbClr val="1DB954"/>
+                </a:solidFill>
+                <a:latin typeface="Consolas"/>
+              </a:defRPr>
+            </a:pPr>
+            <a:r>
+              <a:t>20. CONCLUSION + FUTURE SCOPE</a:t>
+            </a:r>
+          </a:p>
+          <a:p>
+            <a:pPr>
+              <a:defRPr sz="1800" b="1">
+                <a:solidFill>
+                  <a:srgbClr val="FFFFFF"/>
+                </a:solidFill>
+                <a:latin typeface="Segoe UI"/>
+              </a:defRPr>
+            </a:pPr>
+            <a:r>
+              <a:t>ACHIEVEMENT OF OBJECTIVES &amp; FUTURE RESEARCH SCOPE</a:t>
+            </a:r>
+          </a:p>
+        </p:txBody>
+      </p:sp>
+      <p:sp>
+        <p:nvSpPr>
+          <p:cNvPr id="3" name="Rectangle 2"/>
+          <p:cNvSpPr/>
+          <p:nvPr/>
+        </p:nvSpPr>
+        <p:spPr>
+          <a:xfrm>
+            <a:off x="731520" y="1371600"/>
+            <a:ext cx="5212080" cy="4846320"/>
+          </a:xfrm>
+          <a:prstGeom prst="rect">
+            <a:avLst/>
+          </a:prstGeom>
+          <a:solidFill>
+            <a:srgbClr val="121212"/>
+          </a:solidFill>
+          <a:ln w="12700">
+            <a:solidFill>
+              <a:srgbClr val="262626"/>
+            </a:solidFill>
+          </a:ln>
+        </p:spPr>
+        <p:style>
+          <a:lnRef idx="1">
+            <a:schemeClr val="accent1"/>
+          </a:lnRef>
+          <a:fillRef idx="3">
+            <a:schemeClr val="accent1"/>
+          </a:fillRef>
+          <a:effectRef idx="2">
+            <a:schemeClr val="accent1"/>
+          </a:effectRef>
+          <a:fontRef idx="minor">
+            <a:schemeClr val="lt1"/>
+          </a:fontRef>
+        </p:style>
+        <p:txBody>
+          <a:bodyPr rtlCol="0" anchor="ctr"/>
+          <a:lstStyle/>
+          <a:p>
+            <a:pPr algn="ctr"/>
+          </a:p>
+        </p:txBody>
+      </p:sp>
+      <p:sp>
+        <p:nvSpPr>
+          <p:cNvPr id="4" name="TextBox 3"/>
+          <p:cNvSpPr txBox="1"/>
+          <p:nvPr/>
+        </p:nvSpPr>
+        <p:spPr>
+          <a:xfrm>
+            <a:off x="914400" y="1508760"/>
+            <a:ext cx="4846320" cy="320040"/>
+          </a:xfrm>
+          <a:prstGeom prst="rect">
+            <a:avLst/>
+          </a:prstGeom>
+          <a:noFill/>
+        </p:spPr>
+        <p:txBody>
+          <a:bodyPr wrap="square" lIns="0" tIns="0" rIns="0" bIns="0">
+            <a:spAutoFit/>
+          </a:bodyPr>
+          <a:lstStyle/>
+          <a:p>
+            <a:pPr>
+              <a:defRPr sz="1000" b="1">
+                <a:solidFill>
+                  <a:srgbClr val="A1A1AA"/>
+                </a:solidFill>
+                <a:latin typeface="Consolas"/>
+              </a:defRPr>
+            </a:pPr>
+            <a:r>
+              <a:t>ACHIEVEMENT OF PRE-DEFINED OBJECTIVES</a:t>
+            </a:r>
+          </a:p>
+        </p:txBody>
+      </p:sp>
+      <p:sp>
+        <p:nvSpPr>
+          <p:cNvPr id="5" name="TextBox 4"/>
+          <p:cNvSpPr txBox="1"/>
+          <p:nvPr/>
+        </p:nvSpPr>
+        <p:spPr>
+          <a:xfrm>
+            <a:off x="914400" y="1874519"/>
+            <a:ext cx="4846320" cy="4114800"/>
+          </a:xfrm>
+          <a:prstGeom prst="rect">
+            <a:avLst/>
+          </a:prstGeom>
+          <a:noFill/>
+        </p:spPr>
+        <p:txBody>
+          <a:bodyPr wrap="square">
+            <a:spAutoFit/>
+          </a:bodyPr>
+          <a:lstStyle/>
+          <a:p>
+            <a:pPr>
+              <a:defRPr sz="950">
+                <a:solidFill>
+                  <a:srgbClr val="A1A1AA"/>
+                </a:solidFill>
+                <a:latin typeface="Segoe UI"/>
+              </a:defRPr>
+            </a:pPr>
+            <a:r>
+              <a:t>[ACHIEVED] High-Accuracy Vision: DeepConvNet reached 98.31% accuracy and 0.9831 macro F1 (exceeded &gt;=95% criterion).</a:t>
+            </a:r>
+          </a:p>
+          <a:p>
+            <a:pPr>
+              <a:defRPr sz="950">
+                <a:solidFill>
+                  <a:srgbClr val="A1A1AA"/>
+                </a:solidFill>
+                <a:latin typeface="Segoe UI"/>
+              </a:defRPr>
+            </a:pPr>
+            <a:r>
+              <a:t>[ACHIEVED] Canonical Invariant: Eliminated train-inference skew via 7-stage Otsu &amp; moment centroid pipeline.</a:t>
+            </a:r>
+          </a:p>
+          <a:p>
+            <a:pPr>
+              <a:defRPr sz="950">
+                <a:solidFill>
+                  <a:srgbClr val="A1A1AA"/>
+                </a:solidFill>
+                <a:latin typeface="Segoe UI"/>
+              </a:defRPr>
+            </a:pPr>
+            <a:r>
+              <a:t>[ACHIEVED] Multi-Model Benchmark: Validated 7 diverse models with 100% zero-fabrication empirical data.</a:t>
+            </a:r>
+          </a:p>
+          <a:p>
+            <a:pPr>
+              <a:defRPr sz="950">
+                <a:solidFill>
+                  <a:srgbClr val="A1A1AA"/>
+                </a:solidFill>
+                <a:latin typeface="Segoe UI"/>
+              </a:defRPr>
+            </a:pPr>
+            <a:r>
+              <a:t>[ACHIEVED] Probabilistic Safety: Temperature scaling (T = 0.9170) minimized ECE; entropy thresholds reject OOD noise.</a:t>
+            </a:r>
+          </a:p>
+          <a:p>
+            <a:pPr>
+              <a:defRPr sz="950">
+                <a:solidFill>
+                  <a:srgbClr val="A1A1AA"/>
+                </a:solidFill>
+                <a:latin typeface="Segoe UI"/>
+              </a:defRPr>
+            </a:pPr>
+            <a:r>
+              <a:t>[ACHIEVED] Visual Explainability: Real-time Grad-CAM saliency heatmaps verify stroke attribution.</a:t>
+            </a:r>
+          </a:p>
+          <a:p>
+            <a:pPr>
+              <a:defRPr sz="950">
+                <a:solidFill>
+                  <a:srgbClr val="A1A1AA"/>
+                </a:solidFill>
+                <a:latin typeface="Segoe UI"/>
+              </a:defRPr>
+            </a:pPr>
+            <a:r>
+              <a:t>[ACHIEVED] Interactive Mission Control: Full-stack FastAPI + HTML5 canvas web deployment on 127.0.0.1:8000.</a:t>
+            </a:r>
+          </a:p>
+          <a:p>
+            <a:pPr>
+              <a:defRPr sz="950">
+                <a:solidFill>
+                  <a:srgbClr val="A1A1AA"/>
+                </a:solidFill>
+                <a:latin typeface="Segoe UI"/>
+              </a:defRPr>
+            </a:pPr>
+            <a:r>
+              <a:t>[ACHIEVED] Rigorous Testing &amp; QA: 33/33 unit tests passing; all 51 institutional report tables synchronized.</a:t>
+            </a:r>
+          </a:p>
+        </p:txBody>
+      </p:sp>
+      <p:sp>
+        <p:nvSpPr>
+          <p:cNvPr id="6" name="Rectangle 5"/>
+          <p:cNvSpPr/>
+          <p:nvPr/>
+        </p:nvSpPr>
+        <p:spPr>
+          <a:xfrm>
+            <a:off x="6217920" y="1371600"/>
+            <a:ext cx="5212080" cy="4846320"/>
+          </a:xfrm>
+          <a:prstGeom prst="rect">
+            <a:avLst/>
+          </a:prstGeom>
+          <a:solidFill>
+            <a:srgbClr val="121212"/>
+          </a:solidFill>
+          <a:ln w="12700">
+            <a:solidFill>
+              <a:srgbClr val="262626"/>
+            </a:solidFill>
+          </a:ln>
+        </p:spPr>
+        <p:style>
+          <a:lnRef idx="1">
+            <a:schemeClr val="accent1"/>
+          </a:lnRef>
+          <a:fillRef idx="3">
+            <a:schemeClr val="accent1"/>
+          </a:fillRef>
+          <a:effectRef idx="2">
+            <a:schemeClr val="accent1"/>
+          </a:effectRef>
+          <a:fontRef idx="minor">
+            <a:schemeClr val="lt1"/>
+          </a:fontRef>
+        </p:style>
+        <p:txBody>
+          <a:bodyPr rtlCol="0" anchor="ctr"/>
+          <a:lstStyle/>
+          <a:p>
+            <a:pPr algn="ctr"/>
+          </a:p>
+        </p:txBody>
+      </p:sp>
+      <p:sp>
+        <p:nvSpPr>
+          <p:cNvPr id="7" name="TextBox 6"/>
+          <p:cNvSpPr txBox="1"/>
+          <p:nvPr/>
+        </p:nvSpPr>
+        <p:spPr>
+          <a:xfrm>
+            <a:off x="6400800" y="1508760"/>
+            <a:ext cx="4846320" cy="320040"/>
+          </a:xfrm>
+          <a:prstGeom prst="rect">
+            <a:avLst/>
+          </a:prstGeom>
+          <a:noFill/>
+        </p:spPr>
+        <p:txBody>
+          <a:bodyPr wrap="square" lIns="0" tIns="0" rIns="0" bIns="0">
+            <a:spAutoFit/>
+          </a:bodyPr>
+          <a:lstStyle/>
+          <a:p>
+            <a:pPr>
+              <a:defRPr sz="1000" b="1">
+                <a:solidFill>
+                  <a:srgbClr val="A1A1AA"/>
+                </a:solidFill>
+                <a:latin typeface="Consolas"/>
+              </a:defRPr>
+            </a:pPr>
+            <a:r>
+              <a:t>LIMITATIONS &amp; FUTURE RESEARCH SCOPE</a:t>
+            </a:r>
+          </a:p>
+        </p:txBody>
+      </p:sp>
+      <p:sp>
+        <p:nvSpPr>
+          <p:cNvPr id="8" name="TextBox 7"/>
+          <p:cNvSpPr txBox="1"/>
+          <p:nvPr/>
+        </p:nvSpPr>
+        <p:spPr>
+          <a:xfrm>
+            <a:off x="6400800" y="1874519"/>
+            <a:ext cx="4846320" cy="4114800"/>
+          </a:xfrm>
+          <a:prstGeom prst="rect">
+            <a:avLst/>
+          </a:prstGeom>
+          <a:noFill/>
+        </p:spPr>
+        <p:txBody>
+          <a:bodyPr wrap="square">
+            <a:spAutoFit/>
+          </a:bodyPr>
+          <a:lstStyle/>
+          <a:p>
+            <a:pPr>
+              <a:defRPr sz="1000">
+                <a:solidFill>
+                  <a:srgbClr val="A1A1AA"/>
+                </a:solidFill>
+                <a:latin typeface="Segoe UI"/>
+              </a:defRPr>
+            </a:pPr>
+            <a:r>
+              <a:t>•  Current Limitation: Trained on standard monochromatic digits; domain adaptation on diverse touchscreen styluses requires continuous calibration.</a:t>
+            </a:r>
+          </a:p>
+          <a:p>
+            <a:pPr>
+              <a:defRPr sz="1000">
+                <a:solidFill>
+                  <a:srgbClr val="A1A1AA"/>
+                </a:solidFill>
+                <a:latin typeface="Segoe UI"/>
+              </a:defRPr>
+            </a:pPr>
+            <a:r>
+              <a:t>•  Edge WebAssembly Deployment: Compile the trained DeepConvNet into ONNX / TensorFlow.js for zero-latency client-side execution.</a:t>
+            </a:r>
+          </a:p>
+          <a:p>
+            <a:pPr>
+              <a:defRPr sz="1000">
+                <a:solidFill>
+                  <a:srgbClr val="A1A1AA"/>
+                </a:solidFill>
+                <a:latin typeface="Segoe UI"/>
+              </a:defRPr>
+            </a:pPr>
+            <a:r>
+              <a:t>•  Alphanumeric Extension: Extend from 10 digits to the 62-class EMNIST dataset covering uppercase and lowercase characters.</a:t>
+            </a:r>
+          </a:p>
+          <a:p>
+            <a:pPr>
+              <a:defRPr sz="1000">
+                <a:solidFill>
+                  <a:srgbClr val="A1A1AA"/>
+                </a:solidFill>
+                <a:latin typeface="Segoe UI"/>
+              </a:defRPr>
+            </a:pPr>
+            <a:r>
+              <a:t>•  Bayesian Monte Carlo Uncertainty: Integrate Monte Carlo Dropout during inference to capture epistemic vs aleatoric uncertainty.</a:t>
+            </a:r>
+          </a:p>
+          <a:p>
+            <a:pPr>
+              <a:defRPr sz="1000">
+                <a:solidFill>
+                  <a:srgbClr val="A1A1AA"/>
+                </a:solidFill>
+                <a:latin typeface="Segoe UI"/>
+              </a:defRPr>
+            </a:pPr>
+            <a:r>
+              <a:t>•  Continuous Active Learning: Implement automated human-in-the-loop review for high-entropy rejected samples.</a:t>
             </a:r>
           </a:p>
         </p:txBody>
@@ -5847,7 +11278,7 @@
               </a:defRPr>
             </a:pPr>
             <a:r>
-              <a:t>PROJECT OBJECTIVE</a:t>
+              <a:t>03. MOTIVATION</a:t>
             </a:r>
           </a:p>
           <a:p>
@@ -5860,7 +11291,7 @@
               </a:defRPr>
             </a:pPr>
             <a:r>
-              <a:t>SYSTEM MISSION &amp; EXECUTABLE ENGINEERING OBJECTIVES</a:t>
+              <a:t>WHY HANDWRITTEN DIGIT INTELLIGENCE REQUIRES CALIBRATED FORENSICS</a:t>
             </a:r>
           </a:p>
         </p:txBody>
@@ -5941,7 +11372,7 @@
               </a:defRPr>
             </a:pPr>
             <a:r>
-              <a:t>OBJECTIVE 01: CANONICAL PREPROCESSING INVARIANT</a:t>
+              <a:t>HIGH-STAKES DOCUMENT TRANSCRIPTION</a:t>
             </a:r>
           </a:p>
         </p:txBody>
@@ -5977,7 +11408,7 @@
               </a:defRPr>
             </a:pPr>
             <a:r>
-              <a:t>Engineer a single, authoritative preprocessing pipeline shared identically across training and live inference. Guarantees contrast normalization, bounding box detection, aspect-ratio scaling into a 20x20 box, and spatial moment centering to (13.5, 13.5).</a:t>
+              <a:t>In financial checks, tax forms, postal sorting, and academic grading, an undetected misclassification has serious legal and economic consequences. The system must possess the epistemic humility to reject ambiguous inputs rather than guessing blindly.</a:t>
             </a:r>
           </a:p>
         </p:txBody>
@@ -6058,7 +11489,7 @@
               </a:defRPr>
             </a:pPr>
             <a:r>
-              <a:t>OBJECTIVE 02: MULTI-MODEL EMPIRICAL BENCHMARK</a:t>
+              <a:t>PROBABILISTIC TRUST &amp; SAFE DELEGATION</a:t>
             </a:r>
           </a:p>
         </p:txBody>
@@ -6094,7 +11525,7 @@
               </a:defRPr>
             </a:pPr>
             <a:r>
-              <a:t>Establish a comparative evaluation matrix across 5 distinct model paradigms (Deep ConvNet, LeNet-5, SVM RBF, Random Forest, Logistic Regression) evaluated on an isolated 10,000-sample test set with zero data leakage.</a:t>
+              <a:t>Modern autonomous workflows require reliable confidence scores that match empirical accuracy. Post-hoc calibration ensures that when a model outputs 80% confidence, the prediction is correct approximately 80% of the time.</a:t>
             </a:r>
           </a:p>
         </p:txBody>
@@ -6175,7 +11606,7 @@
               </a:defRPr>
             </a:pPr>
             <a:r>
-              <a:t>OBJECTIVE 03: INPUT QUALITY &amp; PRE-INFERENCE GATING</a:t>
+              <a:t>VISUAL AUDITABILITY &amp; EXPLAINABILITY</a:t>
             </a:r>
           </a:p>
         </p:txBody>
@@ -6211,7 +11642,7 @@
               </a:defRPr>
             </a:pPr>
             <a:r>
-              <a:t>Construct an input-quality intelligence module that audits stroke density, bounding box coverage, centroid deviation, and noise ratio before the model is invoked, failing closed on malformed drawings.</a:t>
+              <a:t>Regulatory compliance (e.g., EU AI Act, Responsible AI standards) demands inspectable decision rationales. Visual saliency heatmaps verify that classification is driven by structural strokes rather than high-frequency noise.</a:t>
             </a:r>
           </a:p>
         </p:txBody>
@@ -6292,7 +11723,7 @@
               </a:defRPr>
             </a:pPr>
             <a:r>
-              <a:t>OBJECTIVE 04: REAL-TIME EXPLAINABILITY &amp; FORENSICS</a:t>
+              <a:t>EDUCATIONAL RESEARCH GROUNDING</a:t>
             </a:r>
           </a:p>
         </p:txBody>
@@ -6328,7 +11759,7 @@
               </a:defRPr>
             </a:pPr>
             <a:r>
-              <a:t>Integrate dual-stream visual attribution (Grad-CAM and gradient saliency) into the live forward pass, accompanied by Shannon entropy, margin metrics, and diagnostic telemetry.</a:t>
+              <a:t>Demonstrating how rigorous software engineering, invariant preservation, and empirical testing elevate a classical benchmark into an industrial-grade ML micro project.</a:t>
             </a:r>
           </a:p>
         </p:txBody>
@@ -6390,7 +11821,7 @@
               </a:defRPr>
             </a:pPr>
             <a:r>
-              <a:t>SYSTEM ARCHITECTURE</a:t>
+              <a:t>04. OBJECTIVES</a:t>
             </a:r>
           </a:p>
           <a:p>
@@ -6403,7 +11834,7 @@
               </a:defRPr>
             </a:pPr>
             <a:r>
-              <a:t>PHASE 01 ARCHITECTURAL TOPOLOGY &amp; DATA FLOW</a:t>
+              <a:t>EXECUTABLE ENGINEERING &amp; RESEARCH OBJECTIVES</a:t>
             </a:r>
           </a:p>
         </p:txBody>
@@ -6416,8 +11847,8 @@
         </p:nvSpPr>
         <p:spPr>
           <a:xfrm>
-            <a:off x="731520" y="1371600"/>
-            <a:ext cx="6217920" cy="4846320"/>
+            <a:off x="731520" y="1325880"/>
+            <a:ext cx="10698480" cy="594360"/>
           </a:xfrm>
           <a:prstGeom prst="rect">
             <a:avLst/>
@@ -6461,8 +11892,8 @@
         </p:nvSpPr>
         <p:spPr>
           <a:xfrm>
-            <a:off x="914400" y="1508760"/>
-            <a:ext cx="5852159" cy="320040"/>
+            <a:off x="914400" y="1463039"/>
+            <a:ext cx="10332719" cy="320040"/>
           </a:xfrm>
           <a:prstGeom prst="rect">
             <a:avLst/>
@@ -6484,7 +11915,7 @@
               </a:defRPr>
             </a:pPr>
             <a:r>
-              <a:t>PIPELINE TOPOLOGY (PHASE 01 FOUNDATION)</a:t>
+              <a:t>OBJ 1: PROVENANCE &amp; PARTITION HYGIENE</a:t>
             </a:r>
           </a:p>
         </p:txBody>
@@ -6497,8 +11928,8 @@
         </p:nvSpPr>
         <p:spPr>
           <a:xfrm>
-            <a:off x="914400" y="1874519"/>
-            <a:ext cx="5852160" cy="4114800"/>
+            <a:off x="914400" y="1581912"/>
+            <a:ext cx="10332720" cy="320040"/>
           </a:xfrm>
           <a:prstGeom prst="rect">
             <a:avLst/>
@@ -6512,19 +11943,6 @@
           <a:lstStyle/>
           <a:p>
             <a:pPr>
-              <a:defRPr sz="1000" b="1">
-                <a:solidFill>
-                  <a:srgbClr val="1DB954"/>
-                </a:solidFill>
-                <a:latin typeface="Consolas"/>
-              </a:defRPr>
-            </a:pPr>
-            <a:r>
-              <a:t>LAYER 1: INPUT INGESTION</a:t>
-            </a:r>
-          </a:p>
-          <a:p>
-            <a:pPr>
               <a:defRPr sz="1000">
                 <a:solidFill>
                   <a:srgbClr val="A1A1AA"/>
@@ -6533,118 +11951,9 @@
               </a:defRPr>
             </a:pPr>
             <a:r>
-              <a:t>Base64 canvas strings, raw PNG/JPEG bytes, or offline numpy arrays decoded into single-channel grayscale.</a:t>
-            </a:r>
-          </a:p>
-          <a:p/>
-          <a:p>
-            <a:pPr>
-              <a:defRPr sz="1000" b="1">
-                <a:solidFill>
-                  <a:srgbClr val="1DB954"/>
-                </a:solidFill>
-                <a:latin typeface="Consolas"/>
-              </a:defRPr>
-            </a:pPr>
-            <a:r>
-              <a:t>LAYER 2: CANONICAL PREPROCESSOR</a:t>
-            </a:r>
-          </a:p>
-          <a:p>
-            <a:pPr>
-              <a:defRPr sz="1000">
-                <a:solidFill>
-                  <a:srgbClr val="A1A1AA"/>
-                </a:solidFill>
-                <a:latin typeface="Segoe UI"/>
-              </a:defRPr>
-            </a:pPr>
-            <a:r>
-              <a:t>Authoritative invariant: Contrast inversion → Otsu thresholding → BBox extraction → 20x20 aspect scaling → Moment centroiding to (13.5, 13.5) → (1, 28, 28, 1) float32.</a:t>
-            </a:r>
-          </a:p>
-          <a:p/>
-          <a:p>
-            <a:pPr>
-              <a:defRPr sz="1000" b="1">
-                <a:solidFill>
-                  <a:srgbClr val="1DB954"/>
-                </a:solidFill>
-                <a:latin typeface="Consolas"/>
-              </a:defRPr>
-            </a:pPr>
-            <a:r>
-              <a:t>LAYER 3: INPUT QUALITY GATEKEEPER</a:t>
-            </a:r>
-          </a:p>
-          <a:p>
-            <a:pPr>
-              <a:defRPr sz="1000">
-                <a:solidFill>
-                  <a:srgbClr val="A1A1AA"/>
-                </a:solidFill>
-                <a:latin typeface="Segoe UI"/>
-              </a:defRPr>
-            </a:pPr>
-            <a:r>
-              <a:t>Computes composite quality score [0, 100], active pixel bounds [18, 380], centroid offset tolerance (&lt;= 4.5px), and speckle noise ratio.</a:t>
-            </a:r>
-          </a:p>
-          <a:p/>
-          <a:p>
-            <a:pPr>
-              <a:defRPr sz="1000" b="1">
-                <a:solidFill>
-                  <a:srgbClr val="1DB954"/>
-                </a:solidFill>
-                <a:latin typeface="Consolas"/>
-              </a:defRPr>
-            </a:pPr>
-            <a:r>
-              <a:t>LAYER 4: CENTRALIZED CONFIGURATION</a:t>
-            </a:r>
-          </a:p>
-          <a:p>
-            <a:pPr>
-              <a:defRPr sz="1000">
-                <a:solidFill>
-                  <a:srgbClr val="A1A1AA"/>
-                </a:solidFill>
-                <a:latin typeface="Segoe UI"/>
-              </a:defRPr>
-            </a:pPr>
-            <a:r>
-              <a:t>src/config.py centralizes random seeds, dataset partitions, learning rates, batch configurations, and path topologies. Zero magic numbers.</a:t>
-            </a:r>
-          </a:p>
-          <a:p/>
-          <a:p>
-            <a:pPr>
-              <a:defRPr sz="1000" b="1">
-                <a:solidFill>
-                  <a:srgbClr val="1DB954"/>
-                </a:solidFill>
-                <a:latin typeface="Consolas"/>
-              </a:defRPr>
-            </a:pPr>
-            <a:r>
-              <a:t>LAYER 5: UNIFIED MODEL &amp; TELEMETRY HUD</a:t>
-            </a:r>
-          </a:p>
-          <a:p>
-            <a:pPr>
-              <a:defRPr sz="1000">
-                <a:solidFill>
-                  <a:srgbClr val="A1A1AA"/>
-                </a:solidFill>
-                <a:latin typeface="Segoe UI"/>
-              </a:defRPr>
-            </a:pPr>
-            <a:r>
-              <a:t>Provides normalized tensors to model wrappers, Grad-CAM attribution hooks, and emits high-density JSON telemetry for dashboard rendering.</a:t>
-            </a:r>
-          </a:p>
-          <a:p/>
+              <a:t>Curate authentic MNIST data from NIST SD 19/3 with documented provenance and strict 20k/3k/10k zero-leakage partitions.</a:t>
+            </a:r>
+          </a:p>
         </p:txBody>
       </p:sp>
       <p:sp>
@@ -6655,8 +11964,8 @@
         </p:nvSpPr>
         <p:spPr>
           <a:xfrm>
-            <a:off x="7223760" y="1371600"/>
-            <a:ext cx="4206240" cy="4846320"/>
+            <a:off x="731520" y="2029967"/>
+            <a:ext cx="10698480" cy="594360"/>
           </a:xfrm>
           <a:prstGeom prst="rect">
             <a:avLst/>
@@ -6700,8 +12009,8 @@
         </p:nvSpPr>
         <p:spPr>
           <a:xfrm>
-            <a:off x="7406640" y="1508760"/>
-            <a:ext cx="3840479" cy="320040"/>
+            <a:off x="914400" y="2167127"/>
+            <a:ext cx="10332719" cy="320040"/>
           </a:xfrm>
           <a:prstGeom prst="rect">
             <a:avLst/>
@@ -6723,7 +12032,7 @@
               </a:defRPr>
             </a:pPr>
             <a:r>
-              <a:t>REPOSITORY STRUCTURE &amp; MODULES</a:t>
+              <a:t>OBJ 2: CANONICAL PREPROCESSING INVARIANT</a:t>
             </a:r>
           </a:p>
         </p:txBody>
@@ -6736,8 +12045,8 @@
         </p:nvSpPr>
         <p:spPr>
           <a:xfrm>
-            <a:off x="7406640" y="1874519"/>
-            <a:ext cx="3840480" cy="4114800"/>
+            <a:off x="914400" y="2286000"/>
+            <a:ext cx="10332720" cy="320040"/>
           </a:xfrm>
           <a:prstGeom prst="rect">
             <a:avLst/>
@@ -6751,73 +12060,601 @@
           <a:lstStyle/>
           <a:p>
             <a:pPr>
-              <a:defRPr sz="900">
-                <a:solidFill>
-                  <a:srgbClr val="737373"/>
+              <a:defRPr sz="1000">
+                <a:solidFill>
+                  <a:srgbClr val="A1A1AA"/>
+                </a:solidFill>
+                <a:latin typeface="Segoe UI"/>
+              </a:defRPr>
+            </a:pPr>
+            <a:r>
+              <a:t>Implement a unified 7-stage preprocessing pipeline shared identically between training and real-time live web canvas inference.</a:t>
+            </a:r>
+          </a:p>
+        </p:txBody>
+      </p:sp>
+      <p:sp>
+        <p:nvSpPr>
+          <p:cNvPr id="9" name="Rectangle 8"/>
+          <p:cNvSpPr/>
+          <p:nvPr/>
+        </p:nvSpPr>
+        <p:spPr>
+          <a:xfrm>
+            <a:off x="731520" y="2734056"/>
+            <a:ext cx="10698480" cy="594360"/>
+          </a:xfrm>
+          <a:prstGeom prst="rect">
+            <a:avLst/>
+          </a:prstGeom>
+          <a:solidFill>
+            <a:srgbClr val="121212"/>
+          </a:solidFill>
+          <a:ln w="12700">
+            <a:solidFill>
+              <a:srgbClr val="262626"/>
+            </a:solidFill>
+          </a:ln>
+        </p:spPr>
+        <p:style>
+          <a:lnRef idx="1">
+            <a:schemeClr val="accent1"/>
+          </a:lnRef>
+          <a:fillRef idx="3">
+            <a:schemeClr val="accent1"/>
+          </a:fillRef>
+          <a:effectRef idx="2">
+            <a:schemeClr val="accent1"/>
+          </a:effectRef>
+          <a:fontRef idx="minor">
+            <a:schemeClr val="lt1"/>
+          </a:fontRef>
+        </p:style>
+        <p:txBody>
+          <a:bodyPr rtlCol="0" anchor="ctr"/>
+          <a:lstStyle/>
+          <a:p>
+            <a:pPr algn="ctr"/>
+          </a:p>
+        </p:txBody>
+      </p:sp>
+      <p:sp>
+        <p:nvSpPr>
+          <p:cNvPr id="10" name="TextBox 9"/>
+          <p:cNvSpPr txBox="1"/>
+          <p:nvPr/>
+        </p:nvSpPr>
+        <p:spPr>
+          <a:xfrm>
+            <a:off x="914400" y="2871216"/>
+            <a:ext cx="10332719" cy="320040"/>
+          </a:xfrm>
+          <a:prstGeom prst="rect">
+            <a:avLst/>
+          </a:prstGeom>
+          <a:noFill/>
+        </p:spPr>
+        <p:txBody>
+          <a:bodyPr wrap="square" lIns="0" tIns="0" rIns="0" bIns="0">
+            <a:spAutoFit/>
+          </a:bodyPr>
+          <a:lstStyle/>
+          <a:p>
+            <a:pPr>
+              <a:defRPr sz="1000" b="1">
+                <a:solidFill>
+                  <a:srgbClr val="A1A1AA"/>
                 </a:solidFill>
                 <a:latin typeface="Consolas"/>
               </a:defRPr>
             </a:pPr>
             <a:r>
-              <a:t>ML_PROJECT/</a:t>
-            </a:r>
-            <a:br/>
-            <a:r>
-              <a:t>├── src/</a:t>
-            </a:r>
-            <a:br/>
-            <a:r>
-              <a:t>│   ├── config.py             [Centralized Config]</a:t>
-            </a:r>
-            <a:br/>
-            <a:r>
-              <a:t>│   ├── data/                 [Dataset &amp; EDA]</a:t>
-            </a:r>
-            <a:br/>
-            <a:r>
-              <a:t>│   │   ├── dataset.py        [MNIST Pipeline]</a:t>
-            </a:r>
-            <a:br/>
-            <a:r>
-              <a:t>│   │   └── eda.py            [Empirical EDA]</a:t>
-            </a:r>
-            <a:br/>
-            <a:r>
-              <a:t>│   ├── preprocessing/        [Canonical Pipeline]</a:t>
-            </a:r>
-            <a:br/>
-            <a:r>
-              <a:t>│   │   └── canonical.py      [Autoritative Invariant]</a:t>
-            </a:r>
-            <a:br/>
-            <a:r>
-              <a:t>│   ├── intelligence/         [Quality &amp; Forensics]</a:t>
-            </a:r>
-            <a:br/>
-            <a:r>
-              <a:t>│   ├── models/               [Deep &amp; Classical]</a:t>
-            </a:r>
-            <a:br/>
-            <a:r>
-              <a:t>│   ├── xai/                  [Grad-CAM &amp; Saliency]</a:t>
-            </a:r>
-            <a:br/>
-            <a:r>
-              <a:t>│   └── app/                  [FastAPI &amp; Dashboard]</a:t>
-            </a:r>
-            <a:br/>
-            <a:r>
-              <a:t>├── artifacts/data/           [Generated Figures]</a:t>
-            </a:r>
-            <a:br/>
-            <a:r>
-              <a:t>├── docs/                     [Formal Specifications]</a:t>
-            </a:r>
-            <a:br/>
-            <a:r>
-              <a:t>└── tests/                    [33 Verified Tests]</a:t>
-            </a:r>
-            <a:br/>
+              <a:t>OBJ 3: MULTI-MODEL BENCHMARK SUITE</a:t>
+            </a:r>
+          </a:p>
+        </p:txBody>
+      </p:sp>
+      <p:sp>
+        <p:nvSpPr>
+          <p:cNvPr id="11" name="TextBox 10"/>
+          <p:cNvSpPr txBox="1"/>
+          <p:nvPr/>
+        </p:nvSpPr>
+        <p:spPr>
+          <a:xfrm>
+            <a:off x="914400" y="2990088"/>
+            <a:ext cx="10332720" cy="320040"/>
+          </a:xfrm>
+          <a:prstGeom prst="rect">
+            <a:avLst/>
+          </a:prstGeom>
+          <a:noFill/>
+        </p:spPr>
+        <p:txBody>
+          <a:bodyPr wrap="square">
+            <a:spAutoFit/>
+          </a:bodyPr>
+          <a:lstStyle/>
+          <a:p>
+            <a:pPr>
+              <a:defRPr sz="1000">
+                <a:solidFill>
+                  <a:srgbClr val="A1A1AA"/>
+                </a:solidFill>
+                <a:latin typeface="Segoe UI"/>
+              </a:defRPr>
+            </a:pPr>
+            <a:r>
+              <a:t>Train and empirically benchmark 7 distinct machine learning algorithms on 10,000 isolated test samples without fabrication.</a:t>
+            </a:r>
+          </a:p>
+        </p:txBody>
+      </p:sp>
+      <p:sp>
+        <p:nvSpPr>
+          <p:cNvPr id="12" name="Rectangle 11"/>
+          <p:cNvSpPr/>
+          <p:nvPr/>
+        </p:nvSpPr>
+        <p:spPr>
+          <a:xfrm>
+            <a:off x="731520" y="3438144"/>
+            <a:ext cx="10698480" cy="594360"/>
+          </a:xfrm>
+          <a:prstGeom prst="rect">
+            <a:avLst/>
+          </a:prstGeom>
+          <a:solidFill>
+            <a:srgbClr val="121212"/>
+          </a:solidFill>
+          <a:ln w="12700">
+            <a:solidFill>
+              <a:srgbClr val="262626"/>
+            </a:solidFill>
+          </a:ln>
+        </p:spPr>
+        <p:style>
+          <a:lnRef idx="1">
+            <a:schemeClr val="accent1"/>
+          </a:lnRef>
+          <a:fillRef idx="3">
+            <a:schemeClr val="accent1"/>
+          </a:fillRef>
+          <a:effectRef idx="2">
+            <a:schemeClr val="accent1"/>
+          </a:effectRef>
+          <a:fontRef idx="minor">
+            <a:schemeClr val="lt1"/>
+          </a:fontRef>
+        </p:style>
+        <p:txBody>
+          <a:bodyPr rtlCol="0" anchor="ctr"/>
+          <a:lstStyle/>
+          <a:p>
+            <a:pPr algn="ctr"/>
+          </a:p>
+        </p:txBody>
+      </p:sp>
+      <p:sp>
+        <p:nvSpPr>
+          <p:cNvPr id="13" name="TextBox 12"/>
+          <p:cNvSpPr txBox="1"/>
+          <p:nvPr/>
+        </p:nvSpPr>
+        <p:spPr>
+          <a:xfrm>
+            <a:off x="914400" y="3575303"/>
+            <a:ext cx="10332719" cy="320040"/>
+          </a:xfrm>
+          <a:prstGeom prst="rect">
+            <a:avLst/>
+          </a:prstGeom>
+          <a:noFill/>
+        </p:spPr>
+        <p:txBody>
+          <a:bodyPr wrap="square" lIns="0" tIns="0" rIns="0" bIns="0">
+            <a:spAutoFit/>
+          </a:bodyPr>
+          <a:lstStyle/>
+          <a:p>
+            <a:pPr>
+              <a:defRPr sz="1000" b="1">
+                <a:solidFill>
+                  <a:srgbClr val="A1A1AA"/>
+                </a:solidFill>
+                <a:latin typeface="Consolas"/>
+              </a:defRPr>
+            </a:pPr>
+            <a:r>
+              <a:t>OBJ 4: SUCCESS CRITERION EXCEEDED</a:t>
+            </a:r>
+          </a:p>
+        </p:txBody>
+      </p:sp>
+      <p:sp>
+        <p:nvSpPr>
+          <p:cNvPr id="14" name="TextBox 13"/>
+          <p:cNvSpPr txBox="1"/>
+          <p:nvPr/>
+        </p:nvSpPr>
+        <p:spPr>
+          <a:xfrm>
+            <a:off x="914400" y="3694176"/>
+            <a:ext cx="10332720" cy="320040"/>
+          </a:xfrm>
+          <a:prstGeom prst="rect">
+            <a:avLst/>
+          </a:prstGeom>
+          <a:noFill/>
+        </p:spPr>
+        <p:txBody>
+          <a:bodyPr wrap="square">
+            <a:spAutoFit/>
+          </a:bodyPr>
+          <a:lstStyle/>
+          <a:p>
+            <a:pPr>
+              <a:defRPr sz="1000">
+                <a:solidFill>
+                  <a:srgbClr val="A1A1AA"/>
+                </a:solidFill>
+                <a:latin typeface="Segoe UI"/>
+              </a:defRPr>
+            </a:pPr>
+            <a:r>
+              <a:t>Achieve &gt;=95.0% accuracy and &gt;=0.950 macro F1 (achieved 98.31% accuracy and 0.9831 macro F1).</a:t>
+            </a:r>
+          </a:p>
+        </p:txBody>
+      </p:sp>
+      <p:sp>
+        <p:nvSpPr>
+          <p:cNvPr id="15" name="Rectangle 14"/>
+          <p:cNvSpPr/>
+          <p:nvPr/>
+        </p:nvSpPr>
+        <p:spPr>
+          <a:xfrm>
+            <a:off x="731520" y="4142232"/>
+            <a:ext cx="10698480" cy="594360"/>
+          </a:xfrm>
+          <a:prstGeom prst="rect">
+            <a:avLst/>
+          </a:prstGeom>
+          <a:solidFill>
+            <a:srgbClr val="121212"/>
+          </a:solidFill>
+          <a:ln w="12700">
+            <a:solidFill>
+              <a:srgbClr val="262626"/>
+            </a:solidFill>
+          </a:ln>
+        </p:spPr>
+        <p:style>
+          <a:lnRef idx="1">
+            <a:schemeClr val="accent1"/>
+          </a:lnRef>
+          <a:fillRef idx="3">
+            <a:schemeClr val="accent1"/>
+          </a:fillRef>
+          <a:effectRef idx="2">
+            <a:schemeClr val="accent1"/>
+          </a:effectRef>
+          <a:fontRef idx="minor">
+            <a:schemeClr val="lt1"/>
+          </a:fontRef>
+        </p:style>
+        <p:txBody>
+          <a:bodyPr rtlCol="0" anchor="ctr"/>
+          <a:lstStyle/>
+          <a:p>
+            <a:pPr algn="ctr"/>
+          </a:p>
+        </p:txBody>
+      </p:sp>
+      <p:sp>
+        <p:nvSpPr>
+          <p:cNvPr id="16" name="TextBox 15"/>
+          <p:cNvSpPr txBox="1"/>
+          <p:nvPr/>
+        </p:nvSpPr>
+        <p:spPr>
+          <a:xfrm>
+            <a:off x="914400" y="4279392"/>
+            <a:ext cx="10332719" cy="320040"/>
+          </a:xfrm>
+          <a:prstGeom prst="rect">
+            <a:avLst/>
+          </a:prstGeom>
+          <a:noFill/>
+        </p:spPr>
+        <p:txBody>
+          <a:bodyPr wrap="square" lIns="0" tIns="0" rIns="0" bIns="0">
+            <a:spAutoFit/>
+          </a:bodyPr>
+          <a:lstStyle/>
+          <a:p>
+            <a:pPr>
+              <a:defRPr sz="1000" b="1">
+                <a:solidFill>
+                  <a:srgbClr val="A1A1AA"/>
+                </a:solidFill>
+                <a:latin typeface="Consolas"/>
+              </a:defRPr>
+            </a:pPr>
+            <a:r>
+              <a:t>OBJ 5: CONFIDENCE CALIBRATION &amp; ENTROPY</a:t>
+            </a:r>
+          </a:p>
+        </p:txBody>
+      </p:sp>
+      <p:sp>
+        <p:nvSpPr>
+          <p:cNvPr id="17" name="TextBox 16"/>
+          <p:cNvSpPr txBox="1"/>
+          <p:nvPr/>
+        </p:nvSpPr>
+        <p:spPr>
+          <a:xfrm>
+            <a:off x="914400" y="4398264"/>
+            <a:ext cx="10332720" cy="320040"/>
+          </a:xfrm>
+          <a:prstGeom prst="rect">
+            <a:avLst/>
+          </a:prstGeom>
+          <a:noFill/>
+        </p:spPr>
+        <p:txBody>
+          <a:bodyPr wrap="square">
+            <a:spAutoFit/>
+          </a:bodyPr>
+          <a:lstStyle/>
+          <a:p>
+            <a:pPr>
+              <a:defRPr sz="1000">
+                <a:solidFill>
+                  <a:srgbClr val="A1A1AA"/>
+                </a:solidFill>
+                <a:latin typeface="Segoe UI"/>
+              </a:defRPr>
+            </a:pPr>
+            <a:r>
+              <a:t>Implement post-hoc temperature scaling (T = 0.9170) to minimize ECE and integrate Shannon entropy rejection thresholds.</a:t>
+            </a:r>
+          </a:p>
+        </p:txBody>
+      </p:sp>
+      <p:sp>
+        <p:nvSpPr>
+          <p:cNvPr id="18" name="Rectangle 17"/>
+          <p:cNvSpPr/>
+          <p:nvPr/>
+        </p:nvSpPr>
+        <p:spPr>
+          <a:xfrm>
+            <a:off x="731520" y="4846320"/>
+            <a:ext cx="10698480" cy="594360"/>
+          </a:xfrm>
+          <a:prstGeom prst="rect">
+            <a:avLst/>
+          </a:prstGeom>
+          <a:solidFill>
+            <a:srgbClr val="121212"/>
+          </a:solidFill>
+          <a:ln w="12700">
+            <a:solidFill>
+              <a:srgbClr val="262626"/>
+            </a:solidFill>
+          </a:ln>
+        </p:spPr>
+        <p:style>
+          <a:lnRef idx="1">
+            <a:schemeClr val="accent1"/>
+          </a:lnRef>
+          <a:fillRef idx="3">
+            <a:schemeClr val="accent1"/>
+          </a:fillRef>
+          <a:effectRef idx="2">
+            <a:schemeClr val="accent1"/>
+          </a:effectRef>
+          <a:fontRef idx="minor">
+            <a:schemeClr val="lt1"/>
+          </a:fontRef>
+        </p:style>
+        <p:txBody>
+          <a:bodyPr rtlCol="0" anchor="ctr"/>
+          <a:lstStyle/>
+          <a:p>
+            <a:pPr algn="ctr"/>
+          </a:p>
+        </p:txBody>
+      </p:sp>
+      <p:sp>
+        <p:nvSpPr>
+          <p:cNvPr id="19" name="TextBox 18"/>
+          <p:cNvSpPr txBox="1"/>
+          <p:nvPr/>
+        </p:nvSpPr>
+        <p:spPr>
+          <a:xfrm>
+            <a:off x="914400" y="4983480"/>
+            <a:ext cx="10332719" cy="320040"/>
+          </a:xfrm>
+          <a:prstGeom prst="rect">
+            <a:avLst/>
+          </a:prstGeom>
+          <a:noFill/>
+        </p:spPr>
+        <p:txBody>
+          <a:bodyPr wrap="square" lIns="0" tIns="0" rIns="0" bIns="0">
+            <a:spAutoFit/>
+          </a:bodyPr>
+          <a:lstStyle/>
+          <a:p>
+            <a:pPr>
+              <a:defRPr sz="1000" b="1">
+                <a:solidFill>
+                  <a:srgbClr val="A1A1AA"/>
+                </a:solidFill>
+                <a:latin typeface="Consolas"/>
+              </a:defRPr>
+            </a:pPr>
+            <a:r>
+              <a:t>OBJ 6: VISUAL EXPLAINABILITY VIA GRAD-CAM</a:t>
+            </a:r>
+          </a:p>
+        </p:txBody>
+      </p:sp>
+      <p:sp>
+        <p:nvSpPr>
+          <p:cNvPr id="20" name="TextBox 19"/>
+          <p:cNvSpPr txBox="1"/>
+          <p:nvPr/>
+        </p:nvSpPr>
+        <p:spPr>
+          <a:xfrm>
+            <a:off x="914400" y="5102352"/>
+            <a:ext cx="10332720" cy="320040"/>
+          </a:xfrm>
+          <a:prstGeom prst="rect">
+            <a:avLst/>
+          </a:prstGeom>
+          <a:noFill/>
+        </p:spPr>
+        <p:txBody>
+          <a:bodyPr wrap="square">
+            <a:spAutoFit/>
+          </a:bodyPr>
+          <a:lstStyle/>
+          <a:p>
+            <a:pPr>
+              <a:defRPr sz="1000">
+                <a:solidFill>
+                  <a:srgbClr val="A1A1AA"/>
+                </a:solidFill>
+                <a:latin typeface="Segoe UI"/>
+              </a:defRPr>
+            </a:pPr>
+            <a:r>
+              <a:t>Engineer gradient backpropagation hooks on target layer 'conv_cam' to generate 300 DPI visual saliency attribution maps.</a:t>
+            </a:r>
+          </a:p>
+        </p:txBody>
+      </p:sp>
+      <p:sp>
+        <p:nvSpPr>
+          <p:cNvPr id="21" name="Rectangle 20"/>
+          <p:cNvSpPr/>
+          <p:nvPr/>
+        </p:nvSpPr>
+        <p:spPr>
+          <a:xfrm>
+            <a:off x="731520" y="5550408"/>
+            <a:ext cx="10698480" cy="594360"/>
+          </a:xfrm>
+          <a:prstGeom prst="rect">
+            <a:avLst/>
+          </a:prstGeom>
+          <a:solidFill>
+            <a:srgbClr val="121212"/>
+          </a:solidFill>
+          <a:ln w="12700">
+            <a:solidFill>
+              <a:srgbClr val="262626"/>
+            </a:solidFill>
+          </a:ln>
+        </p:spPr>
+        <p:style>
+          <a:lnRef idx="1">
+            <a:schemeClr val="accent1"/>
+          </a:lnRef>
+          <a:fillRef idx="3">
+            <a:schemeClr val="accent1"/>
+          </a:fillRef>
+          <a:effectRef idx="2">
+            <a:schemeClr val="accent1"/>
+          </a:effectRef>
+          <a:fontRef idx="minor">
+            <a:schemeClr val="lt1"/>
+          </a:fontRef>
+        </p:style>
+        <p:txBody>
+          <a:bodyPr rtlCol="0" anchor="ctr"/>
+          <a:lstStyle/>
+          <a:p>
+            <a:pPr algn="ctr"/>
+          </a:p>
+        </p:txBody>
+      </p:sp>
+      <p:sp>
+        <p:nvSpPr>
+          <p:cNvPr id="22" name="TextBox 21"/>
+          <p:cNvSpPr txBox="1"/>
+          <p:nvPr/>
+        </p:nvSpPr>
+        <p:spPr>
+          <a:xfrm>
+            <a:off x="914400" y="5687568"/>
+            <a:ext cx="10332719" cy="320040"/>
+          </a:xfrm>
+          <a:prstGeom prst="rect">
+            <a:avLst/>
+          </a:prstGeom>
+          <a:noFill/>
+        </p:spPr>
+        <p:txBody>
+          <a:bodyPr wrap="square" lIns="0" tIns="0" rIns="0" bIns="0">
+            <a:spAutoFit/>
+          </a:bodyPr>
+          <a:lstStyle/>
+          <a:p>
+            <a:pPr>
+              <a:defRPr sz="1000" b="1">
+                <a:solidFill>
+                  <a:srgbClr val="A1A1AA"/>
+                </a:solidFill>
+                <a:latin typeface="Consolas"/>
+              </a:defRPr>
+            </a:pPr>
+            <a:r>
+              <a:t>OBJ 7: ML MISSION CONTROL DASHBOARD</a:t>
+            </a:r>
+          </a:p>
+        </p:txBody>
+      </p:sp>
+      <p:sp>
+        <p:nvSpPr>
+          <p:cNvPr id="23" name="TextBox 22"/>
+          <p:cNvSpPr txBox="1"/>
+          <p:nvPr/>
+        </p:nvSpPr>
+        <p:spPr>
+          <a:xfrm>
+            <a:off x="914400" y="5806440"/>
+            <a:ext cx="10332720" cy="320040"/>
+          </a:xfrm>
+          <a:prstGeom prst="rect">
+            <a:avLst/>
+          </a:prstGeom>
+          <a:noFill/>
+        </p:spPr>
+        <p:txBody>
+          <a:bodyPr wrap="square">
+            <a:spAutoFit/>
+          </a:bodyPr>
+          <a:lstStyle/>
+          <a:p>
+            <a:pPr>
+              <a:defRPr sz="1000">
+                <a:solidFill>
+                  <a:srgbClr val="A1A1AA"/>
+                </a:solidFill>
+                <a:latin typeface="Segoe UI"/>
+              </a:defRPr>
+            </a:pPr>
+            <a:r>
+              <a:t>Deploy an interactive full-stack web console with real-time HTML5 canvas drawing, telemetry HUD, and forensics.</a:t>
+            </a:r>
           </a:p>
         </p:txBody>
       </p:sp>
@@ -6878,7 +12715,7 @@
               </a:defRPr>
             </a:pPr>
             <a:r>
-              <a:t>MNIST DATASET</a:t>
+              <a:t>05. ML FORMULATION</a:t>
             </a:r>
           </a:p>
           <a:p>
@@ -6891,7 +12728,7 @@
               </a:defRPr>
             </a:pPr>
             <a:r>
-              <a:t>DATASET PROVENANCE, PARTITIONING &amp; ZERO-LEAKAGE HYGIENE</a:t>
+              <a:t>MATHEMATICAL PROBLEM FORMULATION &amp; FORMAL METRIC SPACE</a:t>
             </a:r>
           </a:p>
         </p:txBody>
@@ -6905,7 +12742,7 @@
         <p:spPr>
           <a:xfrm>
             <a:off x="731520" y="1371600"/>
-            <a:ext cx="5212080" cy="4846320"/>
+            <a:ext cx="3291840" cy="4754880"/>
           </a:xfrm>
           <a:prstGeom prst="rect">
             <a:avLst/>
@@ -6950,7 +12787,7 @@
         <p:spPr>
           <a:xfrm>
             <a:off x="914400" y="1508760"/>
-            <a:ext cx="4846320" cy="320040"/>
+            <a:ext cx="2926080" cy="320040"/>
           </a:xfrm>
           <a:prstGeom prst="rect">
             <a:avLst/>
@@ -6972,7 +12809,7 @@
               </a:defRPr>
             </a:pPr>
             <a:r>
-              <a:t>DATASET PROVENANCE &amp; PARTITIONING</a:t>
+              <a:t>INPUT &amp; LABEL SPACES</a:t>
             </a:r>
           </a:p>
         </p:txBody>
@@ -6985,8 +12822,8 @@
         </p:nvSpPr>
         <p:spPr>
           <a:xfrm>
-            <a:off x="914400" y="1874519"/>
-            <a:ext cx="4846320" cy="4114800"/>
+            <a:off x="914400" y="1920240"/>
+            <a:ext cx="2926080" cy="4023360"/>
           </a:xfrm>
           <a:prstGeom prst="rect">
             <a:avLst/>
@@ -7000,146 +12837,57 @@
           <a:lstStyle/>
           <a:p>
             <a:pPr>
-              <a:defRPr sz="1000" b="1">
-                <a:solidFill>
-                  <a:srgbClr val="1DB954"/>
-                </a:solidFill>
-                <a:latin typeface="Consolas"/>
-              </a:defRPr>
-            </a:pPr>
-            <a:r>
-              <a:t>CORPUS SPECIFICATION:</a:t>
-            </a:r>
-          </a:p>
-          <a:p>
-            <a:pPr>
-              <a:defRPr sz="1000">
-                <a:solidFill>
-                  <a:srgbClr val="A1A1AA"/>
-                </a:solidFill>
-                <a:latin typeface="Segoe UI"/>
-              </a:defRPr>
-            </a:pPr>
-            <a:r>
-              <a:t>•  Origin: Yann LeCun, Corinna Cortes, Christopher Burges (1998).</a:t>
-            </a:r>
-          </a:p>
-          <a:p>
-            <a:pPr>
-              <a:defRPr sz="1000">
-                <a:solidFill>
-                  <a:srgbClr val="A1A1AA"/>
-                </a:solidFill>
-                <a:latin typeface="Segoe UI"/>
-              </a:defRPr>
-            </a:pPr>
-            <a:r>
-              <a:t>•  Source: NIST Special Database 3 (high school students) and Special Database 19 (Census Bureau employees).</a:t>
-            </a:r>
-          </a:p>
-          <a:p>
-            <a:pPr>
-              <a:defRPr sz="1000">
-                <a:solidFill>
-                  <a:srgbClr val="A1A1AA"/>
-                </a:solidFill>
-                <a:latin typeface="Segoe UI"/>
-              </a:defRPr>
-            </a:pPr>
-            <a:r>
-              <a:t>•  Total Available Instances: 70,000 monochrome digit glyphs.</a:t>
-            </a:r>
-          </a:p>
-          <a:p>
-            <a:pPr>
-              <a:defRPr sz="1000">
-                <a:solidFill>
-                  <a:srgbClr val="A1A1AA"/>
-                </a:solidFill>
-                <a:latin typeface="Segoe UI"/>
-              </a:defRPr>
-            </a:pPr>
-            <a:r>
-              <a:t>•  Active Training Partition: 20,000 instances (configurable up to 57,000).</a:t>
-            </a:r>
-          </a:p>
-          <a:p>
-            <a:pPr>
-              <a:defRPr sz="1000">
-                <a:solidFill>
-                  <a:srgbClr val="A1A1AA"/>
-                </a:solidFill>
-                <a:latin typeface="Segoe UI"/>
-              </a:defRPr>
-            </a:pPr>
-            <a:r>
-              <a:t>•  Validation / Tuning Partition: 3,000 instances.</a:t>
-            </a:r>
-          </a:p>
-          <a:p>
-            <a:pPr>
-              <a:defRPr sz="1000">
-                <a:solidFill>
-                  <a:srgbClr val="A1A1AA"/>
-                </a:solidFill>
-                <a:latin typeface="Segoe UI"/>
-              </a:defRPr>
-            </a:pPr>
-            <a:r>
-              <a:t>•  Isolated Benchmark Test Set: 10,000 instances — STRICTLY ISOLATED.</a:t>
-            </a:r>
-          </a:p>
-          <a:p>
-            <a:br/>
-            <a:pPr>
-              <a:defRPr sz="1000" b="1">
-                <a:solidFill>
-                  <a:srgbClr val="FFB000"/>
-                </a:solidFill>
-                <a:latin typeface="Consolas"/>
-              </a:defRPr>
-            </a:pPr>
-            <a:r>
-              <a:t>ZERO-LEAKAGE HYGIENE PROTOCOL:</a:t>
-            </a:r>
-          </a:p>
-          <a:p>
-            <a:pPr>
-              <a:defRPr sz="1000">
-                <a:solidFill>
-                  <a:srgbClr val="A1A1AA"/>
-                </a:solidFill>
-                <a:latin typeface="Segoe UI"/>
-              </a:defRPr>
-            </a:pPr>
-            <a:r>
-              <a:t>•  Air-Gapped Test Set: 10,000 test images are never exposed to training, feature fitting, or hyperparameter selection.</a:t>
-            </a:r>
-          </a:p>
-          <a:p>
-            <a:pPr>
-              <a:defRPr sz="1000">
-                <a:solidFill>
-                  <a:srgbClr val="A1A1AA"/>
-                </a:solidFill>
-                <a:latin typeface="Segoe UI"/>
-              </a:defRPr>
-            </a:pPr>
-            <a:r>
-              <a:t>•  Deterministic Splitting: Globally seeded with RANDOM_SEED = 42.</a:t>
-            </a:r>
-          </a:p>
-          <a:p>
-            <a:pPr>
-              <a:defRPr sz="1000">
-                <a:solidFill>
-                  <a:srgbClr val="A1A1AA"/>
-                </a:solidFill>
-                <a:latin typeface="Segoe UI"/>
-              </a:defRPr>
-            </a:pPr>
-            <a:r>
-              <a:t>•  Memory Disjointness: Validated via pytest asserting disjoint index arrays.</a:t>
+              <a:defRPr sz="1050">
+                <a:solidFill>
+                  <a:srgbClr val="A1A1AA"/>
+                </a:solidFill>
+                <a:latin typeface="Segoe UI"/>
+              </a:defRPr>
+            </a:pPr>
+            <a:r>
+              <a:t>•  Input Tensor Space: X in [0, 1]^(28x28x1), normalized single-channel floating-point matrices.</a:t>
+            </a:r>
+          </a:p>
+          <a:p/>
+          <a:p>
+            <a:pPr>
+              <a:defRPr sz="1050">
+                <a:solidFill>
+                  <a:srgbClr val="A1A1AA"/>
+                </a:solidFill>
+                <a:latin typeface="Segoe UI"/>
+              </a:defRPr>
+            </a:pPr>
+            <a:r>
+              <a:t>•  Flattened Feature Space: x in R^784 for classical classifiers.</a:t>
+            </a:r>
+          </a:p>
+          <a:p/>
+          <a:p>
+            <a:pPr>
+              <a:defRPr sz="1050">
+                <a:solidFill>
+                  <a:srgbClr val="A1A1AA"/>
+                </a:solidFill>
+                <a:latin typeface="Segoe UI"/>
+              </a:defRPr>
+            </a:pPr>
+            <a:r>
+              <a:t>•  Categorical Label Space: Y = {0, 1, ..., 9}, a 10-class mutually exclusive discrete set.</a:t>
+            </a:r>
+          </a:p>
+          <a:p/>
+          <a:p>
+            <a:pPr>
+              <a:defRPr sz="1050">
+                <a:solidFill>
+                  <a:srgbClr val="A1A1AA"/>
+                </a:solidFill>
+                <a:latin typeface="Segoe UI"/>
+              </a:defRPr>
+            </a:pPr>
+            <a:r>
+              <a:t>•  Dataset Domain: D = {(X_i, y_i)} drawn i.i.d. from empirical handwriting distribution P(X, Y).</a:t>
             </a:r>
           </a:p>
         </p:txBody>
@@ -7152,8 +12900,8 @@
         </p:nvSpPr>
         <p:spPr>
           <a:xfrm>
-            <a:off x="6217920" y="1371600"/>
-            <a:ext cx="5212080" cy="4846320"/>
+            <a:off x="4343400" y="1371600"/>
+            <a:ext cx="3291840" cy="4754880"/>
           </a:xfrm>
           <a:prstGeom prst="rect">
             <a:avLst/>
@@ -7197,8 +12945,8 @@
         </p:nvSpPr>
         <p:spPr>
           <a:xfrm>
-            <a:off x="6400800" y="1508760"/>
-            <a:ext cx="4846320" cy="320040"/>
+            <a:off x="4526280" y="1508760"/>
+            <a:ext cx="2926080" cy="320040"/>
           </a:xfrm>
           <a:prstGeom prst="rect">
             <a:avLst/>
@@ -7220,35 +12968,248 @@
               </a:defRPr>
             </a:pPr>
             <a:r>
-              <a:t>EMPIRICAL SAMPLE GRID (ARTIFACTS/DATA/SAMPLE_IMAGE_GRID.PNG)</a:t>
-            </a:r>
-          </a:p>
-        </p:txBody>
-      </p:sp>
-      <p:pic>
-        <p:nvPicPr>
-          <p:cNvPr id="8" name="Picture 7" descr="sample_image_grid.png"/>
-          <p:cNvPicPr>
-            <a:picLocks noChangeAspect="1"/>
-          </p:cNvPicPr>
-          <p:nvPr/>
-        </p:nvPicPr>
-        <p:blipFill>
-          <a:blip r:embed="rId2"/>
-          <a:stretch>
-            <a:fillRect/>
-          </a:stretch>
-        </p:blipFill>
-        <p:spPr>
-          <a:xfrm>
-            <a:off x="6400800" y="1920240"/>
-            <a:ext cx="4846320" cy="4846320"/>
-          </a:xfrm>
-          <a:prstGeom prst="rect">
-            <a:avLst/>
-          </a:prstGeom>
-        </p:spPr>
-      </p:pic>
+              <a:t>LOSS &amp; OPTIMIZATION</a:t>
+            </a:r>
+          </a:p>
+        </p:txBody>
+      </p:sp>
+      <p:sp>
+        <p:nvSpPr>
+          <p:cNvPr id="8" name="TextBox 7"/>
+          <p:cNvSpPr txBox="1"/>
+          <p:nvPr/>
+        </p:nvSpPr>
+        <p:spPr>
+          <a:xfrm>
+            <a:off x="4526280" y="1920240"/>
+            <a:ext cx="2926080" cy="4023360"/>
+          </a:xfrm>
+          <a:prstGeom prst="rect">
+            <a:avLst/>
+          </a:prstGeom>
+          <a:noFill/>
+        </p:spPr>
+        <p:txBody>
+          <a:bodyPr wrap="square">
+            <a:spAutoFit/>
+          </a:bodyPr>
+          <a:lstStyle/>
+          <a:p>
+            <a:pPr>
+              <a:defRPr sz="1050">
+                <a:solidFill>
+                  <a:srgbClr val="A1A1AA"/>
+                </a:solidFill>
+                <a:latin typeface="Segoe UI"/>
+              </a:defRPr>
+            </a:pPr>
+            <a:r>
+              <a:t>•  Objective: Sparse Categorical Cross-Entropy (Multinomial Negative Log-Likelihood):</a:t>
+            </a:r>
+          </a:p>
+          <a:p/>
+          <a:p>
+            <a:pPr>
+              <a:defRPr sz="1050">
+                <a:solidFill>
+                  <a:srgbClr val="A1A1AA"/>
+                </a:solidFill>
+                <a:latin typeface="Segoe UI"/>
+              </a:defRPr>
+            </a:pPr>
+            <a:r>
+              <a:t>•  L_CE(theta) = - (1/N) * sum_i log( exp(z_{i, y_i}) / sum_j exp(z_{i, j}) ).</a:t>
+            </a:r>
+          </a:p>
+          <a:p/>
+          <a:p>
+            <a:pPr>
+              <a:defRPr sz="1050">
+                <a:solidFill>
+                  <a:srgbClr val="A1A1AA"/>
+                </a:solidFill>
+                <a:latin typeface="Segoe UI"/>
+              </a:defRPr>
+            </a:pPr>
+            <a:r>
+              <a:t>•  Optimizer: Adam with mini-batch stochastic gradient updates (beta1=0.9, beta2=0.999, eps=1e-7).</a:t>
+            </a:r>
+          </a:p>
+          <a:p/>
+          <a:p>
+            <a:pPr>
+              <a:defRPr sz="1050">
+                <a:solidFill>
+                  <a:srgbClr val="A1A1AA"/>
+                </a:solidFill>
+                <a:latin typeface="Segoe UI"/>
+              </a:defRPr>
+            </a:pPr>
+            <a:r>
+              <a:t>•  Regularization: Dual spatial dropout (p=0.25) and dense dropout (p=0.40).</a:t>
+            </a:r>
+          </a:p>
+        </p:txBody>
+      </p:sp>
+      <p:sp>
+        <p:nvSpPr>
+          <p:cNvPr id="9" name="Rectangle 8"/>
+          <p:cNvSpPr/>
+          <p:nvPr/>
+        </p:nvSpPr>
+        <p:spPr>
+          <a:xfrm>
+            <a:off x="7955280" y="1371600"/>
+            <a:ext cx="3291840" cy="4754880"/>
+          </a:xfrm>
+          <a:prstGeom prst="rect">
+            <a:avLst/>
+          </a:prstGeom>
+          <a:solidFill>
+            <a:srgbClr val="121212"/>
+          </a:solidFill>
+          <a:ln w="12700">
+            <a:solidFill>
+              <a:srgbClr val="262626"/>
+            </a:solidFill>
+          </a:ln>
+        </p:spPr>
+        <p:style>
+          <a:lnRef idx="1">
+            <a:schemeClr val="accent1"/>
+          </a:lnRef>
+          <a:fillRef idx="3">
+            <a:schemeClr val="accent1"/>
+          </a:fillRef>
+          <a:effectRef idx="2">
+            <a:schemeClr val="accent1"/>
+          </a:effectRef>
+          <a:fontRef idx="minor">
+            <a:schemeClr val="lt1"/>
+          </a:fontRef>
+        </p:style>
+        <p:txBody>
+          <a:bodyPr rtlCol="0" anchor="ctr"/>
+          <a:lstStyle/>
+          <a:p>
+            <a:pPr algn="ctr"/>
+          </a:p>
+        </p:txBody>
+      </p:sp>
+      <p:sp>
+        <p:nvSpPr>
+          <p:cNvPr id="10" name="TextBox 9"/>
+          <p:cNvSpPr txBox="1"/>
+          <p:nvPr/>
+        </p:nvSpPr>
+        <p:spPr>
+          <a:xfrm>
+            <a:off x="8138160" y="1508760"/>
+            <a:ext cx="2926080" cy="320040"/>
+          </a:xfrm>
+          <a:prstGeom prst="rect">
+            <a:avLst/>
+          </a:prstGeom>
+          <a:noFill/>
+        </p:spPr>
+        <p:txBody>
+          <a:bodyPr wrap="square" lIns="0" tIns="0" rIns="0" bIns="0">
+            <a:spAutoFit/>
+          </a:bodyPr>
+          <a:lstStyle/>
+          <a:p>
+            <a:pPr>
+              <a:defRPr sz="1000" b="1">
+                <a:solidFill>
+                  <a:srgbClr val="A1A1AA"/>
+                </a:solidFill>
+                <a:latin typeface="Consolas"/>
+              </a:defRPr>
+            </a:pPr>
+            <a:r>
+              <a:t>EVALUATION METRIC SPACE</a:t>
+            </a:r>
+          </a:p>
+        </p:txBody>
+      </p:sp>
+      <p:sp>
+        <p:nvSpPr>
+          <p:cNvPr id="11" name="TextBox 10"/>
+          <p:cNvSpPr txBox="1"/>
+          <p:nvPr/>
+        </p:nvSpPr>
+        <p:spPr>
+          <a:xfrm>
+            <a:off x="8138160" y="1920240"/>
+            <a:ext cx="2926080" cy="4023360"/>
+          </a:xfrm>
+          <a:prstGeom prst="rect">
+            <a:avLst/>
+          </a:prstGeom>
+          <a:noFill/>
+        </p:spPr>
+        <p:txBody>
+          <a:bodyPr wrap="square">
+            <a:spAutoFit/>
+          </a:bodyPr>
+          <a:lstStyle/>
+          <a:p>
+            <a:pPr>
+              <a:defRPr sz="1050">
+                <a:solidFill>
+                  <a:srgbClr val="A1A1AA"/>
+                </a:solidFill>
+                <a:latin typeface="Segoe UI"/>
+              </a:defRPr>
+            </a:pPr>
+            <a:r>
+              <a:t>•  Primary Metric: Categorical Accuracy = (TP + TN) / Total.</a:t>
+            </a:r>
+          </a:p>
+          <a:p/>
+          <a:p>
+            <a:pPr>
+              <a:defRPr sz="1050">
+                <a:solidFill>
+                  <a:srgbClr val="A1A1AA"/>
+                </a:solidFill>
+                <a:latin typeface="Segoe UI"/>
+              </a:defRPr>
+            </a:pPr>
+            <a:r>
+              <a:t>•  Class-Balanced Metric: Macro-Averaged F1-Score = (1/10) * sum_c F1_c.</a:t>
+            </a:r>
+          </a:p>
+          <a:p/>
+          <a:p>
+            <a:pPr>
+              <a:defRPr sz="1050">
+                <a:solidFill>
+                  <a:srgbClr val="A1A1AA"/>
+                </a:solidFill>
+                <a:latin typeface="Segoe UI"/>
+              </a:defRPr>
+            </a:pPr>
+            <a:r>
+              <a:t>•  Calibration Metric: Expected Calibration Error (ECE) across M empirical confidence bins.</a:t>
+            </a:r>
+          </a:p>
+          <a:p/>
+          <a:p>
+            <a:pPr>
+              <a:defRPr sz="1050">
+                <a:solidFill>
+                  <a:srgbClr val="A1A1AA"/>
+                </a:solidFill>
+                <a:latin typeface="Segoe UI"/>
+              </a:defRPr>
+            </a:pPr>
+            <a:r>
+              <a:t>•  Epistemic Entropy: H(p) = - sum_j p_j * log(p_j) nats.</a:t>
+            </a:r>
+          </a:p>
+        </p:txBody>
+      </p:sp>
     </p:spTree>
   </p:cSld>
   <p:clrMapOvr>
@@ -7306,7 +13267,7 @@
               </a:defRPr>
             </a:pPr>
             <a:r>
-              <a:t>DATASET ATTRIBUTES</a:t>
+              <a:t>06. SYSTEM ARCHITECTURE</a:t>
             </a:r>
           </a:p>
           <a:p>
@@ -7319,21 +13280,45 @@
               </a:defRPr>
             </a:pPr>
             <a:r>
-              <a:t>MATHEMATICAL FEATURE SPACES &amp; PIXEL INTENSITY MOMENTS</a:t>
-            </a:r>
-          </a:p>
-        </p:txBody>
-      </p:sp>
-      <p:sp>
-        <p:nvSpPr>
-          <p:cNvPr id="3" name="Rectangle 2"/>
+              <a:t>END-TO-END SYSTEM ARCHITECTURE &amp; DATA FLOW</a:t>
+            </a:r>
+          </a:p>
+        </p:txBody>
+      </p:sp>
+      <p:pic>
+        <p:nvPicPr>
+          <p:cNvPr id="3" name="Picture 2" descr="system_workflow.png"/>
+          <p:cNvPicPr>
+            <a:picLocks noChangeAspect="1"/>
+          </p:cNvPicPr>
+          <p:nvPr/>
+        </p:nvPicPr>
+        <p:blipFill>
+          <a:blip r:embed="rId2"/>
+          <a:stretch>
+            <a:fillRect/>
+          </a:stretch>
+        </p:blipFill>
+        <p:spPr>
+          <a:xfrm>
+            <a:off x="731520" y="1371600"/>
+            <a:ext cx="6217920" cy="3553097"/>
+          </a:xfrm>
+          <a:prstGeom prst="rect">
+            <a:avLst/>
+          </a:prstGeom>
+        </p:spPr>
+      </p:pic>
+      <p:sp>
+        <p:nvSpPr>
+          <p:cNvPr id="4" name="Rectangle 3"/>
           <p:cNvSpPr/>
           <p:nvPr/>
         </p:nvSpPr>
         <p:spPr>
           <a:xfrm>
-            <a:off x="731520" y="1371600"/>
-            <a:ext cx="5212080" cy="4846320"/>
+            <a:off x="7223760" y="1371600"/>
+            <a:ext cx="4206240" cy="4846320"/>
           </a:xfrm>
           <a:prstGeom prst="rect">
             <a:avLst/>
@@ -7371,14 +13356,14 @@
       </p:sp>
       <p:sp>
         <p:nvSpPr>
-          <p:cNvPr id="4" name="TextBox 3"/>
+          <p:cNvPr id="5" name="TextBox 4"/>
           <p:cNvSpPr txBox="1"/>
           <p:nvPr/>
         </p:nvSpPr>
         <p:spPr>
           <a:xfrm>
-            <a:off x="914400" y="1508760"/>
-            <a:ext cx="4846320" cy="320040"/>
+            <a:off x="7406640" y="1508760"/>
+            <a:ext cx="3840479" cy="320040"/>
           </a:xfrm>
           <a:prstGeom prst="rect">
             <a:avLst/>
@@ -7400,21 +13385,21 @@
               </a:defRPr>
             </a:pPr>
             <a:r>
-              <a:t>MATHEMATICAL SPACES &amp; REPRESENTATIONS</a:t>
-            </a:r>
-          </a:p>
-        </p:txBody>
-      </p:sp>
-      <p:sp>
-        <p:nvSpPr>
-          <p:cNvPr id="5" name="TextBox 4"/>
+              <a:t>CORE ARCHITECTURAL LAYERS</a:t>
+            </a:r>
+          </a:p>
+        </p:txBody>
+      </p:sp>
+      <p:sp>
+        <p:nvSpPr>
+          <p:cNvPr id="6" name="TextBox 5"/>
           <p:cNvSpPr txBox="1"/>
           <p:nvPr/>
         </p:nvSpPr>
         <p:spPr>
           <a:xfrm>
-            <a:off x="914400" y="1874519"/>
-            <a:ext cx="4846320" cy="4114800"/>
+            <a:off x="7406640" y="1874519"/>
+            <a:ext cx="3840480" cy="4114800"/>
           </a:xfrm>
           <a:prstGeom prst="rect">
             <a:avLst/>
@@ -7428,7 +13413,7 @@
           <a:lstStyle/>
           <a:p>
             <a:pPr>
-              <a:defRPr sz="1000" b="1">
+              <a:defRPr sz="950" b="1">
                 <a:solidFill>
                   <a:srgbClr val="1DB954"/>
                 </a:solidFill>
@@ -7436,7 +13421,7 @@
               </a:defRPr>
             </a:pPr>
             <a:r>
-              <a:t>FORMAL SPACES:</a:t>
+              <a:t>1. INPUT INGESTION</a:t>
             </a:r>
           </a:p>
           <a:p>
@@ -7445,11 +13430,25 @@
                 <a:solidFill>
                   <a:srgbClr val="A1A1AA"/>
                 </a:solidFill>
+                <a:latin typeface="Segoe UI"/>
+              </a:defRPr>
+            </a:pPr>
+            <a:r>
+              <a:t>Captures HTML5 drawing canvas dataURLs, uploads, or offline benchmark tensors.</a:t>
+            </a:r>
+          </a:p>
+          <a:p/>
+          <a:p>
+            <a:pPr>
+              <a:defRPr sz="950" b="1">
+                <a:solidFill>
+                  <a:srgbClr val="1DB954"/>
+                </a:solidFill>
                 <a:latin typeface="Consolas"/>
               </a:defRPr>
             </a:pPr>
             <a:r>
-              <a:t>•  Image Tensor Space:  X ∈ [0.0, 1.0]^(28 × 28 × 1), dtype=float32</a:t>
+              <a:t>2. CANONICAL PREPROCESSOR</a:t>
             </a:r>
           </a:p>
           <a:p>
@@ -7458,11 +13457,25 @@
                 <a:solidFill>
                   <a:srgbClr val="A1A1AA"/>
                 </a:solidFill>
+                <a:latin typeface="Segoe UI"/>
+              </a:defRPr>
+            </a:pPr>
+            <a:r>
+              <a:t>7-stage invariant: Contrast inversion -&gt; Otsu threshold -&gt; Bounding box -&gt; 20x20 scale -&gt; CoM center -&gt; 28x28 float32.</a:t>
+            </a:r>
+          </a:p>
+          <a:p/>
+          <a:p>
+            <a:pPr>
+              <a:defRPr sz="950" b="1">
+                <a:solidFill>
+                  <a:srgbClr val="1DB954"/>
+                </a:solidFill>
                 <a:latin typeface="Consolas"/>
               </a:defRPr>
             </a:pPr>
             <a:r>
-              <a:t>•  Flattened Feature Space:  X_flat ∈ [0.0, 1.0]^784, dtype=float32</a:t>
+              <a:t>3. MODEL INFERENCE ENGINE</a:t>
             </a:r>
           </a:p>
           <a:p>
@@ -7471,11 +13484,25 @@
                 <a:solidFill>
                   <a:srgbClr val="A1A1AA"/>
                 </a:solidFill>
+                <a:latin typeface="Segoe UI"/>
+              </a:defRPr>
+            </a:pPr>
+            <a:r>
+              <a:t>Dual-block DeepConvNet processes normalized tensor in 9.14 ms on CPU.</a:t>
+            </a:r>
+          </a:p>
+          <a:p/>
+          <a:p>
+            <a:pPr>
+              <a:defRPr sz="950" b="1">
+                <a:solidFill>
+                  <a:srgbClr val="1DB954"/>
+                </a:solidFill>
                 <a:latin typeface="Consolas"/>
               </a:defRPr>
             </a:pPr>
             <a:r>
-              <a:t>•  Categorical Label Space:  y ∈ {0, 1, 2, ..., 9}, cardinality K=10</a:t>
+              <a:t>4. CONFIDENCE FORENSICS</a:t>
             </a:r>
           </a:p>
           <a:p>
@@ -7484,212 +13511,70 @@
                 <a:solidFill>
                   <a:srgbClr val="A1A1AA"/>
                 </a:solidFill>
+                <a:latin typeface="Segoe UI"/>
+              </a:defRPr>
+            </a:pPr>
+            <a:r>
+              <a:t>Applies temperature scaling (T=0.9170) and computes Shannon entropy to reject OOD noise.</a:t>
+            </a:r>
+          </a:p>
+          <a:p/>
+          <a:p>
+            <a:pPr>
+              <a:defRPr sz="950" b="1">
+                <a:solidFill>
+                  <a:srgbClr val="1DB954"/>
+                </a:solidFill>
                 <a:latin typeface="Consolas"/>
               </a:defRPr>
             </a:pPr>
             <a:r>
-              <a:t>•  Vectorization Operator: vec: ℝ^(28×28×1) → ℝ^784 via row-major index k = i · 28 + j</a:t>
-            </a:r>
-          </a:p>
-          <a:p>
-            <a:br/>
-            <a:pPr>
-              <a:defRPr sz="1000" b="1">
-                <a:solidFill>
-                  <a:srgbClr val="FFB000"/>
+              <a:t>5. EXPLAINABILITY HOOK</a:t>
+            </a:r>
+          </a:p>
+          <a:p>
+            <a:pPr>
+              <a:defRPr sz="950">
+                <a:solidFill>
+                  <a:srgbClr val="A1A1AA"/>
+                </a:solidFill>
+                <a:latin typeface="Segoe UI"/>
+              </a:defRPr>
+            </a:pPr>
+            <a:r>
+              <a:t>Grad-CAM backpropagates class gradients to 'conv_cam' for instant visual heatmap overlay.</a:t>
+            </a:r>
+          </a:p>
+          <a:p/>
+          <a:p>
+            <a:pPr>
+              <a:defRPr sz="950" b="1">
+                <a:solidFill>
+                  <a:srgbClr val="1DB954"/>
                 </a:solidFill>
                 <a:latin typeface="Consolas"/>
               </a:defRPr>
             </a:pPr>
             <a:r>
-              <a:t>EMPIRICAL PIXEL MOMENTS &amp; SPARSITY:</a:t>
-            </a:r>
-          </a:p>
-          <a:p>
-            <a:pPr>
-              <a:defRPr sz="1000">
-                <a:solidFill>
-                  <a:srgbClr val="A1A1AA"/>
-                </a:solidFill>
-                <a:latin typeface="Segoe UI"/>
-              </a:defRPr>
-            </a:pPr>
-            <a:r>
-              <a:t>•  Global Pixel Minimum: 0.0 (Pure Inactive Background)</a:t>
-            </a:r>
-          </a:p>
-          <a:p>
-            <a:pPr>
-              <a:defRPr sz="1000">
-                <a:solidFill>
-                  <a:srgbClr val="A1A1AA"/>
-                </a:solidFill>
-                <a:latin typeface="Segoe UI"/>
-              </a:defRPr>
-            </a:pPr>
-            <a:r>
-              <a:t>•  Global Pixel Maximum: 1.0 (Normalized Peak Stroke Intensity)</a:t>
-            </a:r>
-          </a:p>
-          <a:p>
-            <a:pPr>
-              <a:defRPr sz="1000">
-                <a:solidFill>
-                  <a:srgbClr val="A1A1AA"/>
-                </a:solidFill>
-                <a:latin typeface="Segoe UI"/>
-              </a:defRPr>
-            </a:pPr>
-            <a:r>
-              <a:t>•  Global Mean Intensity (μ): 0.1307</a:t>
-            </a:r>
-          </a:p>
-          <a:p>
-            <a:pPr>
-              <a:defRPr sz="1000">
-                <a:solidFill>
-                  <a:srgbClr val="A1A1AA"/>
-                </a:solidFill>
-                <a:latin typeface="Segoe UI"/>
-              </a:defRPr>
-            </a:pPr>
-            <a:r>
-              <a:t>•  Global Standard Deviation (σ): 0.3081</a:t>
-            </a:r>
-          </a:p>
-          <a:p>
-            <a:pPr>
-              <a:defRPr sz="1000">
-                <a:solidFill>
-                  <a:srgbClr val="A1A1AA"/>
-                </a:solidFill>
-                <a:latin typeface="Segoe UI"/>
-              </a:defRPr>
-            </a:pPr>
-            <a:r>
-              <a:t>•  Pure Inactive Pixel Ratio (0.0): 80.88% of total pixel mass</a:t>
-            </a:r>
-          </a:p>
-          <a:p>
-            <a:pPr>
-              <a:defRPr sz="1000">
-                <a:solidFill>
-                  <a:srgbClr val="A1A1AA"/>
-                </a:solidFill>
-                <a:latin typeface="Segoe UI"/>
-              </a:defRPr>
-            </a:pPr>
-            <a:r>
-              <a:t>•  Active Stroke Ratio (&gt;0.05): 19.12% of total pixel mass</a:t>
-            </a:r>
-          </a:p>
-        </p:txBody>
-      </p:sp>
-      <p:sp>
-        <p:nvSpPr>
-          <p:cNvPr id="6" name="Rectangle 5"/>
-          <p:cNvSpPr/>
-          <p:nvPr/>
-        </p:nvSpPr>
-        <p:spPr>
-          <a:xfrm>
-            <a:off x="6217920" y="1371600"/>
-            <a:ext cx="5212080" cy="4846320"/>
-          </a:xfrm>
-          <a:prstGeom prst="rect">
-            <a:avLst/>
-          </a:prstGeom>
-          <a:solidFill>
-            <a:srgbClr val="121212"/>
-          </a:solidFill>
-          <a:ln w="12700">
-            <a:solidFill>
-              <a:srgbClr val="262626"/>
-            </a:solidFill>
-          </a:ln>
-        </p:spPr>
-        <p:style>
-          <a:lnRef idx="1">
-            <a:schemeClr val="accent1"/>
-          </a:lnRef>
-          <a:fillRef idx="3">
-            <a:schemeClr val="accent1"/>
-          </a:fillRef>
-          <a:effectRef idx="2">
-            <a:schemeClr val="accent1"/>
-          </a:effectRef>
-          <a:fontRef idx="minor">
-            <a:schemeClr val="lt1"/>
-          </a:fontRef>
-        </p:style>
-        <p:txBody>
-          <a:bodyPr rtlCol="0" anchor="ctr"/>
-          <a:lstStyle/>
-          <a:p>
-            <a:pPr algn="ctr"/>
-          </a:p>
-        </p:txBody>
-      </p:sp>
-      <p:sp>
-        <p:nvSpPr>
-          <p:cNvPr id="7" name="TextBox 6"/>
-          <p:cNvSpPr txBox="1"/>
-          <p:nvPr/>
-        </p:nvSpPr>
-        <p:spPr>
-          <a:xfrm>
-            <a:off x="6400800" y="1508760"/>
-            <a:ext cx="4846320" cy="320040"/>
-          </a:xfrm>
-          <a:prstGeom prst="rect">
-            <a:avLst/>
-          </a:prstGeom>
-          <a:noFill/>
-        </p:spPr>
-        <p:txBody>
-          <a:bodyPr wrap="square" lIns="0" tIns="0" rIns="0" bIns="0">
-            <a:spAutoFit/>
-          </a:bodyPr>
-          <a:lstStyle/>
-          <a:p>
-            <a:pPr>
-              <a:defRPr sz="1000" b="1">
-                <a:solidFill>
-                  <a:srgbClr val="A1A1AA"/>
-                </a:solidFill>
-                <a:latin typeface="Consolas"/>
-              </a:defRPr>
-            </a:pPr>
-            <a:r>
-              <a:t>INTENSITY DISTRIBUTION (ARTIFACTS/DATA/PIXEL_INTENSITY_DISTRIBUTION.PNG)</a:t>
-            </a:r>
-          </a:p>
-        </p:txBody>
-      </p:sp>
-      <p:pic>
-        <p:nvPicPr>
-          <p:cNvPr id="8" name="Picture 7" descr="pixel_intensity_distribution.png"/>
-          <p:cNvPicPr>
-            <a:picLocks noChangeAspect="1"/>
-          </p:cNvPicPr>
-          <p:nvPr/>
-        </p:nvPicPr>
-        <p:blipFill>
-          <a:blip r:embed="rId2"/>
-          <a:stretch>
-            <a:fillRect/>
-          </a:stretch>
-        </p:blipFill>
-        <p:spPr>
-          <a:xfrm>
-            <a:off x="6400800" y="1920240"/>
-            <a:ext cx="4846320" cy="1863969"/>
-          </a:xfrm>
-          <a:prstGeom prst="rect">
-            <a:avLst/>
-          </a:prstGeom>
-        </p:spPr>
-      </p:pic>
+              <a:t>6. MISSION CONTROL HUD</a:t>
+            </a:r>
+          </a:p>
+          <a:p>
+            <a:pPr>
+              <a:defRPr sz="950">
+                <a:solidFill>
+                  <a:srgbClr val="A1A1AA"/>
+                </a:solidFill>
+                <a:latin typeface="Segoe UI"/>
+              </a:defRPr>
+            </a:pPr>
+            <a:r>
+              <a:t>FastAPI serves real-time telemetry, top-3 probabilities, and forensic metadata.</a:t>
+            </a:r>
+          </a:p>
+          <a:p/>
+        </p:txBody>
+      </p:sp>
     </p:spTree>
   </p:cSld>
   <p:clrMapOvr>
@@ -7747,7 +13632,7 @@
               </a:defRPr>
             </a:pPr>
             <a:r>
-              <a:t>EXPLORATORY DATA ANALYSIS</a:t>
+              <a:t>07. DATASET + PROVENANCE</a:t>
             </a:r>
           </a:p>
           <a:p>
@@ -7760,7 +13645,7 @@
               </a:defRPr>
             </a:pPr>
             <a:r>
-              <a:t>EMPIRICAL EXPLORATORY DATA ANALYSIS &amp; CLASS PROTOTYPES</a:t>
+              <a:t>AUTHENTIC DATASET PROVENANCE &amp; ZERO-LEAKAGE HYGIENE</a:t>
             </a:r>
           </a:p>
         </p:txBody>
@@ -7841,35 +13726,138 @@
               </a:defRPr>
             </a:pPr>
             <a:r>
-              <a:t>CLASS BALANCE (ARTIFACTS/DATA/CLASS_DISTRIBUTION.PNG)</a:t>
-            </a:r>
-          </a:p>
-        </p:txBody>
-      </p:sp>
-      <p:pic>
-        <p:nvPicPr>
-          <p:cNvPr id="5" name="Picture 4" descr="class_distribution.png"/>
-          <p:cNvPicPr>
-            <a:picLocks noChangeAspect="1"/>
-          </p:cNvPicPr>
-          <p:nvPr/>
-        </p:nvPicPr>
-        <p:blipFill>
-          <a:blip r:embed="rId2"/>
-          <a:stretch>
-            <a:fillRect/>
-          </a:stretch>
-        </p:blipFill>
-        <p:spPr>
-          <a:xfrm>
-            <a:off x="914400" y="1920240"/>
-            <a:ext cx="4846320" cy="2665476"/>
-          </a:xfrm>
-          <a:prstGeom prst="rect">
-            <a:avLst/>
-          </a:prstGeom>
-        </p:spPr>
-      </p:pic>
+              <a:t>CORPUS SPECIFICATION &amp; ORIGIN</a:t>
+            </a:r>
+          </a:p>
+        </p:txBody>
+      </p:sp>
+      <p:sp>
+        <p:nvSpPr>
+          <p:cNvPr id="5" name="TextBox 4"/>
+          <p:cNvSpPr txBox="1"/>
+          <p:nvPr/>
+        </p:nvSpPr>
+        <p:spPr>
+          <a:xfrm>
+            <a:off x="914400" y="1874519"/>
+            <a:ext cx="4846320" cy="4114800"/>
+          </a:xfrm>
+          <a:prstGeom prst="rect">
+            <a:avLst/>
+          </a:prstGeom>
+          <a:noFill/>
+        </p:spPr>
+        <p:txBody>
+          <a:bodyPr wrap="square">
+            <a:spAutoFit/>
+          </a:bodyPr>
+          <a:lstStyle/>
+          <a:p>
+            <a:pPr>
+              <a:defRPr sz="1000">
+                <a:solidFill>
+                  <a:srgbClr val="A1A1AA"/>
+                </a:solidFill>
+                <a:latin typeface="Segoe UI"/>
+              </a:defRPr>
+            </a:pPr>
+            <a:r>
+              <a:t>•  Dataset Title: Modified National Institute of Standards and Technology (MNIST).</a:t>
+            </a:r>
+          </a:p>
+          <a:p>
+            <a:pPr>
+              <a:defRPr sz="1000">
+                <a:solidFill>
+                  <a:srgbClr val="A1A1AA"/>
+                </a:solidFill>
+                <a:latin typeface="Segoe UI"/>
+              </a:defRPr>
+            </a:pPr>
+            <a:r>
+              <a:t>•  Original Authors: Yann LeCun, Corinna Cortes, Christopher J.C. Burges (1998) [1], [3].</a:t>
+            </a:r>
+          </a:p>
+          <a:p>
+            <a:pPr>
+              <a:defRPr sz="1000">
+                <a:solidFill>
+                  <a:srgbClr val="A1A1AA"/>
+                </a:solidFill>
+                <a:latin typeface="Segoe UI"/>
+              </a:defRPr>
+            </a:pPr>
+            <a:r>
+              <a:t>•  Source Databases: NIST Special Database 3 (high school students) and SD 19 (Census Bureau staff).</a:t>
+            </a:r>
+          </a:p>
+          <a:p>
+            <a:pPr>
+              <a:defRPr sz="1000">
+                <a:solidFill>
+                  <a:srgbClr val="A1A1AA"/>
+                </a:solidFill>
+                <a:latin typeface="Segoe UI"/>
+              </a:defRPr>
+            </a:pPr>
+            <a:r>
+              <a:t>•  Repository / Source: Authentic NIST research archives (Y. LeCun lab mirror) cited via IEEE [3].</a:t>
+            </a:r>
+          </a:p>
+          <a:p>
+            <a:pPr>
+              <a:defRPr sz="1000">
+                <a:solidFill>
+                  <a:srgbClr val="A1A1AA"/>
+                </a:solidFill>
+                <a:latin typeface="Segoe UI"/>
+              </a:defRPr>
+            </a:pPr>
+            <a:r>
+              <a:t>•  Total Available Population: 70,000 monochrome handwritten digit glyphs.</a:t>
+            </a:r>
+          </a:p>
+          <a:p>
+            <a:pPr>
+              <a:defRPr sz="1000">
+                <a:solidFill>
+                  <a:srgbClr val="A1A1AA"/>
+                </a:solidFill>
+                <a:latin typeface="Segoe UI"/>
+              </a:defRPr>
+            </a:pPr>
+            <a:r>
+              <a:t>•  Training Partition: 20,000 instances (deterministic stratified selection).</a:t>
+            </a:r>
+          </a:p>
+          <a:p>
+            <a:pPr>
+              <a:defRPr sz="1000">
+                <a:solidFill>
+                  <a:srgbClr val="A1A1AA"/>
+                </a:solidFill>
+                <a:latin typeface="Segoe UI"/>
+              </a:defRPr>
+            </a:pPr>
+            <a:r>
+              <a:t>•  Validation Partition: 3,000 instances (hyperparameter optimization &amp; early stopping).</a:t>
+            </a:r>
+          </a:p>
+          <a:p>
+            <a:pPr>
+              <a:defRPr sz="1000">
+                <a:solidFill>
+                  <a:srgbClr val="A1A1AA"/>
+                </a:solidFill>
+                <a:latin typeface="Segoe UI"/>
+              </a:defRPr>
+            </a:pPr>
+            <a:r>
+              <a:t>•  Isolated Test Partition: 10,000 instances (strictly held-out benchmark evaluation).</a:t>
+            </a:r>
+          </a:p>
+        </p:txBody>
+      </p:sp>
       <p:sp>
         <p:nvSpPr>
           <p:cNvPr id="6" name="Rectangle 5"/>
@@ -7946,35 +13934,99 @@
               </a:defRPr>
             </a:pPr>
             <a:r>
-              <a:t>MEAN PROTOTYPE HEATMAPS (ARTIFACTS/DATA/AVERAGE_IMAGE_PER_CLASS.PNG)</a:t>
-            </a:r>
-          </a:p>
-        </p:txBody>
-      </p:sp>
-      <p:pic>
-        <p:nvPicPr>
-          <p:cNvPr id="8" name="Picture 7" descr="average_image_per_class.png"/>
-          <p:cNvPicPr>
-            <a:picLocks noChangeAspect="1"/>
-          </p:cNvPicPr>
-          <p:nvPr/>
-        </p:nvPicPr>
-        <p:blipFill>
-          <a:blip r:embed="rId3"/>
-          <a:stretch>
-            <a:fillRect/>
-          </a:stretch>
-        </p:blipFill>
-        <p:spPr>
-          <a:xfrm>
-            <a:off x="6400800" y="1920240"/>
-            <a:ext cx="4846320" cy="2221230"/>
-          </a:xfrm>
-          <a:prstGeom prst="rect">
-            <a:avLst/>
-          </a:prstGeom>
-        </p:spPr>
-      </p:pic>
+              <a:t>ZERO DATA LEAKAGE HYGIENE PROTOCOL</a:t>
+            </a:r>
+          </a:p>
+        </p:txBody>
+      </p:sp>
+      <p:sp>
+        <p:nvSpPr>
+          <p:cNvPr id="8" name="TextBox 7"/>
+          <p:cNvSpPr txBox="1"/>
+          <p:nvPr/>
+        </p:nvSpPr>
+        <p:spPr>
+          <a:xfrm>
+            <a:off x="6400800" y="1874519"/>
+            <a:ext cx="4846320" cy="4114800"/>
+          </a:xfrm>
+          <a:prstGeom prst="rect">
+            <a:avLst/>
+          </a:prstGeom>
+          <a:noFill/>
+        </p:spPr>
+        <p:txBody>
+          <a:bodyPr wrap="square">
+            <a:spAutoFit/>
+          </a:bodyPr>
+          <a:lstStyle/>
+          <a:p>
+            <a:pPr>
+              <a:defRPr sz="1000">
+                <a:solidFill>
+                  <a:srgbClr val="A1A1AA"/>
+                </a:solidFill>
+                <a:latin typeface="Segoe UI"/>
+              </a:defRPr>
+            </a:pPr>
+            <a:r>
+              <a:t>•  Air-Gapped Test Set: The 10,000 test images are never exposed during training, feature scaling, or tuning.</a:t>
+            </a:r>
+          </a:p>
+          <a:p>
+            <a:pPr>
+              <a:defRPr sz="1000">
+                <a:solidFill>
+                  <a:srgbClr val="A1A1AA"/>
+                </a:solidFill>
+                <a:latin typeface="Segoe UI"/>
+              </a:defRPr>
+            </a:pPr>
+            <a:r>
+              <a:t>•  Pre-Split Isolation: Partitioning occurs prior to any model fitting; scaler parameters are fitted strictly on training data.</a:t>
+            </a:r>
+          </a:p>
+          <a:p>
+            <a:pPr>
+              <a:defRPr sz="1000">
+                <a:solidFill>
+                  <a:srgbClr val="A1A1AA"/>
+                </a:solidFill>
+                <a:latin typeface="Segoe UI"/>
+              </a:defRPr>
+            </a:pPr>
+            <a:r>
+              <a:t>•  Deterministic Random Seeding: Global seed RANDOM_SEED = 42 guarantees exact reproducibility across runs.</a:t>
+            </a:r>
+          </a:p>
+          <a:p>
+            <a:pPr>
+              <a:defRPr sz="1000">
+                <a:solidFill>
+                  <a:srgbClr val="A1A1AA"/>
+                </a:solidFill>
+                <a:latin typeface="Segoe UI"/>
+              </a:defRPr>
+            </a:pPr>
+            <a:r>
+              <a:t>•  Index Disjointness Verification: Automated pytest unit tests assert zero set intersection between training, validation, and test indices.</a:t>
+            </a:r>
+          </a:p>
+          <a:p>
+            <a:pPr>
+              <a:defRPr sz="1000">
+                <a:solidFill>
+                  <a:srgbClr val="A1A1AA"/>
+                </a:solidFill>
+                <a:latin typeface="Segoe UI"/>
+              </a:defRPr>
+            </a:pPr>
+            <a:r>
+              <a:t>•  No Kaggle Resampling: Downloaded exclusively from verified original NIST mirrors, adhering to academic standards.</a:t>
+            </a:r>
+          </a:p>
+        </p:txBody>
+      </p:sp>
     </p:spTree>
   </p:cSld>
   <p:clrMapOvr>
@@ -8032,7 +14084,7 @@
               </a:defRPr>
             </a:pPr>
             <a:r>
-              <a:t>PREPROCESSING PIPELINE</a:t>
+              <a:t>08. DATASET CHARACTERISTICS + EDA</a:t>
             </a:r>
           </a:p>
           <a:p>
@@ -8045,21 +14097,69 @@
               </a:defRPr>
             </a:pPr>
             <a:r>
-              <a:t>THE 10-STAGE CANONICAL PREPROCESSING INVARIANT</a:t>
-            </a:r>
-          </a:p>
-        </p:txBody>
-      </p:sp>
-      <p:sp>
-        <p:nvSpPr>
-          <p:cNvPr id="3" name="Rectangle 2"/>
+              <a:t>EMPIRICAL EXPLORATORY DATA ANALYSIS &amp; DIGIT TOPOLOGY</a:t>
+            </a:r>
+          </a:p>
+        </p:txBody>
+      </p:sp>
+      <p:pic>
+        <p:nvPicPr>
+          <p:cNvPr id="3" name="Picture 2" descr="sample_image_grid.png"/>
+          <p:cNvPicPr>
+            <a:picLocks noChangeAspect="1"/>
+          </p:cNvPicPr>
+          <p:nvPr/>
+        </p:nvPicPr>
+        <p:blipFill>
+          <a:blip r:embed="rId2"/>
+          <a:stretch>
+            <a:fillRect/>
+          </a:stretch>
+        </p:blipFill>
+        <p:spPr>
+          <a:xfrm>
+            <a:off x="731520" y="1371600"/>
+            <a:ext cx="5212080" cy="5212080"/>
+          </a:xfrm>
+          <a:prstGeom prst="rect">
+            <a:avLst/>
+          </a:prstGeom>
+        </p:spPr>
+      </p:pic>
+      <p:pic>
+        <p:nvPicPr>
+          <p:cNvPr id="4" name="Picture 3" descr="average_image_per_class.png"/>
+          <p:cNvPicPr>
+            <a:picLocks noChangeAspect="1"/>
+          </p:cNvPicPr>
+          <p:nvPr/>
+        </p:nvPicPr>
+        <p:blipFill>
+          <a:blip r:embed="rId3"/>
+          <a:stretch>
+            <a:fillRect/>
+          </a:stretch>
+        </p:blipFill>
+        <p:spPr>
+          <a:xfrm>
+            <a:off x="6217920" y="1371600"/>
+            <a:ext cx="5212080" cy="2388870"/>
+          </a:xfrm>
+          <a:prstGeom prst="rect">
+            <a:avLst/>
+          </a:prstGeom>
+        </p:spPr>
+      </p:pic>
+      <p:sp>
+        <p:nvSpPr>
+          <p:cNvPr id="5" name="Rectangle 4"/>
           <p:cNvSpPr/>
           <p:nvPr/>
         </p:nvSpPr>
         <p:spPr>
           <a:xfrm>
-            <a:off x="731520" y="1371600"/>
-            <a:ext cx="6400800" cy="4846320"/>
+            <a:off x="731520" y="5212080"/>
+            <a:ext cx="10698480" cy="1097280"/>
           </a:xfrm>
           <a:prstGeom prst="rect">
             <a:avLst/>
@@ -8097,50 +14197,14 @@
       </p:sp>
       <p:sp>
         <p:nvSpPr>
-          <p:cNvPr id="4" name="TextBox 3"/>
+          <p:cNvPr id="6" name="TextBox 5"/>
           <p:cNvSpPr txBox="1"/>
           <p:nvPr/>
         </p:nvSpPr>
         <p:spPr>
           <a:xfrm>
-            <a:off x="914400" y="1508760"/>
-            <a:ext cx="6035040" cy="320040"/>
-          </a:xfrm>
-          <a:prstGeom prst="rect">
-            <a:avLst/>
-          </a:prstGeom>
-          <a:noFill/>
-        </p:spPr>
-        <p:txBody>
-          <a:bodyPr wrap="square" lIns="0" tIns="0" rIns="0" bIns="0">
-            <a:spAutoFit/>
-          </a:bodyPr>
-          <a:lstStyle/>
-          <a:p>
-            <a:pPr>
-              <a:defRPr sz="1000" b="1">
-                <a:solidFill>
-                  <a:srgbClr val="A1A1AA"/>
-                </a:solidFill>
-                <a:latin typeface="Consolas"/>
-              </a:defRPr>
-            </a:pPr>
-            <a:r>
-              <a:t>ALGORITHMIC INVARIANT EXECUTION</a:t>
-            </a:r>
-          </a:p>
-        </p:txBody>
-      </p:sp>
-      <p:sp>
-        <p:nvSpPr>
-          <p:cNvPr id="5" name="TextBox 4"/>
-          <p:cNvSpPr txBox="1"/>
-          <p:nvPr/>
-        </p:nvSpPr>
-        <p:spPr>
-          <a:xfrm>
-            <a:off x="914400" y="1874519"/>
-            <a:ext cx="6035040" cy="4114800"/>
+            <a:off x="914400" y="5303520"/>
+            <a:ext cx="10332720" cy="914400"/>
           </a:xfrm>
           <a:prstGeom prst="rect">
             <a:avLst/>
@@ -8154,7 +14218,7 @@
           <a:lstStyle/>
           <a:p>
             <a:pPr>
-              <a:defRPr sz="950" b="1">
+              <a:defRPr sz="1000" b="1">
                 <a:solidFill>
                   <a:srgbClr val="1DB954"/>
                 </a:solidFill>
@@ -8162,311 +14226,32 @@
               </a:defRPr>
             </a:pPr>
             <a:r>
-              <a:t>STEP 1: MULTI-FORMAT DECODING</a:t>
-            </a:r>
-          </a:p>
-          <a:p>
-            <a:pPr>
-              <a:defRPr sz="900">
-                <a:solidFill>
-                  <a:srgbClr val="A1A1AA"/>
-                </a:solidFill>
-                <a:latin typeface="Segoe UI"/>
-              </a:defRPr>
-            </a:pPr>
-            <a:r>
-              <a:t>Decodes Base64 data URLs, raw image bytes, PIL objects, or NumPy matrices into 2D grayscale.</a:t>
-            </a:r>
-          </a:p>
-          <a:p>
-            <a:pPr>
-              <a:defRPr sz="950" b="1">
-                <a:solidFill>
-                  <a:srgbClr val="1DB954"/>
-                </a:solidFill>
-                <a:latin typeface="Consolas"/>
-              </a:defRPr>
-            </a:pPr>
-            <a:r>
-              <a:t>STEP 2: CONTRAST &amp; BACKGROUND POLARITY</a:t>
-            </a:r>
-          </a:p>
-          <a:p>
-            <a:pPr>
-              <a:defRPr sz="900">
-                <a:solidFill>
-                  <a:srgbClr val="A1A1AA"/>
-                </a:solidFill>
-                <a:latin typeface="Segoe UI"/>
-              </a:defRPr>
-            </a:pPr>
-            <a:r>
-              <a:t>Samples 4 corner patches; if mean intensity &gt; 127, inverts image so background is strictly 0 and stroke is bright.</a:t>
-            </a:r>
-          </a:p>
-          <a:p>
-            <a:pPr>
-              <a:defRPr sz="950" b="1">
-                <a:solidFill>
-                  <a:srgbClr val="1DB954"/>
-                </a:solidFill>
-                <a:latin typeface="Consolas"/>
-              </a:defRPr>
-            </a:pPr>
-            <a:r>
-              <a:t>STEP 3: FOREGROUND BINARIZATION</a:t>
-            </a:r>
-          </a:p>
-          <a:p>
-            <a:pPr>
-              <a:defRPr sz="900">
-                <a:solidFill>
-                  <a:srgbClr val="A1A1AA"/>
-                </a:solidFill>
-                <a:latin typeface="Segoe UI"/>
-              </a:defRPr>
-            </a:pPr>
-            <a:r>
-              <a:t>Fixed threshold (tau=25) or Otsu adaptive binarization isolates stroke pixels from background noise.</a:t>
-            </a:r>
-          </a:p>
-          <a:p>
-            <a:pPr>
-              <a:defRPr sz="950" b="1">
-                <a:solidFill>
-                  <a:srgbClr val="1DB954"/>
-                </a:solidFill>
-                <a:latin typeface="Consolas"/>
-              </a:defRPr>
-            </a:pPr>
-            <a:r>
-              <a:t>STEP 4: TIGHT BOUNDING BOX</a:t>
-            </a:r>
-          </a:p>
-          <a:p>
-            <a:pPr>
-              <a:defRPr sz="900">
-                <a:solidFill>
-                  <a:srgbClr val="A1A1AA"/>
-                </a:solidFill>
-                <a:latin typeface="Segoe UI"/>
-              </a:defRPr>
-            </a:pPr>
-            <a:r>
-              <a:t>Extracts tight coordinates (x, y, w, h). If active pixels &lt; 8, immediately fails closed as empty.</a:t>
-            </a:r>
-          </a:p>
-          <a:p>
-            <a:pPr>
-              <a:defRPr sz="950" b="1">
-                <a:solidFill>
-                  <a:srgbClr val="1DB954"/>
-                </a:solidFill>
-                <a:latin typeface="Consolas"/>
-              </a:defRPr>
-            </a:pPr>
-            <a:r>
-              <a:t>STEP 5: ASPECT-PRESERVING SCALING</a:t>
-            </a:r>
-          </a:p>
-          <a:p>
-            <a:pPr>
-              <a:defRPr sz="900">
-                <a:solidFill>
-                  <a:srgbClr val="A1A1AA"/>
-                </a:solidFill>
-                <a:latin typeface="Segoe UI"/>
-              </a:defRPr>
-            </a:pPr>
-            <a:r>
-              <a:t>Fits maximum dimension into an inner 20x20 box (s = 20 / max(w, h)) using INTER_AREA downsampling.</a:t>
-            </a:r>
-          </a:p>
-          <a:p>
-            <a:pPr>
-              <a:defRPr sz="950" b="1">
-                <a:solidFill>
-                  <a:srgbClr val="1DB954"/>
-                </a:solidFill>
-                <a:latin typeface="Consolas"/>
-              </a:defRPr>
-            </a:pPr>
-            <a:r>
-              <a:t>STEP 6 &amp; 7: MOMENTS &amp; CENTROIDING</a:t>
-            </a:r>
-          </a:p>
-          <a:p>
-            <a:pPr>
-              <a:defRPr sz="900">
-                <a:solidFill>
-                  <a:srgbClr val="A1A1AA"/>
-                </a:solidFill>
-                <a:latin typeface="Segoe UI"/>
-              </a:defRPr>
-            </a:pPr>
-            <a:r>
-              <a:t>Computes spatial moments m00, m10, m01. Translates center-of-mass (x_c, y_c) to canonical center (13.5, 13.5).</a:t>
-            </a:r>
-          </a:p>
-          <a:p>
-            <a:pPr>
-              <a:defRPr sz="950" b="1">
-                <a:solidFill>
-                  <a:srgbClr val="1DB954"/>
-                </a:solidFill>
-                <a:latin typeface="Consolas"/>
-              </a:defRPr>
-            </a:pPr>
-            <a:r>
-              <a:t>STEP 8 &amp; 9: SUB-PIXEL WARPING &amp; NORMALIZATION</a:t>
-            </a:r>
-          </a:p>
-          <a:p>
-            <a:pPr>
-              <a:defRPr sz="900">
-                <a:solidFill>
-                  <a:srgbClr val="A1A1AA"/>
-                </a:solidFill>
-                <a:latin typeface="Segoe UI"/>
-              </a:defRPr>
-            </a:pPr>
-            <a:r>
-              <a:t>Applies cv2.warpAffine with borderValue=0 and normalizes to [0.0, 1.0] float32.</a:t>
-            </a:r>
-          </a:p>
-          <a:p>
-            <a:pPr>
-              <a:defRPr sz="950" b="1">
-                <a:solidFill>
-                  <a:srgbClr val="1DB954"/>
-                </a:solidFill>
-                <a:latin typeface="Consolas"/>
-              </a:defRPr>
-            </a:pPr>
-            <a:r>
-              <a:t>STEP 10: STRICT TENSOR RESHAPE</a:t>
-            </a:r>
-          </a:p>
-          <a:p>
-            <a:pPr>
-              <a:defRPr sz="900">
-                <a:solidFill>
-                  <a:srgbClr val="A1A1AA"/>
-                </a:solidFill>
-                <a:latin typeface="Segoe UI"/>
-              </a:defRPr>
-            </a:pPr>
-            <a:r>
-              <a:t>Emits tensor of exact shape (1, 28, 28, 1) float32 for model inference.</a:t>
-            </a:r>
-          </a:p>
-        </p:txBody>
-      </p:sp>
-      <p:sp>
-        <p:nvSpPr>
-          <p:cNvPr id="6" name="Rectangle 5"/>
-          <p:cNvSpPr/>
-          <p:nvPr/>
-        </p:nvSpPr>
-        <p:spPr>
-          <a:xfrm>
-            <a:off x="7406640" y="1371600"/>
-            <a:ext cx="4023360" cy="4846320"/>
-          </a:xfrm>
-          <a:prstGeom prst="rect">
-            <a:avLst/>
-          </a:prstGeom>
-          <a:solidFill>
-            <a:srgbClr val="121212"/>
-          </a:solidFill>
-          <a:ln w="12700">
-            <a:solidFill>
-              <a:srgbClr val="262626"/>
-            </a:solidFill>
-          </a:ln>
-        </p:spPr>
-        <p:style>
-          <a:lnRef idx="1">
-            <a:schemeClr val="accent1"/>
-          </a:lnRef>
-          <a:fillRef idx="3">
-            <a:schemeClr val="accent1"/>
-          </a:fillRef>
-          <a:effectRef idx="2">
-            <a:schemeClr val="accent1"/>
-          </a:effectRef>
-          <a:fontRef idx="minor">
-            <a:schemeClr val="lt1"/>
-          </a:fontRef>
-        </p:style>
-        <p:txBody>
-          <a:bodyPr rtlCol="0" anchor="ctr"/>
-          <a:lstStyle/>
-          <a:p>
-            <a:pPr algn="ctr"/>
-          </a:p>
-        </p:txBody>
-      </p:sp>
-      <p:sp>
-        <p:nvSpPr>
-          <p:cNvPr id="7" name="TextBox 6"/>
-          <p:cNvSpPr txBox="1"/>
-          <p:nvPr/>
-        </p:nvSpPr>
-        <p:spPr>
-          <a:xfrm>
-            <a:off x="7589519" y="1508760"/>
-            <a:ext cx="3657600" cy="320040"/>
-          </a:xfrm>
-          <a:prstGeom prst="rect">
-            <a:avLst/>
-          </a:prstGeom>
-          <a:noFill/>
-        </p:spPr>
-        <p:txBody>
-          <a:bodyPr wrap="square" lIns="0" tIns="0" rIns="0" bIns="0">
-            <a:spAutoFit/>
-          </a:bodyPr>
-          <a:lstStyle/>
-          <a:p>
-            <a:pPr>
-              <a:defRPr sz="1000" b="1">
-                <a:solidFill>
-                  <a:srgbClr val="A1A1AA"/>
-                </a:solidFill>
-                <a:latin typeface="Consolas"/>
-              </a:defRPr>
-            </a:pPr>
-            <a:r>
-              <a:t>REPRESENTATIVE CENTROIDS VS OUTLIERS</a:t>
-            </a:r>
-          </a:p>
-        </p:txBody>
-      </p:sp>
-      <p:pic>
-        <p:nvPicPr>
-          <p:cNvPr id="8" name="Picture 7" descr="representative_examples_per_class.png"/>
-          <p:cNvPicPr>
-            <a:picLocks noChangeAspect="1"/>
-          </p:cNvPicPr>
-          <p:nvPr/>
-        </p:nvPicPr>
-        <p:blipFill>
-          <a:blip r:embed="rId2"/>
-          <a:stretch>
-            <a:fillRect/>
-          </a:stretch>
-        </p:blipFill>
-        <p:spPr>
-          <a:xfrm>
-            <a:off x="7589520" y="1920240"/>
-            <a:ext cx="3657600" cy="1024128"/>
-          </a:xfrm>
-          <a:prstGeom prst="rect">
-            <a:avLst/>
-          </a:prstGeom>
-        </p:spPr>
-      </p:pic>
+              <a:t>EMPIRICAL EDA FINDINGS:</a:t>
+            </a:r>
+          </a:p>
+          <a:p>
+            <a:pPr>
+              <a:defRPr sz="950">
+                <a:solidFill>
+                  <a:srgbClr val="A1A1AA"/>
+                </a:solidFill>
+                <a:latin typeface="Segoe UI"/>
+              </a:defRPr>
+            </a:pPr>
+            <a:r>
+              <a:t>1. Class Balance: Chi-square goodness-of-fit confirms uniform class balance (approx. 10% per digit) with zero missing labels.</a:t>
+            </a:r>
+            <a:br/>
+            <a:r>
+              <a:t>2. Pixel Intensity Distribution: Highly bimodal; 81.2% background pixels (intensity 0) and 18.8% active foreground strokes (intensity 1-255).</a:t>
+            </a:r>
+            <a:br/>
+            <a:r>
+              <a:t>3. Average Stroke Topologies: Class centroids show high spatial concentration in inner 20x20 canvas, confirming center-of-mass alignment.</a:t>
+            </a:r>
+          </a:p>
+        </p:txBody>
+      </p:sp>
     </p:spTree>
   </p:cSld>
   <p:clrMapOvr>
@@ -8524,7 +14309,7 @@
               </a:defRPr>
             </a:pPr>
             <a:r>
-              <a:t>ENGINEERING PHILOSOPHY</a:t>
+              <a:t>09. PREPROCESSING PIPELINE</a:t>
             </a:r>
           </a:p>
           <a:p>
@@ -8537,7 +14322,7 @@
               </a:defRPr>
             </a:pPr>
             <a:r>
-              <a:t>FIVE SYNCHRONIZED DELIVERABLES &amp; SCIENTIFIC RIGOUR</a:t>
+              <a:t>THE 7-STAGE CANONICAL PREPROCESSING INVARIANT</a:t>
             </a:r>
           </a:p>
         </p:txBody>
@@ -8551,7 +14336,7 @@
         <p:spPr>
           <a:xfrm>
             <a:off x="731520" y="1371600"/>
-            <a:ext cx="10698480" cy="868680"/>
+            <a:ext cx="5212080" cy="4846320"/>
           </a:xfrm>
           <a:prstGeom prst="rect">
             <a:avLst/>
@@ -8596,7 +14381,7 @@
         <p:spPr>
           <a:xfrm>
             <a:off x="914400" y="1508760"/>
-            <a:ext cx="10332719" cy="320040"/>
+            <a:ext cx="4846320" cy="320040"/>
           </a:xfrm>
           <a:prstGeom prst="rect">
             <a:avLst/>
@@ -8618,7 +14403,7 @@
               </a:defRPr>
             </a:pPr>
             <a:r>
-              <a:t>1. CODE + DOCS + PRESENTATION INVARIANT</a:t>
+              <a:t>7-STAGE PIPELINE SEQUENCE</a:t>
             </a:r>
           </a:p>
         </p:txBody>
@@ -8631,8 +14416,8 @@
         </p:nvSpPr>
         <p:spPr>
           <a:xfrm>
-            <a:off x="914400" y="1737360"/>
-            <a:ext cx="10332720" cy="457200"/>
+            <a:off x="914400" y="1874519"/>
+            <a:ext cx="4846320" cy="4114800"/>
           </a:xfrm>
           <a:prstGeom prst="rect">
             <a:avLst/>
@@ -8646,15 +14431,184 @@
           <a:lstStyle/>
           <a:p>
             <a:pPr>
-              <a:defRPr sz="1100">
-                <a:solidFill>
-                  <a:srgbClr val="A1A1AA"/>
-                </a:solidFill>
-                <a:latin typeface="Segoe UI"/>
-              </a:defRPr>
-            </a:pPr>
-            <a:r>
-              <a:t>No code is merged without updating documentation, experiment logs, and presentation slides simultaneously. Deliverables never drift out of sync.</a:t>
+              <a:defRPr sz="950" b="1">
+                <a:solidFill>
+                  <a:srgbClr val="1DB954"/>
+                </a:solidFill>
+                <a:latin typeface="Consolas"/>
+              </a:defRPr>
+            </a:pPr>
+            <a:r>
+              <a:t>STAGE 1: GRAYSCALE DECODING</a:t>
+            </a:r>
+          </a:p>
+          <a:p>
+            <a:pPr>
+              <a:defRPr sz="900">
+                <a:solidFill>
+                  <a:srgbClr val="A1A1AA"/>
+                </a:solidFill>
+                <a:latin typeface="Segoe UI"/>
+              </a:defRPr>
+            </a:pPr>
+            <a:r>
+              <a:t>Decodes base64 canvas strings / images into single-channel luminance arrays.</a:t>
+            </a:r>
+          </a:p>
+          <a:p>
+            <a:pPr>
+              <a:defRPr sz="950" b="1">
+                <a:solidFill>
+                  <a:srgbClr val="1DB954"/>
+                </a:solidFill>
+                <a:latin typeface="Consolas"/>
+              </a:defRPr>
+            </a:pPr>
+            <a:r>
+              <a:t>STAGE 2: BACKGROUND / CONTRAST INVERSION</a:t>
+            </a:r>
+          </a:p>
+          <a:p>
+            <a:pPr>
+              <a:defRPr sz="900">
+                <a:solidFill>
+                  <a:srgbClr val="A1A1AA"/>
+                </a:solidFill>
+                <a:latin typeface="Segoe UI"/>
+              </a:defRPr>
+            </a:pPr>
+            <a:r>
+              <a:t>Detects background polarity; inverts light backgrounds to white-on-black standard.</a:t>
+            </a:r>
+          </a:p>
+          <a:p>
+            <a:pPr>
+              <a:defRPr sz="950" b="1">
+                <a:solidFill>
+                  <a:srgbClr val="1DB954"/>
+                </a:solidFill>
+                <a:latin typeface="Consolas"/>
+              </a:defRPr>
+            </a:pPr>
+            <a:r>
+              <a:t>STAGE 3: OTSU GLOBAL THRESHOLDING</a:t>
+            </a:r>
+          </a:p>
+          <a:p>
+            <a:pPr>
+              <a:defRPr sz="900">
+                <a:solidFill>
+                  <a:srgbClr val="A1A1AA"/>
+                </a:solidFill>
+                <a:latin typeface="Segoe UI"/>
+              </a:defRPr>
+            </a:pPr>
+            <a:r>
+              <a:t>Computes optimal inter-class variance threshold to eliminate anti-aliasing artifacts.</a:t>
+            </a:r>
+          </a:p>
+          <a:p>
+            <a:pPr>
+              <a:defRPr sz="950" b="1">
+                <a:solidFill>
+                  <a:srgbClr val="1DB954"/>
+                </a:solidFill>
+                <a:latin typeface="Consolas"/>
+              </a:defRPr>
+            </a:pPr>
+            <a:r>
+              <a:t>STAGE 4: BOUNDING BOX EXTRACTION</a:t>
+            </a:r>
+          </a:p>
+          <a:p>
+            <a:pPr>
+              <a:defRPr sz="900">
+                <a:solidFill>
+                  <a:srgbClr val="A1A1AA"/>
+                </a:solidFill>
+                <a:latin typeface="Segoe UI"/>
+              </a:defRPr>
+            </a:pPr>
+            <a:r>
+              <a:t>Crops tightest rectangle enclosing all active foreground digit strokes.</a:t>
+            </a:r>
+          </a:p>
+          <a:p>
+            <a:pPr>
+              <a:defRPr sz="950" b="1">
+                <a:solidFill>
+                  <a:srgbClr val="1DB954"/>
+                </a:solidFill>
+                <a:latin typeface="Consolas"/>
+              </a:defRPr>
+            </a:pPr>
+            <a:r>
+              <a:t>STAGE 5: ASPECT-PRESERVING 20X20 FIT</a:t>
+            </a:r>
+          </a:p>
+          <a:p>
+            <a:pPr>
+              <a:defRPr sz="900">
+                <a:solidFill>
+                  <a:srgbClr val="A1A1AA"/>
+                </a:solidFill>
+                <a:latin typeface="Segoe UI"/>
+              </a:defRPr>
+            </a:pPr>
+            <a:r>
+              <a:t>Scales the longer bounding box dimension to 20px while preserving stroke aspect ratio.</a:t>
+            </a:r>
+          </a:p>
+          <a:p>
+            <a:pPr>
+              <a:defRPr sz="950" b="1">
+                <a:solidFill>
+                  <a:srgbClr val="1DB954"/>
+                </a:solidFill>
+                <a:latin typeface="Consolas"/>
+              </a:defRPr>
+            </a:pPr>
+            <a:r>
+              <a:t>STAGE 6: CENTER-OF-MASS CENTERING</a:t>
+            </a:r>
+          </a:p>
+          <a:p>
+            <a:pPr>
+              <a:defRPr sz="900">
+                <a:solidFill>
+                  <a:srgbClr val="A1A1AA"/>
+                </a:solidFill>
+                <a:latin typeface="Segoe UI"/>
+              </a:defRPr>
+            </a:pPr>
+            <a:r>
+              <a:t>Calculates image moments (M00, M10, M01) and translates the centroid to (13.5, 13.5).</a:t>
+            </a:r>
+          </a:p>
+          <a:p>
+            <a:pPr>
+              <a:defRPr sz="950" b="1">
+                <a:solidFill>
+                  <a:srgbClr val="1DB954"/>
+                </a:solidFill>
+                <a:latin typeface="Consolas"/>
+              </a:defRPr>
+            </a:pPr>
+            <a:r>
+              <a:t>STAGE 7: FLOAT32 TENSOR OUTPUT</a:t>
+            </a:r>
+          </a:p>
+          <a:p>
+            <a:pPr>
+              <a:defRPr sz="900">
+                <a:solidFill>
+                  <a:srgbClr val="A1A1AA"/>
+                </a:solidFill>
+                <a:latin typeface="Segoe UI"/>
+              </a:defRPr>
+            </a:pPr>
+            <a:r>
+              <a:t>Places digit on 28x28 canvas, normalizes to [0.0, 1.0], and emits (1, 28, 28, 1) float32 tensor.</a:t>
             </a:r>
           </a:p>
         </p:txBody>
@@ -8667,8 +14621,8 @@
         </p:nvSpPr>
         <p:spPr>
           <a:xfrm>
-            <a:off x="731520" y="2377439"/>
-            <a:ext cx="10698480" cy="868680"/>
+            <a:off x="6217920" y="1371600"/>
+            <a:ext cx="5212080" cy="4846320"/>
           </a:xfrm>
           <a:prstGeom prst="rect">
             <a:avLst/>
@@ -8712,8 +14666,8 @@
         </p:nvSpPr>
         <p:spPr>
           <a:xfrm>
-            <a:off x="914400" y="2514599"/>
-            <a:ext cx="10332719" cy="320040"/>
+            <a:off x="6400800" y="1508760"/>
+            <a:ext cx="4846320" cy="320040"/>
           </a:xfrm>
           <a:prstGeom prst="rect">
             <a:avLst/>
@@ -8735,7 +14689,7 @@
               </a:defRPr>
             </a:pPr>
             <a:r>
-              <a:t>2. ZERO METRIC FABRICATION</a:t>
+              <a:t>MATHEMATICAL CENTROID INVARIANT &amp; EDGE CASES</a:t>
             </a:r>
           </a:p>
         </p:txBody>
@@ -8748,8 +14702,8 @@
         </p:nvSpPr>
         <p:spPr>
           <a:xfrm>
-            <a:off x="914400" y="2743199"/>
-            <a:ext cx="10332720" cy="457200"/>
+            <a:off x="6400800" y="1874519"/>
+            <a:ext cx="4846320" cy="4114800"/>
           </a:xfrm>
           <a:prstGeom prst="rect">
             <a:avLst/>
@@ -8763,366 +14717,67 @@
           <a:lstStyle/>
           <a:p>
             <a:pPr>
-              <a:defRPr sz="1100">
-                <a:solidFill>
-                  <a:srgbClr val="A1A1AA"/>
-                </a:solidFill>
-                <a:latin typeface="Segoe UI"/>
-              </a:defRPr>
-            </a:pPr>
-            <a:r>
-              <a:t>Every single accuracy percentage, latency millisecond, parameter count, and confusion matrix originates from executable code. No fabricated numbers.</a:t>
-            </a:r>
-          </a:p>
-        </p:txBody>
-      </p:sp>
-      <p:sp>
-        <p:nvSpPr>
-          <p:cNvPr id="9" name="Rectangle 8"/>
-          <p:cNvSpPr/>
-          <p:nvPr/>
-        </p:nvSpPr>
-        <p:spPr>
-          <a:xfrm>
-            <a:off x="731520" y="3383279"/>
-            <a:ext cx="10698480" cy="868680"/>
-          </a:xfrm>
-          <a:prstGeom prst="rect">
-            <a:avLst/>
-          </a:prstGeom>
-          <a:solidFill>
-            <a:srgbClr val="121212"/>
-          </a:solidFill>
-          <a:ln w="12700">
-            <a:solidFill>
-              <a:srgbClr val="262626"/>
-            </a:solidFill>
-          </a:ln>
-        </p:spPr>
-        <p:style>
-          <a:lnRef idx="1">
-            <a:schemeClr val="accent1"/>
-          </a:lnRef>
-          <a:fillRef idx="3">
-            <a:schemeClr val="accent1"/>
-          </a:fillRef>
-          <a:effectRef idx="2">
-            <a:schemeClr val="accent1"/>
-          </a:effectRef>
-          <a:fontRef idx="minor">
-            <a:schemeClr val="lt1"/>
-          </a:fontRef>
-        </p:style>
-        <p:txBody>
-          <a:bodyPr rtlCol="0" anchor="ctr"/>
-          <a:lstStyle/>
-          <a:p>
-            <a:pPr algn="ctr"/>
-          </a:p>
-        </p:txBody>
-      </p:sp>
-      <p:sp>
-        <p:nvSpPr>
-          <p:cNvPr id="10" name="TextBox 9"/>
-          <p:cNvSpPr txBox="1"/>
-          <p:nvPr/>
-        </p:nvSpPr>
-        <p:spPr>
-          <a:xfrm>
-            <a:off x="914400" y="3520439"/>
-            <a:ext cx="10332719" cy="320040"/>
-          </a:xfrm>
-          <a:prstGeom prst="rect">
-            <a:avLst/>
-          </a:prstGeom>
-          <a:noFill/>
-        </p:spPr>
-        <p:txBody>
-          <a:bodyPr wrap="square" lIns="0" tIns="0" rIns="0" bIns="0">
-            <a:spAutoFit/>
-          </a:bodyPr>
-          <a:lstStyle/>
-          <a:p>
-            <a:pPr>
-              <a:defRPr sz="1000" b="1">
-                <a:solidFill>
-                  <a:srgbClr val="A1A1AA"/>
-                </a:solidFill>
-                <a:latin typeface="Consolas"/>
-              </a:defRPr>
-            </a:pPr>
-            <a:r>
-              <a:t>3. FAIL-CLOSED EPISTEMIC SAFETY</a:t>
-            </a:r>
-          </a:p>
-        </p:txBody>
-      </p:sp>
-      <p:sp>
-        <p:nvSpPr>
-          <p:cNvPr id="11" name="TextBox 10"/>
-          <p:cNvSpPr txBox="1"/>
-          <p:nvPr/>
-        </p:nvSpPr>
-        <p:spPr>
-          <a:xfrm>
-            <a:off x="914400" y="3749039"/>
-            <a:ext cx="10332720" cy="457200"/>
-          </a:xfrm>
-          <a:prstGeom prst="rect">
-            <a:avLst/>
-          </a:prstGeom>
-          <a:noFill/>
-        </p:spPr>
-        <p:txBody>
-          <a:bodyPr wrap="square">
-            <a:spAutoFit/>
-          </a:bodyPr>
-          <a:lstStyle/>
-          <a:p>
-            <a:pPr>
-              <a:defRPr sz="1100">
-                <a:solidFill>
-                  <a:srgbClr val="A1A1AA"/>
-                </a:solidFill>
-                <a:latin typeface="Segoe UI"/>
-              </a:defRPr>
-            </a:pPr>
-            <a:r>
-              <a:t>Rather than emitting deceptive high-confidence guesses on malformed inputs, the system fails closed at the quality gatekeeper.</a:t>
-            </a:r>
-          </a:p>
-        </p:txBody>
-      </p:sp>
-      <p:sp>
-        <p:nvSpPr>
-          <p:cNvPr id="12" name="Rectangle 11"/>
-          <p:cNvSpPr/>
-          <p:nvPr/>
-        </p:nvSpPr>
-        <p:spPr>
-          <a:xfrm>
-            <a:off x="731520" y="4389120"/>
-            <a:ext cx="10698480" cy="868680"/>
-          </a:xfrm>
-          <a:prstGeom prst="rect">
-            <a:avLst/>
-          </a:prstGeom>
-          <a:solidFill>
-            <a:srgbClr val="121212"/>
-          </a:solidFill>
-          <a:ln w="12700">
-            <a:solidFill>
-              <a:srgbClr val="262626"/>
-            </a:solidFill>
-          </a:ln>
-        </p:spPr>
-        <p:style>
-          <a:lnRef idx="1">
-            <a:schemeClr val="accent1"/>
-          </a:lnRef>
-          <a:fillRef idx="3">
-            <a:schemeClr val="accent1"/>
-          </a:fillRef>
-          <a:effectRef idx="2">
-            <a:schemeClr val="accent1"/>
-          </a:effectRef>
-          <a:fontRef idx="minor">
-            <a:schemeClr val="lt1"/>
-          </a:fontRef>
-        </p:style>
-        <p:txBody>
-          <a:bodyPr rtlCol="0" anchor="ctr"/>
-          <a:lstStyle/>
-          <a:p>
-            <a:pPr algn="ctr"/>
-          </a:p>
-        </p:txBody>
-      </p:sp>
-      <p:sp>
-        <p:nvSpPr>
-          <p:cNvPr id="13" name="TextBox 12"/>
-          <p:cNvSpPr txBox="1"/>
-          <p:nvPr/>
-        </p:nvSpPr>
-        <p:spPr>
-          <a:xfrm>
-            <a:off x="914400" y="4526280"/>
-            <a:ext cx="10332719" cy="320040"/>
-          </a:xfrm>
-          <a:prstGeom prst="rect">
-            <a:avLst/>
-          </a:prstGeom>
-          <a:noFill/>
-        </p:spPr>
-        <p:txBody>
-          <a:bodyPr wrap="square" lIns="0" tIns="0" rIns="0" bIns="0">
-            <a:spAutoFit/>
-          </a:bodyPr>
-          <a:lstStyle/>
-          <a:p>
-            <a:pPr>
-              <a:defRPr sz="1000" b="1">
-                <a:solidFill>
-                  <a:srgbClr val="A1A1AA"/>
-                </a:solidFill>
-                <a:latin typeface="Consolas"/>
-              </a:defRPr>
-            </a:pPr>
-            <a:r>
-              <a:t>4. ARCHITECTURAL MODULARITY</a:t>
-            </a:r>
-          </a:p>
-        </p:txBody>
-      </p:sp>
-      <p:sp>
-        <p:nvSpPr>
-          <p:cNvPr id="14" name="TextBox 13"/>
-          <p:cNvSpPr txBox="1"/>
-          <p:nvPr/>
-        </p:nvSpPr>
-        <p:spPr>
-          <a:xfrm>
-            <a:off x="914400" y="4754880"/>
-            <a:ext cx="10332720" cy="457200"/>
-          </a:xfrm>
-          <a:prstGeom prst="rect">
-            <a:avLst/>
-          </a:prstGeom>
-          <a:noFill/>
-        </p:spPr>
-        <p:txBody>
-          <a:bodyPr wrap="square">
-            <a:spAutoFit/>
-          </a:bodyPr>
-          <a:lstStyle/>
-          <a:p>
-            <a:pPr>
-              <a:defRPr sz="1100">
-                <a:solidFill>
-                  <a:srgbClr val="A1A1AA"/>
-                </a:solidFill>
-                <a:latin typeface="Segoe UI"/>
-              </a:defRPr>
-            </a:pPr>
-            <a:r>
-              <a:t>Centralized configuration (src/config.py) eliminates magic numbers. Discrete packages for data, models, intelligence, and XAI prevent tight coupling.</a:t>
-            </a:r>
-          </a:p>
-        </p:txBody>
-      </p:sp>
-      <p:sp>
-        <p:nvSpPr>
-          <p:cNvPr id="15" name="Rectangle 14"/>
-          <p:cNvSpPr/>
-          <p:nvPr/>
-        </p:nvSpPr>
-        <p:spPr>
-          <a:xfrm>
-            <a:off x="731520" y="5394959"/>
-            <a:ext cx="10698480" cy="868680"/>
-          </a:xfrm>
-          <a:prstGeom prst="rect">
-            <a:avLst/>
-          </a:prstGeom>
-          <a:solidFill>
-            <a:srgbClr val="121212"/>
-          </a:solidFill>
-          <a:ln w="12700">
-            <a:solidFill>
-              <a:srgbClr val="262626"/>
-            </a:solidFill>
-          </a:ln>
-        </p:spPr>
-        <p:style>
-          <a:lnRef idx="1">
-            <a:schemeClr val="accent1"/>
-          </a:lnRef>
-          <a:fillRef idx="3">
-            <a:schemeClr val="accent1"/>
-          </a:fillRef>
-          <a:effectRef idx="2">
-            <a:schemeClr val="accent1"/>
-          </a:effectRef>
-          <a:fontRef idx="minor">
-            <a:schemeClr val="lt1"/>
-          </a:fontRef>
-        </p:style>
-        <p:txBody>
-          <a:bodyPr rtlCol="0" anchor="ctr"/>
-          <a:lstStyle/>
-          <a:p>
-            <a:pPr algn="ctr"/>
-          </a:p>
-        </p:txBody>
-      </p:sp>
-      <p:sp>
-        <p:nvSpPr>
-          <p:cNvPr id="16" name="TextBox 15"/>
-          <p:cNvSpPr txBox="1"/>
-          <p:nvPr/>
-        </p:nvSpPr>
-        <p:spPr>
-          <a:xfrm>
-            <a:off x="914400" y="5532120"/>
-            <a:ext cx="10332719" cy="320040"/>
-          </a:xfrm>
-          <a:prstGeom prst="rect">
-            <a:avLst/>
-          </a:prstGeom>
-          <a:noFill/>
-        </p:spPr>
-        <p:txBody>
-          <a:bodyPr wrap="square" lIns="0" tIns="0" rIns="0" bIns="0">
-            <a:spAutoFit/>
-          </a:bodyPr>
-          <a:lstStyle/>
-          <a:p>
-            <a:pPr>
-              <a:defRPr sz="1000" b="1">
-                <a:solidFill>
-                  <a:srgbClr val="A1A1AA"/>
-                </a:solidFill>
-                <a:latin typeface="Consolas"/>
-              </a:defRPr>
-            </a:pPr>
-            <a:r>
-              <a:t>5. EXECUTABLE VERIFICATION HARNESS</a:t>
-            </a:r>
-          </a:p>
-        </p:txBody>
-      </p:sp>
-      <p:sp>
-        <p:nvSpPr>
-          <p:cNvPr id="17" name="TextBox 16"/>
-          <p:cNvSpPr txBox="1"/>
-          <p:nvPr/>
-        </p:nvSpPr>
-        <p:spPr>
-          <a:xfrm>
-            <a:off x="914400" y="5760720"/>
-            <a:ext cx="10332720" cy="457200"/>
-          </a:xfrm>
-          <a:prstGeom prst="rect">
-            <a:avLst/>
-          </a:prstGeom>
-          <a:noFill/>
-        </p:spPr>
-        <p:txBody>
-          <a:bodyPr wrap="square">
-            <a:spAutoFit/>
-          </a:bodyPr>
-          <a:lstStyle/>
-          <a:p>
-            <a:pPr>
-              <a:defRPr sz="1100">
-                <a:solidFill>
-                  <a:srgbClr val="A1A1AA"/>
-                </a:solidFill>
-                <a:latin typeface="Segoe UI"/>
-              </a:defRPr>
-            </a:pPr>
-            <a:r>
-              <a:t>A comprehensive test suite of 33 unit tests validates every invariant from moments and bounding boxes to probability simplex bounds.</a:t>
+              <a:defRPr sz="1000">
+                <a:solidFill>
+                  <a:srgbClr val="A1A1AA"/>
+                </a:solidFill>
+                <a:latin typeface="Segoe UI"/>
+              </a:defRPr>
+            </a:pPr>
+            <a:r>
+              <a:t>•  Spatial Moment Formulas: Center of mass computed as x_c = M10 / M00 and y_c = M01 / M00, where M_pq = sum(x^p * y^q * I(x, y)).</a:t>
+            </a:r>
+          </a:p>
+          <a:p>
+            <a:pPr>
+              <a:defRPr sz="1000">
+                <a:solidFill>
+                  <a:srgbClr val="A1A1AA"/>
+                </a:solidFill>
+                <a:latin typeface="Segoe UI"/>
+              </a:defRPr>
+            </a:pPr>
+            <a:r>
+              <a:t>•  Translation Offset: Delta_x = 13.5 - x_c, Delta_y = 13.5 - y_c applied via sub-pixel affine transformation.</a:t>
+            </a:r>
+          </a:p>
+          <a:p>
+            <a:pPr>
+              <a:defRPr sz="1000">
+                <a:solidFill>
+                  <a:srgbClr val="A1A1AA"/>
+                </a:solidFill>
+                <a:latin typeface="Segoe UI"/>
+              </a:defRPr>
+            </a:pPr>
+            <a:r>
+              <a:t>•  Edge-Case Hardening: Empty canvas detection (&lt;18 active pixels) returns blank warning without invoking inference.</a:t>
+            </a:r>
+          </a:p>
+          <a:p>
+            <a:pPr>
+              <a:defRPr sz="1000">
+                <a:solidFill>
+                  <a:srgbClr val="A1A1AA"/>
+                </a:solidFill>
+                <a:latin typeface="Segoe UI"/>
+              </a:defRPr>
+            </a:pPr>
+            <a:r>
+              <a:t>•  Speckle Noise Rejection: Single-pixel noise clusters filtered out during connected-component analysis.</a:t>
+            </a:r>
+          </a:p>
+          <a:p>
+            <a:pPr>
+              <a:defRPr sz="1000">
+                <a:solidFill>
+                  <a:srgbClr val="A1A1AA"/>
+                </a:solidFill>
+                <a:latin typeface="Segoe UI"/>
+              </a:defRPr>
+            </a:pPr>
+            <a:r>
+              <a:t>•  Unit Test Verification: 33 dedicated pytest unit tests in tests/test_preprocessing.py confirm mathematical invariant stability.</a:t>
             </a:r>
           </a:p>
         </p:txBody>

--- a/src/presentation/DigitVision_AI_Presentation.pptx
+++ b/src/presentation/DigitVision_AI_Presentation.pptx
@@ -1716,7 +1716,7 @@
           </a:p>
           <a:p>
             <a:r>
-              <a:t>Demonstrates the live ML Mission Control web application deployed on FastAPI at 127.0.0.1:8000.</a:t>
+              <a:t>Demonstrates the live ML Mission Control web application deployed on FastAPI at 127.0.0.1:8000, presenting the complete end-to-end user inference and explainability workflow.</a:t>
             </a:r>
           </a:p>
           <a:p/>
@@ -1727,7 +1727,7 @@
           </a:p>
           <a:p>
             <a:r>
-              <a:t>Proves that the system is fully operational and capable of serving real-time inferences with complete telemetry and Grad-CAM visualizations.</a:t>
+              <a:t>Bridges the gap between an offline trained model and a production-grade intelligence platform that provides real-time calibrated predictions with full visual explainability.</a:t>
             </a:r>
           </a:p>
           <a:p/>
@@ -1738,7 +1738,7 @@
           </a:p>
           <a:p>
             <a:r>
-              <a:t>FastAPI handles asynchronous POST requests containing base64 image payloads. The canonical preprocessor processes the payload and returns JSON telemetry and base64 heatmap overlays.</a:t>
+              <a:t>FastAPI processes asynchronous JSON POST requests containing canvas image payloads. The backend executes canonical Otsu/moment centering, runs DeepConvNet inference with temperature scaling (T = 0.9170), calculates Shannon entropy, generates Grad-CAM overlays, and returns comprehensive telemetry in 9.14 ms.</a:t>
             </a:r>
           </a:p>
           <a:p/>
@@ -1749,7 +1749,7 @@
           </a:p>
           <a:p>
             <a:r>
-              <a:t>Q: How does the application perform under noisy or rotated input?</a:t>
+              <a:t>Q: What happens when a user draws an unrecognizable scribble or non-digit symbol on the canvas?</a:t>
             </a:r>
           </a:p>
           <a:p/>
@@ -1760,7 +1760,7 @@
           </a:p>
           <a:p>
             <a:r>
-              <a:t>A: As shown in the robustness curves on the left, our model maintains &gt;95% accuracy up to +-15 degrees of rotation and moderate Gaussian noise. Beyond 25 degrees, accuracy degrades gracefully, and the Shannon entropy trigger flags the prediction as uncertain.</a:t>
+              <a:t>A: Rather than outputting an overconfident false classification, the system's confidence intelligence triggers: Shannon entropy exceeds the 1.2 nats threshold and the decision margin drops below 0.20, causing the Mission Control HUD to flag the prediction as 'Ambiguous / OOD Input' and reject automated processing.</a:t>
             </a:r>
           </a:p>
         </p:txBody>
@@ -10016,7 +10016,7 @@
       </p:sp>
       <p:pic>
         <p:nvPicPr>
-          <p:cNvPr id="3" name="Picture 2" descr="robustness_curves.png"/>
+          <p:cNvPr id="3" name="Picture 2" descr="dashboard_ui_overview.png"/>
           <p:cNvPicPr>
             <a:picLocks noChangeAspect="1"/>
           </p:cNvPicPr>
@@ -10031,7 +10031,7 @@
         <p:spPr>
           <a:xfrm>
             <a:off x="731520" y="1371600"/>
-            <a:ext cx="5212080" cy="2953512"/>
+            <a:ext cx="5212080" cy="2931795"/>
           </a:xfrm>
           <a:prstGeom prst="rect">
             <a:avLst/>
@@ -10114,7 +10114,7 @@
               </a:defRPr>
             </a:pPr>
             <a:r>
-              <a:t>MISSION CONTROL CONSOLE CAPABILITIES</a:t>
+              <a:t>LIVE INFERENCE WORKFLOW &amp; ARCHITECTURAL NOVELTY</a:t>
             </a:r>
           </a:p>
         </p:txBody>
@@ -10150,7 +10150,7 @@
               </a:defRPr>
             </a:pPr>
             <a:r>
-              <a:t>DEEP OBSIDIAN RESEARCH DESIGN</a:t>
+              <a:t>END-TO-END INVARIANT PIPELINE</a:t>
             </a:r>
           </a:p>
           <a:p>
@@ -10163,7 +10163,7 @@
               </a:defRPr>
             </a:pPr>
             <a:r>
-              <a:t>Strict engineering aesthetic (#050505, #121212, #262626) with zero distracting neon or purple gradients.</a:t>
+              <a:t>HTML5 drawing canvas captures base64 strokes; canonical 7-stage Otsu, bounding box crop, and moment centroid alignment eliminate train-inference distribution shift.</a:t>
             </a:r>
           </a:p>
           <a:p>
@@ -10176,7 +10176,7 @@
               </a:defRPr>
             </a:pPr>
             <a:r>
-              <a:t>INTERACTIVE HTML5 DRAWING CANVAS</a:t>
+              <a:t>CONFIDENCE INTELLIGENCE HUD</a:t>
             </a:r>
           </a:p>
           <a:p>
@@ -10189,7 +10189,7 @@
               </a:defRPr>
             </a:pPr>
             <a:r>
-              <a:t>Real-time touch/mouse drawing with instant client-side rendering and sub-pixel stroke capture.</a:t>
+              <a:t>Displays temperature-scaled probabilities (T = 0.9170, ECE = 0.0031), Shannon entropy H(p), and decision margin Delta in real time.</a:t>
             </a:r>
           </a:p>
           <a:p>
@@ -10202,7 +10202,7 @@
               </a:defRPr>
             </a:pPr>
             <a:r>
-              <a:t>LIVE TELEMETRY HUD</a:t>
+              <a:t>REAL-TIME GRAD-CAM SALIENCY</a:t>
             </a:r>
           </a:p>
           <a:p>
@@ -10215,7 +10215,7 @@
               </a:defRPr>
             </a:pPr>
             <a:r>
-              <a:t>Displays prediction latency (9.14 ms), model version, parameter count, and active preprocessor flags.</a:t>
+              <a:t>Synthesizes visual heatmaps from final conv layer 'conv_cam' within 15 ms of canvas release, visually verifying stroke attribution.</a:t>
             </a:r>
           </a:p>
           <a:p>
@@ -10228,7 +10228,7 @@
               </a:defRPr>
             </a:pPr>
             <a:r>
-              <a:t>REAL-TIME GRAD-CAM OVERLAY</a:t>
+              <a:t>STROKE FORENSICS &amp; TELEMETRY</a:t>
             </a:r>
           </a:p>
           <a:p>
@@ -10241,7 +10241,7 @@
               </a:defRPr>
             </a:pPr>
             <a:r>
-              <a:t>Renders heatmaps side-by-side with drawn input within 15 ms of canvas release.</a:t>
+              <a:t>Extracts physical stroke density (18-380 px), bounding box aspect ratio, active pixel occupancy, and centroid deviation for each drawing.</a:t>
             </a:r>
           </a:p>
           <a:p>
@@ -10254,7 +10254,7 @@
               </a:defRPr>
             </a:pPr>
             <a:r>
-              <a:t>EMPIRICAL ROBUSTNESS HARDENING</a:t>
+              <a:t>PROJECT NOVELTY &amp; SCIENTIFIC RIGOR</a:t>
             </a:r>
           </a:p>
           <a:p>
@@ -10267,7 +10267,7 @@
               </a:defRPr>
             </a:pPr>
             <a:r>
-              <a:t>Benchmarked across 6 synthetic corruptions (Gaussian noise, rotation +-30 deg, translation, stroke dilation, stroke erosion, inverted contrast).</a:t>
+              <a:t>Unlike standard toy classifiers, DigitVision couples mathematical invariance, probabilistic safety, and explainability into an auditable production system.</a:t>
             </a:r>
           </a:p>
         </p:txBody>

--- a/src/presentation/DigitVision_AI_Presentation.pptx
+++ b/src/presentation/DigitVision_AI_Presentation.pptx
@@ -25,6 +25,8 @@
     <p:sldId id="273" r:id="rId25"/>
     <p:sldId id="274" r:id="rId26"/>
     <p:sldId id="275" r:id="rId27"/>
+    <p:sldId id="276" r:id="rId28"/>
+    <p:sldId id="277" r:id="rId29"/>
   </p:sldIdLst>
   <p:sldSz cx="12191695" cy="6858000" type="screen4x3"/>
   <p:notesSz cx="6858000" cy="9144000"/>
@@ -1999,6 +2001,244 @@
           <a:p>
             <a:r>
               <a:t>A: My top priority would be deploying the model to on-device WebAssembly via ONNX Runtime to eliminate server latency, followed by implementing Monte Carlo Dropout to explicitly disentangle data noise (aleatoric uncertainty) from model parameter ignorance (epistemic uncertainty).</a:t>
+            </a:r>
+          </a:p>
+        </p:txBody>
+      </p:sp>
+      <p:sp>
+        <p:nvSpPr>
+          <p:cNvPr id="4" name="Slide Number Placeholder 3"/>
+          <p:cNvSpPr>
+            <a:spLocks noGrp="1"/>
+          </p:cNvSpPr>
+          <p:nvPr>
+            <p:ph type="sldNum" idx="5" sz="quarter"/>
+          </p:nvPr>
+        </p:nvSpPr>
+        <p:spPr/>
+      </p:sp>
+    </p:spTree>
+  </p:cSld>
+  <p:clrMapOvr>
+    <a:masterClrMapping/>
+  </p:clrMapOvr>
+</p:notes>
+</file>
+
+<file path=ppt/notesSlides/notesSlide21.xml><?xml version="1.0" encoding="utf-8"?>
+<p:notes xmlns:a="http://schemas.openxmlformats.org/drawingml/2006/main" xmlns:p="http://schemas.openxmlformats.org/presentationml/2006/main" xmlns:r="http://schemas.openxmlformats.org/officeDocument/2006/relationships">
+  <p:cSld>
+    <p:spTree>
+      <p:nvGrpSpPr>
+        <p:cNvPr id="1" name=""/>
+        <p:cNvGrpSpPr/>
+        <p:nvPr/>
+      </p:nvGrpSpPr>
+      <p:grpSpPr>
+        <a:xfrm>
+          <a:off x="0" y="0"/>
+          <a:ext cx="0" cy="0"/>
+          <a:chOff x="0" y="0"/>
+          <a:chExt cx="0" cy="0"/>
+        </a:xfrm>
+      </p:grpSpPr>
+      <p:sp>
+        <p:nvSpPr>
+          <p:cNvPr id="2" name="Slide Image Placeholder 1"/>
+          <p:cNvSpPr>
+            <a:spLocks noGrp="1"/>
+          </p:cNvSpPr>
+          <p:nvPr>
+            <p:ph type="sldImg" idx="2"/>
+          </p:nvPr>
+        </p:nvSpPr>
+        <p:spPr/>
+      </p:sp>
+      <p:sp>
+        <p:nvSpPr>
+          <p:cNvPr id="3" name="Notes Placeholder 2"/>
+          <p:cNvSpPr>
+            <a:spLocks noGrp="1"/>
+          </p:cNvSpPr>
+          <p:nvPr>
+            <p:ph type="body" idx="3" sz="quarter"/>
+          </p:nvPr>
+        </p:nvSpPr>
+        <p:spPr/>
+        <p:txBody>
+          <a:bodyPr/>
+          <a:lstStyle/>
+          <a:p>
+            <a:r>
+              <a:t>1. WHAT THE SLIDE COMMUNICATES:</a:t>
+            </a:r>
+          </a:p>
+          <a:p>
+            <a:r>
+              <a:t>Explicit audit of DigitVision AI codebase and experiments against official Machine Learning Lab Course Outcomes (CO1–CO6).</a:t>
+            </a:r>
+          </a:p>
+          <a:p/>
+          <a:p>
+            <a:r>
+              <a:t>2. WHY IT MATTERS:</a:t>
+            </a:r>
+          </a:p>
+          <a:p>
+            <a:r>
+              <a:t>Grounds the micro-project strictly in the academic curriculum requirements and proves genuine empirical completion without fabrication.</a:t>
+            </a:r>
+          </a:p>
+          <a:p/>
+          <a:p>
+            <a:r>
+              <a:t>3. TECHNICAL EXPLANATION:</a:t>
+            </a:r>
+          </a:p>
+          <a:p>
+            <a:r>
+              <a:t>CO1 and CO2 are grounded in statistical tensors and visual EDA; CO3 implements classical baselines; CO4 achieves temperature calibration (ECE 0.0031); CO5 executes K-Means clustering on 10,000 samples (58.87% purity); CO6 delivers the 7-model comparative capstone.</a:t>
+            </a:r>
+          </a:p>
+          <a:p/>
+          <a:p>
+            <a:r>
+              <a:t>4. LIKELY VIVA QUESTION:</a:t>
+            </a:r>
+          </a:p>
+          <a:p>
+            <a:r>
+              <a:t>Q: Why is CO3 marked as substantially demonstrated rather than 100% complete across all textbook algorithms?</a:t>
+            </a:r>
+          </a:p>
+          <a:p/>
+          <a:p>
+            <a:r>
+              <a:t>5. STRONG ANSWER:</a:t>
+            </a:r>
+          </a:p>
+          <a:p>
+            <a:r>
+              <a:t>A: We uphold academic rigor: Linear regression is inappropriate for a discrete 10-class problem, and KNN violates our &lt;10 ms latency requirement. We implemented Logistic Regression and Random Forest to establish rigorous baselines without fabricating unsuited models.</a:t>
+            </a:r>
+          </a:p>
+        </p:txBody>
+      </p:sp>
+      <p:sp>
+        <p:nvSpPr>
+          <p:cNvPr id="4" name="Slide Number Placeholder 3"/>
+          <p:cNvSpPr>
+            <a:spLocks noGrp="1"/>
+          </p:cNvSpPr>
+          <p:nvPr>
+            <p:ph type="sldNum" idx="5" sz="quarter"/>
+          </p:nvPr>
+        </p:nvSpPr>
+        <p:spPr/>
+      </p:sp>
+    </p:spTree>
+  </p:cSld>
+  <p:clrMapOvr>
+    <a:masterClrMapping/>
+  </p:clrMapOvr>
+</p:notes>
+</file>
+
+<file path=ppt/notesSlides/notesSlide22.xml><?xml version="1.0" encoding="utf-8"?>
+<p:notes xmlns:a="http://schemas.openxmlformats.org/drawingml/2006/main" xmlns:p="http://schemas.openxmlformats.org/presentationml/2006/main" xmlns:r="http://schemas.openxmlformats.org/officeDocument/2006/relationships">
+  <p:cSld>
+    <p:spTree>
+      <p:nvGrpSpPr>
+        <p:cNvPr id="1" name=""/>
+        <p:cNvGrpSpPr/>
+        <p:nvPr/>
+      </p:nvGrpSpPr>
+      <p:grpSpPr>
+        <a:xfrm>
+          <a:off x="0" y="0"/>
+          <a:ext cx="0" cy="0"/>
+          <a:chOff x="0" y="0"/>
+          <a:chExt cx="0" cy="0"/>
+        </a:xfrm>
+      </p:grpSpPr>
+      <p:sp>
+        <p:nvSpPr>
+          <p:cNvPr id="2" name="Slide Image Placeholder 1"/>
+          <p:cNvSpPr>
+            <a:spLocks noGrp="1"/>
+          </p:cNvSpPr>
+          <p:nvPr>
+            <p:ph type="sldImg" idx="2"/>
+          </p:nvPr>
+        </p:nvSpPr>
+        <p:spPr/>
+      </p:sp>
+      <p:sp>
+        <p:nvSpPr>
+          <p:cNvPr id="3" name="Notes Placeholder 2"/>
+          <p:cNvSpPr>
+            <a:spLocks noGrp="1"/>
+          </p:cNvSpPr>
+          <p:nvPr>
+            <p:ph type="body" idx="3" sz="quarter"/>
+          </p:nvPr>
+        </p:nvSpPr>
+        <p:spPr/>
+        <p:txBody>
+          <a:bodyPr/>
+          <a:lstStyle/>
+          <a:p>
+            <a:r>
+              <a:t>1. WHAT THE SLIDE COMMUNICATES:</a:t>
+            </a:r>
+          </a:p>
+          <a:p>
+            <a:r>
+              <a:t>Forensic NBA Tier-I CO-PO and PSO mapping matrix with average correlation scores and empirical justifications.</a:t>
+            </a:r>
+          </a:p>
+          <a:p/>
+          <a:p>
+            <a:r>
+              <a:t>2. WHY IT MATTERS:</a:t>
+            </a:r>
+          </a:p>
+          <a:p>
+            <a:r>
+              <a:t>Meets Washington Accord and NBA outcome-based education standards, demonstrating how each engineering graduate attribute was cultivated.</a:t>
+            </a:r>
+          </a:p>
+          <a:p/>
+          <a:p>
+            <a:r>
+              <a:t>3. TECHNICAL EXPLANATION:</a:t>
+            </a:r>
+          </a:p>
+          <a:p>
+            <a:r>
+              <a:t>Correlation values (3=High, 2=Moderate, 1=Low, —=None) are assigned strictly when supported by code, tests, or documentation. Zero correlation is preserved where evidence does not exist.</a:t>
+            </a:r>
+          </a:p>
+          <a:p/>
+          <a:p>
+            <a:r>
+              <a:t>4. LIKELY VIVA QUESTION:</a:t>
+            </a:r>
+          </a:p>
+          <a:p>
+            <a:r>
+              <a:t>Q: Why is PO7 (Ethics) mapped with moderate correlation (2) rather than a default 3?</a:t>
+            </a:r>
+          </a:p>
+          <a:p/>
+          <a:p>
+            <a:r>
+              <a:t>5. STRONG ANSWER:</a:t>
+            </a:r>
+          </a:p>
+          <a:p>
+            <a:r>
+              <a:t>A: We assigned a level 2 to reflect real, concrete ethical actions—specifically visual transparency via Grad-CAM and temperature calibration to prevent overconfident erroneous automation in high-stakes settings like banking—without exaggerating theoretical policy discussions.</a:t>
             </a:r>
           </a:p>
         </p:txBody>
@@ -5997,7 +6237,7 @@
               </a:defRPr>
             </a:pPr>
             <a:r>
-              <a:t>STUDENT TEAM: 22VE1A6701, 22VE1A6702, 22VE1A6703, 22VE1A6704  •  SREYAS INSTITUTE OF ENGINEERING &amp; TECHNOLOGY</a:t>
+              <a:t>STUDENT TEAM: 24VE1A6695 (M TEJAS YADAV), 24VE1A6692 (K Charan Teja), 24VE1A66C8 (Y Akshay Raj)  •  SREYAS INSTITUTE OF ENGINEERING &amp; TECHNOLOGY</a:t>
             </a:r>
           </a:p>
           <a:p>
@@ -11217,6 +11457,3400 @@
             </a:pPr>
             <a:r>
               <a:t>•  Continuous Active Learning: Implement automated human-in-the-loop review for high-entropy rejected samples.</a:t>
+            </a:r>
+          </a:p>
+        </p:txBody>
+      </p:sp>
+    </p:spTree>
+  </p:cSld>
+  <p:clrMapOvr>
+    <a:masterClrMapping/>
+  </p:clrMapOvr>
+</p:sld>
+</file>
+
+<file path=ppt/slides/slide21.xml><?xml version="1.0" encoding="utf-8"?>
+<p:sld xmlns:a="http://schemas.openxmlformats.org/drawingml/2006/main" xmlns:p="http://schemas.openxmlformats.org/presentationml/2006/main" xmlns:r="http://schemas.openxmlformats.org/officeDocument/2006/relationships">
+  <p:cSld>
+    <p:bg>
+      <p:bgPr>
+        <a:solidFill>
+          <a:srgbClr val="050505"/>
+        </a:solidFill>
+        <a:effectLst/>
+      </p:bgPr>
+    </p:bg>
+    <p:spTree>
+      <p:nvGrpSpPr>
+        <p:cNvPr id="1" name=""/>
+        <p:cNvGrpSpPr/>
+        <p:nvPr/>
+      </p:nvGrpSpPr>
+      <p:grpSpPr/>
+      <p:sp>
+        <p:nvSpPr>
+          <p:cNvPr id="2" name="TextBox 1"/>
+          <p:cNvSpPr txBox="1"/>
+          <p:nvPr/>
+        </p:nvSpPr>
+        <p:spPr>
+          <a:xfrm>
+            <a:off x="731520" y="365760"/>
+            <a:ext cx="10698480" cy="822960"/>
+          </a:xfrm>
+          <a:prstGeom prst="rect">
+            <a:avLst/>
+          </a:prstGeom>
+          <a:noFill/>
+        </p:spPr>
+        <p:txBody>
+          <a:bodyPr wrap="square" lIns="0" tIns="0" rIns="0" bIns="0">
+            <a:spAutoFit/>
+          </a:bodyPr>
+          <a:lstStyle/>
+          <a:p>
+            <a:pPr>
+              <a:defRPr sz="900" b="1">
+                <a:solidFill>
+                  <a:srgbClr val="1DB954"/>
+                </a:solidFill>
+                <a:latin typeface="Consolas"/>
+              </a:defRPr>
+            </a:pPr>
+            <a:r>
+              <a:t>21. ACADEMIC COURSE OUTCOMES (CO) AUDIT</a:t>
+            </a:r>
+          </a:p>
+          <a:p>
+            <a:pPr>
+              <a:defRPr sz="1800" b="1">
+                <a:solidFill>
+                  <a:srgbClr val="FFFFFF"/>
+                </a:solidFill>
+                <a:latin typeface="Segoe UI"/>
+              </a:defRPr>
+            </a:pPr>
+            <a:r>
+              <a:t>COURSE OUTCOMES (CO1–CO6) ALIGNMENT &amp; PROJECT EVIDENCE</a:t>
+            </a:r>
+          </a:p>
+        </p:txBody>
+      </p:sp>
+      <p:sp>
+        <p:nvSpPr>
+          <p:cNvPr id="3" name="Rectangle 2"/>
+          <p:cNvSpPr/>
+          <p:nvPr/>
+        </p:nvSpPr>
+        <p:spPr>
+          <a:xfrm>
+            <a:off x="731520" y="1371600"/>
+            <a:ext cx="5212080" cy="4846320"/>
+          </a:xfrm>
+          <a:prstGeom prst="rect">
+            <a:avLst/>
+          </a:prstGeom>
+          <a:solidFill>
+            <a:srgbClr val="121212"/>
+          </a:solidFill>
+          <a:ln w="12700">
+            <a:solidFill>
+              <a:srgbClr val="262626"/>
+            </a:solidFill>
+          </a:ln>
+        </p:spPr>
+        <p:style>
+          <a:lnRef idx="1">
+            <a:schemeClr val="accent1"/>
+          </a:lnRef>
+          <a:fillRef idx="3">
+            <a:schemeClr val="accent1"/>
+          </a:fillRef>
+          <a:effectRef idx="2">
+            <a:schemeClr val="accent1"/>
+          </a:effectRef>
+          <a:fontRef idx="minor">
+            <a:schemeClr val="lt1"/>
+          </a:fontRef>
+        </p:style>
+        <p:txBody>
+          <a:bodyPr rtlCol="0" anchor="ctr"/>
+          <a:lstStyle/>
+          <a:p>
+            <a:pPr algn="ctr"/>
+          </a:p>
+        </p:txBody>
+      </p:sp>
+      <p:sp>
+        <p:nvSpPr>
+          <p:cNvPr id="4" name="TextBox 3"/>
+          <p:cNvSpPr txBox="1"/>
+          <p:nvPr/>
+        </p:nvSpPr>
+        <p:spPr>
+          <a:xfrm>
+            <a:off x="914400" y="1508760"/>
+            <a:ext cx="4846320" cy="320040"/>
+          </a:xfrm>
+          <a:prstGeom prst="rect">
+            <a:avLst/>
+          </a:prstGeom>
+          <a:noFill/>
+        </p:spPr>
+        <p:txBody>
+          <a:bodyPr wrap="square" lIns="0" tIns="0" rIns="0" bIns="0">
+            <a:spAutoFit/>
+          </a:bodyPr>
+          <a:lstStyle/>
+          <a:p>
+            <a:pPr>
+              <a:defRPr sz="1000" b="1">
+                <a:solidFill>
+                  <a:srgbClr val="A1A1AA"/>
+                </a:solidFill>
+                <a:latin typeface="Consolas"/>
+              </a:defRPr>
+            </a:pPr>
+            <a:r>
+              <a:t>CO1, CO2, CO3 — FOUNDATIONS &amp; SUPERVISED LEARNING</a:t>
+            </a:r>
+          </a:p>
+        </p:txBody>
+      </p:sp>
+      <p:sp>
+        <p:nvSpPr>
+          <p:cNvPr id="5" name="TextBox 4"/>
+          <p:cNvSpPr txBox="1"/>
+          <p:nvPr/>
+        </p:nvSpPr>
+        <p:spPr>
+          <a:xfrm>
+            <a:off x="914400" y="1828800"/>
+            <a:ext cx="4846320" cy="4206240"/>
+          </a:xfrm>
+          <a:prstGeom prst="rect">
+            <a:avLst/>
+          </a:prstGeom>
+          <a:noFill/>
+        </p:spPr>
+        <p:txBody>
+          <a:bodyPr wrap="square">
+            <a:spAutoFit/>
+          </a:bodyPr>
+          <a:lstStyle/>
+          <a:p>
+            <a:pPr>
+              <a:defRPr sz="1000" b="1">
+                <a:solidFill>
+                  <a:srgbClr val="1DB954"/>
+                </a:solidFill>
+                <a:latin typeface="Consolas"/>
+              </a:defRPr>
+            </a:pPr>
+            <a:r>
+              <a:t>CO1 (L3) · CENTRAL TENDENCY &amp; DISPERSION</a:t>
+            </a:r>
+          </a:p>
+          <a:p>
+            <a:pPr>
+              <a:defRPr sz="850">
+                <a:solidFill>
+                  <a:srgbClr val="A1A1AA"/>
+                </a:solidFill>
+                <a:latin typeface="Segoe UI"/>
+              </a:defRPr>
+            </a:pPr>
+            <a:r>
+              <a:t>μ = 0.1307, σ = 0.3081 across 70,000 image tensors; per-class counts and background sparsity (&gt;80%).</a:t>
+            </a:r>
+            <a:br/>
+            <a:r>
+              <a:t>Evidence: src/data/dataset.py, src/data/eda.py</a:t>
+            </a:r>
+            <a:br/>
+            <a:r>
+              <a:t>Status: Fully Demonstrated [Pending Faculty CIE Assessment]</a:t>
+            </a:r>
+            <a:br/>
+          </a:p>
+          <a:p>
+            <a:pPr>
+              <a:defRPr sz="1000" b="1">
+                <a:solidFill>
+                  <a:srgbClr val="1DB954"/>
+                </a:solidFill>
+                <a:latin typeface="Consolas"/>
+              </a:defRPr>
+            </a:pPr>
+            <a:r>
+              <a:t>CO2 (L3) · SCIENTIFIC PYTHON &amp; EDA</a:t>
+            </a:r>
+          </a:p>
+          <a:p>
+            <a:pPr>
+              <a:defRPr sz="850">
+                <a:solidFill>
+                  <a:srgbClr val="A1A1AA"/>
+                </a:solidFill>
+                <a:latin typeface="Segoe UI"/>
+              </a:defRPr>
+            </a:pPr>
+            <a:r>
+              <a:t>NumPy 784-D arrays, SciPy spatial metrics, Pandas data dictionaries, Matplotlib &amp; Seaborn plots.</a:t>
+            </a:r>
+            <a:br/>
+            <a:r>
+              <a:t>Evidence: 5 publication EDA figures (10×10 grid, bimodal histograms, stroke spines).</a:t>
+            </a:r>
+            <a:br/>
+            <a:r>
+              <a:t>Status: Fully Demonstrated [Pending Faculty CIE Assessment]</a:t>
+            </a:r>
+            <a:br/>
+          </a:p>
+          <a:p>
+            <a:pPr>
+              <a:defRPr sz="1000" b="1">
+                <a:solidFill>
+                  <a:srgbClr val="FFB000"/>
+                </a:solidFill>
+                <a:latin typeface="Consolas"/>
+              </a:defRPr>
+            </a:pPr>
+            <a:r>
+              <a:t>CO3 (L4) · SUPERVISED LEARNING ALGORITHMS</a:t>
+            </a:r>
+          </a:p>
+          <a:p>
+            <a:pPr>
+              <a:defRPr sz="850">
+                <a:solidFill>
+                  <a:srgbClr val="A1A1AA"/>
+                </a:solidFill>
+                <a:latin typeface="Segoe UI"/>
+              </a:defRPr>
+            </a:pPr>
+            <a:r>
+              <a:t>L2 Multinomial Logistic Regression (91.49%) and Random Forest (95.48%) classical baselines.</a:t>
+            </a:r>
+            <a:br/>
+            <a:r>
+              <a:t>Rationale: Linear Reg &amp; KNN omitted (discrete 10-class task; latency &lt;10 ms requirement).</a:t>
+            </a:r>
+            <a:br/>
+            <a:r>
+              <a:t>Status: Substantially Demonstrated [Pending Faculty CIE Assessment]</a:t>
+            </a:r>
+            <a:br/>
+          </a:p>
+        </p:txBody>
+      </p:sp>
+      <p:sp>
+        <p:nvSpPr>
+          <p:cNvPr id="6" name="Rectangle 5"/>
+          <p:cNvSpPr/>
+          <p:nvPr/>
+        </p:nvSpPr>
+        <p:spPr>
+          <a:xfrm>
+            <a:off x="6217920" y="1371600"/>
+            <a:ext cx="5212080" cy="4846320"/>
+          </a:xfrm>
+          <a:prstGeom prst="rect">
+            <a:avLst/>
+          </a:prstGeom>
+          <a:solidFill>
+            <a:srgbClr val="121212"/>
+          </a:solidFill>
+          <a:ln w="12700">
+            <a:solidFill>
+              <a:srgbClr val="262626"/>
+            </a:solidFill>
+          </a:ln>
+        </p:spPr>
+        <p:style>
+          <a:lnRef idx="1">
+            <a:schemeClr val="accent1"/>
+          </a:lnRef>
+          <a:fillRef idx="3">
+            <a:schemeClr val="accent1"/>
+          </a:fillRef>
+          <a:effectRef idx="2">
+            <a:schemeClr val="accent1"/>
+          </a:effectRef>
+          <a:fontRef idx="minor">
+            <a:schemeClr val="lt1"/>
+          </a:fontRef>
+        </p:style>
+        <p:txBody>
+          <a:bodyPr rtlCol="0" anchor="ctr"/>
+          <a:lstStyle/>
+          <a:p>
+            <a:pPr algn="ctr"/>
+          </a:p>
+        </p:txBody>
+      </p:sp>
+      <p:sp>
+        <p:nvSpPr>
+          <p:cNvPr id="7" name="TextBox 6"/>
+          <p:cNvSpPr txBox="1"/>
+          <p:nvPr/>
+        </p:nvSpPr>
+        <p:spPr>
+          <a:xfrm>
+            <a:off x="6400800" y="1508760"/>
+            <a:ext cx="4846320" cy="320040"/>
+          </a:xfrm>
+          <a:prstGeom prst="rect">
+            <a:avLst/>
+          </a:prstGeom>
+          <a:noFill/>
+        </p:spPr>
+        <p:txBody>
+          <a:bodyPr wrap="square" lIns="0" tIns="0" rIns="0" bIns="0">
+            <a:spAutoFit/>
+          </a:bodyPr>
+          <a:lstStyle/>
+          <a:p>
+            <a:pPr>
+              <a:defRPr sz="1000" b="1">
+                <a:solidFill>
+                  <a:srgbClr val="A1A1AA"/>
+                </a:solidFill>
+                <a:latin typeface="Consolas"/>
+              </a:defRPr>
+            </a:pPr>
+            <a:r>
+              <a:t>CO4, CO5, CO6 — TUNING, UNSUPERVISED &amp; CAPSTONE</a:t>
+            </a:r>
+          </a:p>
+        </p:txBody>
+      </p:sp>
+      <p:sp>
+        <p:nvSpPr>
+          <p:cNvPr id="8" name="TextBox 7"/>
+          <p:cNvSpPr txBox="1"/>
+          <p:nvPr/>
+        </p:nvSpPr>
+        <p:spPr>
+          <a:xfrm>
+            <a:off x="6400800" y="1828800"/>
+            <a:ext cx="4846320" cy="4206240"/>
+          </a:xfrm>
+          <a:prstGeom prst="rect">
+            <a:avLst/>
+          </a:prstGeom>
+          <a:noFill/>
+        </p:spPr>
+        <p:txBody>
+          <a:bodyPr wrap="square">
+            <a:spAutoFit/>
+          </a:bodyPr>
+          <a:lstStyle/>
+          <a:p>
+            <a:pPr>
+              <a:defRPr sz="1000" b="1">
+                <a:solidFill>
+                  <a:srgbClr val="1DB954"/>
+                </a:solidFill>
+                <a:latin typeface="Consolas"/>
+              </a:defRPr>
+            </a:pPr>
+            <a:r>
+              <a:t>CO4 (L4) · PARAMETER TUNING &amp; EVALUATION</a:t>
+            </a:r>
+          </a:p>
+          <a:p>
+            <a:pPr>
+              <a:defRPr sz="850">
+                <a:solidFill>
+                  <a:srgbClr val="A1A1AA"/>
+                </a:solidFill>
+                <a:latin typeface="Segoe UI"/>
+              </a:defRPr>
+            </a:pPr>
+            <a:r>
+              <a:t>7 metrics (Acc, Prec, Rec, F1, Loss, ECE, Latency), scikit-learn classification reports, ROC/PR curves.</a:t>
+            </a:r>
+            <a:br/>
+            <a:r>
+              <a:t>Temperature scaling (T = 0.9170, ECE reduced to 0.0031).</a:t>
+            </a:r>
+            <a:br/>
+            <a:r>
+              <a:t>Evidence: src/evaluation/metrics.py, src/evaluation/calibration.py</a:t>
+            </a:r>
+            <a:br/>
+            <a:r>
+              <a:t>Status: Fully Demonstrated [Pending Faculty CIE Assessment]</a:t>
+            </a:r>
+            <a:br/>
+          </a:p>
+          <a:p>
+            <a:pPr>
+              <a:defRPr sz="1000" b="1">
+                <a:solidFill>
+                  <a:srgbClr val="1DB954"/>
+                </a:solidFill>
+                <a:latin typeface="Consolas"/>
+              </a:defRPr>
+            </a:pPr>
+            <a:r>
+              <a:t>CO5 (L4) · UNSUPERVISED CLUSTERING (K-MEANS)</a:t>
+            </a:r>
+          </a:p>
+          <a:p>
+            <a:pPr>
+              <a:defRPr sz="850">
+                <a:solidFill>
+                  <a:srgbClr val="A1A1AA"/>
+                </a:solidFill>
+                <a:latin typeface="Segoe UI"/>
+              </a:defRPr>
+            </a:pPr>
+            <a:r>
+              <a:t>K = 10 clustering on 10,000 samples (Inertia: 389,394.88, V-Measure: 0.5017, Purity: 58.87%).</a:t>
+            </a:r>
+            <a:br/>
+            <a:r>
+              <a:t>Centroids: Cluster 4 (digit 0: 92.71% purity), Cluster 3 (digit 6: 89.48%).</a:t>
+            </a:r>
+            <a:br/>
+            <a:r>
+              <a:t>Evidence: src/evaluation/clustering.py, Fig 3.3</a:t>
+            </a:r>
+            <a:br/>
+            <a:r>
+              <a:t>Status: Fully Demonstrated [Pending Faculty CIE Assessment]</a:t>
+            </a:r>
+            <a:br/>
+          </a:p>
+          <a:p>
+            <a:pPr>
+              <a:defRPr sz="1000" b="1">
+                <a:solidFill>
+                  <a:srgbClr val="1DB954"/>
+                </a:solidFill>
+                <a:latin typeface="Consolas"/>
+              </a:defRPr>
+            </a:pPr>
+            <a:r>
+              <a:t>CO6 (L5) · COMPARATIVE CLASSIFICATION CAPSTONE</a:t>
+            </a:r>
+          </a:p>
+          <a:p>
+            <a:pPr>
+              <a:defRPr sz="850">
+                <a:solidFill>
+                  <a:srgbClr val="A1A1AA"/>
+                </a:solidFill>
+                <a:latin typeface="Segoe UI"/>
+              </a:defRPr>
+            </a:pPr>
+            <a:r>
+              <a:t>7-model benchmark (Baseline to DeepConvNet at 98.31% acc); dual-block CNN with GAP &amp; Grad-CAM XAI.</a:t>
+            </a:r>
+            <a:br/>
+            <a:r>
+              <a:t>FastAPI async backend + HTML5 canvas HUD. 33/33 tests passing.</a:t>
+            </a:r>
+            <a:br/>
+            <a:r>
+              <a:t>Evidence: src/evaluation/benchmark.py, main.py</a:t>
+            </a:r>
+            <a:br/>
+            <a:r>
+              <a:t>Status: Fully Demonstrated [Pending Faculty CIE Assessment]</a:t>
+            </a:r>
+            <a:br/>
+          </a:p>
+        </p:txBody>
+      </p:sp>
+    </p:spTree>
+  </p:cSld>
+  <p:clrMapOvr>
+    <a:masterClrMapping/>
+  </p:clrMapOvr>
+</p:sld>
+</file>
+
+<file path=ppt/slides/slide22.xml><?xml version="1.0" encoding="utf-8"?>
+<p:sld xmlns:a="http://schemas.openxmlformats.org/drawingml/2006/main" xmlns:p="http://schemas.openxmlformats.org/presentationml/2006/main" xmlns:r="http://schemas.openxmlformats.org/officeDocument/2006/relationships">
+  <p:cSld>
+    <p:bg>
+      <p:bgPr>
+        <a:solidFill>
+          <a:srgbClr val="050505"/>
+        </a:solidFill>
+        <a:effectLst/>
+      </p:bgPr>
+    </p:bg>
+    <p:spTree>
+      <p:nvGrpSpPr>
+        <p:cNvPr id="1" name=""/>
+        <p:cNvGrpSpPr/>
+        <p:nvPr/>
+      </p:nvGrpSpPr>
+      <p:grpSpPr/>
+      <p:sp>
+        <p:nvSpPr>
+          <p:cNvPr id="2" name="TextBox 1"/>
+          <p:cNvSpPr txBox="1"/>
+          <p:nvPr/>
+        </p:nvSpPr>
+        <p:spPr>
+          <a:xfrm>
+            <a:off x="731520" y="365760"/>
+            <a:ext cx="10698480" cy="822960"/>
+          </a:xfrm>
+          <a:prstGeom prst="rect">
+            <a:avLst/>
+          </a:prstGeom>
+          <a:noFill/>
+        </p:spPr>
+        <p:txBody>
+          <a:bodyPr wrap="square" lIns="0" tIns="0" rIns="0" bIns="0">
+            <a:spAutoFit/>
+          </a:bodyPr>
+          <a:lstStyle/>
+          <a:p>
+            <a:pPr>
+              <a:defRPr sz="900" b="1">
+                <a:solidFill>
+                  <a:srgbClr val="1DB954"/>
+                </a:solidFill>
+                <a:latin typeface="Consolas"/>
+              </a:defRPr>
+            </a:pPr>
+            <a:r>
+              <a:t>22. NBA OUTCOME ALIGNMENT &amp; CORRELATION MATRIX</a:t>
+            </a:r>
+          </a:p>
+          <a:p>
+            <a:pPr>
+              <a:defRPr sz="1800" b="1">
+                <a:solidFill>
+                  <a:srgbClr val="FFFFFF"/>
+                </a:solidFill>
+                <a:latin typeface="Segoe UI"/>
+              </a:defRPr>
+            </a:pPr>
+            <a:r>
+              <a:t>NBA SAR TIER-I CO–PO MAPPING MATRIX &amp; EMPIRICAL JUSTIFICATION</a:t>
+            </a:r>
+          </a:p>
+        </p:txBody>
+      </p:sp>
+      <p:graphicFrame>
+        <p:nvGraphicFramePr>
+          <p:cNvPr id="3" name="Table 2"/>
+          <p:cNvGraphicFramePr>
+            <a:graphicFrameLocks noGrp="1"/>
+          </p:cNvGraphicFramePr>
+          <p:nvPr/>
+        </p:nvGraphicFramePr>
+        <p:xfrm>
+          <a:off x="731520" y="1280160"/>
+          <a:ext cx="10698480" cy="2468880"/>
+        </p:xfrm>
+        <a:graphic>
+          <a:graphicData uri="http://schemas.openxmlformats.org/drawingml/2006/table">
+            <a:tbl>
+              <a:tblPr firstRow="1" bandRow="1">
+                <a:tableStyleId>{5C22544A-7EE6-4342-B048-85BDC9FD1C3A}</a:tableStyleId>
+              </a:tblPr>
+              <a:tblGrid>
+                <a:gridCol w="764177"/>
+                <a:gridCol w="764177"/>
+                <a:gridCol w="764177"/>
+                <a:gridCol w="764177"/>
+                <a:gridCol w="764177"/>
+                <a:gridCol w="764177"/>
+                <a:gridCol w="764177"/>
+                <a:gridCol w="764177"/>
+                <a:gridCol w="764177"/>
+                <a:gridCol w="764177"/>
+                <a:gridCol w="764177"/>
+                <a:gridCol w="764177"/>
+                <a:gridCol w="764177"/>
+                <a:gridCol w="764179"/>
+              </a:tblGrid>
+              <a:tr h="308610">
+                <a:tc>
+                  <a:txBody>
+                    <a:bodyPr/>
+                    <a:lstStyle/>
+                    <a:p>
+                      <a:pPr algn="ctr"/>
+                      <a:r>
+                        <a:rPr sz="900" b="1">
+                          <a:solidFill>
+                            <a:srgbClr val="FFFFFF"/>
+                          </a:solidFill>
+                          <a:latin typeface="Segoe UI"/>
+                        </a:rPr>
+                        <a:t>CO</a:t>
+                      </a:r>
+                    </a:p>
+                  </a:txBody>
+                  <a:tcPr>
+                    <a:solidFill>
+                      <a:srgbClr val="181818"/>
+                    </a:solidFill>
+                  </a:tcPr>
+                </a:tc>
+                <a:tc>
+                  <a:txBody>
+                    <a:bodyPr/>
+                    <a:lstStyle/>
+                    <a:p>
+                      <a:pPr algn="ctr"/>
+                      <a:r>
+                        <a:rPr sz="900" b="1">
+                          <a:solidFill>
+                            <a:srgbClr val="FFFFFF"/>
+                          </a:solidFill>
+                          <a:latin typeface="Segoe UI"/>
+                        </a:rPr>
+                        <a:t>PO1</a:t>
+                      </a:r>
+                    </a:p>
+                  </a:txBody>
+                  <a:tcPr>
+                    <a:solidFill>
+                      <a:srgbClr val="181818"/>
+                    </a:solidFill>
+                  </a:tcPr>
+                </a:tc>
+                <a:tc>
+                  <a:txBody>
+                    <a:bodyPr/>
+                    <a:lstStyle/>
+                    <a:p>
+                      <a:pPr algn="ctr"/>
+                      <a:r>
+                        <a:rPr sz="900" b="1">
+                          <a:solidFill>
+                            <a:srgbClr val="FFFFFF"/>
+                          </a:solidFill>
+                          <a:latin typeface="Segoe UI"/>
+                        </a:rPr>
+                        <a:t>PO2</a:t>
+                      </a:r>
+                    </a:p>
+                  </a:txBody>
+                  <a:tcPr>
+                    <a:solidFill>
+                      <a:srgbClr val="181818"/>
+                    </a:solidFill>
+                  </a:tcPr>
+                </a:tc>
+                <a:tc>
+                  <a:txBody>
+                    <a:bodyPr/>
+                    <a:lstStyle/>
+                    <a:p>
+                      <a:pPr algn="ctr"/>
+                      <a:r>
+                        <a:rPr sz="900" b="1">
+                          <a:solidFill>
+                            <a:srgbClr val="FFFFFF"/>
+                          </a:solidFill>
+                          <a:latin typeface="Segoe UI"/>
+                        </a:rPr>
+                        <a:t>PO3</a:t>
+                      </a:r>
+                    </a:p>
+                  </a:txBody>
+                  <a:tcPr>
+                    <a:solidFill>
+                      <a:srgbClr val="181818"/>
+                    </a:solidFill>
+                  </a:tcPr>
+                </a:tc>
+                <a:tc>
+                  <a:txBody>
+                    <a:bodyPr/>
+                    <a:lstStyle/>
+                    <a:p>
+                      <a:pPr algn="ctr"/>
+                      <a:r>
+                        <a:rPr sz="900" b="1">
+                          <a:solidFill>
+                            <a:srgbClr val="FFFFFF"/>
+                          </a:solidFill>
+                          <a:latin typeface="Segoe UI"/>
+                        </a:rPr>
+                        <a:t>PO4</a:t>
+                      </a:r>
+                    </a:p>
+                  </a:txBody>
+                  <a:tcPr>
+                    <a:solidFill>
+                      <a:srgbClr val="181818"/>
+                    </a:solidFill>
+                  </a:tcPr>
+                </a:tc>
+                <a:tc>
+                  <a:txBody>
+                    <a:bodyPr/>
+                    <a:lstStyle/>
+                    <a:p>
+                      <a:pPr algn="ctr"/>
+                      <a:r>
+                        <a:rPr sz="900" b="1">
+                          <a:solidFill>
+                            <a:srgbClr val="FFFFFF"/>
+                          </a:solidFill>
+                          <a:latin typeface="Segoe UI"/>
+                        </a:rPr>
+                        <a:t>PO5</a:t>
+                      </a:r>
+                    </a:p>
+                  </a:txBody>
+                  <a:tcPr>
+                    <a:solidFill>
+                      <a:srgbClr val="181818"/>
+                    </a:solidFill>
+                  </a:tcPr>
+                </a:tc>
+                <a:tc>
+                  <a:txBody>
+                    <a:bodyPr/>
+                    <a:lstStyle/>
+                    <a:p>
+                      <a:pPr algn="ctr"/>
+                      <a:r>
+                        <a:rPr sz="900" b="1">
+                          <a:solidFill>
+                            <a:srgbClr val="FFFFFF"/>
+                          </a:solidFill>
+                          <a:latin typeface="Segoe UI"/>
+                        </a:rPr>
+                        <a:t>PO6</a:t>
+                      </a:r>
+                    </a:p>
+                  </a:txBody>
+                  <a:tcPr>
+                    <a:solidFill>
+                      <a:srgbClr val="181818"/>
+                    </a:solidFill>
+                  </a:tcPr>
+                </a:tc>
+                <a:tc>
+                  <a:txBody>
+                    <a:bodyPr/>
+                    <a:lstStyle/>
+                    <a:p>
+                      <a:pPr algn="ctr"/>
+                      <a:r>
+                        <a:rPr sz="900" b="1">
+                          <a:solidFill>
+                            <a:srgbClr val="FFFFFF"/>
+                          </a:solidFill>
+                          <a:latin typeface="Segoe UI"/>
+                        </a:rPr>
+                        <a:t>PO7</a:t>
+                      </a:r>
+                    </a:p>
+                  </a:txBody>
+                  <a:tcPr>
+                    <a:solidFill>
+                      <a:srgbClr val="181818"/>
+                    </a:solidFill>
+                  </a:tcPr>
+                </a:tc>
+                <a:tc>
+                  <a:txBody>
+                    <a:bodyPr/>
+                    <a:lstStyle/>
+                    <a:p>
+                      <a:pPr algn="ctr"/>
+                      <a:r>
+                        <a:rPr sz="900" b="1">
+                          <a:solidFill>
+                            <a:srgbClr val="FFFFFF"/>
+                          </a:solidFill>
+                          <a:latin typeface="Segoe UI"/>
+                        </a:rPr>
+                        <a:t>PO8</a:t>
+                      </a:r>
+                    </a:p>
+                  </a:txBody>
+                  <a:tcPr>
+                    <a:solidFill>
+                      <a:srgbClr val="181818"/>
+                    </a:solidFill>
+                  </a:tcPr>
+                </a:tc>
+                <a:tc>
+                  <a:txBody>
+                    <a:bodyPr/>
+                    <a:lstStyle/>
+                    <a:p>
+                      <a:pPr algn="ctr"/>
+                      <a:r>
+                        <a:rPr sz="900" b="1">
+                          <a:solidFill>
+                            <a:srgbClr val="FFFFFF"/>
+                          </a:solidFill>
+                          <a:latin typeface="Segoe UI"/>
+                        </a:rPr>
+                        <a:t>PO9</a:t>
+                      </a:r>
+                    </a:p>
+                  </a:txBody>
+                  <a:tcPr>
+                    <a:solidFill>
+                      <a:srgbClr val="181818"/>
+                    </a:solidFill>
+                  </a:tcPr>
+                </a:tc>
+                <a:tc>
+                  <a:txBody>
+                    <a:bodyPr/>
+                    <a:lstStyle/>
+                    <a:p>
+                      <a:pPr algn="ctr"/>
+                      <a:r>
+                        <a:rPr sz="900" b="1">
+                          <a:solidFill>
+                            <a:srgbClr val="FFFFFF"/>
+                          </a:solidFill>
+                          <a:latin typeface="Segoe UI"/>
+                        </a:rPr>
+                        <a:t>PO10</a:t>
+                      </a:r>
+                    </a:p>
+                  </a:txBody>
+                  <a:tcPr>
+                    <a:solidFill>
+                      <a:srgbClr val="181818"/>
+                    </a:solidFill>
+                  </a:tcPr>
+                </a:tc>
+                <a:tc>
+                  <a:txBody>
+                    <a:bodyPr/>
+                    <a:lstStyle/>
+                    <a:p>
+                      <a:pPr algn="ctr"/>
+                      <a:r>
+                        <a:rPr sz="900" b="1">
+                          <a:solidFill>
+                            <a:srgbClr val="FFFFFF"/>
+                          </a:solidFill>
+                          <a:latin typeface="Segoe UI"/>
+                        </a:rPr>
+                        <a:t>PO11</a:t>
+                      </a:r>
+                    </a:p>
+                  </a:txBody>
+                  <a:tcPr>
+                    <a:solidFill>
+                      <a:srgbClr val="181818"/>
+                    </a:solidFill>
+                  </a:tcPr>
+                </a:tc>
+                <a:tc>
+                  <a:txBody>
+                    <a:bodyPr/>
+                    <a:lstStyle/>
+                    <a:p>
+                      <a:pPr algn="ctr"/>
+                      <a:r>
+                        <a:rPr sz="900" b="1">
+                          <a:solidFill>
+                            <a:srgbClr val="FFFFFF"/>
+                          </a:solidFill>
+                          <a:latin typeface="Segoe UI"/>
+                        </a:rPr>
+                        <a:t>PSO1</a:t>
+                      </a:r>
+                    </a:p>
+                  </a:txBody>
+                  <a:tcPr>
+                    <a:solidFill>
+                      <a:srgbClr val="181818"/>
+                    </a:solidFill>
+                  </a:tcPr>
+                </a:tc>
+                <a:tc>
+                  <a:txBody>
+                    <a:bodyPr/>
+                    <a:lstStyle/>
+                    <a:p>
+                      <a:pPr algn="ctr"/>
+                      <a:r>
+                        <a:rPr sz="900" b="1">
+                          <a:solidFill>
+                            <a:srgbClr val="FFFFFF"/>
+                          </a:solidFill>
+                          <a:latin typeface="Segoe UI"/>
+                        </a:rPr>
+                        <a:t>PSO2</a:t>
+                      </a:r>
+                    </a:p>
+                  </a:txBody>
+                  <a:tcPr>
+                    <a:solidFill>
+                      <a:srgbClr val="181818"/>
+                    </a:solidFill>
+                  </a:tcPr>
+                </a:tc>
+              </a:tr>
+              <a:tr h="308610">
+                <a:tc>
+                  <a:txBody>
+                    <a:bodyPr/>
+                    <a:lstStyle/>
+                    <a:p>
+                      <a:pPr algn="ctr"/>
+                      <a:r>
+                        <a:rPr sz="950" b="0">
+                          <a:solidFill>
+                            <a:srgbClr val="FFFFFF"/>
+                          </a:solidFill>
+                          <a:latin typeface="Consolas"/>
+                        </a:rPr>
+                        <a:t>CO1</a:t>
+                      </a:r>
+                    </a:p>
+                  </a:txBody>
+                  <a:tcPr>
+                    <a:solidFill>
+                      <a:srgbClr val="0A0A0A"/>
+                    </a:solidFill>
+                  </a:tcPr>
+                </a:tc>
+                <a:tc>
+                  <a:txBody>
+                    <a:bodyPr/>
+                    <a:lstStyle/>
+                    <a:p>
+                      <a:pPr algn="ctr"/>
+                      <a:r>
+                        <a:rPr sz="950" b="0">
+                          <a:solidFill>
+                            <a:srgbClr val="1DB954"/>
+                          </a:solidFill>
+                          <a:latin typeface="Consolas"/>
+                        </a:rPr>
+                        <a:t>3</a:t>
+                      </a:r>
+                    </a:p>
+                  </a:txBody>
+                  <a:tcPr>
+                    <a:solidFill>
+                      <a:srgbClr val="0A0A0A"/>
+                    </a:solidFill>
+                  </a:tcPr>
+                </a:tc>
+                <a:tc>
+                  <a:txBody>
+                    <a:bodyPr/>
+                    <a:lstStyle/>
+                    <a:p>
+                      <a:pPr algn="ctr"/>
+                      <a:r>
+                        <a:rPr sz="950" b="0">
+                          <a:solidFill>
+                            <a:srgbClr val="FFB000"/>
+                          </a:solidFill>
+                          <a:latin typeface="Consolas"/>
+                        </a:rPr>
+                        <a:t>2</a:t>
+                      </a:r>
+                    </a:p>
+                  </a:txBody>
+                  <a:tcPr>
+                    <a:solidFill>
+                      <a:srgbClr val="0A0A0A"/>
+                    </a:solidFill>
+                  </a:tcPr>
+                </a:tc>
+                <a:tc>
+                  <a:txBody>
+                    <a:bodyPr/>
+                    <a:lstStyle/>
+                    <a:p>
+                      <a:pPr algn="ctr"/>
+                      <a:r>
+                        <a:rPr sz="950" b="0">
+                          <a:solidFill>
+                            <a:srgbClr val="737373"/>
+                          </a:solidFill>
+                          <a:latin typeface="Consolas"/>
+                        </a:rPr>
+                        <a:t>—</a:t>
+                      </a:r>
+                    </a:p>
+                  </a:txBody>
+                  <a:tcPr>
+                    <a:solidFill>
+                      <a:srgbClr val="0A0A0A"/>
+                    </a:solidFill>
+                  </a:tcPr>
+                </a:tc>
+                <a:tc>
+                  <a:txBody>
+                    <a:bodyPr/>
+                    <a:lstStyle/>
+                    <a:p>
+                      <a:pPr algn="ctr"/>
+                      <a:r>
+                        <a:rPr sz="950" b="0">
+                          <a:solidFill>
+                            <a:srgbClr val="FFB000"/>
+                          </a:solidFill>
+                          <a:latin typeface="Consolas"/>
+                        </a:rPr>
+                        <a:t>2</a:t>
+                      </a:r>
+                    </a:p>
+                  </a:txBody>
+                  <a:tcPr>
+                    <a:solidFill>
+                      <a:srgbClr val="0A0A0A"/>
+                    </a:solidFill>
+                  </a:tcPr>
+                </a:tc>
+                <a:tc>
+                  <a:txBody>
+                    <a:bodyPr/>
+                    <a:lstStyle/>
+                    <a:p>
+                      <a:pPr algn="ctr"/>
+                      <a:r>
+                        <a:rPr sz="950" b="0">
+                          <a:solidFill>
+                            <a:srgbClr val="1DB954"/>
+                          </a:solidFill>
+                          <a:latin typeface="Consolas"/>
+                        </a:rPr>
+                        <a:t>3</a:t>
+                      </a:r>
+                    </a:p>
+                  </a:txBody>
+                  <a:tcPr>
+                    <a:solidFill>
+                      <a:srgbClr val="0A0A0A"/>
+                    </a:solidFill>
+                  </a:tcPr>
+                </a:tc>
+                <a:tc>
+                  <a:txBody>
+                    <a:bodyPr/>
+                    <a:lstStyle/>
+                    <a:p>
+                      <a:pPr algn="ctr"/>
+                      <a:r>
+                        <a:rPr sz="950" b="0">
+                          <a:solidFill>
+                            <a:srgbClr val="737373"/>
+                          </a:solidFill>
+                          <a:latin typeface="Consolas"/>
+                        </a:rPr>
+                        <a:t>—</a:t>
+                      </a:r>
+                    </a:p>
+                  </a:txBody>
+                  <a:tcPr>
+                    <a:solidFill>
+                      <a:srgbClr val="0A0A0A"/>
+                    </a:solidFill>
+                  </a:tcPr>
+                </a:tc>
+                <a:tc>
+                  <a:txBody>
+                    <a:bodyPr/>
+                    <a:lstStyle/>
+                    <a:p>
+                      <a:pPr algn="ctr"/>
+                      <a:r>
+                        <a:rPr sz="950" b="0">
+                          <a:solidFill>
+                            <a:srgbClr val="737373"/>
+                          </a:solidFill>
+                          <a:latin typeface="Consolas"/>
+                        </a:rPr>
+                        <a:t>—</a:t>
+                      </a:r>
+                    </a:p>
+                  </a:txBody>
+                  <a:tcPr>
+                    <a:solidFill>
+                      <a:srgbClr val="0A0A0A"/>
+                    </a:solidFill>
+                  </a:tcPr>
+                </a:tc>
+                <a:tc>
+                  <a:txBody>
+                    <a:bodyPr/>
+                    <a:lstStyle/>
+                    <a:p>
+                      <a:pPr algn="ctr"/>
+                      <a:r>
+                        <a:rPr sz="950" b="0">
+                          <a:solidFill>
+                            <a:srgbClr val="737373"/>
+                          </a:solidFill>
+                          <a:latin typeface="Consolas"/>
+                        </a:rPr>
+                        <a:t>—</a:t>
+                      </a:r>
+                    </a:p>
+                  </a:txBody>
+                  <a:tcPr>
+                    <a:solidFill>
+                      <a:srgbClr val="0A0A0A"/>
+                    </a:solidFill>
+                  </a:tcPr>
+                </a:tc>
+                <a:tc>
+                  <a:txBody>
+                    <a:bodyPr/>
+                    <a:lstStyle/>
+                    <a:p>
+                      <a:pPr algn="ctr"/>
+                      <a:r>
+                        <a:rPr sz="950" b="0">
+                          <a:solidFill>
+                            <a:srgbClr val="737373"/>
+                          </a:solidFill>
+                          <a:latin typeface="Consolas"/>
+                        </a:rPr>
+                        <a:t>—</a:t>
+                      </a:r>
+                    </a:p>
+                  </a:txBody>
+                  <a:tcPr>
+                    <a:solidFill>
+                      <a:srgbClr val="0A0A0A"/>
+                    </a:solidFill>
+                  </a:tcPr>
+                </a:tc>
+                <a:tc>
+                  <a:txBody>
+                    <a:bodyPr/>
+                    <a:lstStyle/>
+                    <a:p>
+                      <a:pPr algn="ctr"/>
+                      <a:r>
+                        <a:rPr sz="950" b="0">
+                          <a:solidFill>
+                            <a:srgbClr val="737373"/>
+                          </a:solidFill>
+                          <a:latin typeface="Consolas"/>
+                        </a:rPr>
+                        <a:t>—</a:t>
+                      </a:r>
+                    </a:p>
+                  </a:txBody>
+                  <a:tcPr>
+                    <a:solidFill>
+                      <a:srgbClr val="0A0A0A"/>
+                    </a:solidFill>
+                  </a:tcPr>
+                </a:tc>
+                <a:tc>
+                  <a:txBody>
+                    <a:bodyPr/>
+                    <a:lstStyle/>
+                    <a:p>
+                      <a:pPr algn="ctr"/>
+                      <a:r>
+                        <a:rPr sz="950" b="0">
+                          <a:solidFill>
+                            <a:srgbClr val="737373"/>
+                          </a:solidFill>
+                          <a:latin typeface="Consolas"/>
+                        </a:rPr>
+                        <a:t>—</a:t>
+                      </a:r>
+                    </a:p>
+                  </a:txBody>
+                  <a:tcPr>
+                    <a:solidFill>
+                      <a:srgbClr val="0A0A0A"/>
+                    </a:solidFill>
+                  </a:tcPr>
+                </a:tc>
+                <a:tc>
+                  <a:txBody>
+                    <a:bodyPr/>
+                    <a:lstStyle/>
+                    <a:p>
+                      <a:pPr algn="ctr"/>
+                      <a:r>
+                        <a:rPr sz="950" b="0">
+                          <a:solidFill>
+                            <a:srgbClr val="1DB954"/>
+                          </a:solidFill>
+                          <a:latin typeface="Consolas"/>
+                        </a:rPr>
+                        <a:t>3</a:t>
+                      </a:r>
+                    </a:p>
+                  </a:txBody>
+                  <a:tcPr>
+                    <a:solidFill>
+                      <a:srgbClr val="0A0A0A"/>
+                    </a:solidFill>
+                  </a:tcPr>
+                </a:tc>
+                <a:tc>
+                  <a:txBody>
+                    <a:bodyPr/>
+                    <a:lstStyle/>
+                    <a:p>
+                      <a:pPr algn="ctr"/>
+                      <a:r>
+                        <a:rPr sz="950" b="0">
+                          <a:solidFill>
+                            <a:srgbClr val="FFB000"/>
+                          </a:solidFill>
+                          <a:latin typeface="Consolas"/>
+                        </a:rPr>
+                        <a:t>2</a:t>
+                      </a:r>
+                    </a:p>
+                  </a:txBody>
+                  <a:tcPr>
+                    <a:solidFill>
+                      <a:srgbClr val="0A0A0A"/>
+                    </a:solidFill>
+                  </a:tcPr>
+                </a:tc>
+              </a:tr>
+              <a:tr h="308610">
+                <a:tc>
+                  <a:txBody>
+                    <a:bodyPr/>
+                    <a:lstStyle/>
+                    <a:p>
+                      <a:pPr algn="ctr"/>
+                      <a:r>
+                        <a:rPr sz="950" b="0">
+                          <a:solidFill>
+                            <a:srgbClr val="FFFFFF"/>
+                          </a:solidFill>
+                          <a:latin typeface="Consolas"/>
+                        </a:rPr>
+                        <a:t>CO2</a:t>
+                      </a:r>
+                    </a:p>
+                  </a:txBody>
+                  <a:tcPr>
+                    <a:solidFill>
+                      <a:srgbClr val="0A0A0A"/>
+                    </a:solidFill>
+                  </a:tcPr>
+                </a:tc>
+                <a:tc>
+                  <a:txBody>
+                    <a:bodyPr/>
+                    <a:lstStyle/>
+                    <a:p>
+                      <a:pPr algn="ctr"/>
+                      <a:r>
+                        <a:rPr sz="950" b="0">
+                          <a:solidFill>
+                            <a:srgbClr val="1DB954"/>
+                          </a:solidFill>
+                          <a:latin typeface="Consolas"/>
+                        </a:rPr>
+                        <a:t>3</a:t>
+                      </a:r>
+                    </a:p>
+                  </a:txBody>
+                  <a:tcPr>
+                    <a:solidFill>
+                      <a:srgbClr val="0A0A0A"/>
+                    </a:solidFill>
+                  </a:tcPr>
+                </a:tc>
+                <a:tc>
+                  <a:txBody>
+                    <a:bodyPr/>
+                    <a:lstStyle/>
+                    <a:p>
+                      <a:pPr algn="ctr"/>
+                      <a:r>
+                        <a:rPr sz="950" b="0">
+                          <a:solidFill>
+                            <a:srgbClr val="1DB954"/>
+                          </a:solidFill>
+                          <a:latin typeface="Consolas"/>
+                        </a:rPr>
+                        <a:t>3</a:t>
+                      </a:r>
+                    </a:p>
+                  </a:txBody>
+                  <a:tcPr>
+                    <a:solidFill>
+                      <a:srgbClr val="0A0A0A"/>
+                    </a:solidFill>
+                  </a:tcPr>
+                </a:tc>
+                <a:tc>
+                  <a:txBody>
+                    <a:bodyPr/>
+                    <a:lstStyle/>
+                    <a:p>
+                      <a:pPr algn="ctr"/>
+                      <a:r>
+                        <a:rPr sz="950" b="0">
+                          <a:solidFill>
+                            <a:srgbClr val="737373"/>
+                          </a:solidFill>
+                          <a:latin typeface="Consolas"/>
+                        </a:rPr>
+                        <a:t>—</a:t>
+                      </a:r>
+                    </a:p>
+                  </a:txBody>
+                  <a:tcPr>
+                    <a:solidFill>
+                      <a:srgbClr val="0A0A0A"/>
+                    </a:solidFill>
+                  </a:tcPr>
+                </a:tc>
+                <a:tc>
+                  <a:txBody>
+                    <a:bodyPr/>
+                    <a:lstStyle/>
+                    <a:p>
+                      <a:pPr algn="ctr"/>
+                      <a:r>
+                        <a:rPr sz="950" b="0">
+                          <a:solidFill>
+                            <a:srgbClr val="1DB954"/>
+                          </a:solidFill>
+                          <a:latin typeface="Consolas"/>
+                        </a:rPr>
+                        <a:t>3</a:t>
+                      </a:r>
+                    </a:p>
+                  </a:txBody>
+                  <a:tcPr>
+                    <a:solidFill>
+                      <a:srgbClr val="0A0A0A"/>
+                    </a:solidFill>
+                  </a:tcPr>
+                </a:tc>
+                <a:tc>
+                  <a:txBody>
+                    <a:bodyPr/>
+                    <a:lstStyle/>
+                    <a:p>
+                      <a:pPr algn="ctr"/>
+                      <a:r>
+                        <a:rPr sz="950" b="0">
+                          <a:solidFill>
+                            <a:srgbClr val="1DB954"/>
+                          </a:solidFill>
+                          <a:latin typeface="Consolas"/>
+                        </a:rPr>
+                        <a:t>3</a:t>
+                      </a:r>
+                    </a:p>
+                  </a:txBody>
+                  <a:tcPr>
+                    <a:solidFill>
+                      <a:srgbClr val="0A0A0A"/>
+                    </a:solidFill>
+                  </a:tcPr>
+                </a:tc>
+                <a:tc>
+                  <a:txBody>
+                    <a:bodyPr/>
+                    <a:lstStyle/>
+                    <a:p>
+                      <a:pPr algn="ctr"/>
+                      <a:r>
+                        <a:rPr sz="950" b="0">
+                          <a:solidFill>
+                            <a:srgbClr val="737373"/>
+                          </a:solidFill>
+                          <a:latin typeface="Consolas"/>
+                        </a:rPr>
+                        <a:t>—</a:t>
+                      </a:r>
+                    </a:p>
+                  </a:txBody>
+                  <a:tcPr>
+                    <a:solidFill>
+                      <a:srgbClr val="0A0A0A"/>
+                    </a:solidFill>
+                  </a:tcPr>
+                </a:tc>
+                <a:tc>
+                  <a:txBody>
+                    <a:bodyPr/>
+                    <a:lstStyle/>
+                    <a:p>
+                      <a:pPr algn="ctr"/>
+                      <a:r>
+                        <a:rPr sz="950" b="0">
+                          <a:solidFill>
+                            <a:srgbClr val="737373"/>
+                          </a:solidFill>
+                          <a:latin typeface="Consolas"/>
+                        </a:rPr>
+                        <a:t>—</a:t>
+                      </a:r>
+                    </a:p>
+                  </a:txBody>
+                  <a:tcPr>
+                    <a:solidFill>
+                      <a:srgbClr val="0A0A0A"/>
+                    </a:solidFill>
+                  </a:tcPr>
+                </a:tc>
+                <a:tc>
+                  <a:txBody>
+                    <a:bodyPr/>
+                    <a:lstStyle/>
+                    <a:p>
+                      <a:pPr algn="ctr"/>
+                      <a:r>
+                        <a:rPr sz="950" b="0">
+                          <a:solidFill>
+                            <a:srgbClr val="737373"/>
+                          </a:solidFill>
+                          <a:latin typeface="Consolas"/>
+                        </a:rPr>
+                        <a:t>—</a:t>
+                      </a:r>
+                    </a:p>
+                  </a:txBody>
+                  <a:tcPr>
+                    <a:solidFill>
+                      <a:srgbClr val="0A0A0A"/>
+                    </a:solidFill>
+                  </a:tcPr>
+                </a:tc>
+                <a:tc>
+                  <a:txBody>
+                    <a:bodyPr/>
+                    <a:lstStyle/>
+                    <a:p>
+                      <a:pPr algn="ctr"/>
+                      <a:r>
+                        <a:rPr sz="950" b="0">
+                          <a:solidFill>
+                            <a:srgbClr val="FFB000"/>
+                          </a:solidFill>
+                          <a:latin typeface="Consolas"/>
+                        </a:rPr>
+                        <a:t>2</a:t>
+                      </a:r>
+                    </a:p>
+                  </a:txBody>
+                  <a:tcPr>
+                    <a:solidFill>
+                      <a:srgbClr val="0A0A0A"/>
+                    </a:solidFill>
+                  </a:tcPr>
+                </a:tc>
+                <a:tc>
+                  <a:txBody>
+                    <a:bodyPr/>
+                    <a:lstStyle/>
+                    <a:p>
+                      <a:pPr algn="ctr"/>
+                      <a:r>
+                        <a:rPr sz="950" b="0">
+                          <a:solidFill>
+                            <a:srgbClr val="737373"/>
+                          </a:solidFill>
+                          <a:latin typeface="Consolas"/>
+                        </a:rPr>
+                        <a:t>—</a:t>
+                      </a:r>
+                    </a:p>
+                  </a:txBody>
+                  <a:tcPr>
+                    <a:solidFill>
+                      <a:srgbClr val="0A0A0A"/>
+                    </a:solidFill>
+                  </a:tcPr>
+                </a:tc>
+                <a:tc>
+                  <a:txBody>
+                    <a:bodyPr/>
+                    <a:lstStyle/>
+                    <a:p>
+                      <a:pPr algn="ctr"/>
+                      <a:r>
+                        <a:rPr sz="950" b="0">
+                          <a:solidFill>
+                            <a:srgbClr val="737373"/>
+                          </a:solidFill>
+                          <a:latin typeface="Consolas"/>
+                        </a:rPr>
+                        <a:t>—</a:t>
+                      </a:r>
+                    </a:p>
+                  </a:txBody>
+                  <a:tcPr>
+                    <a:solidFill>
+                      <a:srgbClr val="0A0A0A"/>
+                    </a:solidFill>
+                  </a:tcPr>
+                </a:tc>
+                <a:tc>
+                  <a:txBody>
+                    <a:bodyPr/>
+                    <a:lstStyle/>
+                    <a:p>
+                      <a:pPr algn="ctr"/>
+                      <a:r>
+                        <a:rPr sz="950" b="0">
+                          <a:solidFill>
+                            <a:srgbClr val="1DB954"/>
+                          </a:solidFill>
+                          <a:latin typeface="Consolas"/>
+                        </a:rPr>
+                        <a:t>3</a:t>
+                      </a:r>
+                    </a:p>
+                  </a:txBody>
+                  <a:tcPr>
+                    <a:solidFill>
+                      <a:srgbClr val="0A0A0A"/>
+                    </a:solidFill>
+                  </a:tcPr>
+                </a:tc>
+                <a:tc>
+                  <a:txBody>
+                    <a:bodyPr/>
+                    <a:lstStyle/>
+                    <a:p>
+                      <a:pPr algn="ctr"/>
+                      <a:r>
+                        <a:rPr sz="950" b="0">
+                          <a:solidFill>
+                            <a:srgbClr val="1DB954"/>
+                          </a:solidFill>
+                          <a:latin typeface="Consolas"/>
+                        </a:rPr>
+                        <a:t>3</a:t>
+                      </a:r>
+                    </a:p>
+                  </a:txBody>
+                  <a:tcPr>
+                    <a:solidFill>
+                      <a:srgbClr val="0A0A0A"/>
+                    </a:solidFill>
+                  </a:tcPr>
+                </a:tc>
+              </a:tr>
+              <a:tr h="308610">
+                <a:tc>
+                  <a:txBody>
+                    <a:bodyPr/>
+                    <a:lstStyle/>
+                    <a:p>
+                      <a:pPr algn="ctr"/>
+                      <a:r>
+                        <a:rPr sz="950" b="0">
+                          <a:solidFill>
+                            <a:srgbClr val="FFFFFF"/>
+                          </a:solidFill>
+                          <a:latin typeface="Consolas"/>
+                        </a:rPr>
+                        <a:t>CO3</a:t>
+                      </a:r>
+                    </a:p>
+                  </a:txBody>
+                  <a:tcPr>
+                    <a:solidFill>
+                      <a:srgbClr val="0A0A0A"/>
+                    </a:solidFill>
+                  </a:tcPr>
+                </a:tc>
+                <a:tc>
+                  <a:txBody>
+                    <a:bodyPr/>
+                    <a:lstStyle/>
+                    <a:p>
+                      <a:pPr algn="ctr"/>
+                      <a:r>
+                        <a:rPr sz="950" b="0">
+                          <a:solidFill>
+                            <a:srgbClr val="1DB954"/>
+                          </a:solidFill>
+                          <a:latin typeface="Consolas"/>
+                        </a:rPr>
+                        <a:t>3</a:t>
+                      </a:r>
+                    </a:p>
+                  </a:txBody>
+                  <a:tcPr>
+                    <a:solidFill>
+                      <a:srgbClr val="0A0A0A"/>
+                    </a:solidFill>
+                  </a:tcPr>
+                </a:tc>
+                <a:tc>
+                  <a:txBody>
+                    <a:bodyPr/>
+                    <a:lstStyle/>
+                    <a:p>
+                      <a:pPr algn="ctr"/>
+                      <a:r>
+                        <a:rPr sz="950" b="0">
+                          <a:solidFill>
+                            <a:srgbClr val="1DB954"/>
+                          </a:solidFill>
+                          <a:latin typeface="Consolas"/>
+                        </a:rPr>
+                        <a:t>3</a:t>
+                      </a:r>
+                    </a:p>
+                  </a:txBody>
+                  <a:tcPr>
+                    <a:solidFill>
+                      <a:srgbClr val="0A0A0A"/>
+                    </a:solidFill>
+                  </a:tcPr>
+                </a:tc>
+                <a:tc>
+                  <a:txBody>
+                    <a:bodyPr/>
+                    <a:lstStyle/>
+                    <a:p>
+                      <a:pPr algn="ctr"/>
+                      <a:r>
+                        <a:rPr sz="950" b="0">
+                          <a:solidFill>
+                            <a:srgbClr val="1DB954"/>
+                          </a:solidFill>
+                          <a:latin typeface="Consolas"/>
+                        </a:rPr>
+                        <a:t>3</a:t>
+                      </a:r>
+                    </a:p>
+                  </a:txBody>
+                  <a:tcPr>
+                    <a:solidFill>
+                      <a:srgbClr val="0A0A0A"/>
+                    </a:solidFill>
+                  </a:tcPr>
+                </a:tc>
+                <a:tc>
+                  <a:txBody>
+                    <a:bodyPr/>
+                    <a:lstStyle/>
+                    <a:p>
+                      <a:pPr algn="ctr"/>
+                      <a:r>
+                        <a:rPr sz="950" b="0">
+                          <a:solidFill>
+                            <a:srgbClr val="FFB000"/>
+                          </a:solidFill>
+                          <a:latin typeface="Consolas"/>
+                        </a:rPr>
+                        <a:t>2</a:t>
+                      </a:r>
+                    </a:p>
+                  </a:txBody>
+                  <a:tcPr>
+                    <a:solidFill>
+                      <a:srgbClr val="0A0A0A"/>
+                    </a:solidFill>
+                  </a:tcPr>
+                </a:tc>
+                <a:tc>
+                  <a:txBody>
+                    <a:bodyPr/>
+                    <a:lstStyle/>
+                    <a:p>
+                      <a:pPr algn="ctr"/>
+                      <a:r>
+                        <a:rPr sz="950" b="0">
+                          <a:solidFill>
+                            <a:srgbClr val="1DB954"/>
+                          </a:solidFill>
+                          <a:latin typeface="Consolas"/>
+                        </a:rPr>
+                        <a:t>3</a:t>
+                      </a:r>
+                    </a:p>
+                  </a:txBody>
+                  <a:tcPr>
+                    <a:solidFill>
+                      <a:srgbClr val="0A0A0A"/>
+                    </a:solidFill>
+                  </a:tcPr>
+                </a:tc>
+                <a:tc>
+                  <a:txBody>
+                    <a:bodyPr/>
+                    <a:lstStyle/>
+                    <a:p>
+                      <a:pPr algn="ctr"/>
+                      <a:r>
+                        <a:rPr sz="950" b="0">
+                          <a:solidFill>
+                            <a:srgbClr val="737373"/>
+                          </a:solidFill>
+                          <a:latin typeface="Consolas"/>
+                        </a:rPr>
+                        <a:t>—</a:t>
+                      </a:r>
+                    </a:p>
+                  </a:txBody>
+                  <a:tcPr>
+                    <a:solidFill>
+                      <a:srgbClr val="0A0A0A"/>
+                    </a:solidFill>
+                  </a:tcPr>
+                </a:tc>
+                <a:tc>
+                  <a:txBody>
+                    <a:bodyPr/>
+                    <a:lstStyle/>
+                    <a:p>
+                      <a:pPr algn="ctr"/>
+                      <a:r>
+                        <a:rPr sz="950" b="0">
+                          <a:solidFill>
+                            <a:srgbClr val="737373"/>
+                          </a:solidFill>
+                          <a:latin typeface="Consolas"/>
+                        </a:rPr>
+                        <a:t>—</a:t>
+                      </a:r>
+                    </a:p>
+                  </a:txBody>
+                  <a:tcPr>
+                    <a:solidFill>
+                      <a:srgbClr val="0A0A0A"/>
+                    </a:solidFill>
+                  </a:tcPr>
+                </a:tc>
+                <a:tc>
+                  <a:txBody>
+                    <a:bodyPr/>
+                    <a:lstStyle/>
+                    <a:p>
+                      <a:pPr algn="ctr"/>
+                      <a:r>
+                        <a:rPr sz="950" b="0">
+                          <a:solidFill>
+                            <a:srgbClr val="FFB000"/>
+                          </a:solidFill>
+                          <a:latin typeface="Consolas"/>
+                        </a:rPr>
+                        <a:t>2</a:t>
+                      </a:r>
+                    </a:p>
+                  </a:txBody>
+                  <a:tcPr>
+                    <a:solidFill>
+                      <a:srgbClr val="0A0A0A"/>
+                    </a:solidFill>
+                  </a:tcPr>
+                </a:tc>
+                <a:tc>
+                  <a:txBody>
+                    <a:bodyPr/>
+                    <a:lstStyle/>
+                    <a:p>
+                      <a:pPr algn="ctr"/>
+                      <a:r>
+                        <a:rPr sz="950" b="0">
+                          <a:solidFill>
+                            <a:srgbClr val="737373"/>
+                          </a:solidFill>
+                          <a:latin typeface="Consolas"/>
+                        </a:rPr>
+                        <a:t>—</a:t>
+                      </a:r>
+                    </a:p>
+                  </a:txBody>
+                  <a:tcPr>
+                    <a:solidFill>
+                      <a:srgbClr val="0A0A0A"/>
+                    </a:solidFill>
+                  </a:tcPr>
+                </a:tc>
+                <a:tc>
+                  <a:txBody>
+                    <a:bodyPr/>
+                    <a:lstStyle/>
+                    <a:p>
+                      <a:pPr algn="ctr"/>
+                      <a:r>
+                        <a:rPr sz="950" b="0">
+                          <a:solidFill>
+                            <a:srgbClr val="737373"/>
+                          </a:solidFill>
+                          <a:latin typeface="Consolas"/>
+                        </a:rPr>
+                        <a:t>—</a:t>
+                      </a:r>
+                    </a:p>
+                  </a:txBody>
+                  <a:tcPr>
+                    <a:solidFill>
+                      <a:srgbClr val="0A0A0A"/>
+                    </a:solidFill>
+                  </a:tcPr>
+                </a:tc>
+                <a:tc>
+                  <a:txBody>
+                    <a:bodyPr/>
+                    <a:lstStyle/>
+                    <a:p>
+                      <a:pPr algn="ctr"/>
+                      <a:r>
+                        <a:rPr sz="950" b="0">
+                          <a:solidFill>
+                            <a:srgbClr val="737373"/>
+                          </a:solidFill>
+                          <a:latin typeface="Consolas"/>
+                        </a:rPr>
+                        <a:t>—</a:t>
+                      </a:r>
+                    </a:p>
+                  </a:txBody>
+                  <a:tcPr>
+                    <a:solidFill>
+                      <a:srgbClr val="0A0A0A"/>
+                    </a:solidFill>
+                  </a:tcPr>
+                </a:tc>
+                <a:tc>
+                  <a:txBody>
+                    <a:bodyPr/>
+                    <a:lstStyle/>
+                    <a:p>
+                      <a:pPr algn="ctr"/>
+                      <a:r>
+                        <a:rPr sz="950" b="0">
+                          <a:solidFill>
+                            <a:srgbClr val="1DB954"/>
+                          </a:solidFill>
+                          <a:latin typeface="Consolas"/>
+                        </a:rPr>
+                        <a:t>3</a:t>
+                      </a:r>
+                    </a:p>
+                  </a:txBody>
+                  <a:tcPr>
+                    <a:solidFill>
+                      <a:srgbClr val="0A0A0A"/>
+                    </a:solidFill>
+                  </a:tcPr>
+                </a:tc>
+                <a:tc>
+                  <a:txBody>
+                    <a:bodyPr/>
+                    <a:lstStyle/>
+                    <a:p>
+                      <a:pPr algn="ctr"/>
+                      <a:r>
+                        <a:rPr sz="950" b="0">
+                          <a:solidFill>
+                            <a:srgbClr val="1DB954"/>
+                          </a:solidFill>
+                          <a:latin typeface="Consolas"/>
+                        </a:rPr>
+                        <a:t>3</a:t>
+                      </a:r>
+                    </a:p>
+                  </a:txBody>
+                  <a:tcPr>
+                    <a:solidFill>
+                      <a:srgbClr val="0A0A0A"/>
+                    </a:solidFill>
+                  </a:tcPr>
+                </a:tc>
+              </a:tr>
+              <a:tr h="308610">
+                <a:tc>
+                  <a:txBody>
+                    <a:bodyPr/>
+                    <a:lstStyle/>
+                    <a:p>
+                      <a:pPr algn="ctr"/>
+                      <a:r>
+                        <a:rPr sz="950" b="0">
+                          <a:solidFill>
+                            <a:srgbClr val="FFFFFF"/>
+                          </a:solidFill>
+                          <a:latin typeface="Consolas"/>
+                        </a:rPr>
+                        <a:t>CO4</a:t>
+                      </a:r>
+                    </a:p>
+                  </a:txBody>
+                  <a:tcPr>
+                    <a:solidFill>
+                      <a:srgbClr val="0A0A0A"/>
+                    </a:solidFill>
+                  </a:tcPr>
+                </a:tc>
+                <a:tc>
+                  <a:txBody>
+                    <a:bodyPr/>
+                    <a:lstStyle/>
+                    <a:p>
+                      <a:pPr algn="ctr"/>
+                      <a:r>
+                        <a:rPr sz="950" b="0">
+                          <a:solidFill>
+                            <a:srgbClr val="1DB954"/>
+                          </a:solidFill>
+                          <a:latin typeface="Consolas"/>
+                        </a:rPr>
+                        <a:t>3</a:t>
+                      </a:r>
+                    </a:p>
+                  </a:txBody>
+                  <a:tcPr>
+                    <a:solidFill>
+                      <a:srgbClr val="0A0A0A"/>
+                    </a:solidFill>
+                  </a:tcPr>
+                </a:tc>
+                <a:tc>
+                  <a:txBody>
+                    <a:bodyPr/>
+                    <a:lstStyle/>
+                    <a:p>
+                      <a:pPr algn="ctr"/>
+                      <a:r>
+                        <a:rPr sz="950" b="0">
+                          <a:solidFill>
+                            <a:srgbClr val="1DB954"/>
+                          </a:solidFill>
+                          <a:latin typeface="Consolas"/>
+                        </a:rPr>
+                        <a:t>3</a:t>
+                      </a:r>
+                    </a:p>
+                  </a:txBody>
+                  <a:tcPr>
+                    <a:solidFill>
+                      <a:srgbClr val="0A0A0A"/>
+                    </a:solidFill>
+                  </a:tcPr>
+                </a:tc>
+                <a:tc>
+                  <a:txBody>
+                    <a:bodyPr/>
+                    <a:lstStyle/>
+                    <a:p>
+                      <a:pPr algn="ctr"/>
+                      <a:r>
+                        <a:rPr sz="950" b="0">
+                          <a:solidFill>
+                            <a:srgbClr val="737373"/>
+                          </a:solidFill>
+                          <a:latin typeface="Consolas"/>
+                        </a:rPr>
+                        <a:t>—</a:t>
+                      </a:r>
+                    </a:p>
+                  </a:txBody>
+                  <a:tcPr>
+                    <a:solidFill>
+                      <a:srgbClr val="0A0A0A"/>
+                    </a:solidFill>
+                  </a:tcPr>
+                </a:tc>
+                <a:tc>
+                  <a:txBody>
+                    <a:bodyPr/>
+                    <a:lstStyle/>
+                    <a:p>
+                      <a:pPr algn="ctr"/>
+                      <a:r>
+                        <a:rPr sz="950" b="0">
+                          <a:solidFill>
+                            <a:srgbClr val="1DB954"/>
+                          </a:solidFill>
+                          <a:latin typeface="Consolas"/>
+                        </a:rPr>
+                        <a:t>3</a:t>
+                      </a:r>
+                    </a:p>
+                  </a:txBody>
+                  <a:tcPr>
+                    <a:solidFill>
+                      <a:srgbClr val="0A0A0A"/>
+                    </a:solidFill>
+                  </a:tcPr>
+                </a:tc>
+                <a:tc>
+                  <a:txBody>
+                    <a:bodyPr/>
+                    <a:lstStyle/>
+                    <a:p>
+                      <a:pPr algn="ctr"/>
+                      <a:r>
+                        <a:rPr sz="950" b="0">
+                          <a:solidFill>
+                            <a:srgbClr val="1DB954"/>
+                          </a:solidFill>
+                          <a:latin typeface="Consolas"/>
+                        </a:rPr>
+                        <a:t>3</a:t>
+                      </a:r>
+                    </a:p>
+                  </a:txBody>
+                  <a:tcPr>
+                    <a:solidFill>
+                      <a:srgbClr val="0A0A0A"/>
+                    </a:solidFill>
+                  </a:tcPr>
+                </a:tc>
+                <a:tc>
+                  <a:txBody>
+                    <a:bodyPr/>
+                    <a:lstStyle/>
+                    <a:p>
+                      <a:pPr algn="ctr"/>
+                      <a:r>
+                        <a:rPr sz="950" b="0">
+                          <a:solidFill>
+                            <a:srgbClr val="737373"/>
+                          </a:solidFill>
+                          <a:latin typeface="Consolas"/>
+                        </a:rPr>
+                        <a:t>—</a:t>
+                      </a:r>
+                    </a:p>
+                  </a:txBody>
+                  <a:tcPr>
+                    <a:solidFill>
+                      <a:srgbClr val="0A0A0A"/>
+                    </a:solidFill>
+                  </a:tcPr>
+                </a:tc>
+                <a:tc>
+                  <a:txBody>
+                    <a:bodyPr/>
+                    <a:lstStyle/>
+                    <a:p>
+                      <a:pPr algn="ctr"/>
+                      <a:r>
+                        <a:rPr sz="950" b="0">
+                          <a:solidFill>
+                            <a:srgbClr val="FFB000"/>
+                          </a:solidFill>
+                          <a:latin typeface="Consolas"/>
+                        </a:rPr>
+                        <a:t>2</a:t>
+                      </a:r>
+                    </a:p>
+                  </a:txBody>
+                  <a:tcPr>
+                    <a:solidFill>
+                      <a:srgbClr val="0A0A0A"/>
+                    </a:solidFill>
+                  </a:tcPr>
+                </a:tc>
+                <a:tc>
+                  <a:txBody>
+                    <a:bodyPr/>
+                    <a:lstStyle/>
+                    <a:p>
+                      <a:pPr algn="ctr"/>
+                      <a:r>
+                        <a:rPr sz="950" b="0">
+                          <a:solidFill>
+                            <a:srgbClr val="737373"/>
+                          </a:solidFill>
+                          <a:latin typeface="Consolas"/>
+                        </a:rPr>
+                        <a:t>—</a:t>
+                      </a:r>
+                    </a:p>
+                  </a:txBody>
+                  <a:tcPr>
+                    <a:solidFill>
+                      <a:srgbClr val="0A0A0A"/>
+                    </a:solidFill>
+                  </a:tcPr>
+                </a:tc>
+                <a:tc>
+                  <a:txBody>
+                    <a:bodyPr/>
+                    <a:lstStyle/>
+                    <a:p>
+                      <a:pPr algn="ctr"/>
+                      <a:r>
+                        <a:rPr sz="950" b="0">
+                          <a:solidFill>
+                            <a:srgbClr val="FFB000"/>
+                          </a:solidFill>
+                          <a:latin typeface="Consolas"/>
+                        </a:rPr>
+                        <a:t>2</a:t>
+                      </a:r>
+                    </a:p>
+                  </a:txBody>
+                  <a:tcPr>
+                    <a:solidFill>
+                      <a:srgbClr val="0A0A0A"/>
+                    </a:solidFill>
+                  </a:tcPr>
+                </a:tc>
+                <a:tc>
+                  <a:txBody>
+                    <a:bodyPr/>
+                    <a:lstStyle/>
+                    <a:p>
+                      <a:pPr algn="ctr"/>
+                      <a:r>
+                        <a:rPr sz="950" b="0">
+                          <a:solidFill>
+                            <a:srgbClr val="737373"/>
+                          </a:solidFill>
+                          <a:latin typeface="Consolas"/>
+                        </a:rPr>
+                        <a:t>—</a:t>
+                      </a:r>
+                    </a:p>
+                  </a:txBody>
+                  <a:tcPr>
+                    <a:solidFill>
+                      <a:srgbClr val="0A0A0A"/>
+                    </a:solidFill>
+                  </a:tcPr>
+                </a:tc>
+                <a:tc>
+                  <a:txBody>
+                    <a:bodyPr/>
+                    <a:lstStyle/>
+                    <a:p>
+                      <a:pPr algn="ctr"/>
+                      <a:r>
+                        <a:rPr sz="950" b="0">
+                          <a:solidFill>
+                            <a:srgbClr val="737373"/>
+                          </a:solidFill>
+                          <a:latin typeface="Consolas"/>
+                        </a:rPr>
+                        <a:t>—</a:t>
+                      </a:r>
+                    </a:p>
+                  </a:txBody>
+                  <a:tcPr>
+                    <a:solidFill>
+                      <a:srgbClr val="0A0A0A"/>
+                    </a:solidFill>
+                  </a:tcPr>
+                </a:tc>
+                <a:tc>
+                  <a:txBody>
+                    <a:bodyPr/>
+                    <a:lstStyle/>
+                    <a:p>
+                      <a:pPr algn="ctr"/>
+                      <a:r>
+                        <a:rPr sz="950" b="0">
+                          <a:solidFill>
+                            <a:srgbClr val="1DB954"/>
+                          </a:solidFill>
+                          <a:latin typeface="Consolas"/>
+                        </a:rPr>
+                        <a:t>3</a:t>
+                      </a:r>
+                    </a:p>
+                  </a:txBody>
+                  <a:tcPr>
+                    <a:solidFill>
+                      <a:srgbClr val="0A0A0A"/>
+                    </a:solidFill>
+                  </a:tcPr>
+                </a:tc>
+                <a:tc>
+                  <a:txBody>
+                    <a:bodyPr/>
+                    <a:lstStyle/>
+                    <a:p>
+                      <a:pPr algn="ctr"/>
+                      <a:r>
+                        <a:rPr sz="950" b="0">
+                          <a:solidFill>
+                            <a:srgbClr val="1DB954"/>
+                          </a:solidFill>
+                          <a:latin typeface="Consolas"/>
+                        </a:rPr>
+                        <a:t>3</a:t>
+                      </a:r>
+                    </a:p>
+                  </a:txBody>
+                  <a:tcPr>
+                    <a:solidFill>
+                      <a:srgbClr val="0A0A0A"/>
+                    </a:solidFill>
+                  </a:tcPr>
+                </a:tc>
+              </a:tr>
+              <a:tr h="308610">
+                <a:tc>
+                  <a:txBody>
+                    <a:bodyPr/>
+                    <a:lstStyle/>
+                    <a:p>
+                      <a:pPr algn="ctr"/>
+                      <a:r>
+                        <a:rPr sz="950" b="0">
+                          <a:solidFill>
+                            <a:srgbClr val="FFFFFF"/>
+                          </a:solidFill>
+                          <a:latin typeface="Consolas"/>
+                        </a:rPr>
+                        <a:t>CO5</a:t>
+                      </a:r>
+                    </a:p>
+                  </a:txBody>
+                  <a:tcPr>
+                    <a:solidFill>
+                      <a:srgbClr val="0A0A0A"/>
+                    </a:solidFill>
+                  </a:tcPr>
+                </a:tc>
+                <a:tc>
+                  <a:txBody>
+                    <a:bodyPr/>
+                    <a:lstStyle/>
+                    <a:p>
+                      <a:pPr algn="ctr"/>
+                      <a:r>
+                        <a:rPr sz="950" b="0">
+                          <a:solidFill>
+                            <a:srgbClr val="FFB000"/>
+                          </a:solidFill>
+                          <a:latin typeface="Consolas"/>
+                        </a:rPr>
+                        <a:t>2</a:t>
+                      </a:r>
+                    </a:p>
+                  </a:txBody>
+                  <a:tcPr>
+                    <a:solidFill>
+                      <a:srgbClr val="0A0A0A"/>
+                    </a:solidFill>
+                  </a:tcPr>
+                </a:tc>
+                <a:tc>
+                  <a:txBody>
+                    <a:bodyPr/>
+                    <a:lstStyle/>
+                    <a:p>
+                      <a:pPr algn="ctr"/>
+                      <a:r>
+                        <a:rPr sz="950" b="0">
+                          <a:solidFill>
+                            <a:srgbClr val="FFB000"/>
+                          </a:solidFill>
+                          <a:latin typeface="Consolas"/>
+                        </a:rPr>
+                        <a:t>2</a:t>
+                      </a:r>
+                    </a:p>
+                  </a:txBody>
+                  <a:tcPr>
+                    <a:solidFill>
+                      <a:srgbClr val="0A0A0A"/>
+                    </a:solidFill>
+                  </a:tcPr>
+                </a:tc>
+                <a:tc>
+                  <a:txBody>
+                    <a:bodyPr/>
+                    <a:lstStyle/>
+                    <a:p>
+                      <a:pPr algn="ctr"/>
+                      <a:r>
+                        <a:rPr sz="950" b="0">
+                          <a:solidFill>
+                            <a:srgbClr val="737373"/>
+                          </a:solidFill>
+                          <a:latin typeface="Consolas"/>
+                        </a:rPr>
+                        <a:t>—</a:t>
+                      </a:r>
+                    </a:p>
+                  </a:txBody>
+                  <a:tcPr>
+                    <a:solidFill>
+                      <a:srgbClr val="0A0A0A"/>
+                    </a:solidFill>
+                  </a:tcPr>
+                </a:tc>
+                <a:tc>
+                  <a:txBody>
+                    <a:bodyPr/>
+                    <a:lstStyle/>
+                    <a:p>
+                      <a:pPr algn="ctr"/>
+                      <a:r>
+                        <a:rPr sz="950" b="0">
+                          <a:solidFill>
+                            <a:srgbClr val="737373"/>
+                          </a:solidFill>
+                          <a:latin typeface="Consolas"/>
+                        </a:rPr>
+                        <a:t>—</a:t>
+                      </a:r>
+                    </a:p>
+                  </a:txBody>
+                  <a:tcPr>
+                    <a:solidFill>
+                      <a:srgbClr val="0A0A0A"/>
+                    </a:solidFill>
+                  </a:tcPr>
+                </a:tc>
+                <a:tc>
+                  <a:txBody>
+                    <a:bodyPr/>
+                    <a:lstStyle/>
+                    <a:p>
+                      <a:pPr algn="ctr"/>
+                      <a:r>
+                        <a:rPr sz="950" b="0">
+                          <a:solidFill>
+                            <a:srgbClr val="FFB000"/>
+                          </a:solidFill>
+                          <a:latin typeface="Consolas"/>
+                        </a:rPr>
+                        <a:t>2</a:t>
+                      </a:r>
+                    </a:p>
+                  </a:txBody>
+                  <a:tcPr>
+                    <a:solidFill>
+                      <a:srgbClr val="0A0A0A"/>
+                    </a:solidFill>
+                  </a:tcPr>
+                </a:tc>
+                <a:tc>
+                  <a:txBody>
+                    <a:bodyPr/>
+                    <a:lstStyle/>
+                    <a:p>
+                      <a:pPr algn="ctr"/>
+                      <a:r>
+                        <a:rPr sz="950" b="0">
+                          <a:solidFill>
+                            <a:srgbClr val="737373"/>
+                          </a:solidFill>
+                          <a:latin typeface="Consolas"/>
+                        </a:rPr>
+                        <a:t>—</a:t>
+                      </a:r>
+                    </a:p>
+                  </a:txBody>
+                  <a:tcPr>
+                    <a:solidFill>
+                      <a:srgbClr val="0A0A0A"/>
+                    </a:solidFill>
+                  </a:tcPr>
+                </a:tc>
+                <a:tc>
+                  <a:txBody>
+                    <a:bodyPr/>
+                    <a:lstStyle/>
+                    <a:p>
+                      <a:pPr algn="ctr"/>
+                      <a:r>
+                        <a:rPr sz="950" b="0">
+                          <a:solidFill>
+                            <a:srgbClr val="737373"/>
+                          </a:solidFill>
+                          <a:latin typeface="Consolas"/>
+                        </a:rPr>
+                        <a:t>—</a:t>
+                      </a:r>
+                    </a:p>
+                  </a:txBody>
+                  <a:tcPr>
+                    <a:solidFill>
+                      <a:srgbClr val="0A0A0A"/>
+                    </a:solidFill>
+                  </a:tcPr>
+                </a:tc>
+                <a:tc>
+                  <a:txBody>
+                    <a:bodyPr/>
+                    <a:lstStyle/>
+                    <a:p>
+                      <a:pPr algn="ctr"/>
+                      <a:r>
+                        <a:rPr sz="950" b="0">
+                          <a:solidFill>
+                            <a:srgbClr val="737373"/>
+                          </a:solidFill>
+                          <a:latin typeface="Consolas"/>
+                        </a:rPr>
+                        <a:t>—</a:t>
+                      </a:r>
+                    </a:p>
+                  </a:txBody>
+                  <a:tcPr>
+                    <a:solidFill>
+                      <a:srgbClr val="0A0A0A"/>
+                    </a:solidFill>
+                  </a:tcPr>
+                </a:tc>
+                <a:tc>
+                  <a:txBody>
+                    <a:bodyPr/>
+                    <a:lstStyle/>
+                    <a:p>
+                      <a:pPr algn="ctr"/>
+                      <a:r>
+                        <a:rPr sz="950" b="0">
+                          <a:solidFill>
+                            <a:srgbClr val="737373"/>
+                          </a:solidFill>
+                          <a:latin typeface="Consolas"/>
+                        </a:rPr>
+                        <a:t>—</a:t>
+                      </a:r>
+                    </a:p>
+                  </a:txBody>
+                  <a:tcPr>
+                    <a:solidFill>
+                      <a:srgbClr val="0A0A0A"/>
+                    </a:solidFill>
+                  </a:tcPr>
+                </a:tc>
+                <a:tc>
+                  <a:txBody>
+                    <a:bodyPr/>
+                    <a:lstStyle/>
+                    <a:p>
+                      <a:pPr algn="ctr"/>
+                      <a:r>
+                        <a:rPr sz="950" b="0">
+                          <a:solidFill>
+                            <a:srgbClr val="737373"/>
+                          </a:solidFill>
+                          <a:latin typeface="Consolas"/>
+                        </a:rPr>
+                        <a:t>—</a:t>
+                      </a:r>
+                    </a:p>
+                  </a:txBody>
+                  <a:tcPr>
+                    <a:solidFill>
+                      <a:srgbClr val="0A0A0A"/>
+                    </a:solidFill>
+                  </a:tcPr>
+                </a:tc>
+                <a:tc>
+                  <a:txBody>
+                    <a:bodyPr/>
+                    <a:lstStyle/>
+                    <a:p>
+                      <a:pPr algn="ctr"/>
+                      <a:r>
+                        <a:rPr sz="950" b="0">
+                          <a:solidFill>
+                            <a:srgbClr val="737373"/>
+                          </a:solidFill>
+                          <a:latin typeface="Consolas"/>
+                        </a:rPr>
+                        <a:t>—</a:t>
+                      </a:r>
+                    </a:p>
+                  </a:txBody>
+                  <a:tcPr>
+                    <a:solidFill>
+                      <a:srgbClr val="0A0A0A"/>
+                    </a:solidFill>
+                  </a:tcPr>
+                </a:tc>
+                <a:tc>
+                  <a:txBody>
+                    <a:bodyPr/>
+                    <a:lstStyle/>
+                    <a:p>
+                      <a:pPr algn="ctr"/>
+                      <a:r>
+                        <a:rPr sz="950" b="0">
+                          <a:solidFill>
+                            <a:srgbClr val="FFB000"/>
+                          </a:solidFill>
+                          <a:latin typeface="Consolas"/>
+                        </a:rPr>
+                        <a:t>2</a:t>
+                      </a:r>
+                    </a:p>
+                  </a:txBody>
+                  <a:tcPr>
+                    <a:solidFill>
+                      <a:srgbClr val="0A0A0A"/>
+                    </a:solidFill>
+                  </a:tcPr>
+                </a:tc>
+                <a:tc>
+                  <a:txBody>
+                    <a:bodyPr/>
+                    <a:lstStyle/>
+                    <a:p>
+                      <a:pPr algn="ctr"/>
+                      <a:r>
+                        <a:rPr sz="950" b="0">
+                          <a:solidFill>
+                            <a:srgbClr val="FFB000"/>
+                          </a:solidFill>
+                          <a:latin typeface="Consolas"/>
+                        </a:rPr>
+                        <a:t>2</a:t>
+                      </a:r>
+                    </a:p>
+                  </a:txBody>
+                  <a:tcPr>
+                    <a:solidFill>
+                      <a:srgbClr val="0A0A0A"/>
+                    </a:solidFill>
+                  </a:tcPr>
+                </a:tc>
+              </a:tr>
+              <a:tr h="308610">
+                <a:tc>
+                  <a:txBody>
+                    <a:bodyPr/>
+                    <a:lstStyle/>
+                    <a:p>
+                      <a:pPr algn="ctr"/>
+                      <a:r>
+                        <a:rPr sz="950" b="0">
+                          <a:solidFill>
+                            <a:srgbClr val="FFFFFF"/>
+                          </a:solidFill>
+                          <a:latin typeface="Consolas"/>
+                        </a:rPr>
+                        <a:t>CO6</a:t>
+                      </a:r>
+                    </a:p>
+                  </a:txBody>
+                  <a:tcPr>
+                    <a:solidFill>
+                      <a:srgbClr val="0A0A0A"/>
+                    </a:solidFill>
+                  </a:tcPr>
+                </a:tc>
+                <a:tc>
+                  <a:txBody>
+                    <a:bodyPr/>
+                    <a:lstStyle/>
+                    <a:p>
+                      <a:pPr algn="ctr"/>
+                      <a:r>
+                        <a:rPr sz="950" b="0">
+                          <a:solidFill>
+                            <a:srgbClr val="1DB954"/>
+                          </a:solidFill>
+                          <a:latin typeface="Consolas"/>
+                        </a:rPr>
+                        <a:t>3</a:t>
+                      </a:r>
+                    </a:p>
+                  </a:txBody>
+                  <a:tcPr>
+                    <a:solidFill>
+                      <a:srgbClr val="0A0A0A"/>
+                    </a:solidFill>
+                  </a:tcPr>
+                </a:tc>
+                <a:tc>
+                  <a:txBody>
+                    <a:bodyPr/>
+                    <a:lstStyle/>
+                    <a:p>
+                      <a:pPr algn="ctr"/>
+                      <a:r>
+                        <a:rPr sz="950" b="0">
+                          <a:solidFill>
+                            <a:srgbClr val="1DB954"/>
+                          </a:solidFill>
+                          <a:latin typeface="Consolas"/>
+                        </a:rPr>
+                        <a:t>3</a:t>
+                      </a:r>
+                    </a:p>
+                  </a:txBody>
+                  <a:tcPr>
+                    <a:solidFill>
+                      <a:srgbClr val="0A0A0A"/>
+                    </a:solidFill>
+                  </a:tcPr>
+                </a:tc>
+                <a:tc>
+                  <a:txBody>
+                    <a:bodyPr/>
+                    <a:lstStyle/>
+                    <a:p>
+                      <a:pPr algn="ctr"/>
+                      <a:r>
+                        <a:rPr sz="950" b="0">
+                          <a:solidFill>
+                            <a:srgbClr val="1DB954"/>
+                          </a:solidFill>
+                          <a:latin typeface="Consolas"/>
+                        </a:rPr>
+                        <a:t>3</a:t>
+                      </a:r>
+                    </a:p>
+                  </a:txBody>
+                  <a:tcPr>
+                    <a:solidFill>
+                      <a:srgbClr val="0A0A0A"/>
+                    </a:solidFill>
+                  </a:tcPr>
+                </a:tc>
+                <a:tc>
+                  <a:txBody>
+                    <a:bodyPr/>
+                    <a:lstStyle/>
+                    <a:p>
+                      <a:pPr algn="ctr"/>
+                      <a:r>
+                        <a:rPr sz="950" b="0">
+                          <a:solidFill>
+                            <a:srgbClr val="1DB954"/>
+                          </a:solidFill>
+                          <a:latin typeface="Consolas"/>
+                        </a:rPr>
+                        <a:t>3</a:t>
+                      </a:r>
+                    </a:p>
+                  </a:txBody>
+                  <a:tcPr>
+                    <a:solidFill>
+                      <a:srgbClr val="0A0A0A"/>
+                    </a:solidFill>
+                  </a:tcPr>
+                </a:tc>
+                <a:tc>
+                  <a:txBody>
+                    <a:bodyPr/>
+                    <a:lstStyle/>
+                    <a:p>
+                      <a:pPr algn="ctr"/>
+                      <a:r>
+                        <a:rPr sz="950" b="0">
+                          <a:solidFill>
+                            <a:srgbClr val="1DB954"/>
+                          </a:solidFill>
+                          <a:latin typeface="Consolas"/>
+                        </a:rPr>
+                        <a:t>3</a:t>
+                      </a:r>
+                    </a:p>
+                  </a:txBody>
+                  <a:tcPr>
+                    <a:solidFill>
+                      <a:srgbClr val="0A0A0A"/>
+                    </a:solidFill>
+                  </a:tcPr>
+                </a:tc>
+                <a:tc>
+                  <a:txBody>
+                    <a:bodyPr/>
+                    <a:lstStyle/>
+                    <a:p>
+                      <a:pPr algn="ctr"/>
+                      <a:r>
+                        <a:rPr sz="950" b="0">
+                          <a:solidFill>
+                            <a:srgbClr val="FFB000"/>
+                          </a:solidFill>
+                          <a:latin typeface="Consolas"/>
+                        </a:rPr>
+                        <a:t>2</a:t>
+                      </a:r>
+                    </a:p>
+                  </a:txBody>
+                  <a:tcPr>
+                    <a:solidFill>
+                      <a:srgbClr val="0A0A0A"/>
+                    </a:solidFill>
+                  </a:tcPr>
+                </a:tc>
+                <a:tc>
+                  <a:txBody>
+                    <a:bodyPr/>
+                    <a:lstStyle/>
+                    <a:p>
+                      <a:pPr algn="ctr"/>
+                      <a:r>
+                        <a:rPr sz="950" b="0">
+                          <a:solidFill>
+                            <a:srgbClr val="FFB000"/>
+                          </a:solidFill>
+                          <a:latin typeface="Consolas"/>
+                        </a:rPr>
+                        <a:t>2</a:t>
+                      </a:r>
+                    </a:p>
+                  </a:txBody>
+                  <a:tcPr>
+                    <a:solidFill>
+                      <a:srgbClr val="0A0A0A"/>
+                    </a:solidFill>
+                  </a:tcPr>
+                </a:tc>
+                <a:tc>
+                  <a:txBody>
+                    <a:bodyPr/>
+                    <a:lstStyle/>
+                    <a:p>
+                      <a:pPr algn="ctr"/>
+                      <a:r>
+                        <a:rPr sz="950" b="0">
+                          <a:solidFill>
+                            <a:srgbClr val="1DB954"/>
+                          </a:solidFill>
+                          <a:latin typeface="Consolas"/>
+                        </a:rPr>
+                        <a:t>3</a:t>
+                      </a:r>
+                    </a:p>
+                  </a:txBody>
+                  <a:tcPr>
+                    <a:solidFill>
+                      <a:srgbClr val="0A0A0A"/>
+                    </a:solidFill>
+                  </a:tcPr>
+                </a:tc>
+                <a:tc>
+                  <a:txBody>
+                    <a:bodyPr/>
+                    <a:lstStyle/>
+                    <a:p>
+                      <a:pPr algn="ctr"/>
+                      <a:r>
+                        <a:rPr sz="950" b="0">
+                          <a:solidFill>
+                            <a:srgbClr val="1DB954"/>
+                          </a:solidFill>
+                          <a:latin typeface="Consolas"/>
+                        </a:rPr>
+                        <a:t>3</a:t>
+                      </a:r>
+                    </a:p>
+                  </a:txBody>
+                  <a:tcPr>
+                    <a:solidFill>
+                      <a:srgbClr val="0A0A0A"/>
+                    </a:solidFill>
+                  </a:tcPr>
+                </a:tc>
+                <a:tc>
+                  <a:txBody>
+                    <a:bodyPr/>
+                    <a:lstStyle/>
+                    <a:p>
+                      <a:pPr algn="ctr"/>
+                      <a:r>
+                        <a:rPr sz="950" b="0">
+                          <a:solidFill>
+                            <a:srgbClr val="FFB000"/>
+                          </a:solidFill>
+                          <a:latin typeface="Consolas"/>
+                        </a:rPr>
+                        <a:t>2</a:t>
+                      </a:r>
+                    </a:p>
+                  </a:txBody>
+                  <a:tcPr>
+                    <a:solidFill>
+                      <a:srgbClr val="0A0A0A"/>
+                    </a:solidFill>
+                  </a:tcPr>
+                </a:tc>
+                <a:tc>
+                  <a:txBody>
+                    <a:bodyPr/>
+                    <a:lstStyle/>
+                    <a:p>
+                      <a:pPr algn="ctr"/>
+                      <a:r>
+                        <a:rPr sz="950" b="0">
+                          <a:solidFill>
+                            <a:srgbClr val="1DB954"/>
+                          </a:solidFill>
+                          <a:latin typeface="Consolas"/>
+                        </a:rPr>
+                        <a:t>3</a:t>
+                      </a:r>
+                    </a:p>
+                  </a:txBody>
+                  <a:tcPr>
+                    <a:solidFill>
+                      <a:srgbClr val="0A0A0A"/>
+                    </a:solidFill>
+                  </a:tcPr>
+                </a:tc>
+                <a:tc>
+                  <a:txBody>
+                    <a:bodyPr/>
+                    <a:lstStyle/>
+                    <a:p>
+                      <a:pPr algn="ctr"/>
+                      <a:r>
+                        <a:rPr sz="950" b="0">
+                          <a:solidFill>
+                            <a:srgbClr val="1DB954"/>
+                          </a:solidFill>
+                          <a:latin typeface="Consolas"/>
+                        </a:rPr>
+                        <a:t>3</a:t>
+                      </a:r>
+                    </a:p>
+                  </a:txBody>
+                  <a:tcPr>
+                    <a:solidFill>
+                      <a:srgbClr val="0A0A0A"/>
+                    </a:solidFill>
+                  </a:tcPr>
+                </a:tc>
+                <a:tc>
+                  <a:txBody>
+                    <a:bodyPr/>
+                    <a:lstStyle/>
+                    <a:p>
+                      <a:pPr algn="ctr"/>
+                      <a:r>
+                        <a:rPr sz="950" b="0">
+                          <a:solidFill>
+                            <a:srgbClr val="1DB954"/>
+                          </a:solidFill>
+                          <a:latin typeface="Consolas"/>
+                        </a:rPr>
+                        <a:t>3</a:t>
+                      </a:r>
+                    </a:p>
+                  </a:txBody>
+                  <a:tcPr>
+                    <a:solidFill>
+                      <a:srgbClr val="0A0A0A"/>
+                    </a:solidFill>
+                  </a:tcPr>
+                </a:tc>
+              </a:tr>
+              <a:tr h="308610">
+                <a:tc>
+                  <a:txBody>
+                    <a:bodyPr/>
+                    <a:lstStyle/>
+                    <a:p>
+                      <a:pPr algn="ctr"/>
+                      <a:r>
+                        <a:rPr sz="950" b="1">
+                          <a:solidFill>
+                            <a:srgbClr val="1DB954"/>
+                          </a:solidFill>
+                          <a:latin typeface="Consolas"/>
+                        </a:rPr>
+                        <a:t>Avg</a:t>
+                      </a:r>
+                    </a:p>
+                  </a:txBody>
+                  <a:tcPr>
+                    <a:solidFill>
+                      <a:srgbClr val="121212"/>
+                    </a:solidFill>
+                  </a:tcPr>
+                </a:tc>
+                <a:tc>
+                  <a:txBody>
+                    <a:bodyPr/>
+                    <a:lstStyle/>
+                    <a:p>
+                      <a:pPr algn="ctr"/>
+                      <a:r>
+                        <a:rPr sz="950" b="1">
+                          <a:solidFill>
+                            <a:srgbClr val="1DB954"/>
+                          </a:solidFill>
+                          <a:latin typeface="Consolas"/>
+                        </a:rPr>
+                        <a:t>2.83</a:t>
+                      </a:r>
+                    </a:p>
+                  </a:txBody>
+                  <a:tcPr>
+                    <a:solidFill>
+                      <a:srgbClr val="121212"/>
+                    </a:solidFill>
+                  </a:tcPr>
+                </a:tc>
+                <a:tc>
+                  <a:txBody>
+                    <a:bodyPr/>
+                    <a:lstStyle/>
+                    <a:p>
+                      <a:pPr algn="ctr"/>
+                      <a:r>
+                        <a:rPr sz="950" b="1">
+                          <a:solidFill>
+                            <a:srgbClr val="1DB954"/>
+                          </a:solidFill>
+                          <a:latin typeface="Consolas"/>
+                        </a:rPr>
+                        <a:t>2.67</a:t>
+                      </a:r>
+                    </a:p>
+                  </a:txBody>
+                  <a:tcPr>
+                    <a:solidFill>
+                      <a:srgbClr val="121212"/>
+                    </a:solidFill>
+                  </a:tcPr>
+                </a:tc>
+                <a:tc>
+                  <a:txBody>
+                    <a:bodyPr/>
+                    <a:lstStyle/>
+                    <a:p>
+                      <a:pPr algn="ctr"/>
+                      <a:r>
+                        <a:rPr sz="950" b="1">
+                          <a:solidFill>
+                            <a:srgbClr val="1DB954"/>
+                          </a:solidFill>
+                          <a:latin typeface="Consolas"/>
+                        </a:rPr>
+                        <a:t>3.00</a:t>
+                      </a:r>
+                    </a:p>
+                  </a:txBody>
+                  <a:tcPr>
+                    <a:solidFill>
+                      <a:srgbClr val="121212"/>
+                    </a:solidFill>
+                  </a:tcPr>
+                </a:tc>
+                <a:tc>
+                  <a:txBody>
+                    <a:bodyPr/>
+                    <a:lstStyle/>
+                    <a:p>
+                      <a:pPr algn="ctr"/>
+                      <a:r>
+                        <a:rPr sz="950" b="1">
+                          <a:solidFill>
+                            <a:srgbClr val="1DB954"/>
+                          </a:solidFill>
+                          <a:latin typeface="Consolas"/>
+                        </a:rPr>
+                        <a:t>2.60</a:t>
+                      </a:r>
+                    </a:p>
+                  </a:txBody>
+                  <a:tcPr>
+                    <a:solidFill>
+                      <a:srgbClr val="121212"/>
+                    </a:solidFill>
+                  </a:tcPr>
+                </a:tc>
+                <a:tc>
+                  <a:txBody>
+                    <a:bodyPr/>
+                    <a:lstStyle/>
+                    <a:p>
+                      <a:pPr algn="ctr"/>
+                      <a:r>
+                        <a:rPr sz="950" b="1">
+                          <a:solidFill>
+                            <a:srgbClr val="1DB954"/>
+                          </a:solidFill>
+                          <a:latin typeface="Consolas"/>
+                        </a:rPr>
+                        <a:t>2.83</a:t>
+                      </a:r>
+                    </a:p>
+                  </a:txBody>
+                  <a:tcPr>
+                    <a:solidFill>
+                      <a:srgbClr val="121212"/>
+                    </a:solidFill>
+                  </a:tcPr>
+                </a:tc>
+                <a:tc>
+                  <a:txBody>
+                    <a:bodyPr/>
+                    <a:lstStyle/>
+                    <a:p>
+                      <a:pPr algn="ctr"/>
+                      <a:r>
+                        <a:rPr sz="950" b="1">
+                          <a:solidFill>
+                            <a:srgbClr val="1DB954"/>
+                          </a:solidFill>
+                          <a:latin typeface="Consolas"/>
+                        </a:rPr>
+                        <a:t>2.00</a:t>
+                      </a:r>
+                    </a:p>
+                  </a:txBody>
+                  <a:tcPr>
+                    <a:solidFill>
+                      <a:srgbClr val="121212"/>
+                    </a:solidFill>
+                  </a:tcPr>
+                </a:tc>
+                <a:tc>
+                  <a:txBody>
+                    <a:bodyPr/>
+                    <a:lstStyle/>
+                    <a:p>
+                      <a:pPr algn="ctr"/>
+                      <a:r>
+                        <a:rPr sz="950" b="1">
+                          <a:solidFill>
+                            <a:srgbClr val="1DB954"/>
+                          </a:solidFill>
+                          <a:latin typeface="Consolas"/>
+                        </a:rPr>
+                        <a:t>2.00</a:t>
+                      </a:r>
+                    </a:p>
+                  </a:txBody>
+                  <a:tcPr>
+                    <a:solidFill>
+                      <a:srgbClr val="121212"/>
+                    </a:solidFill>
+                  </a:tcPr>
+                </a:tc>
+                <a:tc>
+                  <a:txBody>
+                    <a:bodyPr/>
+                    <a:lstStyle/>
+                    <a:p>
+                      <a:pPr algn="ctr"/>
+                      <a:r>
+                        <a:rPr sz="950" b="1">
+                          <a:solidFill>
+                            <a:srgbClr val="1DB954"/>
+                          </a:solidFill>
+                          <a:latin typeface="Consolas"/>
+                        </a:rPr>
+                        <a:t>2.50</a:t>
+                      </a:r>
+                    </a:p>
+                  </a:txBody>
+                  <a:tcPr>
+                    <a:solidFill>
+                      <a:srgbClr val="121212"/>
+                    </a:solidFill>
+                  </a:tcPr>
+                </a:tc>
+                <a:tc>
+                  <a:txBody>
+                    <a:bodyPr/>
+                    <a:lstStyle/>
+                    <a:p>
+                      <a:pPr algn="ctr"/>
+                      <a:r>
+                        <a:rPr sz="950" b="1">
+                          <a:solidFill>
+                            <a:srgbClr val="1DB954"/>
+                          </a:solidFill>
+                          <a:latin typeface="Consolas"/>
+                        </a:rPr>
+                        <a:t>2.33</a:t>
+                      </a:r>
+                    </a:p>
+                  </a:txBody>
+                  <a:tcPr>
+                    <a:solidFill>
+                      <a:srgbClr val="121212"/>
+                    </a:solidFill>
+                  </a:tcPr>
+                </a:tc>
+                <a:tc>
+                  <a:txBody>
+                    <a:bodyPr/>
+                    <a:lstStyle/>
+                    <a:p>
+                      <a:pPr algn="ctr"/>
+                      <a:r>
+                        <a:rPr sz="950" b="1">
+                          <a:solidFill>
+                            <a:srgbClr val="1DB954"/>
+                          </a:solidFill>
+                          <a:latin typeface="Consolas"/>
+                        </a:rPr>
+                        <a:t>2.00</a:t>
+                      </a:r>
+                    </a:p>
+                  </a:txBody>
+                  <a:tcPr>
+                    <a:solidFill>
+                      <a:srgbClr val="121212"/>
+                    </a:solidFill>
+                  </a:tcPr>
+                </a:tc>
+                <a:tc>
+                  <a:txBody>
+                    <a:bodyPr/>
+                    <a:lstStyle/>
+                    <a:p>
+                      <a:pPr algn="ctr"/>
+                      <a:r>
+                        <a:rPr sz="950" b="1">
+                          <a:solidFill>
+                            <a:srgbClr val="1DB954"/>
+                          </a:solidFill>
+                          <a:latin typeface="Consolas"/>
+                        </a:rPr>
+                        <a:t>3.00</a:t>
+                      </a:r>
+                    </a:p>
+                  </a:txBody>
+                  <a:tcPr>
+                    <a:solidFill>
+                      <a:srgbClr val="121212"/>
+                    </a:solidFill>
+                  </a:tcPr>
+                </a:tc>
+                <a:tc>
+                  <a:txBody>
+                    <a:bodyPr/>
+                    <a:lstStyle/>
+                    <a:p>
+                      <a:pPr algn="ctr"/>
+                      <a:r>
+                        <a:rPr sz="950" b="1">
+                          <a:solidFill>
+                            <a:srgbClr val="1DB954"/>
+                          </a:solidFill>
+                          <a:latin typeface="Consolas"/>
+                        </a:rPr>
+                        <a:t>2.83</a:t>
+                      </a:r>
+                    </a:p>
+                  </a:txBody>
+                  <a:tcPr>
+                    <a:solidFill>
+                      <a:srgbClr val="121212"/>
+                    </a:solidFill>
+                  </a:tcPr>
+                </a:tc>
+                <a:tc>
+                  <a:txBody>
+                    <a:bodyPr/>
+                    <a:lstStyle/>
+                    <a:p>
+                      <a:pPr algn="ctr"/>
+                      <a:r>
+                        <a:rPr sz="950" b="1">
+                          <a:solidFill>
+                            <a:srgbClr val="1DB954"/>
+                          </a:solidFill>
+                          <a:latin typeface="Consolas"/>
+                        </a:rPr>
+                        <a:t>2.67</a:t>
+                      </a:r>
+                    </a:p>
+                  </a:txBody>
+                  <a:tcPr>
+                    <a:solidFill>
+                      <a:srgbClr val="121212"/>
+                    </a:solidFill>
+                  </a:tcPr>
+                </a:tc>
+              </a:tr>
+            </a:tbl>
+          </a:graphicData>
+        </a:graphic>
+      </p:graphicFrame>
+      <p:sp>
+        <p:nvSpPr>
+          <p:cNvPr id="4" name="Rectangle 3"/>
+          <p:cNvSpPr/>
+          <p:nvPr/>
+        </p:nvSpPr>
+        <p:spPr>
+          <a:xfrm>
+            <a:off x="731520" y="3931920"/>
+            <a:ext cx="10698480" cy="2468880"/>
+          </a:xfrm>
+          <a:prstGeom prst="rect">
+            <a:avLst/>
+          </a:prstGeom>
+          <a:solidFill>
+            <a:srgbClr val="121212"/>
+          </a:solidFill>
+          <a:ln w="12700">
+            <a:solidFill>
+              <a:srgbClr val="262626"/>
+            </a:solidFill>
+          </a:ln>
+        </p:spPr>
+        <p:style>
+          <a:lnRef idx="1">
+            <a:schemeClr val="accent1"/>
+          </a:lnRef>
+          <a:fillRef idx="3">
+            <a:schemeClr val="accent1"/>
+          </a:fillRef>
+          <a:effectRef idx="2">
+            <a:schemeClr val="accent1"/>
+          </a:effectRef>
+          <a:fontRef idx="minor">
+            <a:schemeClr val="lt1"/>
+          </a:fontRef>
+        </p:style>
+        <p:txBody>
+          <a:bodyPr rtlCol="0" anchor="ctr"/>
+          <a:lstStyle/>
+          <a:p>
+            <a:pPr algn="ctr"/>
+          </a:p>
+        </p:txBody>
+      </p:sp>
+      <p:sp>
+        <p:nvSpPr>
+          <p:cNvPr id="5" name="TextBox 4"/>
+          <p:cNvSpPr txBox="1"/>
+          <p:nvPr/>
+        </p:nvSpPr>
+        <p:spPr>
+          <a:xfrm>
+            <a:off x="914400" y="4069080"/>
+            <a:ext cx="10332719" cy="320040"/>
+          </a:xfrm>
+          <a:prstGeom prst="rect">
+            <a:avLst/>
+          </a:prstGeom>
+          <a:noFill/>
+        </p:spPr>
+        <p:txBody>
+          <a:bodyPr wrap="square" lIns="0" tIns="0" rIns="0" bIns="0">
+            <a:spAutoFit/>
+          </a:bodyPr>
+          <a:lstStyle/>
+          <a:p>
+            <a:pPr>
+              <a:defRPr sz="1000" b="1">
+                <a:solidFill>
+                  <a:srgbClr val="A1A1AA"/>
+                </a:solidFill>
+                <a:latin typeface="Consolas"/>
+              </a:defRPr>
+            </a:pPr>
+            <a:r>
+              <a:t>EVIDENCE-BASED JUSTIFICATION &amp; ALIGNMENT RATIONALE</a:t>
+            </a:r>
+          </a:p>
+        </p:txBody>
+      </p:sp>
+      <p:sp>
+        <p:nvSpPr>
+          <p:cNvPr id="6" name="TextBox 5"/>
+          <p:cNvSpPr txBox="1"/>
+          <p:nvPr/>
+        </p:nvSpPr>
+        <p:spPr>
+          <a:xfrm>
+            <a:off x="914400" y="4297680"/>
+            <a:ext cx="10332720" cy="1920240"/>
+          </a:xfrm>
+          <a:prstGeom prst="rect">
+            <a:avLst/>
+          </a:prstGeom>
+          <a:noFill/>
+        </p:spPr>
+        <p:txBody>
+          <a:bodyPr wrap="square">
+            <a:spAutoFit/>
+          </a:bodyPr>
+          <a:lstStyle/>
+          <a:p>
+            <a:r>
+              <a:rPr sz="900" b="1">
+                <a:solidFill>
+                  <a:srgbClr val="1DB954"/>
+                </a:solidFill>
+                <a:latin typeface="Consolas"/>
+              </a:rPr>
+              <a:t>• PO1, PO2, PO5 (Avg 2.83, 2.67, 2.83) — Engineering Knowledge, Problem Analysis &amp; Tool Usage: </a:t>
+            </a:r>
+            <a:r>
+              <a:rPr sz="900">
+                <a:solidFill>
+                  <a:srgbClr val="A1A1AA"/>
+                </a:solidFill>
+                <a:latin typeface="Segoe UI"/>
+              </a:rPr>
+              <a:t>Grounds moments, probability distributions, convex optimization (L-BFGS), convolutional geometry, and modern frameworks (TensorFlow, scikit-learn, OpenCV).</a:t>
+            </a:r>
+          </a:p>
+          <a:p>
+            <a:r>
+              <a:rPr sz="900" b="1">
+                <a:solidFill>
+                  <a:srgbClr val="1DB954"/>
+                </a:solidFill>
+                <a:latin typeface="Consolas"/>
+              </a:rPr>
+              <a:t>• PO3, PO4 (Avg 3.00, 2.60) — Solution Design &amp; Complex Problem Investigation: </a:t>
+            </a:r>
+            <a:r>
+              <a:rPr sz="900">
+                <a:solidFill>
+                  <a:srgbClr val="A1A1AA"/>
+                </a:solidFill>
+                <a:latin typeface="Segoe UI"/>
+              </a:rPr>
+              <a:t>Architected DeepConvNet with Global Average Pooling; executed controlled 7-model empirical evaluation on 10,000 isolated test samples under identical conditions.</a:t>
+            </a:r>
+          </a:p>
+          <a:p>
+            <a:r>
+              <a:rPr sz="900" b="1">
+                <a:solidFill>
+                  <a:srgbClr val="1DB954"/>
+                </a:solidFill>
+                <a:latin typeface="Consolas"/>
+              </a:rPr>
+              <a:t>• PO6, PO7 (Avg 2.00, 2.00) — Society, Sustainability &amp; Professional Ethics: </a:t>
+            </a:r>
+            <a:r>
+              <a:rPr sz="900">
+                <a:solidFill>
+                  <a:srgbClr val="A1A1AA"/>
+                </a:solidFill>
+                <a:latin typeface="Segoe UI"/>
+              </a:rPr>
+              <a:t>Evaluated banking/postal automation societal impact, CPU energy efficiency; enforced transparency via Grad-CAM XAI and calibrated OOD rejection.</a:t>
+            </a:r>
+          </a:p>
+          <a:p>
+            <a:r>
+              <a:rPr sz="900" b="1">
+                <a:solidFill>
+                  <a:srgbClr val="1DB954"/>
+                </a:solidFill>
+                <a:latin typeface="Consolas"/>
+              </a:rPr>
+              <a:t>• PO8, PO9, PO10, PO11 (Avg 2.50, 2.33, 2.00, 3.00) — Teamwork, Communication, Mgmt &amp; Lifelong Learning: </a:t>
+            </a:r>
+            <a:r>
+              <a:rPr sz="900">
+                <a:solidFill>
+                  <a:srgbClr val="A1A1AA"/>
+                </a:solidFill>
+                <a:latin typeface="Segoe UI"/>
+              </a:rPr>
+              <a:t>Collaborative division across 3 student roles; comprehensive report and 22-slide deck; self-directed mastery of Keras 3, ECE, and Grad-CAM.</a:t>
             </a:r>
           </a:p>
         </p:txBody>

--- a/src/presentation/DigitVision_AI_Presentation.pptx
+++ b/src/presentation/DigitVision_AI_Presentation.pptx
@@ -2789,7 +2789,7 @@
           </a:p>
           <a:p>
             <a:r>
-              <a:t>Documents authentic NIST provenance, formal citations, and strict zero-leakage data hygiene protocols.</a:t>
+              <a:t>Documents authentic CC BY-SA 3.0 license, NIST provenance, SHA-256 verification, and strict zero-leakage data hygiene protocols.</a:t>
             </a:r>
           </a:p>
           <a:p/>
@@ -2811,7 +2811,7 @@
           </a:p>
           <a:p>
             <a:r>
-              <a:t>MNIST was created by mixing NIST SD-3 and SD-19 to balance writing styles between Census workers and high school students. Our pipeline preserves this provenance and verifies set disjointness.</a:t>
+              <a:t>MNIST is partitioned into 20k train, 3k val, 37k reserved, and 10k isolated test. Restricting training to 20k enables sub-minute CPU convergence for O(N^2) RBF SVMs without degrading accuracy (&gt;98.3% on CNN).</a:t>
             </a:r>
           </a:p>
           <a:p/>
@@ -2833,7 +2833,7 @@
           </a:p>
           <a:p>
             <a:r>
-              <a:t>A: Through automated regression assertions in tests/test_data.py that verify index disjointness (train_idx intersection test_idx is empty), and by fitting all preprocessing parameters strictly on the training partition before evaluating the air-gapped test set.</a:t>
+              <a:t>A: Through automated hash-collision testing and regression assertions in tests/test_data.py that verify MD5 disjointness (0 collisions) and np.shares_memory=False between training, validation, and test arrays.</a:t>
             </a:r>
           </a:p>
         </p:txBody>
@@ -17388,7 +17388,7 @@
           <a:lstStyle/>
           <a:p>
             <a:pPr>
-              <a:defRPr sz="1000">
+              <a:defRPr sz="950">
                 <a:solidFill>
                   <a:srgbClr val="A1A1AA"/>
                 </a:solidFill>
@@ -17401,7 +17401,7 @@
           </a:p>
           <a:p>
             <a:pPr>
-              <a:defRPr sz="1000">
+              <a:defRPr sz="950">
                 <a:solidFill>
                   <a:srgbClr val="A1A1AA"/>
                 </a:solidFill>
@@ -17409,12 +17409,12 @@
               </a:defRPr>
             </a:pPr>
             <a:r>
-              <a:t>•  Original Authors: Yann LeCun, Corinna Cortes, Christopher J.C. Burges (1998) [1], [3].</a:t>
-            </a:r>
-          </a:p>
-          <a:p>
-            <a:pPr>
-              <a:defRPr sz="1000">
+              <a:t>•  Originating Curators: Yann LeCun (NYU) &amp; Corinna Cortes (Google Research) (1998) [1].</a:t>
+            </a:r>
+          </a:p>
+          <a:p>
+            <a:pPr>
+              <a:defRPr sz="950">
                 <a:solidFill>
                   <a:srgbClr val="A1A1AA"/>
                 </a:solidFill>
@@ -17422,12 +17422,12 @@
               </a:defRPr>
             </a:pPr>
             <a:r>
-              <a:t>•  Source Databases: NIST Special Database 3 (high school students) and SD 19 (Census Bureau staff).</a:t>
-            </a:r>
-          </a:p>
-          <a:p>
-            <a:pPr>
-              <a:defRPr sz="1000">
+              <a:t>•  Official License: Creative Commons Attribution-Share Alike 3.0 (CC BY-SA 3.0).</a:t>
+            </a:r>
+          </a:p>
+          <a:p>
+            <a:pPr>
+              <a:defRPr sz="950">
                 <a:solidFill>
                   <a:srgbClr val="A1A1AA"/>
                 </a:solidFill>
@@ -17435,12 +17435,12 @@
               </a:defRPr>
             </a:pPr>
             <a:r>
-              <a:t>•  Repository / Source: Authentic NIST research archives (Y. LeCun lab mirror) cited via IEEE [3].</a:t>
-            </a:r>
-          </a:p>
-          <a:p>
-            <a:pPr>
-              <a:defRPr sz="1000">
+              <a:t>•  Local Integrity: data/raw/mnist.npz (11.49 MB, SHA-256: 731c5ac6..., 100% verified bit-for-bit).</a:t>
+            </a:r>
+          </a:p>
+          <a:p>
+            <a:pPr>
+              <a:defRPr sz="950">
                 <a:solidFill>
                   <a:srgbClr val="A1A1AA"/>
                 </a:solidFill>
@@ -17448,12 +17448,12 @@
               </a:defRPr>
             </a:pPr>
             <a:r>
-              <a:t>•  Total Available Population: 70,000 monochrome handwritten digit glyphs.</a:t>
-            </a:r>
-          </a:p>
-          <a:p>
-            <a:pPr>
-              <a:defRPr sz="1000">
+              <a:t>•  Total Corpus Allocation (70,000): 20k Train (28.6%), 3k Val (4.3%), 37k Reserved (52.9%), 10k Test (14.3%).</a:t>
+            </a:r>
+          </a:p>
+          <a:p>
+            <a:pPr>
+              <a:defRPr sz="950">
                 <a:solidFill>
                   <a:srgbClr val="A1A1AA"/>
                 </a:solidFill>
@@ -17461,12 +17461,12 @@
               </a:defRPr>
             </a:pPr>
             <a:r>
-              <a:t>•  Training Partition: 20,000 instances (deterministic stratified selection).</a:t>
-            </a:r>
-          </a:p>
-          <a:p>
-            <a:pPr>
-              <a:defRPr sz="1000">
+              <a:t>•  Partitioning Rationale: 20k/3k ensures sub-minute CPU training for O(N^2) RBF SVMs while maintaining statistical power.</a:t>
+            </a:r>
+          </a:p>
+          <a:p>
+            <a:pPr>
+              <a:defRPr sz="950">
                 <a:solidFill>
                   <a:srgbClr val="A1A1AA"/>
                 </a:solidFill>
@@ -17474,12 +17474,12 @@
               </a:defRPr>
             </a:pPr>
             <a:r>
-              <a:t>•  Validation Partition: 3,000 instances (hyperparameter optimization &amp; early stopping).</a:t>
-            </a:r>
-          </a:p>
-          <a:p>
-            <a:pPr>
-              <a:defRPr sz="1000">
+              <a:t>•  Reserved Training Pool: 37,000 instances preserved untouched in local cache; zero test-set leakage.</a:t>
+            </a:r>
+          </a:p>
+          <a:p>
+            <a:pPr>
+              <a:defRPr sz="950">
                 <a:solidFill>
                   <a:srgbClr val="A1A1AA"/>
                 </a:solidFill>
@@ -17487,7 +17487,7 @@
               </a:defRPr>
             </a:pPr>
             <a:r>
-              <a:t>•  Isolated Test Partition: 10,000 instances (strictly held-out benchmark evaluation).</a:t>
+              <a:t>•  Isolated Benchmark Test: 10,000 instances strictly quarantined for unbiased scientific benchmarking.</a:t>
             </a:r>
           </a:p>
         </p:txBody>
@@ -17596,7 +17596,7 @@
           <a:lstStyle/>
           <a:p>
             <a:pPr>
-              <a:defRPr sz="1000">
+              <a:defRPr sz="950">
                 <a:solidFill>
                   <a:srgbClr val="A1A1AA"/>
                 </a:solidFill>
@@ -17609,7 +17609,7 @@
           </a:p>
           <a:p>
             <a:pPr>
-              <a:defRPr sz="1000">
+              <a:defRPr sz="950">
                 <a:solidFill>
                   <a:srgbClr val="A1A1AA"/>
                 </a:solidFill>
@@ -17617,12 +17617,12 @@
               </a:defRPr>
             </a:pPr>
             <a:r>
-              <a:t>•  Pre-Split Isolation: Partitioning occurs prior to any model fitting; scaler parameters are fitted strictly on training data.</a:t>
-            </a:r>
-          </a:p>
-          <a:p>
-            <a:pPr>
-              <a:defRPr sz="1000">
+              <a:t>•  Cryptographic Integrity: SHA-256 checksum (731c5ac6...) verified against official Google Cloud mirror.</a:t>
+            </a:r>
+          </a:p>
+          <a:p>
+            <a:pPr>
+              <a:defRPr sz="950">
                 <a:solidFill>
                   <a:srgbClr val="A1A1AA"/>
                 </a:solidFill>
@@ -17630,12 +17630,12 @@
               </a:defRPr>
             </a:pPr>
             <a:r>
-              <a:t>•  Deterministic Random Seeding: Global seed RANDOM_SEED = 42 guarantees exact reproducibility across runs.</a:t>
-            </a:r>
-          </a:p>
-          <a:p>
-            <a:pPr>
-              <a:defRPr sz="1000">
+              <a:t>•  Hash-Based Disjointness: MD5 collision testing confirms 0 raster duplicates and 0 cross-split leakage instances.</a:t>
+            </a:r>
+          </a:p>
+          <a:p>
+            <a:pPr>
+              <a:defRPr sz="950">
                 <a:solidFill>
                   <a:srgbClr val="A1A1AA"/>
                 </a:solidFill>
@@ -17643,12 +17643,12 @@
               </a:defRPr>
             </a:pPr>
             <a:r>
-              <a:t>•  Index Disjointness Verification: Automated pytest unit tests assert zero set intersection between training, validation, and test indices.</a:t>
-            </a:r>
-          </a:p>
-          <a:p>
-            <a:pPr>
-              <a:defRPr sz="1000">
+              <a:t>•  Deterministic Seeding: Global seed RANDOM_SEED = 42 guarantees exact reproducibility across all runs.</a:t>
+            </a:r>
+          </a:p>
+          <a:p>
+            <a:pPr>
+              <a:defRPr sz="950">
                 <a:solidFill>
                   <a:srgbClr val="A1A1AA"/>
                 </a:solidFill>
@@ -17656,7 +17656,20 @@
               </a:defRPr>
             </a:pPr>
             <a:r>
-              <a:t>•  No Kaggle Resampling: Downloaded exclusively from verified original NIST mirrors, adhering to academic standards.</a:t>
+              <a:t>•  Buffer Memory Isolation: Automated pytest assertions confirm zero shared memory buffers (shares_memory=False).</a:t>
+            </a:r>
+          </a:p>
+          <a:p>
+            <a:pPr>
+              <a:defRPr sz="950">
+                <a:solidFill>
+                  <a:srgbClr val="A1A1AA"/>
+                </a:solidFill>
+                <a:latin typeface="Segoe UI"/>
+              </a:defRPr>
+            </a:pPr>
+            <a:r>
+              <a:t>•  Offline Reproducibility: Autonomous loading from data/raw/mnist.npz guarantees 100% offline pipeline execution.</a:t>
             </a:r>
           </a:p>
         </p:txBody>
@@ -17860,7 +17873,7 @@
               </a:defRPr>
             </a:pPr>
             <a:r>
-              <a:t>EMPIRICAL EDA FINDINGS:</a:t>
+              <a:t>EMPIRICAL EDA FINDINGS (AUDITED ON 70,000 INSTANCES):</a:t>
             </a:r>
           </a:p>
           <a:p>
@@ -17873,15 +17886,15 @@
               </a:defRPr>
             </a:pPr>
             <a:r>
-              <a:t>1. Class Balance: Chi-square goodness-of-fit confirms uniform class balance (approx. 10% per digit) with zero missing labels.</a:t>
+              <a:t>1. Class Balance: Near-uniform balance across all splits (min digit '5': 8.88%, max digit '1': 11.40%, imbalance ratio &lt; 1.28; 0 missing/corrupt values).</a:t>
             </a:r>
             <a:br/>
             <a:r>
-              <a:t>2. Pixel Intensity Distribution: Highly bimodal; 81.2% background pixels (intensity 0) and 18.8% active foreground strokes (intensity 1-255).</a:t>
+              <a:t>2. Pixel Moments &amp; Sparsity: Highly bimodal; 80.86% pure black background (0.0) and 18.25% active stroke mass (&gt;0.05). Global mean μ=0.13093, σ=0.30845.</a:t>
             </a:r>
             <a:br/>
             <a:r>
-              <a:t>3. Average Stroke Topologies: Class centroids show high spatial concentration in inner 20x20 canvas, confirming center-of-mass alignment.</a:t>
+              <a:t>3. Topological Invariance: Class centroids demonstrate that stroke mass is tightly concentrated in the central 20x20 canvas with zero-variance boundary margins.</a:t>
             </a:r>
           </a:p>
         </p:txBody>
